--- a/out/analysis/dnssec_framework.pptx
+++ b/out/analysis/dnssec_framework.pptx
@@ -18,6 +18,8 @@
     <p:sldId id="266" r:id="rId17"/>
     <p:sldId id="267" r:id="rId18"/>
     <p:sldId id="268" r:id="rId19"/>
+    <p:sldId id="269" r:id="rId20"/>
+    <p:sldId id="270" r:id="rId21"/>
   </p:sldIdLst>
   <p:sldSz cx="12191695" cy="6858000" type="screen4x3"/>
   <p:notesSz cx="6858000" cy="9144000"/>
@@ -3282,7 +3284,7 @@
                 </a:solidFill>
                 <a:latin typeface="Segoe UI"/>
               </a:rPr>
-              <a:t>Reverse-DNS delegation corpus · 199 monthly snapshots, 2009–2026 · 975 source-days · 1,875,584 DS records</a:t>
+              <a:t>Full run: 8.24 TB · 15,179 source-days · 25,151 files · 12 sources · 5 RIRs (2009–2026) + 7 forward TLDs (2016–2023)</a:t>
             </a:r>
           </a:p>
         </p:txBody>
@@ -3342,7 +3344,7 @@
                 </a:solidFill>
                 <a:latin typeface="Segoe UI"/>
               </a:rPr>
-              <a:t>INSIGHT 3</a:t>
+              <a:t>INSIGHT 1</a:t>
             </a:r>
           </a:p>
         </p:txBody>
@@ -3384,62 +3386,20 @@
                 </a:solidFill>
                 <a:latin typeface="Segoe UI"/>
               </a:rPr>
-              <a:t>Most of what happens is retreat, not arrival</a:t>
-            </a:r>
-          </a:p>
-        </p:txBody>
-      </p:sp>
-      <p:sp>
-        <p:nvSpPr>
-          <p:cNvPr id="4" name="TextBox 3"/>
-          <p:cNvSpPr txBox="1"/>
+              <a:t>Being early tells you nothing about ending up used</a:t>
+            </a:r>
+          </a:p>
+        </p:txBody>
+      </p:sp>
+      <p:sp>
+        <p:nvSpPr>
+          <p:cNvPr id="4" name="Rectangle 3"/>
+          <p:cNvSpPr/>
           <p:nvPr/>
         </p:nvSpPr>
         <p:spPr>
           <a:xfrm>
             <a:off x="731520" y="1600200"/>
-            <a:ext cx="10728655" cy="457200"/>
-          </a:xfrm>
-          <a:prstGeom prst="rect">
-            <a:avLst/>
-          </a:prstGeom>
-          <a:noFill/>
-        </p:spPr>
-        <p:txBody>
-          <a:bodyPr wrap="square">
-            <a:spAutoFit/>
-          </a:bodyPr>
-          <a:lstStyle/>
-          <a:p>
-            <a:pPr algn="l">
-              <a:lnSpc>
-                <a:spcPct val="125000"/>
-              </a:lnSpc>
-              <a:spcAft>
-                <a:spcPts val="600"/>
-              </a:spcAft>
-            </a:pPr>
-            <a:r>
-              <a:rPr sz="1500" b="0">
-                <a:solidFill>
-                  <a:srgbClr val="66705C"/>
-                </a:solidFill>
-                <a:latin typeface="Segoe UI"/>
-              </a:rPr>
-              <a:t>Four of six tracked mechanisms are below their own peak.</a:t>
-            </a:r>
-          </a:p>
-        </p:txBody>
-      </p:sp>
-      <p:sp>
-        <p:nvSpPr>
-          <p:cNvPr id="5" name="Rectangle 4"/>
-          <p:cNvSpPr/>
-          <p:nvPr/>
-        </p:nvSpPr>
-        <p:spPr>
-          <a:xfrm>
-            <a:off x="731520" y="2167128"/>
             <a:ext cx="10728655" cy="9525"/>
           </a:xfrm>
           <a:prstGeom prst="rect">
@@ -3477,7 +3437,7 @@
       </p:sp>
       <p:pic>
         <p:nvPicPr>
-          <p:cNvPr id="6" name="Picture 5" descr="displacement.png"/>
+          <p:cNvPr id="5" name="Picture 4" descr="onset_vs_spread.png"/>
           <p:cNvPicPr>
             <a:picLocks noChangeAspect="1"/>
           </p:cNvPicPr>
@@ -3491,8 +3451,8 @@
         </p:blipFill>
         <p:spPr>
           <a:xfrm>
-            <a:off x="2068653" y="2478024"/>
-            <a:ext cx="8054389" cy="3383280"/>
+            <a:off x="2388256" y="1911096"/>
+            <a:ext cx="7415182" cy="3840479"/>
           </a:xfrm>
           <a:prstGeom prst="rect">
             <a:avLst/>
@@ -3501,13 +3461,13 @@
       </p:pic>
       <p:sp>
         <p:nvSpPr>
-          <p:cNvPr id="7" name="TextBox 6"/>
+          <p:cNvPr id="6" name="TextBox 5"/>
           <p:cNvSpPr txBox="1"/>
           <p:nvPr/>
         </p:nvSpPr>
         <p:spPr>
           <a:xfrm>
-            <a:off x="731520" y="5486400"/>
+            <a:off x="731520" y="5532120"/>
             <a:ext cx="10728655" cy="1005840"/>
           </a:xfrm>
           <a:prstGeom prst="rect">
@@ -3530,13 +3490,13 @@
               </a:spcAft>
             </a:pPr>
             <a:r>
-              <a:rPr sz="1500" b="0">
+              <a:rPr sz="1400" b="0">
                 <a:solidFill>
                   <a:srgbClr val="171A14"/>
                 </a:solidFill>
                 <a:latin typeface="Segoe UI"/>
               </a:rPr>
-              <a:t>Every framework in the literature describes something arriving. None describes something being pushed out. In a fixed population that is half of what happens — and in our data it is the bigger half. This looks like the contribution.</a:t>
+              <a:t>Peak share, not today's — “today” is 2023-12 for the forward-only observables and 2026-08 for the DS ones, so one axis cannot carry both. At n=11 the correlation is not distinguishable from zero under either endpoint (−0.14 on peak, +0.33 on latest). This is the evidence FOR splitting the definition, not an assumption behind it.</a:t>
             </a:r>
           </a:p>
         </p:txBody>
@@ -3596,7 +3556,7 @@
                 </a:solidFill>
                 <a:latin typeface="Segoe UI"/>
               </a:rPr>
-              <a:t>INSIGHT 4</a:t>
+              <a:t>INSIGHT 2</a:t>
             </a:r>
           </a:p>
         </p:txBody>
@@ -3638,62 +3598,20 @@
                 </a:solidFill>
                 <a:latin typeface="Segoe UI"/>
               </a:rPr>
-              <a:t>Deprecation runs on an inverted clock</a:t>
-            </a:r>
-          </a:p>
-        </p:txBody>
-      </p:sp>
-      <p:sp>
-        <p:nvSpPr>
-          <p:cNvPr id="4" name="TextBox 3"/>
-          <p:cNvSpPr txBox="1"/>
+              <a:t>What does predict onset: how many parties must ship code</a:t>
+            </a:r>
+          </a:p>
+        </p:txBody>
+      </p:sp>
+      <p:sp>
+        <p:nvSpPr>
+          <p:cNvPr id="4" name="Rectangle 3"/>
+          <p:cNvSpPr/>
           <p:nvPr/>
         </p:nvSpPr>
         <p:spPr>
           <a:xfrm>
             <a:off x="731520" y="1600200"/>
-            <a:ext cx="10728655" cy="457200"/>
-          </a:xfrm>
-          <a:prstGeom prst="rect">
-            <a:avLst/>
-          </a:prstGeom>
-          <a:noFill/>
-        </p:spPr>
-        <p:txBody>
-          <a:bodyPr wrap="square">
-            <a:spAutoFit/>
-          </a:bodyPr>
-          <a:lstStyle/>
-          <a:p>
-            <a:pPr algn="l">
-              <a:lnSpc>
-                <a:spcPct val="125000"/>
-              </a:lnSpc>
-              <a:spcAft>
-                <a:spcPts val="600"/>
-              </a:spcAft>
-            </a:pPr>
-            <a:r>
-              <a:rPr sz="1500" b="0">
-                <a:solidFill>
-                  <a:srgbClr val="66705C"/>
-                </a:solidFill>
-                <a:latin typeface="Segoe UI"/>
-              </a:rPr>
-              <a:t>The question is not when it appeared but how much is still there.</a:t>
-            </a:r>
-          </a:p>
-        </p:txBody>
-      </p:sp>
-      <p:sp>
-        <p:nvSpPr>
-          <p:cNvPr id="5" name="Rectangle 4"/>
-          <p:cNvSpPr/>
-          <p:nvPr/>
-        </p:nvSpPr>
-        <p:spPr>
-          <a:xfrm>
-            <a:off x="731520" y="2167128"/>
             <a:ext cx="10728655" cy="9525"/>
           </a:xfrm>
           <a:prstGeom prst="rect">
@@ -3729,60 +3647,584 @@
           </a:p>
         </p:txBody>
       </p:sp>
-      <p:sp>
-        <p:nvSpPr>
-          <p:cNvPr id="6" name="Rectangle 5"/>
-          <p:cNvSpPr/>
-          <p:nvPr/>
-        </p:nvSpPr>
-        <p:spPr>
-          <a:xfrm>
-            <a:off x="731520" y="2478024"/>
-            <a:ext cx="3442106" cy="2011680"/>
-          </a:xfrm>
-          <a:prstGeom prst="rect">
-            <a:avLst/>
-          </a:prstGeom>
-          <a:solidFill>
-            <a:srgbClr val="F6F7F3"/>
-          </a:solidFill>
-          <a:ln w="9525">
-            <a:solidFill>
-              <a:srgbClr val="D3D8CC"/>
-            </a:solidFill>
-          </a:ln>
-          <a:effectLst/>
-        </p:spPr>
-        <p:style>
-          <a:lnRef idx="1">
-            <a:schemeClr val="accent1"/>
-          </a:lnRef>
-          <a:fillRef idx="3">
-            <a:schemeClr val="accent1"/>
-          </a:fillRef>
-          <a:effectRef idx="2">
-            <a:schemeClr val="accent1"/>
-          </a:effectRef>
-          <a:fontRef idx="minor">
-            <a:schemeClr val="lt1"/>
-          </a:fontRef>
-        </p:style>
-        <p:txBody>
-          <a:bodyPr rtlCol="0" anchor="ctr"/>
-          <a:lstStyle/>
-          <a:p/>
-        </p:txBody>
-      </p:sp>
-      <p:sp>
-        <p:nvSpPr>
-          <p:cNvPr id="7" name="TextBox 6"/>
+      <p:graphicFrame>
+        <p:nvGraphicFramePr>
+          <p:cNvPr id="5" name="Table 4"/>
+          <p:cNvGraphicFramePr>
+            <a:graphicFrameLocks noGrp="1"/>
+          </p:cNvGraphicFramePr>
+          <p:nvPr/>
+        </p:nvGraphicFramePr>
+        <p:xfrm>
+          <a:off x="731520" y="1911096"/>
+          <a:ext cx="10728653" cy="2852928"/>
+        </p:xfrm>
+        <a:graphic>
+          <a:graphicData uri="http://schemas.openxmlformats.org/drawingml/2006/table">
+            <a:tbl>
+              <a:tblPr firstRow="1" bandRow="1">
+                <a:tableStyleId>{5C22544A-7EE6-4342-B048-85BDC9FD1C3A}</a:tableStyleId>
+              </a:tblPr>
+              <a:tblGrid>
+                <a:gridCol w="5587841"/>
+                <a:gridCol w="2235136"/>
+                <a:gridCol w="2235136"/>
+                <a:gridCol w="670540"/>
+              </a:tblGrid>
+              <a:tr h="475488">
+                <a:tc>
+                  <a:txBody>
+                    <a:bodyPr/>
+                    <a:lstStyle/>
+                    <a:p>
+                      <a:r>
+                        <a:rPr sz="1200" b="1">
+                          <a:solidFill>
+                            <a:srgbClr val="66705C"/>
+                          </a:solidFill>
+                          <a:latin typeface="Segoe UI"/>
+                        </a:rPr>
+                        <a:t>What the change requires</a:t>
+                      </a:r>
+                    </a:p>
+                  </a:txBody>
+                  <a:tcPr anchor="ctr" marL="109728" marT="27432" marB="27432">
+                    <a:solidFill>
+                      <a:srgbClr val="F6F7F3"/>
+                    </a:solidFill>
+                  </a:tcPr>
+                </a:tc>
+                <a:tc>
+                  <a:txBody>
+                    <a:bodyPr/>
+                    <a:lstStyle/>
+                    <a:p>
+                      <a:r>
+                        <a:rPr sz="1200" b="1">
+                          <a:solidFill>
+                            <a:srgbClr val="66705C"/>
+                          </a:solidFill>
+                          <a:latin typeface="Segoe UI"/>
+                        </a:rPr>
+                        <a:t>Measured on</a:t>
+                      </a:r>
+                    </a:p>
+                  </a:txBody>
+                  <a:tcPr anchor="ctr" marL="109728" marT="27432" marB="27432">
+                    <a:solidFill>
+                      <a:srgbClr val="F6F7F3"/>
+                    </a:solidFill>
+                  </a:tcPr>
+                </a:tc>
+                <a:tc>
+                  <a:txBody>
+                    <a:bodyPr/>
+                    <a:lstStyle/>
+                    <a:p>
+                      <a:r>
+                        <a:rPr sz="1200" b="1">
+                          <a:solidFill>
+                            <a:srgbClr val="66705C"/>
+                          </a:solidFill>
+                          <a:latin typeface="Segoe UI"/>
+                        </a:rPr>
+                        <a:t>Onset</a:t>
+                      </a:r>
+                    </a:p>
+                  </a:txBody>
+                  <a:tcPr anchor="ctr" marL="109728" marT="27432" marB="27432">
+                    <a:solidFill>
+                      <a:srgbClr val="F6F7F3"/>
+                    </a:solidFill>
+                  </a:tcPr>
+                </a:tc>
+                <a:tc>
+                  <a:txBody>
+                    <a:bodyPr/>
+                    <a:lstStyle/>
+                    <a:p>
+                      <a:r>
+                        <a:rPr sz="1200" b="1">
+                          <a:solidFill>
+                            <a:srgbClr val="66705C"/>
+                          </a:solidFill>
+                          <a:latin typeface="Segoe UI"/>
+                        </a:rPr>
+                        <a:t>n</a:t>
+                      </a:r>
+                    </a:p>
+                  </a:txBody>
+                  <a:tcPr anchor="ctr" marL="109728" marT="27432" marB="27432">
+                    <a:solidFill>
+                      <a:srgbClr val="F6F7F3"/>
+                    </a:solidFill>
+                  </a:tcPr>
+                </a:tc>
+              </a:tr>
+              <a:tr h="475488">
+                <a:tc>
+                  <a:txBody>
+                    <a:bodyPr/>
+                    <a:lstStyle/>
+                    <a:p>
+                      <a:r>
+                        <a:rPr sz="1300" b="0">
+                          <a:solidFill>
+                            <a:srgbClr val="171A14"/>
+                          </a:solidFill>
+                          <a:latin typeface="Segoe UI"/>
+                        </a:rPr>
+                        <a:t>A new codepoint — the cryptography is already linked in</a:t>
+                      </a:r>
+                    </a:p>
+                  </a:txBody>
+                  <a:tcPr anchor="ctr" marL="109728" marT="27432" marB="27432">
+                    <a:solidFill>
+                      <a:srgbClr val="FFFFFF"/>
+                    </a:solidFill>
+                  </a:tcPr>
+                </a:tc>
+                <a:tc>
+                  <a:txBody>
+                    <a:bodyPr/>
+                    <a:lstStyle/>
+                    <a:p>
+                      <a:r>
+                        <a:rPr sz="1300" b="0">
+                          <a:solidFill>
+                            <a:srgbClr val="171A14"/>
+                          </a:solidFill>
+                          <a:latin typeface="Segoe UI"/>
+                        </a:rPr>
+                        <a:t>algorithms 8, 10</a:t>
+                      </a:r>
+                    </a:p>
+                  </a:txBody>
+                  <a:tcPr anchor="ctr" marL="109728" marT="27432" marB="27432">
+                    <a:solidFill>
+                      <a:srgbClr val="FFFFFF"/>
+                    </a:solidFill>
+                  </a:tcPr>
+                </a:tc>
+                <a:tc>
+                  <a:txBody>
+                    <a:bodyPr/>
+                    <a:lstStyle/>
+                    <a:p>
+                      <a:r>
+                        <a:rPr sz="1300" b="0">
+                          <a:solidFill>
+                            <a:srgbClr val="171A14"/>
+                          </a:solidFill>
+                          <a:latin typeface="Segoe UI"/>
+                        </a:rPr>
+                        <a:t>0.4 – 0.8 y</a:t>
+                      </a:r>
+                    </a:p>
+                  </a:txBody>
+                  <a:tcPr anchor="ctr" marL="109728" marT="27432" marB="27432">
+                    <a:solidFill>
+                      <a:srgbClr val="FFFFFF"/>
+                    </a:solidFill>
+                  </a:tcPr>
+                </a:tc>
+                <a:tc>
+                  <a:txBody>
+                    <a:bodyPr/>
+                    <a:lstStyle/>
+                    <a:p>
+                      <a:r>
+                        <a:rPr sz="1300" b="0">
+                          <a:solidFill>
+                            <a:srgbClr val="171A14"/>
+                          </a:solidFill>
+                          <a:latin typeface="Segoe UI"/>
+                        </a:rPr>
+                        <a:t>2</a:t>
+                      </a:r>
+                    </a:p>
+                  </a:txBody>
+                  <a:tcPr anchor="ctr" marL="109728" marT="27432" marB="27432">
+                    <a:solidFill>
+                      <a:srgbClr val="FFFFFF"/>
+                    </a:solidFill>
+                  </a:tcPr>
+                </a:tc>
+              </a:tr>
+              <a:tr h="475488">
+                <a:tc>
+                  <a:txBody>
+                    <a:bodyPr/>
+                    <a:lstStyle/>
+                    <a:p>
+                      <a:r>
+                        <a:rPr sz="1300" b="0">
+                          <a:solidFill>
+                            <a:srgbClr val="171A14"/>
+                          </a:solidFill>
+                          <a:latin typeface="Segoe UI"/>
+                        </a:rPr>
+                        <a:t>A new DS digest — a hash, parent side only</a:t>
+                      </a:r>
+                    </a:p>
+                  </a:txBody>
+                  <a:tcPr anchor="ctr" marL="109728" marT="27432" marB="27432">
+                    <a:solidFill>
+                      <a:srgbClr val="FFFFFF"/>
+                    </a:solidFill>
+                  </a:tcPr>
+                </a:tc>
+                <a:tc>
+                  <a:txBody>
+                    <a:bodyPr/>
+                    <a:lstStyle/>
+                    <a:p>
+                      <a:r>
+                        <a:rPr sz="1300" b="0">
+                          <a:solidFill>
+                            <a:srgbClr val="171A14"/>
+                          </a:solidFill>
+                          <a:latin typeface="Segoe UI"/>
+                        </a:rPr>
+                        <a:t>digests 3, 4</a:t>
+                      </a:r>
+                    </a:p>
+                  </a:txBody>
+                  <a:tcPr anchor="ctr" marL="109728" marT="27432" marB="27432">
+                    <a:solidFill>
+                      <a:srgbClr val="FFFFFF"/>
+                    </a:solidFill>
+                  </a:tcPr>
+                </a:tc>
+                <a:tc>
+                  <a:txBody>
+                    <a:bodyPr/>
+                    <a:lstStyle/>
+                    <a:p>
+                      <a:r>
+                        <a:rPr sz="1300" b="0">
+                          <a:solidFill>
+                            <a:srgbClr val="171A14"/>
+                          </a:solidFill>
+                          <a:latin typeface="Segoe UI"/>
+                        </a:rPr>
+                        <a:t>0.8 – 1.2 y</a:t>
+                      </a:r>
+                    </a:p>
+                  </a:txBody>
+                  <a:tcPr anchor="ctr" marL="109728" marT="27432" marB="27432">
+                    <a:solidFill>
+                      <a:srgbClr val="FFFFFF"/>
+                    </a:solidFill>
+                  </a:tcPr>
+                </a:tc>
+                <a:tc>
+                  <a:txBody>
+                    <a:bodyPr/>
+                    <a:lstStyle/>
+                    <a:p>
+                      <a:r>
+                        <a:rPr sz="1300" b="0">
+                          <a:solidFill>
+                            <a:srgbClr val="171A14"/>
+                          </a:solidFill>
+                          <a:latin typeface="Segoe UI"/>
+                        </a:rPr>
+                        <a:t>2</a:t>
+                      </a:r>
+                    </a:p>
+                  </a:txBody>
+                  <a:tcPr anchor="ctr" marL="109728" marT="27432" marB="27432">
+                    <a:solidFill>
+                      <a:srgbClr val="FFFFFF"/>
+                    </a:solidFill>
+                  </a:tcPr>
+                </a:tc>
+              </a:tr>
+              <a:tr h="475488">
+                <a:tc>
+                  <a:txBody>
+                    <a:bodyPr/>
+                    <a:lstStyle/>
+                    <a:p>
+                      <a:r>
+                        <a:rPr sz="1300" b="0">
+                          <a:solidFill>
+                            <a:srgbClr val="171A14"/>
+                          </a:solidFill>
+                          <a:latin typeface="Segoe UI"/>
+                        </a:rPr>
+                        <a:t>Same cryptography, new signalling</a:t>
+                      </a:r>
+                    </a:p>
+                  </a:txBody>
+                  <a:tcPr anchor="ctr" marL="109728" marT="27432" marB="27432">
+                    <a:solidFill>
+                      <a:srgbClr val="FFFFFF"/>
+                    </a:solidFill>
+                  </a:tcPr>
+                </a:tc>
+                <a:tc>
+                  <a:txBody>
+                    <a:bodyPr/>
+                    <a:lstStyle/>
+                    <a:p>
+                      <a:r>
+                        <a:rPr sz="1300" b="0">
+                          <a:solidFill>
+                            <a:srgbClr val="171A14"/>
+                          </a:solidFill>
+                          <a:latin typeface="Segoe UI"/>
+                        </a:rPr>
+                        <a:t>algorithm 7</a:t>
+                      </a:r>
+                    </a:p>
+                  </a:txBody>
+                  <a:tcPr anchor="ctr" marL="109728" marT="27432" marB="27432">
+                    <a:solidFill>
+                      <a:srgbClr val="FFFFFF"/>
+                    </a:solidFill>
+                  </a:tcPr>
+                </a:tc>
+                <a:tc>
+                  <a:txBody>
+                    <a:bodyPr/>
+                    <a:lstStyle/>
+                    <a:p>
+                      <a:r>
+                        <a:rPr sz="1300" b="0">
+                          <a:solidFill>
+                            <a:srgbClr val="171A14"/>
+                          </a:solidFill>
+                          <a:latin typeface="Segoe UI"/>
+                        </a:rPr>
+                        <a:t>1.3 y</a:t>
+                      </a:r>
+                    </a:p>
+                  </a:txBody>
+                  <a:tcPr anchor="ctr" marL="109728" marT="27432" marB="27432">
+                    <a:solidFill>
+                      <a:srgbClr val="FFFFFF"/>
+                    </a:solidFill>
+                  </a:tcPr>
+                </a:tc>
+                <a:tc>
+                  <a:txBody>
+                    <a:bodyPr/>
+                    <a:lstStyle/>
+                    <a:p>
+                      <a:r>
+                        <a:rPr sz="1300" b="0">
+                          <a:solidFill>
+                            <a:srgbClr val="171A14"/>
+                          </a:solidFill>
+                          <a:latin typeface="Segoe UI"/>
+                        </a:rPr>
+                        <a:t>1</a:t>
+                      </a:r>
+                    </a:p>
+                  </a:txBody>
+                  <a:tcPr anchor="ctr" marL="109728" marT="27432" marB="27432">
+                    <a:solidFill>
+                      <a:srgbClr val="FFFFFF"/>
+                    </a:solidFill>
+                  </a:tcPr>
+                </a:tc>
+              </a:tr>
+              <a:tr h="475488">
+                <a:tc>
+                  <a:txBody>
+                    <a:bodyPr/>
+                    <a:lstStyle/>
+                    <a:p>
+                      <a:r>
+                        <a:rPr sz="1300" b="0">
+                          <a:solidFill>
+                            <a:srgbClr val="171A14"/>
+                          </a:solidFill>
+                          <a:latin typeface="Segoe UI"/>
+                        </a:rPr>
+                        <a:t>A new record type on existing infrastructure</a:t>
+                      </a:r>
+                    </a:p>
+                  </a:txBody>
+                  <a:tcPr anchor="ctr" marL="109728" marT="27432" marB="27432">
+                    <a:solidFill>
+                      <a:srgbClr val="FFFFFF"/>
+                    </a:solidFill>
+                  </a:tcPr>
+                </a:tc>
+                <a:tc>
+                  <a:txBody>
+                    <a:bodyPr/>
+                    <a:lstStyle/>
+                    <a:p>
+                      <a:r>
+                        <a:rPr sz="1300" b="0">
+                          <a:solidFill>
+                            <a:srgbClr val="171A14"/>
+                          </a:solidFill>
+                          <a:latin typeface="Segoe UI"/>
+                        </a:rPr>
+                        <a:t>CDS delete</a:t>
+                      </a:r>
+                    </a:p>
+                  </a:txBody>
+                  <a:tcPr anchor="ctr" marL="109728" marT="27432" marB="27432">
+                    <a:solidFill>
+                      <a:srgbClr val="FFFFFF"/>
+                    </a:solidFill>
+                  </a:tcPr>
+                </a:tc>
+                <a:tc>
+                  <a:txBody>
+                    <a:bodyPr/>
+                    <a:lstStyle/>
+                    <a:p>
+                      <a:r>
+                        <a:rPr sz="1300" b="0">
+                          <a:solidFill>
+                            <a:srgbClr val="171A14"/>
+                          </a:solidFill>
+                          <a:latin typeface="Segoe UI"/>
+                        </a:rPr>
+                        <a:t>1.4 y</a:t>
+                      </a:r>
+                    </a:p>
+                  </a:txBody>
+                  <a:tcPr anchor="ctr" marL="109728" marT="27432" marB="27432">
+                    <a:solidFill>
+                      <a:srgbClr val="FFFFFF"/>
+                    </a:solidFill>
+                  </a:tcPr>
+                </a:tc>
+                <a:tc>
+                  <a:txBody>
+                    <a:bodyPr/>
+                    <a:lstStyle/>
+                    <a:p>
+                      <a:r>
+                        <a:rPr sz="1300" b="0">
+                          <a:solidFill>
+                            <a:srgbClr val="171A14"/>
+                          </a:solidFill>
+                          <a:latin typeface="Segoe UI"/>
+                        </a:rPr>
+                        <a:t>1</a:t>
+                      </a:r>
+                    </a:p>
+                  </a:txBody>
+                  <a:tcPr anchor="ctr" marL="109728" marT="27432" marB="27432">
+                    <a:solidFill>
+                      <a:srgbClr val="FFFFFF"/>
+                    </a:solidFill>
+                  </a:tcPr>
+                </a:tc>
+              </a:tr>
+              <a:tr h="475488">
+                <a:tc>
+                  <a:txBody>
+                    <a:bodyPr/>
+                    <a:lstStyle/>
+                    <a:p>
+                      <a:r>
+                        <a:rPr sz="1300" b="0">
+                          <a:solidFill>
+                            <a:srgbClr val="171A14"/>
+                          </a:solidFill>
+                          <a:latin typeface="Segoe UI"/>
+                        </a:rPr>
+                        <a:t>A NEW PRIMITIVE — signer AND validator must both ship</a:t>
+                      </a:r>
+                    </a:p>
+                  </a:txBody>
+                  <a:tcPr anchor="ctr" marL="109728" marT="27432" marB="27432">
+                    <a:solidFill>
+                      <a:srgbClr val="FFFFFF"/>
+                    </a:solidFill>
+                  </a:tcPr>
+                </a:tc>
+                <a:tc>
+                  <a:txBody>
+                    <a:bodyPr/>
+                    <a:lstStyle/>
+                    <a:p>
+                      <a:r>
+                        <a:rPr sz="1300" b="0">
+                          <a:solidFill>
+                            <a:srgbClr val="171A14"/>
+                          </a:solidFill>
+                          <a:latin typeface="Segoe UI"/>
+                        </a:rPr>
+                        <a:t>algorithms 12–16</a:t>
+                      </a:r>
+                    </a:p>
+                  </a:txBody>
+                  <a:tcPr anchor="ctr" marL="109728" marT="27432" marB="27432">
+                    <a:solidFill>
+                      <a:srgbClr val="FFFFFF"/>
+                    </a:solidFill>
+                  </a:tcPr>
+                </a:tc>
+                <a:tc>
+                  <a:txBody>
+                    <a:bodyPr/>
+                    <a:lstStyle/>
+                    <a:p>
+                      <a:r>
+                        <a:rPr sz="1300" b="0">
+                          <a:solidFill>
+                            <a:srgbClr val="171A14"/>
+                          </a:solidFill>
+                          <a:latin typeface="Segoe UI"/>
+                        </a:rPr>
+                        <a:t>1.9 – 3.9 y</a:t>
+                      </a:r>
+                    </a:p>
+                  </a:txBody>
+                  <a:tcPr anchor="ctr" marL="109728" marT="27432" marB="27432">
+                    <a:solidFill>
+                      <a:srgbClr val="FFFFFF"/>
+                    </a:solidFill>
+                  </a:tcPr>
+                </a:tc>
+                <a:tc>
+                  <a:txBody>
+                    <a:bodyPr/>
+                    <a:lstStyle/>
+                    <a:p>
+                      <a:r>
+                        <a:rPr sz="1300" b="0">
+                          <a:solidFill>
+                            <a:srgbClr val="171A14"/>
+                          </a:solidFill>
+                          <a:latin typeface="Segoe UI"/>
+                        </a:rPr>
+                        <a:t>5</a:t>
+                      </a:r>
+                    </a:p>
+                  </a:txBody>
+                  <a:tcPr anchor="ctr" marL="109728" marT="27432" marB="27432">
+                    <a:solidFill>
+                      <a:srgbClr val="FFFFFF"/>
+                    </a:solidFill>
+                  </a:tcPr>
+                </a:tc>
+              </a:tr>
+            </a:tbl>
+          </a:graphicData>
+        </a:graphic>
+      </p:graphicFrame>
+      <p:sp>
+        <p:nvSpPr>
+          <p:cNvPr id="6" name="TextBox 5"/>
           <p:cNvSpPr txBox="1"/>
           <p:nvPr/>
         </p:nvSpPr>
         <p:spPr>
           <a:xfrm>
-            <a:off x="896112" y="2606040"/>
-            <a:ext cx="3112922" cy="274320"/>
+            <a:off x="731520" y="4965192"/>
+            <a:ext cx="10728655" cy="1554480"/>
           </a:xfrm>
           <a:prstGeom prst="rect">
             <a:avLst/>
@@ -3804,38 +4246,15 @@
               </a:spcAft>
             </a:pPr>
             <a:r>
-              <a:rPr sz="1200" b="1">
-                <a:solidFill>
-                  <a:srgbClr val="00907F"/>
+              <a:rPr sz="1450" b="0">
+                <a:solidFill>
+                  <a:srgbClr val="171A14"/>
                 </a:solidFill>
                 <a:latin typeface="Segoe UI"/>
               </a:rPr>
-              <a:t>RFC 9905 — SHA-1 SIGNING</a:t>
-            </a:r>
-          </a:p>
-        </p:txBody>
-      </p:sp>
-      <p:sp>
-        <p:nvSpPr>
-          <p:cNvPr id="8" name="TextBox 7"/>
-          <p:cNvSpPr txBox="1"/>
-          <p:nvPr/>
-        </p:nvSpPr>
-        <p:spPr>
-          <a:xfrm>
-            <a:off x="896112" y="2953512"/>
-            <a:ext cx="3112922" cy="822960"/>
-          </a:xfrm>
-          <a:prstGeom prst="rect">
-            <a:avLst/>
-          </a:prstGeom>
-          <a:noFill/>
-        </p:spPr>
-        <p:txBody>
-          <a:bodyPr wrap="square">
-            <a:spAutoFit/>
-          </a:bodyPr>
-          <a:lstStyle/>
+              <a:t>Five groups, strictly ascending, on the full corpus. The claim to make is about the ORDERING: the middle gaps are 0.1 y with n=1, which is not a boundary. Only the last gap is substantial — 1.4 y to 1.9 y, where a change starts needing both ends.</a:t>
+            </a:r>
+          </a:p>
           <a:p>
             <a:pPr algn="l">
               <a:lnSpc>
@@ -3846,13 +4265,13 @@
               </a:spcAft>
             </a:pPr>
             <a:r>
-              <a:rPr sz="2000" b="0">
+              <a:rPr sz="1450" b="0">
                 <a:solidFill>
                   <a:srgbClr val="171A14"/>
                 </a:solidFill>
                 <a:latin typeface="Segoe UI"/>
               </a:rPr>
-              <a:t>7.81%</a:t>
+              <a:t/>
             </a:r>
           </a:p>
           <a:p>
@@ -3865,494 +4284,13 @@
               </a:spcAft>
             </a:pPr>
             <a:r>
-              <a:rPr sz="2000" b="0">
+              <a:rPr sz="1450" b="0">
                 <a:solidFill>
                   <a:srgbClr val="171A14"/>
                 </a:solidFill>
                 <a:latin typeface="Segoe UI"/>
               </a:rPr>
-              <a:t>514 zones</a:t>
-            </a:r>
-          </a:p>
-        </p:txBody>
-      </p:sp>
-      <p:sp>
-        <p:nvSpPr>
-          <p:cNvPr id="9" name="TextBox 8"/>
-          <p:cNvSpPr txBox="1"/>
-          <p:nvPr/>
-        </p:nvSpPr>
-        <p:spPr>
-          <a:xfrm>
-            <a:off x="896112" y="3922776"/>
-            <a:ext cx="3112922" cy="457200"/>
-          </a:xfrm>
-          <a:prstGeom prst="rect">
-            <a:avLst/>
-          </a:prstGeom>
-          <a:noFill/>
-        </p:spPr>
-        <p:txBody>
-          <a:bodyPr wrap="square">
-            <a:spAutoFit/>
-          </a:bodyPr>
-          <a:lstStyle/>
-          <a:p>
-            <a:pPr algn="l">
-              <a:lnSpc>
-                <a:spcPct val="125000"/>
-              </a:lnSpc>
-              <a:spcAft>
-                <a:spcPts val="600"/>
-              </a:spcAft>
-            </a:pPr>
-            <a:r>
-              <a:rPr sz="1150" b="0">
-                <a:solidFill>
-                  <a:srgbClr val="66705C"/>
-                </a:solidFill>
-                <a:latin typeface="Segoe UI"/>
-              </a:rPr>
-              <a:t>still published after the RFC forbade new use</a:t>
-            </a:r>
-          </a:p>
-        </p:txBody>
-      </p:sp>
-      <p:sp>
-        <p:nvSpPr>
-          <p:cNvPr id="10" name="Rectangle 9"/>
-          <p:cNvSpPr/>
-          <p:nvPr/>
-        </p:nvSpPr>
-        <p:spPr>
-          <a:xfrm>
-            <a:off x="4374794" y="2478024"/>
-            <a:ext cx="3442106" cy="2011680"/>
-          </a:xfrm>
-          <a:prstGeom prst="rect">
-            <a:avLst/>
-          </a:prstGeom>
-          <a:solidFill>
-            <a:srgbClr val="F6F7F3"/>
-          </a:solidFill>
-          <a:ln w="9525">
-            <a:solidFill>
-              <a:srgbClr val="D3D8CC"/>
-            </a:solidFill>
-          </a:ln>
-          <a:effectLst/>
-        </p:spPr>
-        <p:style>
-          <a:lnRef idx="1">
-            <a:schemeClr val="accent1"/>
-          </a:lnRef>
-          <a:fillRef idx="3">
-            <a:schemeClr val="accent1"/>
-          </a:fillRef>
-          <a:effectRef idx="2">
-            <a:schemeClr val="accent1"/>
-          </a:effectRef>
-          <a:fontRef idx="minor">
-            <a:schemeClr val="lt1"/>
-          </a:fontRef>
-        </p:style>
-        <p:txBody>
-          <a:bodyPr rtlCol="0" anchor="ctr"/>
-          <a:lstStyle/>
-          <a:p/>
-        </p:txBody>
-      </p:sp>
-      <p:sp>
-        <p:nvSpPr>
-          <p:cNvPr id="11" name="TextBox 10"/>
-          <p:cNvSpPr txBox="1"/>
-          <p:nvPr/>
-        </p:nvSpPr>
-        <p:spPr>
-          <a:xfrm>
-            <a:off x="4539386" y="2606040"/>
-            <a:ext cx="3112922" cy="274320"/>
-          </a:xfrm>
-          <a:prstGeom prst="rect">
-            <a:avLst/>
-          </a:prstGeom>
-          <a:noFill/>
-        </p:spPr>
-        <p:txBody>
-          <a:bodyPr wrap="square">
-            <a:spAutoFit/>
-          </a:bodyPr>
-          <a:lstStyle/>
-          <a:p>
-            <a:pPr algn="l">
-              <a:lnSpc>
-                <a:spcPct val="125000"/>
-              </a:lnSpc>
-              <a:spcAft>
-                <a:spcPts val="600"/>
-              </a:spcAft>
-            </a:pPr>
-            <a:r>
-              <a:rPr sz="1200" b="1">
-                <a:solidFill>
-                  <a:srgbClr val="00907F"/>
-                </a:solidFill>
-                <a:latin typeface="Segoe UI"/>
-              </a:rPr>
-              <a:t>RFC 9905 — SHA-1 DS DIGEST</a:t>
-            </a:r>
-          </a:p>
-        </p:txBody>
-      </p:sp>
-      <p:sp>
-        <p:nvSpPr>
-          <p:cNvPr id="12" name="TextBox 11"/>
-          <p:cNvSpPr txBox="1"/>
-          <p:nvPr/>
-        </p:nvSpPr>
-        <p:spPr>
-          <a:xfrm>
-            <a:off x="4539386" y="2953512"/>
-            <a:ext cx="3112922" cy="822960"/>
-          </a:xfrm>
-          <a:prstGeom prst="rect">
-            <a:avLst/>
-          </a:prstGeom>
-          <a:noFill/>
-        </p:spPr>
-        <p:txBody>
-          <a:bodyPr wrap="square">
-            <a:spAutoFit/>
-          </a:bodyPr>
-          <a:lstStyle/>
-          <a:p>
-            <a:pPr algn="l">
-              <a:lnSpc>
-                <a:spcPct val="125000"/>
-              </a:lnSpc>
-              <a:spcAft>
-                <a:spcPts val="600"/>
-              </a:spcAft>
-            </a:pPr>
-            <a:r>
-              <a:rPr sz="2000" b="0">
-                <a:solidFill>
-                  <a:srgbClr val="171A14"/>
-                </a:solidFill>
-                <a:latin typeface="Segoe UI"/>
-              </a:rPr>
-              <a:t>21.77%</a:t>
-            </a:r>
-          </a:p>
-          <a:p>
-            <a:pPr algn="l">
-              <a:lnSpc>
-                <a:spcPct val="125000"/>
-              </a:lnSpc>
-              <a:spcAft>
-                <a:spcPts val="600"/>
-              </a:spcAft>
-            </a:pPr>
-            <a:r>
-              <a:rPr sz="2000" b="0">
-                <a:solidFill>
-                  <a:srgbClr val="171A14"/>
-                </a:solidFill>
-                <a:latin typeface="Segoe UI"/>
-              </a:rPr>
-              <a:t>1,433 zones</a:t>
-            </a:r>
-          </a:p>
-        </p:txBody>
-      </p:sp>
-      <p:sp>
-        <p:nvSpPr>
-          <p:cNvPr id="13" name="TextBox 12"/>
-          <p:cNvSpPr txBox="1"/>
-          <p:nvPr/>
-        </p:nvSpPr>
-        <p:spPr>
-          <a:xfrm>
-            <a:off x="4539386" y="3922776"/>
-            <a:ext cx="3112922" cy="457200"/>
-          </a:xfrm>
-          <a:prstGeom prst="rect">
-            <a:avLst/>
-          </a:prstGeom>
-          <a:noFill/>
-        </p:spPr>
-        <p:txBody>
-          <a:bodyPr wrap="square">
-            <a:spAutoFit/>
-          </a:bodyPr>
-          <a:lstStyle/>
-          <a:p>
-            <a:pPr algn="l">
-              <a:lnSpc>
-                <a:spcPct val="125000"/>
-              </a:lnSpc>
-              <a:spcAft>
-                <a:spcPts val="600"/>
-              </a:spcAft>
-            </a:pPr>
-            <a:r>
-              <a:rPr sz="1150" b="0">
-                <a:solidFill>
-                  <a:srgbClr val="66705C"/>
-                </a:solidFill>
-                <a:latin typeface="Segoe UI"/>
-              </a:rPr>
-              <a:t>a different fix: replace the DS at the parent</a:t>
-            </a:r>
-          </a:p>
-        </p:txBody>
-      </p:sp>
-      <p:sp>
-        <p:nvSpPr>
-          <p:cNvPr id="14" name="Rectangle 13"/>
-          <p:cNvSpPr/>
-          <p:nvPr/>
-        </p:nvSpPr>
-        <p:spPr>
-          <a:xfrm>
-            <a:off x="8018068" y="2478024"/>
-            <a:ext cx="3442106" cy="2011680"/>
-          </a:xfrm>
-          <a:prstGeom prst="rect">
-            <a:avLst/>
-          </a:prstGeom>
-          <a:solidFill>
-            <a:srgbClr val="F6F7F3"/>
-          </a:solidFill>
-          <a:ln w="9525">
-            <a:solidFill>
-              <a:srgbClr val="D3D8CC"/>
-            </a:solidFill>
-          </a:ln>
-          <a:effectLst/>
-        </p:spPr>
-        <p:style>
-          <a:lnRef idx="1">
-            <a:schemeClr val="accent1"/>
-          </a:lnRef>
-          <a:fillRef idx="3">
-            <a:schemeClr val="accent1"/>
-          </a:fillRef>
-          <a:effectRef idx="2">
-            <a:schemeClr val="accent1"/>
-          </a:effectRef>
-          <a:fontRef idx="minor">
-            <a:schemeClr val="lt1"/>
-          </a:fontRef>
-        </p:style>
-        <p:txBody>
-          <a:bodyPr rtlCol="0" anchor="ctr"/>
-          <a:lstStyle/>
-          <a:p/>
-        </p:txBody>
-      </p:sp>
-      <p:sp>
-        <p:nvSpPr>
-          <p:cNvPr id="15" name="TextBox 14"/>
-          <p:cNvSpPr txBox="1"/>
-          <p:nvPr/>
-        </p:nvSpPr>
-        <p:spPr>
-          <a:xfrm>
-            <a:off x="8182660" y="2606040"/>
-            <a:ext cx="3112922" cy="274320"/>
-          </a:xfrm>
-          <a:prstGeom prst="rect">
-            <a:avLst/>
-          </a:prstGeom>
-          <a:noFill/>
-        </p:spPr>
-        <p:txBody>
-          <a:bodyPr wrap="square">
-            <a:spAutoFit/>
-          </a:bodyPr>
-          <a:lstStyle/>
-          <a:p>
-            <a:pPr algn="l">
-              <a:lnSpc>
-                <a:spcPct val="125000"/>
-              </a:lnSpc>
-              <a:spcAft>
-                <a:spcPts val="600"/>
-              </a:spcAft>
-            </a:pPr>
-            <a:r>
-              <a:rPr sz="1200" b="1">
-                <a:solidFill>
-                  <a:srgbClr val="00907F"/>
-                </a:solidFill>
-                <a:latin typeface="Segoe UI"/>
-              </a:rPr>
-              <a:t>RFC 9906 — ECC-GOST</a:t>
-            </a:r>
-          </a:p>
-        </p:txBody>
-      </p:sp>
-      <p:sp>
-        <p:nvSpPr>
-          <p:cNvPr id="16" name="TextBox 15"/>
-          <p:cNvSpPr txBox="1"/>
-          <p:nvPr/>
-        </p:nvSpPr>
-        <p:spPr>
-          <a:xfrm>
-            <a:off x="8182660" y="2953512"/>
-            <a:ext cx="3112922" cy="822960"/>
-          </a:xfrm>
-          <a:prstGeom prst="rect">
-            <a:avLst/>
-          </a:prstGeom>
-          <a:noFill/>
-        </p:spPr>
-        <p:txBody>
-          <a:bodyPr wrap="square">
-            <a:spAutoFit/>
-          </a:bodyPr>
-          <a:lstStyle/>
-          <a:p>
-            <a:pPr algn="l">
-              <a:lnSpc>
-                <a:spcPct val="125000"/>
-              </a:lnSpc>
-              <a:spcAft>
-                <a:spcPts val="600"/>
-              </a:spcAft>
-            </a:pPr>
-            <a:r>
-              <a:rPr sz="2000" b="0">
-                <a:solidFill>
-                  <a:srgbClr val="171A14"/>
-                </a:solidFill>
-                <a:latin typeface="Segoe UI"/>
-              </a:rPr>
-              <a:t>0</a:t>
-            </a:r>
-          </a:p>
-          <a:p>
-            <a:pPr algn="l">
-              <a:lnSpc>
-                <a:spcPct val="125000"/>
-              </a:lnSpc>
-              <a:spcAft>
-                <a:spcPts val="600"/>
-              </a:spcAft>
-            </a:pPr>
-            <a:r>
-              <a:rPr sz="2000" b="0">
-                <a:solidFill>
-                  <a:srgbClr val="171A14"/>
-                </a:solidFill>
-                <a:latin typeface="Segoe UI"/>
-              </a:rPr>
-              <a:t>zero records</a:t>
-            </a:r>
-          </a:p>
-        </p:txBody>
-      </p:sp>
-      <p:sp>
-        <p:nvSpPr>
-          <p:cNvPr id="17" name="TextBox 16"/>
-          <p:cNvSpPr txBox="1"/>
-          <p:nvPr/>
-        </p:nvSpPr>
-        <p:spPr>
-          <a:xfrm>
-            <a:off x="8182660" y="3922776"/>
-            <a:ext cx="3112922" cy="457200"/>
-          </a:xfrm>
-          <a:prstGeom prst="rect">
-            <a:avLst/>
-          </a:prstGeom>
-          <a:noFill/>
-        </p:spPr>
-        <p:txBody>
-          <a:bodyPr wrap="square">
-            <a:spAutoFit/>
-          </a:bodyPr>
-          <a:lstStyle/>
-          <a:p>
-            <a:pPr algn="l">
-              <a:lnSpc>
-                <a:spcPct val="125000"/>
-              </a:lnSpc>
-              <a:spcAft>
-                <a:spcPts val="600"/>
-              </a:spcAft>
-            </a:pPr>
-            <a:r>
-              <a:rPr sz="1150" b="0">
-                <a:solidFill>
-                  <a:srgbClr val="66705C"/>
-                </a:solidFill>
-                <a:latin typeface="Segoe UI"/>
-              </a:rPr>
-              <a:t>documented an ending rather than causing one</a:t>
-            </a:r>
-          </a:p>
-        </p:txBody>
-      </p:sp>
-      <p:sp>
-        <p:nvSpPr>
-          <p:cNvPr id="18" name="TextBox 17"/>
-          <p:cNvSpPr txBox="1"/>
-          <p:nvPr/>
-        </p:nvSpPr>
-        <p:spPr>
-          <a:xfrm>
-            <a:off x="731520" y="4946904"/>
-            <a:ext cx="10728655" cy="1280160"/>
-          </a:xfrm>
-          <a:prstGeom prst="rect">
-            <a:avLst/>
-          </a:prstGeom>
-          <a:noFill/>
-        </p:spPr>
-        <p:txBody>
-          <a:bodyPr wrap="square">
-            <a:spAutoFit/>
-          </a:bodyPr>
-          <a:lstStyle/>
-          <a:p>
-            <a:pPr algn="l">
-              <a:lnSpc>
-                <a:spcPct val="125000"/>
-              </a:lnSpc>
-              <a:spcAft>
-                <a:spcPts val="600"/>
-              </a:spcAft>
-            </a:pPr>
-            <a:r>
-              <a:rPr sz="1600" b="0">
-                <a:solidFill>
-                  <a:srgbClr val="171A14"/>
-                </a:solidFill>
-                <a:latin typeface="Segoe UI"/>
-              </a:rPr>
-              <a:t>The two halves of RFC 9905 need different remedies — replace the DS at the parent, versus reissue the child’s keys — so they are reported as two numbers, never one “SHA-1 exposure”.</a:t>
-            </a:r>
-          </a:p>
-          <a:p>
-            <a:pPr algn="l">
-              <a:lnSpc>
-                <a:spcPct val="125000"/>
-              </a:lnSpc>
-              <a:spcAft>
-                <a:spcPts val="600"/>
-              </a:spcAft>
-            </a:pPr>
-            <a:r>
-              <a:rPr sz="1600" b="0">
-                <a:solidFill>
-                  <a:srgbClr val="171A14"/>
-                </a:solidFill>
-                <a:latin typeface="Segoe UI"/>
-              </a:rPr>
-              <a:t>400 zones carry both.</a:t>
+              <a:t>Not difficulty: Ed25519 is no harder to implement than RSA/SHA-512. RFC 5218 calls it “incrementally deployable”, which is the citation for the mechanism.</a:t>
             </a:r>
           </a:p>
         </p:txBody>
@@ -4412,6 +4350,1076 @@
                 </a:solidFill>
                 <a:latin typeface="Segoe UI"/>
               </a:rPr>
+              <a:t>INSIGHT 3</a:t>
+            </a:r>
+          </a:p>
+        </p:txBody>
+      </p:sp>
+      <p:sp>
+        <p:nvSpPr>
+          <p:cNvPr id="3" name="TextBox 2"/>
+          <p:cNvSpPr txBox="1"/>
+          <p:nvPr/>
+        </p:nvSpPr>
+        <p:spPr>
+          <a:xfrm>
+            <a:off x="731520" y="850392"/>
+            <a:ext cx="10728655" cy="640080"/>
+          </a:xfrm>
+          <a:prstGeom prst="rect">
+            <a:avLst/>
+          </a:prstGeom>
+          <a:noFill/>
+        </p:spPr>
+        <p:txBody>
+          <a:bodyPr wrap="square">
+            <a:spAutoFit/>
+          </a:bodyPr>
+          <a:lstStyle/>
+          <a:p>
+            <a:pPr algn="l">
+              <a:lnSpc>
+                <a:spcPct val="125000"/>
+              </a:lnSpc>
+              <a:spcAft>
+                <a:spcPts val="600"/>
+              </a:spcAft>
+            </a:pPr>
+            <a:r>
+              <a:rPr sz="3200" b="1">
+                <a:solidFill>
+                  <a:srgbClr val="171A14"/>
+                </a:solidFill>
+                <a:latin typeface="Segoe UI"/>
+              </a:rPr>
+              <a:t>Most of what happens is retreat, not arrival</a:t>
+            </a:r>
+          </a:p>
+        </p:txBody>
+      </p:sp>
+      <p:sp>
+        <p:nvSpPr>
+          <p:cNvPr id="4" name="TextBox 3"/>
+          <p:cNvSpPr txBox="1"/>
+          <p:nvPr/>
+        </p:nvSpPr>
+        <p:spPr>
+          <a:xfrm>
+            <a:off x="731520" y="1600200"/>
+            <a:ext cx="10728655" cy="457200"/>
+          </a:xfrm>
+          <a:prstGeom prst="rect">
+            <a:avLst/>
+          </a:prstGeom>
+          <a:noFill/>
+        </p:spPr>
+        <p:txBody>
+          <a:bodyPr wrap="square">
+            <a:spAutoFit/>
+          </a:bodyPr>
+          <a:lstStyle/>
+          <a:p>
+            <a:pPr algn="l">
+              <a:lnSpc>
+                <a:spcPct val="125000"/>
+              </a:lnSpc>
+              <a:spcAft>
+                <a:spcPts val="600"/>
+              </a:spcAft>
+            </a:pPr>
+            <a:r>
+              <a:rPr sz="1500" b="0">
+                <a:solidFill>
+                  <a:srgbClr val="66705C"/>
+                </a:solidFill>
+                <a:latin typeface="Segoe UI"/>
+              </a:rPr>
+              <a:t>Four of six tracked mechanisms are below their own peak.</a:t>
+            </a:r>
+          </a:p>
+        </p:txBody>
+      </p:sp>
+      <p:sp>
+        <p:nvSpPr>
+          <p:cNvPr id="5" name="Rectangle 4"/>
+          <p:cNvSpPr/>
+          <p:nvPr/>
+        </p:nvSpPr>
+        <p:spPr>
+          <a:xfrm>
+            <a:off x="731520" y="2167128"/>
+            <a:ext cx="10728655" cy="9525"/>
+          </a:xfrm>
+          <a:prstGeom prst="rect">
+            <a:avLst/>
+          </a:prstGeom>
+          <a:solidFill>
+            <a:srgbClr val="D3D8CC"/>
+          </a:solidFill>
+          <a:ln>
+            <a:noFill/>
+          </a:ln>
+          <a:effectLst/>
+        </p:spPr>
+        <p:style>
+          <a:lnRef idx="1">
+            <a:schemeClr val="accent1"/>
+          </a:lnRef>
+          <a:fillRef idx="3">
+            <a:schemeClr val="accent1"/>
+          </a:fillRef>
+          <a:effectRef idx="2">
+            <a:schemeClr val="accent1"/>
+          </a:effectRef>
+          <a:fontRef idx="minor">
+            <a:schemeClr val="lt1"/>
+          </a:fontRef>
+        </p:style>
+        <p:txBody>
+          <a:bodyPr rtlCol="0" anchor="ctr"/>
+          <a:lstStyle/>
+          <a:p>
+            <a:pPr algn="ctr"/>
+          </a:p>
+        </p:txBody>
+      </p:sp>
+      <p:pic>
+        <p:nvPicPr>
+          <p:cNvPr id="6" name="Picture 5" descr="displacement.png"/>
+          <p:cNvPicPr>
+            <a:picLocks noChangeAspect="1"/>
+          </p:cNvPicPr>
+          <p:nvPr/>
+        </p:nvPicPr>
+        <p:blipFill>
+          <a:blip r:embed="rId2"/>
+          <a:stretch>
+            <a:fillRect/>
+          </a:stretch>
+        </p:blipFill>
+        <p:spPr>
+          <a:xfrm>
+            <a:off x="2068653" y="2478024"/>
+            <a:ext cx="8054389" cy="3383280"/>
+          </a:xfrm>
+          <a:prstGeom prst="rect">
+            <a:avLst/>
+          </a:prstGeom>
+        </p:spPr>
+      </p:pic>
+      <p:sp>
+        <p:nvSpPr>
+          <p:cNvPr id="7" name="TextBox 6"/>
+          <p:cNvSpPr txBox="1"/>
+          <p:nvPr/>
+        </p:nvSpPr>
+        <p:spPr>
+          <a:xfrm>
+            <a:off x="731520" y="5486400"/>
+            <a:ext cx="10728655" cy="1005840"/>
+          </a:xfrm>
+          <a:prstGeom prst="rect">
+            <a:avLst/>
+          </a:prstGeom>
+          <a:noFill/>
+        </p:spPr>
+        <p:txBody>
+          <a:bodyPr wrap="square">
+            <a:spAutoFit/>
+          </a:bodyPr>
+          <a:lstStyle/>
+          <a:p>
+            <a:pPr algn="l">
+              <a:lnSpc>
+                <a:spcPct val="125000"/>
+              </a:lnSpc>
+              <a:spcAft>
+                <a:spcPts val="600"/>
+              </a:spcAft>
+            </a:pPr>
+            <a:r>
+              <a:rPr sz="1500" b="0">
+                <a:solidFill>
+                  <a:srgbClr val="171A14"/>
+                </a:solidFill>
+                <a:latin typeface="Segoe UI"/>
+              </a:rPr>
+              <a:t>Every framework in the literature describes something arriving. None describes something being pushed out. In a fixed population that is half of what happens — and in our data it is the bigger half. This looks like the contribution.</a:t>
+            </a:r>
+          </a:p>
+        </p:txBody>
+      </p:sp>
+    </p:spTree>
+  </p:cSld>
+  <p:clrMapOvr>
+    <a:masterClrMapping/>
+  </p:clrMapOvr>
+</p:sld>
+</file>
+
+<file path=ppt/slides/slide13.xml><?xml version="1.0" encoding="utf-8"?>
+<p:sld xmlns:a="http://schemas.openxmlformats.org/drawingml/2006/main" xmlns:p="http://schemas.openxmlformats.org/presentationml/2006/main" xmlns:r="http://schemas.openxmlformats.org/officeDocument/2006/relationships">
+  <p:cSld>
+    <p:spTree>
+      <p:nvGrpSpPr>
+        <p:cNvPr id="1" name=""/>
+        <p:cNvGrpSpPr/>
+        <p:nvPr/>
+      </p:nvGrpSpPr>
+      <p:grpSpPr/>
+      <p:sp>
+        <p:nvSpPr>
+          <p:cNvPr id="2" name="TextBox 1"/>
+          <p:cNvSpPr txBox="1"/>
+          <p:nvPr/>
+        </p:nvSpPr>
+        <p:spPr>
+          <a:xfrm>
+            <a:off x="731520" y="502920"/>
+            <a:ext cx="10728655" cy="274320"/>
+          </a:xfrm>
+          <a:prstGeom prst="rect">
+            <a:avLst/>
+          </a:prstGeom>
+          <a:noFill/>
+        </p:spPr>
+        <p:txBody>
+          <a:bodyPr wrap="square">
+            <a:spAutoFit/>
+          </a:bodyPr>
+          <a:lstStyle/>
+          <a:p>
+            <a:pPr algn="l">
+              <a:lnSpc>
+                <a:spcPct val="125000"/>
+              </a:lnSpc>
+              <a:spcAft>
+                <a:spcPts val="600"/>
+              </a:spcAft>
+            </a:pPr>
+            <a:r>
+              <a:rPr sz="1100" b="1">
+                <a:solidFill>
+                  <a:srgbClr val="00907F"/>
+                </a:solidFill>
+                <a:latin typeface="Segoe UI"/>
+              </a:rPr>
+              <a:t>INSIGHT 4</a:t>
+            </a:r>
+          </a:p>
+        </p:txBody>
+      </p:sp>
+      <p:sp>
+        <p:nvSpPr>
+          <p:cNvPr id="3" name="TextBox 2"/>
+          <p:cNvSpPr txBox="1"/>
+          <p:nvPr/>
+        </p:nvSpPr>
+        <p:spPr>
+          <a:xfrm>
+            <a:off x="731520" y="850392"/>
+            <a:ext cx="10728655" cy="640080"/>
+          </a:xfrm>
+          <a:prstGeom prst="rect">
+            <a:avLst/>
+          </a:prstGeom>
+          <a:noFill/>
+        </p:spPr>
+        <p:txBody>
+          <a:bodyPr wrap="square">
+            <a:spAutoFit/>
+          </a:bodyPr>
+          <a:lstStyle/>
+          <a:p>
+            <a:pPr algn="l">
+              <a:lnSpc>
+                <a:spcPct val="125000"/>
+              </a:lnSpc>
+              <a:spcAft>
+                <a:spcPts val="600"/>
+              </a:spcAft>
+            </a:pPr>
+            <a:r>
+              <a:rPr sz="3200" b="1">
+                <a:solidFill>
+                  <a:srgbClr val="171A14"/>
+                </a:solidFill>
+                <a:latin typeface="Segoe UI"/>
+              </a:rPr>
+              <a:t>Deprecation runs on an inverted clock</a:t>
+            </a:r>
+          </a:p>
+        </p:txBody>
+      </p:sp>
+      <p:sp>
+        <p:nvSpPr>
+          <p:cNvPr id="4" name="TextBox 3"/>
+          <p:cNvSpPr txBox="1"/>
+          <p:nvPr/>
+        </p:nvSpPr>
+        <p:spPr>
+          <a:xfrm>
+            <a:off x="731520" y="1600200"/>
+            <a:ext cx="10728655" cy="457200"/>
+          </a:xfrm>
+          <a:prstGeom prst="rect">
+            <a:avLst/>
+          </a:prstGeom>
+          <a:noFill/>
+        </p:spPr>
+        <p:txBody>
+          <a:bodyPr wrap="square">
+            <a:spAutoFit/>
+          </a:bodyPr>
+          <a:lstStyle/>
+          <a:p>
+            <a:pPr algn="l">
+              <a:lnSpc>
+                <a:spcPct val="125000"/>
+              </a:lnSpc>
+              <a:spcAft>
+                <a:spcPts val="600"/>
+              </a:spcAft>
+            </a:pPr>
+            <a:r>
+              <a:rPr sz="1500" b="0">
+                <a:solidFill>
+                  <a:srgbClr val="66705C"/>
+                </a:solidFill>
+                <a:latin typeface="Segoe UI"/>
+              </a:rPr>
+              <a:t>The question is not when it appeared but how much is still there.</a:t>
+            </a:r>
+          </a:p>
+        </p:txBody>
+      </p:sp>
+      <p:sp>
+        <p:nvSpPr>
+          <p:cNvPr id="5" name="Rectangle 4"/>
+          <p:cNvSpPr/>
+          <p:nvPr/>
+        </p:nvSpPr>
+        <p:spPr>
+          <a:xfrm>
+            <a:off x="731520" y="2167128"/>
+            <a:ext cx="10728655" cy="9525"/>
+          </a:xfrm>
+          <a:prstGeom prst="rect">
+            <a:avLst/>
+          </a:prstGeom>
+          <a:solidFill>
+            <a:srgbClr val="D3D8CC"/>
+          </a:solidFill>
+          <a:ln>
+            <a:noFill/>
+          </a:ln>
+          <a:effectLst/>
+        </p:spPr>
+        <p:style>
+          <a:lnRef idx="1">
+            <a:schemeClr val="accent1"/>
+          </a:lnRef>
+          <a:fillRef idx="3">
+            <a:schemeClr val="accent1"/>
+          </a:fillRef>
+          <a:effectRef idx="2">
+            <a:schemeClr val="accent1"/>
+          </a:effectRef>
+          <a:fontRef idx="minor">
+            <a:schemeClr val="lt1"/>
+          </a:fontRef>
+        </p:style>
+        <p:txBody>
+          <a:bodyPr rtlCol="0" anchor="ctr"/>
+          <a:lstStyle/>
+          <a:p>
+            <a:pPr algn="ctr"/>
+          </a:p>
+        </p:txBody>
+      </p:sp>
+      <p:sp>
+        <p:nvSpPr>
+          <p:cNvPr id="6" name="Rectangle 5"/>
+          <p:cNvSpPr/>
+          <p:nvPr/>
+        </p:nvSpPr>
+        <p:spPr>
+          <a:xfrm>
+            <a:off x="731520" y="2478024"/>
+            <a:ext cx="3442106" cy="2011680"/>
+          </a:xfrm>
+          <a:prstGeom prst="rect">
+            <a:avLst/>
+          </a:prstGeom>
+          <a:solidFill>
+            <a:srgbClr val="F6F7F3"/>
+          </a:solidFill>
+          <a:ln w="9525">
+            <a:solidFill>
+              <a:srgbClr val="D3D8CC"/>
+            </a:solidFill>
+          </a:ln>
+          <a:effectLst/>
+        </p:spPr>
+        <p:style>
+          <a:lnRef idx="1">
+            <a:schemeClr val="accent1"/>
+          </a:lnRef>
+          <a:fillRef idx="3">
+            <a:schemeClr val="accent1"/>
+          </a:fillRef>
+          <a:effectRef idx="2">
+            <a:schemeClr val="accent1"/>
+          </a:effectRef>
+          <a:fontRef idx="minor">
+            <a:schemeClr val="lt1"/>
+          </a:fontRef>
+        </p:style>
+        <p:txBody>
+          <a:bodyPr rtlCol="0" anchor="ctr"/>
+          <a:lstStyle/>
+          <a:p/>
+        </p:txBody>
+      </p:sp>
+      <p:sp>
+        <p:nvSpPr>
+          <p:cNvPr id="7" name="TextBox 6"/>
+          <p:cNvSpPr txBox="1"/>
+          <p:nvPr/>
+        </p:nvSpPr>
+        <p:spPr>
+          <a:xfrm>
+            <a:off x="896112" y="2606040"/>
+            <a:ext cx="3112922" cy="274320"/>
+          </a:xfrm>
+          <a:prstGeom prst="rect">
+            <a:avLst/>
+          </a:prstGeom>
+          <a:noFill/>
+        </p:spPr>
+        <p:txBody>
+          <a:bodyPr wrap="square">
+            <a:spAutoFit/>
+          </a:bodyPr>
+          <a:lstStyle/>
+          <a:p>
+            <a:pPr algn="l">
+              <a:lnSpc>
+                <a:spcPct val="125000"/>
+              </a:lnSpc>
+              <a:spcAft>
+                <a:spcPts val="600"/>
+              </a:spcAft>
+            </a:pPr>
+            <a:r>
+              <a:rPr sz="1200" b="1">
+                <a:solidFill>
+                  <a:srgbClr val="00907F"/>
+                </a:solidFill>
+                <a:latin typeface="Segoe UI"/>
+              </a:rPr>
+              <a:t>RFC 9905 — SHA-1 SIGNING</a:t>
+            </a:r>
+          </a:p>
+        </p:txBody>
+      </p:sp>
+      <p:sp>
+        <p:nvSpPr>
+          <p:cNvPr id="8" name="TextBox 7"/>
+          <p:cNvSpPr txBox="1"/>
+          <p:nvPr/>
+        </p:nvSpPr>
+        <p:spPr>
+          <a:xfrm>
+            <a:off x="896112" y="2953512"/>
+            <a:ext cx="3112922" cy="822960"/>
+          </a:xfrm>
+          <a:prstGeom prst="rect">
+            <a:avLst/>
+          </a:prstGeom>
+          <a:noFill/>
+        </p:spPr>
+        <p:txBody>
+          <a:bodyPr wrap="square">
+            <a:spAutoFit/>
+          </a:bodyPr>
+          <a:lstStyle/>
+          <a:p>
+            <a:pPr algn="l">
+              <a:lnSpc>
+                <a:spcPct val="125000"/>
+              </a:lnSpc>
+              <a:spcAft>
+                <a:spcPts val="600"/>
+              </a:spcAft>
+            </a:pPr>
+            <a:r>
+              <a:rPr sz="2000" b="0">
+                <a:solidFill>
+                  <a:srgbClr val="171A14"/>
+                </a:solidFill>
+                <a:latin typeface="Segoe UI"/>
+              </a:rPr>
+              <a:t>7.81%</a:t>
+            </a:r>
+          </a:p>
+          <a:p>
+            <a:pPr algn="l">
+              <a:lnSpc>
+                <a:spcPct val="125000"/>
+              </a:lnSpc>
+              <a:spcAft>
+                <a:spcPts val="600"/>
+              </a:spcAft>
+            </a:pPr>
+            <a:r>
+              <a:rPr sz="2000" b="0">
+                <a:solidFill>
+                  <a:srgbClr val="171A14"/>
+                </a:solidFill>
+                <a:latin typeface="Segoe UI"/>
+              </a:rPr>
+              <a:t>514 zones</a:t>
+            </a:r>
+          </a:p>
+        </p:txBody>
+      </p:sp>
+      <p:sp>
+        <p:nvSpPr>
+          <p:cNvPr id="9" name="TextBox 8"/>
+          <p:cNvSpPr txBox="1"/>
+          <p:nvPr/>
+        </p:nvSpPr>
+        <p:spPr>
+          <a:xfrm>
+            <a:off x="896112" y="3922776"/>
+            <a:ext cx="3112922" cy="457200"/>
+          </a:xfrm>
+          <a:prstGeom prst="rect">
+            <a:avLst/>
+          </a:prstGeom>
+          <a:noFill/>
+        </p:spPr>
+        <p:txBody>
+          <a:bodyPr wrap="square">
+            <a:spAutoFit/>
+          </a:bodyPr>
+          <a:lstStyle/>
+          <a:p>
+            <a:pPr algn="l">
+              <a:lnSpc>
+                <a:spcPct val="125000"/>
+              </a:lnSpc>
+              <a:spcAft>
+                <a:spcPts val="600"/>
+              </a:spcAft>
+            </a:pPr>
+            <a:r>
+              <a:rPr sz="1150" b="0">
+                <a:solidFill>
+                  <a:srgbClr val="66705C"/>
+                </a:solidFill>
+                <a:latin typeface="Segoe UI"/>
+              </a:rPr>
+              <a:t>still published after the RFC forbade new use</a:t>
+            </a:r>
+          </a:p>
+        </p:txBody>
+      </p:sp>
+      <p:sp>
+        <p:nvSpPr>
+          <p:cNvPr id="10" name="Rectangle 9"/>
+          <p:cNvSpPr/>
+          <p:nvPr/>
+        </p:nvSpPr>
+        <p:spPr>
+          <a:xfrm>
+            <a:off x="4374794" y="2478024"/>
+            <a:ext cx="3442106" cy="2011680"/>
+          </a:xfrm>
+          <a:prstGeom prst="rect">
+            <a:avLst/>
+          </a:prstGeom>
+          <a:solidFill>
+            <a:srgbClr val="F6F7F3"/>
+          </a:solidFill>
+          <a:ln w="9525">
+            <a:solidFill>
+              <a:srgbClr val="D3D8CC"/>
+            </a:solidFill>
+          </a:ln>
+          <a:effectLst/>
+        </p:spPr>
+        <p:style>
+          <a:lnRef idx="1">
+            <a:schemeClr val="accent1"/>
+          </a:lnRef>
+          <a:fillRef idx="3">
+            <a:schemeClr val="accent1"/>
+          </a:fillRef>
+          <a:effectRef idx="2">
+            <a:schemeClr val="accent1"/>
+          </a:effectRef>
+          <a:fontRef idx="minor">
+            <a:schemeClr val="lt1"/>
+          </a:fontRef>
+        </p:style>
+        <p:txBody>
+          <a:bodyPr rtlCol="0" anchor="ctr"/>
+          <a:lstStyle/>
+          <a:p/>
+        </p:txBody>
+      </p:sp>
+      <p:sp>
+        <p:nvSpPr>
+          <p:cNvPr id="11" name="TextBox 10"/>
+          <p:cNvSpPr txBox="1"/>
+          <p:nvPr/>
+        </p:nvSpPr>
+        <p:spPr>
+          <a:xfrm>
+            <a:off x="4539386" y="2606040"/>
+            <a:ext cx="3112922" cy="274320"/>
+          </a:xfrm>
+          <a:prstGeom prst="rect">
+            <a:avLst/>
+          </a:prstGeom>
+          <a:noFill/>
+        </p:spPr>
+        <p:txBody>
+          <a:bodyPr wrap="square">
+            <a:spAutoFit/>
+          </a:bodyPr>
+          <a:lstStyle/>
+          <a:p>
+            <a:pPr algn="l">
+              <a:lnSpc>
+                <a:spcPct val="125000"/>
+              </a:lnSpc>
+              <a:spcAft>
+                <a:spcPts val="600"/>
+              </a:spcAft>
+            </a:pPr>
+            <a:r>
+              <a:rPr sz="1200" b="1">
+                <a:solidFill>
+                  <a:srgbClr val="00907F"/>
+                </a:solidFill>
+                <a:latin typeface="Segoe UI"/>
+              </a:rPr>
+              <a:t>RFC 9905 — SHA-1 DS DIGEST</a:t>
+            </a:r>
+          </a:p>
+        </p:txBody>
+      </p:sp>
+      <p:sp>
+        <p:nvSpPr>
+          <p:cNvPr id="12" name="TextBox 11"/>
+          <p:cNvSpPr txBox="1"/>
+          <p:nvPr/>
+        </p:nvSpPr>
+        <p:spPr>
+          <a:xfrm>
+            <a:off x="4539386" y="2953512"/>
+            <a:ext cx="3112922" cy="822960"/>
+          </a:xfrm>
+          <a:prstGeom prst="rect">
+            <a:avLst/>
+          </a:prstGeom>
+          <a:noFill/>
+        </p:spPr>
+        <p:txBody>
+          <a:bodyPr wrap="square">
+            <a:spAutoFit/>
+          </a:bodyPr>
+          <a:lstStyle/>
+          <a:p>
+            <a:pPr algn="l">
+              <a:lnSpc>
+                <a:spcPct val="125000"/>
+              </a:lnSpc>
+              <a:spcAft>
+                <a:spcPts val="600"/>
+              </a:spcAft>
+            </a:pPr>
+            <a:r>
+              <a:rPr sz="2000" b="0">
+                <a:solidFill>
+                  <a:srgbClr val="171A14"/>
+                </a:solidFill>
+                <a:latin typeface="Segoe UI"/>
+              </a:rPr>
+              <a:t>21.77%</a:t>
+            </a:r>
+          </a:p>
+          <a:p>
+            <a:pPr algn="l">
+              <a:lnSpc>
+                <a:spcPct val="125000"/>
+              </a:lnSpc>
+              <a:spcAft>
+                <a:spcPts val="600"/>
+              </a:spcAft>
+            </a:pPr>
+            <a:r>
+              <a:rPr sz="2000" b="0">
+                <a:solidFill>
+                  <a:srgbClr val="171A14"/>
+                </a:solidFill>
+                <a:latin typeface="Segoe UI"/>
+              </a:rPr>
+              <a:t>1,433 zones</a:t>
+            </a:r>
+          </a:p>
+        </p:txBody>
+      </p:sp>
+      <p:sp>
+        <p:nvSpPr>
+          <p:cNvPr id="13" name="TextBox 12"/>
+          <p:cNvSpPr txBox="1"/>
+          <p:nvPr/>
+        </p:nvSpPr>
+        <p:spPr>
+          <a:xfrm>
+            <a:off x="4539386" y="3922776"/>
+            <a:ext cx="3112922" cy="457200"/>
+          </a:xfrm>
+          <a:prstGeom prst="rect">
+            <a:avLst/>
+          </a:prstGeom>
+          <a:noFill/>
+        </p:spPr>
+        <p:txBody>
+          <a:bodyPr wrap="square">
+            <a:spAutoFit/>
+          </a:bodyPr>
+          <a:lstStyle/>
+          <a:p>
+            <a:pPr algn="l">
+              <a:lnSpc>
+                <a:spcPct val="125000"/>
+              </a:lnSpc>
+              <a:spcAft>
+                <a:spcPts val="600"/>
+              </a:spcAft>
+            </a:pPr>
+            <a:r>
+              <a:rPr sz="1150" b="0">
+                <a:solidFill>
+                  <a:srgbClr val="66705C"/>
+                </a:solidFill>
+                <a:latin typeface="Segoe UI"/>
+              </a:rPr>
+              <a:t>a different fix: replace the DS at the parent</a:t>
+            </a:r>
+          </a:p>
+        </p:txBody>
+      </p:sp>
+      <p:sp>
+        <p:nvSpPr>
+          <p:cNvPr id="14" name="Rectangle 13"/>
+          <p:cNvSpPr/>
+          <p:nvPr/>
+        </p:nvSpPr>
+        <p:spPr>
+          <a:xfrm>
+            <a:off x="8018068" y="2478024"/>
+            <a:ext cx="3442106" cy="2011680"/>
+          </a:xfrm>
+          <a:prstGeom prst="rect">
+            <a:avLst/>
+          </a:prstGeom>
+          <a:solidFill>
+            <a:srgbClr val="F6F7F3"/>
+          </a:solidFill>
+          <a:ln w="9525">
+            <a:solidFill>
+              <a:srgbClr val="D3D8CC"/>
+            </a:solidFill>
+          </a:ln>
+          <a:effectLst/>
+        </p:spPr>
+        <p:style>
+          <a:lnRef idx="1">
+            <a:schemeClr val="accent1"/>
+          </a:lnRef>
+          <a:fillRef idx="3">
+            <a:schemeClr val="accent1"/>
+          </a:fillRef>
+          <a:effectRef idx="2">
+            <a:schemeClr val="accent1"/>
+          </a:effectRef>
+          <a:fontRef idx="minor">
+            <a:schemeClr val="lt1"/>
+          </a:fontRef>
+        </p:style>
+        <p:txBody>
+          <a:bodyPr rtlCol="0" anchor="ctr"/>
+          <a:lstStyle/>
+          <a:p/>
+        </p:txBody>
+      </p:sp>
+      <p:sp>
+        <p:nvSpPr>
+          <p:cNvPr id="15" name="TextBox 14"/>
+          <p:cNvSpPr txBox="1"/>
+          <p:nvPr/>
+        </p:nvSpPr>
+        <p:spPr>
+          <a:xfrm>
+            <a:off x="8182660" y="2606040"/>
+            <a:ext cx="3112922" cy="274320"/>
+          </a:xfrm>
+          <a:prstGeom prst="rect">
+            <a:avLst/>
+          </a:prstGeom>
+          <a:noFill/>
+        </p:spPr>
+        <p:txBody>
+          <a:bodyPr wrap="square">
+            <a:spAutoFit/>
+          </a:bodyPr>
+          <a:lstStyle/>
+          <a:p>
+            <a:pPr algn="l">
+              <a:lnSpc>
+                <a:spcPct val="125000"/>
+              </a:lnSpc>
+              <a:spcAft>
+                <a:spcPts val="600"/>
+              </a:spcAft>
+            </a:pPr>
+            <a:r>
+              <a:rPr sz="1200" b="1">
+                <a:solidFill>
+                  <a:srgbClr val="00907F"/>
+                </a:solidFill>
+                <a:latin typeface="Segoe UI"/>
+              </a:rPr>
+              <a:t>RFC 9906 — ECC-GOST</a:t>
+            </a:r>
+          </a:p>
+        </p:txBody>
+      </p:sp>
+      <p:sp>
+        <p:nvSpPr>
+          <p:cNvPr id="16" name="TextBox 15"/>
+          <p:cNvSpPr txBox="1"/>
+          <p:nvPr/>
+        </p:nvSpPr>
+        <p:spPr>
+          <a:xfrm>
+            <a:off x="8182660" y="2953512"/>
+            <a:ext cx="3112922" cy="822960"/>
+          </a:xfrm>
+          <a:prstGeom prst="rect">
+            <a:avLst/>
+          </a:prstGeom>
+          <a:noFill/>
+        </p:spPr>
+        <p:txBody>
+          <a:bodyPr wrap="square">
+            <a:spAutoFit/>
+          </a:bodyPr>
+          <a:lstStyle/>
+          <a:p>
+            <a:pPr algn="l">
+              <a:lnSpc>
+                <a:spcPct val="125000"/>
+              </a:lnSpc>
+              <a:spcAft>
+                <a:spcPts val="600"/>
+              </a:spcAft>
+            </a:pPr>
+            <a:r>
+              <a:rPr sz="2000" b="0">
+                <a:solidFill>
+                  <a:srgbClr val="171A14"/>
+                </a:solidFill>
+                <a:latin typeface="Segoe UI"/>
+              </a:rPr>
+              <a:t>0</a:t>
+            </a:r>
+          </a:p>
+          <a:p>
+            <a:pPr algn="l">
+              <a:lnSpc>
+                <a:spcPct val="125000"/>
+              </a:lnSpc>
+              <a:spcAft>
+                <a:spcPts val="600"/>
+              </a:spcAft>
+            </a:pPr>
+            <a:r>
+              <a:rPr sz="2000" b="0">
+                <a:solidFill>
+                  <a:srgbClr val="171A14"/>
+                </a:solidFill>
+                <a:latin typeface="Segoe UI"/>
+              </a:rPr>
+              <a:t>zero records</a:t>
+            </a:r>
+          </a:p>
+        </p:txBody>
+      </p:sp>
+      <p:sp>
+        <p:nvSpPr>
+          <p:cNvPr id="17" name="TextBox 16"/>
+          <p:cNvSpPr txBox="1"/>
+          <p:nvPr/>
+        </p:nvSpPr>
+        <p:spPr>
+          <a:xfrm>
+            <a:off x="8182660" y="3922776"/>
+            <a:ext cx="3112922" cy="457200"/>
+          </a:xfrm>
+          <a:prstGeom prst="rect">
+            <a:avLst/>
+          </a:prstGeom>
+          <a:noFill/>
+        </p:spPr>
+        <p:txBody>
+          <a:bodyPr wrap="square">
+            <a:spAutoFit/>
+          </a:bodyPr>
+          <a:lstStyle/>
+          <a:p>
+            <a:pPr algn="l">
+              <a:lnSpc>
+                <a:spcPct val="125000"/>
+              </a:lnSpc>
+              <a:spcAft>
+                <a:spcPts val="600"/>
+              </a:spcAft>
+            </a:pPr>
+            <a:r>
+              <a:rPr sz="1150" b="0">
+                <a:solidFill>
+                  <a:srgbClr val="66705C"/>
+                </a:solidFill>
+                <a:latin typeface="Segoe UI"/>
+              </a:rPr>
+              <a:t>documented an ending rather than causing one</a:t>
+            </a:r>
+          </a:p>
+        </p:txBody>
+      </p:sp>
+      <p:sp>
+        <p:nvSpPr>
+          <p:cNvPr id="18" name="TextBox 17"/>
+          <p:cNvSpPr txBox="1"/>
+          <p:nvPr/>
+        </p:nvSpPr>
+        <p:spPr>
+          <a:xfrm>
+            <a:off x="731520" y="4946904"/>
+            <a:ext cx="10728655" cy="1280160"/>
+          </a:xfrm>
+          <a:prstGeom prst="rect">
+            <a:avLst/>
+          </a:prstGeom>
+          <a:noFill/>
+        </p:spPr>
+        <p:txBody>
+          <a:bodyPr wrap="square">
+            <a:spAutoFit/>
+          </a:bodyPr>
+          <a:lstStyle/>
+          <a:p>
+            <a:pPr algn="l">
+              <a:lnSpc>
+                <a:spcPct val="125000"/>
+              </a:lnSpc>
+              <a:spcAft>
+                <a:spcPts val="600"/>
+              </a:spcAft>
+            </a:pPr>
+            <a:r>
+              <a:rPr sz="1600" b="0">
+                <a:solidFill>
+                  <a:srgbClr val="171A14"/>
+                </a:solidFill>
+                <a:latin typeface="Segoe UI"/>
+              </a:rPr>
+              <a:t>The two halves of RFC 9905 need different remedies — replace the DS at the parent, versus reissue the child’s keys — so they are reported as two numbers, never one “SHA-1 exposure”.</a:t>
+            </a:r>
+          </a:p>
+          <a:p>
+            <a:pPr algn="l">
+              <a:lnSpc>
+                <a:spcPct val="125000"/>
+              </a:lnSpc>
+              <a:spcAft>
+                <a:spcPts val="600"/>
+              </a:spcAft>
+            </a:pPr>
+            <a:r>
+              <a:rPr sz="1600" b="0">
+                <a:solidFill>
+                  <a:srgbClr val="171A14"/>
+                </a:solidFill>
+                <a:latin typeface="Segoe UI"/>
+              </a:rPr>
+              <a:t>400 zones carry both.</a:t>
+            </a:r>
+          </a:p>
+        </p:txBody>
+      </p:sp>
+    </p:spTree>
+  </p:cSld>
+  <p:clrMapOvr>
+    <a:masterClrMapping/>
+  </p:clrMapOvr>
+</p:sld>
+</file>
+
+<file path=ppt/slides/slide14.xml><?xml version="1.0" encoding="utf-8"?>
+<p:sld xmlns:a="http://schemas.openxmlformats.org/drawingml/2006/main" xmlns:p="http://schemas.openxmlformats.org/presentationml/2006/main" xmlns:r="http://schemas.openxmlformats.org/officeDocument/2006/relationships">
+  <p:cSld>
+    <p:spTree>
+      <p:nvGrpSpPr>
+        <p:cNvPr id="1" name=""/>
+        <p:cNvGrpSpPr/>
+        <p:nvPr/>
+      </p:nvGrpSpPr>
+      <p:grpSpPr/>
+      <p:sp>
+        <p:nvSpPr>
+          <p:cNvPr id="2" name="TextBox 1"/>
+          <p:cNvSpPr txBox="1"/>
+          <p:nvPr/>
+        </p:nvSpPr>
+        <p:spPr>
+          <a:xfrm>
+            <a:off x="731520" y="502920"/>
+            <a:ext cx="10728655" cy="274320"/>
+          </a:xfrm>
+          <a:prstGeom prst="rect">
+            <a:avLst/>
+          </a:prstGeom>
+          <a:noFill/>
+        </p:spPr>
+        <p:txBody>
+          <a:bodyPr wrap="square">
+            <a:spAutoFit/>
+          </a:bodyPr>
+          <a:lstStyle/>
+          <a:p>
+            <a:pPr algn="l">
+              <a:lnSpc>
+                <a:spcPct val="125000"/>
+              </a:lnSpc>
+              <a:spcAft>
+                <a:spcPts val="600"/>
+              </a:spcAft>
+            </a:pPr>
+            <a:r>
+              <a:rPr sz="1100" b="1">
+                <a:solidFill>
+                  <a:srgbClr val="00907F"/>
+                </a:solidFill>
+                <a:latin typeface="Segoe UI"/>
+              </a:rPr>
               <a:t>LIMITS</a:t>
             </a:r>
           </a:p>
@@ -4809,7 +5817,7 @@
 </p:sld>
 </file>
 
-<file path=ppt/slides/slide13.xml><?xml version="1.0" encoding="utf-8"?>
+<file path=ppt/slides/slide15.xml><?xml version="1.0" encoding="utf-8"?>
 <p:sld xmlns:a="http://schemas.openxmlformats.org/drawingml/2006/main" xmlns:p="http://schemas.openxmlformats.org/presentationml/2006/main" xmlns:r="http://schemas.openxmlformats.org/officeDocument/2006/relationships">
   <p:cSld>
     <p:spTree>
@@ -5693,7 +6701,7 @@
                 </a:solidFill>
                 <a:latin typeface="Segoe UI"/>
               </a:rPr>
-              <a:t>A single zone published Ed25519 in 2021.</a:t>
+              <a:t>Ed25519 first appeared in 2019-01, 1.9 years after RFC 8080.</a:t>
             </a:r>
           </a:p>
         </p:txBody>
@@ -5821,7 +6829,7 @@
                 </a:solidFill>
                 <a:latin typeface="Segoe UI"/>
               </a:rPr>
-              <a:t>IT IS IN REAL USE</a:t>
+              <a:t>IT REACHED REAL USE</a:t>
             </a:r>
           </a:p>
         </p:txBody>
@@ -5863,7 +6871,7 @@
                 </a:solidFill>
                 <a:latin typeface="Segoe UI"/>
               </a:rPr>
-              <a:t>0.34% of signed delegations carry it today.</a:t>
+              <a:t>It peaked at 2.03% of signed names in 2020-06.</a:t>
             </a:r>
           </a:p>
         </p:txBody>
@@ -6033,7 +7041,7 @@
                 </a:solidFill>
                 <a:latin typeface="Segoe UI"/>
               </a:rPr>
-              <a:t>It is not. The share has been flat for two years.</a:t>
+              <a:t>It is not. It has fallen back to 0.37% since.</a:t>
             </a:r>
           </a:p>
         </p:txBody>
@@ -6117,7 +7125,7 @@
                 </a:solidFill>
                 <a:latin typeface="Segoe UI"/>
               </a:rPr>
-              <a:t>“Ed25519 was adopted after 5.6 years” and “Ed25519 was never adopted” are both defensible readings of the same record.</a:t>
+              <a:t>“Ed25519 was adopted after 1.9 years” and “Ed25519 was never adopted” are both defensible readings of the same record.</a:t>
             </a:r>
           </a:p>
           <a:p>
@@ -8142,7 +9150,7 @@
                 </a:solidFill>
                 <a:latin typeface="Segoe UI"/>
               </a:rPr>
-              <a:t>WHAT IT DOES</a:t>
+              <a:t>WORKED EXAMPLES</a:t>
             </a:r>
           </a:p>
         </p:txBody>
@@ -8184,7 +9192,7 @@
                 </a:solidFill>
                 <a:latin typeface="Segoe UI"/>
               </a:rPr>
-              <a:t>The pipeline</a:t>
+              <a:t>The same three stages, three different endings</a:t>
             </a:r>
           </a:p>
         </p:txBody>
@@ -8226,7 +9234,7 @@
                 </a:solidFill>
                 <a:latin typeface="Segoe UI"/>
               </a:rPr>
-              <a:t>Five stages, each resumable, each skippable.</a:t>
+              <a:t>All three of these “first appeared”. Only one of them is used.</a:t>
             </a:r>
           </a:p>
         </p:txBody>
@@ -8285,7 +9293,7 @@
         </p:nvGraphicFramePr>
         <p:xfrm>
           <a:off x="731520" y="2478024"/>
-          <a:ext cx="10728654" cy="3072384"/>
+          <a:ext cx="10728651" cy="1901952"/>
         </p:xfrm>
         <a:graphic>
           <a:graphicData uri="http://schemas.openxmlformats.org/drawingml/2006/table">
@@ -8294,11 +9302,15 @@
                 <a:tableStyleId>{5C22544A-7EE6-4342-B048-85BDC9FD1C3A}</a:tableStyleId>
               </a:tblPr>
               <a:tblGrid>
-                <a:gridCol w="1287438"/>
-                <a:gridCol w="5900760"/>
-                <a:gridCol w="3540456"/>
+                <a:gridCol w="2600886"/>
+                <a:gridCol w="1083702"/>
+                <a:gridCol w="1625553"/>
+                <a:gridCol w="1408813"/>
+                <a:gridCol w="1625553"/>
+                <a:gridCol w="1192072"/>
+                <a:gridCol w="1192072"/>
               </a:tblGrid>
-              <a:tr h="512064">
+              <a:tr h="475488">
                 <a:tc>
                   <a:txBody>
                     <a:bodyPr/>
@@ -8311,7 +9323,7 @@
                           </a:solidFill>
                           <a:latin typeface="Segoe UI"/>
                         </a:rPr>
-                        <a:t>Stage</a:t>
+                        <a:t>From RFC 8080</a:t>
                       </a:r>
                     </a:p>
                   </a:txBody>
@@ -8333,7 +9345,7 @@
                           </a:solidFill>
                           <a:latin typeface="Segoe UI"/>
                         </a:rPr>
-                        <a:t>What happens</a:t>
+                        <a:t>Onset</a:t>
                       </a:r>
                     </a:p>
                   </a:txBody>
@@ -8355,7 +9367,7 @@
                           </a:solidFill>
                           <a:latin typeface="Segoe UI"/>
                         </a:rPr>
-                        <a:t>Output</a:t>
+                        <a:t>1 · first seen</a:t>
                       </a:r>
                     </a:p>
                   </a:txBody>
@@ -8365,8 +9377,96 @@
                     </a:solidFill>
                   </a:tcPr>
                 </a:tc>
+                <a:tc>
+                  <a:txBody>
+                    <a:bodyPr/>
+                    <a:lstStyle/>
+                    <a:p>
+                      <a:r>
+                        <a:rPr sz="1200" b="1">
+                          <a:solidFill>
+                            <a:srgbClr val="66705C"/>
+                          </a:solidFill>
+                          <a:latin typeface="Segoe UI"/>
+                        </a:rPr>
+                        <a:t>2 · in use</a:t>
+                      </a:r>
+                    </a:p>
+                  </a:txBody>
+                  <a:tcPr anchor="ctr" marL="109728" marT="27432" marB="27432">
+                    <a:solidFill>
+                      <a:srgbClr val="F6F7F3"/>
+                    </a:solidFill>
+                  </a:tcPr>
+                </a:tc>
+                <a:tc>
+                  <a:txBody>
+                    <a:bodyPr/>
+                    <a:lstStyle/>
+                    <a:p>
+                      <a:r>
+                        <a:rPr sz="1200" b="1">
+                          <a:solidFill>
+                            <a:srgbClr val="66705C"/>
+                          </a:solidFill>
+                          <a:latin typeface="Segoe UI"/>
+                        </a:rPr>
+                        <a:t>3 · widely used</a:t>
+                      </a:r>
+                    </a:p>
+                  </a:txBody>
+                  <a:tcPr anchor="ctr" marL="109728" marT="27432" marB="27432">
+                    <a:solidFill>
+                      <a:srgbClr val="F6F7F3"/>
+                    </a:solidFill>
+                  </a:tcPr>
+                </a:tc>
+                <a:tc>
+                  <a:txBody>
+                    <a:bodyPr/>
+                    <a:lstStyle/>
+                    <a:p>
+                      <a:r>
+                        <a:rPr sz="1200" b="1">
+                          <a:solidFill>
+                            <a:srgbClr val="66705C"/>
+                          </a:solidFill>
+                          <a:latin typeface="Segoe UI"/>
+                        </a:rPr>
+                        <a:t>Peak</a:t>
+                      </a:r>
+                    </a:p>
+                  </a:txBody>
+                  <a:tcPr anchor="ctr" marL="109728" marT="27432" marB="27432">
+                    <a:solidFill>
+                      <a:srgbClr val="F6F7F3"/>
+                    </a:solidFill>
+                  </a:tcPr>
+                </a:tc>
+                <a:tc>
+                  <a:txBody>
+                    <a:bodyPr/>
+                    <a:lstStyle/>
+                    <a:p>
+                      <a:r>
+                        <a:rPr sz="1200" b="1">
+                          <a:solidFill>
+                            <a:srgbClr val="66705C"/>
+                          </a:solidFill>
+                          <a:latin typeface="Segoe UI"/>
+                        </a:rPr>
+                        <a:t>Now</a:t>
+                      </a:r>
+                    </a:p>
+                  </a:txBody>
+                  <a:tcPr anchor="ctr" marL="109728" marT="27432" marB="27432">
+                    <a:solidFill>
+                      <a:srgbClr val="F6F7F3"/>
+                    </a:solidFill>
+                  </a:tcPr>
+                </a:tc>
               </a:tr>
-              <a:tr h="512064">
+              <a:tr h="475488">
                 <a:tc>
                   <a:txBody>
                     <a:bodyPr/>
@@ -8379,7 +9479,7 @@
                           </a:solidFill>
                           <a:latin typeface="Segoe UI"/>
                         </a:rPr>
-                        <a:t>ripe</a:t>
+                        <a:t>Ed25519</a:t>
                       </a:r>
                     </a:p>
                   </a:txBody>
@@ -8401,7 +9501,7 @@
                           </a:solidFill>
                           <a:latin typeface="Segoe UI"/>
                         </a:rPr>
-                        <a:t>Fetches RIPE’s reverse-delegation archive (the only stage that touches the network)</a:t>
+                        <a:t>1.9 y</a:t>
                       </a:r>
                     </a:p>
                   </a:txBody>
@@ -8423,7 +9523,7 @@
                           </a:solidFill>
                           <a:latin typeface="Segoe UI"/>
                         </a:rPr>
-                        <a:t>the reverse corpus</a:t>
+                        <a:t>2019-01</a:t>
                       </a:r>
                     </a:p>
                   </a:txBody>
@@ -8433,8 +9533,96 @@
                     </a:solidFill>
                   </a:tcPr>
                 </a:tc>
+                <a:tc>
+                  <a:txBody>
+                    <a:bodyPr/>
+                    <a:lstStyle/>
+                    <a:p>
+                      <a:r>
+                        <a:rPr sz="1300" b="0">
+                          <a:solidFill>
+                            <a:srgbClr val="171A14"/>
+                          </a:solidFill>
+                          <a:latin typeface="Segoe UI"/>
+                        </a:rPr>
+                        <a:t>2020-04</a:t>
+                      </a:r>
+                    </a:p>
+                  </a:txBody>
+                  <a:tcPr anchor="ctr" marL="109728" marT="27432" marB="27432">
+                    <a:solidFill>
+                      <a:srgbClr val="FFFFFF"/>
+                    </a:solidFill>
+                  </a:tcPr>
+                </a:tc>
+                <a:tc>
+                  <a:txBody>
+                    <a:bodyPr/>
+                    <a:lstStyle/>
+                    <a:p>
+                      <a:r>
+                        <a:rPr sz="1300" b="0">
+                          <a:solidFill>
+                            <a:srgbClr val="171A14"/>
+                          </a:solidFill>
+                          <a:latin typeface="Segoe UI"/>
+                        </a:rPr>
+                        <a:t>never</a:t>
+                      </a:r>
+                    </a:p>
+                  </a:txBody>
+                  <a:tcPr anchor="ctr" marL="109728" marT="27432" marB="27432">
+                    <a:solidFill>
+                      <a:srgbClr val="FFFFFF"/>
+                    </a:solidFill>
+                  </a:tcPr>
+                </a:tc>
+                <a:tc>
+                  <a:txBody>
+                    <a:bodyPr/>
+                    <a:lstStyle/>
+                    <a:p>
+                      <a:r>
+                        <a:rPr sz="1300" b="0">
+                          <a:solidFill>
+                            <a:srgbClr val="171A14"/>
+                          </a:solidFill>
+                          <a:latin typeface="Segoe UI"/>
+                        </a:rPr>
+                        <a:t>2.03%</a:t>
+                      </a:r>
+                    </a:p>
+                  </a:txBody>
+                  <a:tcPr anchor="ctr" marL="109728" marT="27432" marB="27432">
+                    <a:solidFill>
+                      <a:srgbClr val="FFFFFF"/>
+                    </a:solidFill>
+                  </a:tcPr>
+                </a:tc>
+                <a:tc>
+                  <a:txBody>
+                    <a:bodyPr/>
+                    <a:lstStyle/>
+                    <a:p>
+                      <a:r>
+                        <a:rPr sz="1300" b="0">
+                          <a:solidFill>
+                            <a:srgbClr val="171A14"/>
+                          </a:solidFill>
+                          <a:latin typeface="Segoe UI"/>
+                        </a:rPr>
+                        <a:t>0.37%</a:t>
+                      </a:r>
+                    </a:p>
+                  </a:txBody>
+                  <a:tcPr anchor="ctr" marL="109728" marT="27432" marB="27432">
+                    <a:solidFill>
+                      <a:srgbClr val="FFFFFF"/>
+                    </a:solidFill>
+                  </a:tcPr>
+                </a:tc>
               </a:tr>
-              <a:tr h="512064">
+              <a:tr h="475488">
                 <a:tc>
                   <a:txBody>
                     <a:bodyPr/>
@@ -8447,7 +9635,7 @@
                           </a:solidFill>
                           <a:latin typeface="Segoe UI"/>
                         </a:rPr>
-                        <a:t>index</a:t>
+                        <a:t>Ed448</a:t>
                       </a:r>
                     </a:p>
                   </a:txBody>
@@ -8469,7 +9657,7 @@
                           </a:solidFill>
                           <a:latin typeface="Segoe UI"/>
                         </a:rPr>
-                        <a:t>Walks every cache root on the NAS, merges them into one view</a:t>
+                        <a:t>3.2 y</a:t>
                       </a:r>
                     </a:p>
                   </a:txBody>
@@ -8491,7 +9679,7 @@
                           </a:solidFill>
                           <a:latin typeface="Segoe UI"/>
                         </a:rPr>
-                        <a:t>inventory.json</a:t>
+                        <a:t>2020-05</a:t>
                       </a:r>
                     </a:p>
                   </a:txBody>
@@ -8501,8 +9689,96 @@
                     </a:solidFill>
                   </a:tcPr>
                 </a:tc>
+                <a:tc>
+                  <a:txBody>
+                    <a:bodyPr/>
+                    <a:lstStyle/>
+                    <a:p>
+                      <a:r>
+                        <a:rPr sz="1300" b="0">
+                          <a:solidFill>
+                            <a:srgbClr val="171A14"/>
+                          </a:solidFill>
+                          <a:latin typeface="Segoe UI"/>
+                        </a:rPr>
+                        <a:t>never</a:t>
+                      </a:r>
+                    </a:p>
+                  </a:txBody>
+                  <a:tcPr anchor="ctr" marL="109728" marT="27432" marB="27432">
+                    <a:solidFill>
+                      <a:srgbClr val="FFFFFF"/>
+                    </a:solidFill>
+                  </a:tcPr>
+                </a:tc>
+                <a:tc>
+                  <a:txBody>
+                    <a:bodyPr/>
+                    <a:lstStyle/>
+                    <a:p>
+                      <a:r>
+                        <a:rPr sz="1300" b="0">
+                          <a:solidFill>
+                            <a:srgbClr val="171A14"/>
+                          </a:solidFill>
+                          <a:latin typeface="Segoe UI"/>
+                        </a:rPr>
+                        <a:t>never</a:t>
+                      </a:r>
+                    </a:p>
+                  </a:txBody>
+                  <a:tcPr anchor="ctr" marL="109728" marT="27432" marB="27432">
+                    <a:solidFill>
+                      <a:srgbClr val="FFFFFF"/>
+                    </a:solidFill>
+                  </a:tcPr>
+                </a:tc>
+                <a:tc>
+                  <a:txBody>
+                    <a:bodyPr/>
+                    <a:lstStyle/>
+                    <a:p>
+                      <a:r>
+                        <a:rPr sz="1300" b="0">
+                          <a:solidFill>
+                            <a:srgbClr val="171A14"/>
+                          </a:solidFill>
+                          <a:latin typeface="Segoe UI"/>
+                        </a:rPr>
+                        <a:t>0.03%</a:t>
+                      </a:r>
+                    </a:p>
+                  </a:txBody>
+                  <a:tcPr anchor="ctr" marL="109728" marT="27432" marB="27432">
+                    <a:solidFill>
+                      <a:srgbClr val="FFFFFF"/>
+                    </a:solidFill>
+                  </a:tcPr>
+                </a:tc>
+                <a:tc>
+                  <a:txBody>
+                    <a:bodyPr/>
+                    <a:lstStyle/>
+                    <a:p>
+                      <a:r>
+                        <a:rPr sz="1300" b="0">
+                          <a:solidFill>
+                            <a:srgbClr val="171A14"/>
+                          </a:solidFill>
+                          <a:latin typeface="Segoe UI"/>
+                        </a:rPr>
+                        <a:t>0.03%</a:t>
+                      </a:r>
+                    </a:p>
+                  </a:txBody>
+                  <a:tcPr anchor="ctr" marL="109728" marT="27432" marB="27432">
+                    <a:solidFill>
+                      <a:srgbClr val="FFFFFF"/>
+                    </a:solidFill>
+                  </a:tcPr>
+                </a:tc>
               </a:tr>
-              <a:tr h="512064">
+              <a:tr h="475488">
                 <a:tc>
                   <a:txBody>
                     <a:bodyPr/>
@@ -8515,7 +9791,7 @@
                           </a:solidFill>
                           <a:latin typeface="Segoe UI"/>
                         </a:rPr>
-                        <a:t>extract</a:t>
+                        <a:t>ECDSA P-256 (RFC 6605)</a:t>
                       </a:r>
                     </a:p>
                   </a:txBody>
@@ -8537,7 +9813,7 @@
                           </a:solidFill>
                           <a:latin typeface="Segoe UI"/>
                         </a:rPr>
-                        <a:t>One pass per source-day → tidy counts, one checkpoint each</a:t>
+                        <a:t>3.6 y</a:t>
                       </a:r>
                     </a:p>
                   </a:txBody>
@@ -8559,7 +9835,7 @@
                           </a:solidFill>
                           <a:latin typeface="Segoe UI"/>
                         </a:rPr>
-                        <a:t>timeline_monthly.csv</a:t>
+                        <a:t>2015-11</a:t>
                       </a:r>
                     </a:p>
                   </a:txBody>
@@ -8569,8 +9845,6 @@
                     </a:solidFill>
                   </a:tcPr>
                 </a:tc>
-              </a:tr>
-              <a:tr h="512064">
                 <a:tc>
                   <a:txBody>
                     <a:bodyPr/>
@@ -8583,7 +9857,7 @@
                           </a:solidFill>
                           <a:latin typeface="Segoe UI"/>
                         </a:rPr>
-                        <a:t>analyse</a:t>
+                        <a:t>2016-10</a:t>
                       </a:r>
                     </a:p>
                   </a:txBody>
@@ -8605,7 +9879,7 @@
                           </a:solidFill>
                           <a:latin typeface="Segoe UI"/>
                         </a:rPr>
-                        <a:t>Bottom-up over observable changes, top-down over categories</a:t>
+                        <a:t>2019-02</a:t>
                       </a:r>
                     </a:p>
                   </a:txBody>
@@ -8627,7 +9901,7 @@
                           </a:solidFill>
                           <a:latin typeface="Segoe UI"/>
                         </a:rPr>
-                        <a:t>bottom_up.json · top_down.json</a:t>
+                        <a:t>76.2%</a:t>
                       </a:r>
                     </a:p>
                   </a:txBody>
@@ -8637,8 +9911,6 @@
                     </a:solidFill>
                   </a:tcPr>
                 </a:tc>
-              </a:tr>
-              <a:tr h="512064">
                 <a:tc>
                   <a:txBody>
                     <a:bodyPr/>
@@ -8651,51 +9923,7 @@
                           </a:solidFill>
                           <a:latin typeface="Segoe UI"/>
                         </a:rPr>
-                        <a:t>report</a:t>
-                      </a:r>
-                    </a:p>
-                  </a:txBody>
-                  <a:tcPr anchor="ctr" marL="109728" marT="27432" marB="27432">
-                    <a:solidFill>
-                      <a:srgbClr val="FFFFFF"/>
-                    </a:solidFill>
-                  </a:tcPr>
-                </a:tc>
-                <a:tc>
-                  <a:txBody>
-                    <a:bodyPr/>
-                    <a:lstStyle/>
-                    <a:p>
-                      <a:r>
-                        <a:rPr sz="1300" b="0">
-                          <a:solidFill>
-                            <a:srgbClr val="171A14"/>
-                          </a:solidFill>
-                          <a:latin typeface="Segoe UI"/>
-                        </a:rPr>
-                        <a:t>Digest for humans, compact bundle for the next conversation</a:t>
-                      </a:r>
-                    </a:p>
-                  </a:txBody>
-                  <a:tcPr anchor="ctr" marL="109728" marT="27432" marB="27432">
-                    <a:solidFill>
-                      <a:srgbClr val="FFFFFF"/>
-                    </a:solidFill>
-                  </a:tcPr>
-                </a:tc>
-                <a:tc>
-                  <a:txBody>
-                    <a:bodyPr/>
-                    <a:lstStyle/>
-                    <a:p>
-                      <a:r>
-                        <a:rPr sz="1300" b="0">
-                          <a:solidFill>
-                            <a:srgbClr val="171A14"/>
-                          </a:solidFill>
-                          <a:latin typeface="Segoe UI"/>
-                        </a:rPr>
-                        <a:t>summary.md · analysis_bundle.json</a:t>
+                        <a:t>71.1%</a:t>
                       </a:r>
                     </a:p>
                   </a:txBody>
@@ -8718,8 +9946,8 @@
         </p:nvSpPr>
         <p:spPr>
           <a:xfrm>
-            <a:off x="731520" y="5733288"/>
-            <a:ext cx="10728655" cy="1097280"/>
+            <a:off x="731520" y="4617720"/>
+            <a:ext cx="5212080" cy="310896"/>
           </a:xfrm>
           <a:prstGeom prst="rect">
             <a:avLst/>
@@ -8741,13 +9969,291 @@
               </a:spcAft>
             </a:pPr>
             <a:r>
-              <a:rPr sz="1500" b="0">
-                <a:solidFill>
-                  <a:srgbClr val="171A14"/>
+              <a:rPr sz="1500" b="1">
+                <a:solidFill>
+                  <a:srgbClr val="00907F"/>
                 </a:solidFill>
                 <a:latin typeface="Segoe UI"/>
               </a:rPr>
-              <a:t>Both analysis directions are configuration, not code — data/analysis_config.json holds the observable changes, the implementation groups, the categories and the thresholds. Adding a mechanism to measure means adding a row.</a:t>
+              <a:t>Why the stages are separate</a:t>
+            </a:r>
+          </a:p>
+        </p:txBody>
+      </p:sp>
+      <p:sp>
+        <p:nvSpPr>
+          <p:cNvPr id="8" name="TextBox 7"/>
+          <p:cNvSpPr txBox="1"/>
+          <p:nvPr/>
+        </p:nvSpPr>
+        <p:spPr>
+          <a:xfrm>
+            <a:off x="731520" y="4965192"/>
+            <a:ext cx="5212080" cy="1737360"/>
+          </a:xfrm>
+          <a:prstGeom prst="rect">
+            <a:avLst/>
+          </a:prstGeom>
+          <a:noFill/>
+        </p:spPr>
+        <p:txBody>
+          <a:bodyPr wrap="square">
+            <a:spAutoFit/>
+          </a:bodyPr>
+          <a:lstStyle/>
+          <a:p>
+            <a:pPr algn="l">
+              <a:lnSpc>
+                <a:spcPct val="125000"/>
+              </a:lnSpc>
+              <a:spcAft>
+                <a:spcPts val="600"/>
+              </a:spcAft>
+            </a:pPr>
+            <a:r>
+              <a:rPr sz="1350" b="0">
+                <a:solidFill>
+                  <a:srgbClr val="171A14"/>
+                </a:solidFill>
+                <a:latin typeface="Segoe UI"/>
+              </a:rPr>
+              <a:t>Ed25519 and Ed448 are defined by the SAME RFC, published the same day, in the same cryptographic family.</a:t>
+            </a:r>
+          </a:p>
+          <a:p>
+            <a:pPr algn="l">
+              <a:lnSpc>
+                <a:spcPct val="125000"/>
+              </a:lnSpc>
+              <a:spcAft>
+                <a:spcPts val="600"/>
+              </a:spcAft>
+            </a:pPr>
+            <a:r>
+              <a:rPr sz="1350" b="0">
+                <a:solidFill>
+                  <a:srgbClr val="171A14"/>
+                </a:solidFill>
+                <a:latin typeface="Segoe UI"/>
+              </a:rPr>
+              <a:t/>
+            </a:r>
+          </a:p>
+          <a:p>
+            <a:pPr algn="l">
+              <a:lnSpc>
+                <a:spcPct val="125000"/>
+              </a:lnSpc>
+              <a:spcAft>
+                <a:spcPts val="600"/>
+              </a:spcAft>
+            </a:pPr>
+            <a:r>
+              <a:rPr sz="1350" b="0">
+                <a:solidFill>
+                  <a:srgbClr val="171A14"/>
+                </a:solidFill>
+                <a:latin typeface="Segoe UI"/>
+              </a:rPr>
+              <a:t>Ed25519 appeared after 1.9 years, reached real use, peaked at 2.03% and has fallen back to 0.37%. Ed448 took 3.2 years to appear and has never been used by more than a handful of zones.</a:t>
+            </a:r>
+          </a:p>
+          <a:p>
+            <a:pPr algn="l">
+              <a:lnSpc>
+                <a:spcPct val="125000"/>
+              </a:lnSpc>
+              <a:spcAft>
+                <a:spcPts val="600"/>
+              </a:spcAft>
+            </a:pPr>
+            <a:r>
+              <a:rPr sz="1350" b="0">
+                <a:solidFill>
+                  <a:srgbClr val="171A14"/>
+                </a:solidFill>
+                <a:latin typeface="Segoe UI"/>
+              </a:rPr>
+              <a:t/>
+            </a:r>
+          </a:p>
+          <a:p>
+            <a:pPr algn="l">
+              <a:lnSpc>
+                <a:spcPct val="125000"/>
+              </a:lnSpc>
+              <a:spcAft>
+                <a:spcPts val="600"/>
+              </a:spcAft>
+            </a:pPr>
+            <a:r>
+              <a:rPr sz="1350" b="0">
+                <a:solidFill>
+                  <a:srgbClr val="171A14"/>
+                </a:solidFill>
+                <a:latin typeface="Segoe UI"/>
+              </a:rPr>
+              <a:t>One date per RFC would have averaged these into a single number for “RFC 8080” and hidden both stories. This is why the unit of measurement is the observable change, not the document.</a:t>
+            </a:r>
+          </a:p>
+        </p:txBody>
+      </p:sp>
+      <p:sp>
+        <p:nvSpPr>
+          <p:cNvPr id="9" name="TextBox 8"/>
+          <p:cNvSpPr txBox="1"/>
+          <p:nvPr/>
+        </p:nvSpPr>
+        <p:spPr>
+          <a:xfrm>
+            <a:off x="6492240" y="4617720"/>
+            <a:ext cx="4937760" cy="310896"/>
+          </a:xfrm>
+          <a:prstGeom prst="rect">
+            <a:avLst/>
+          </a:prstGeom>
+          <a:noFill/>
+        </p:spPr>
+        <p:txBody>
+          <a:bodyPr wrap="square">
+            <a:spAutoFit/>
+          </a:bodyPr>
+          <a:lstStyle/>
+          <a:p>
+            <a:pPr algn="l">
+              <a:lnSpc>
+                <a:spcPct val="125000"/>
+              </a:lnSpc>
+              <a:spcAft>
+                <a:spcPts val="600"/>
+              </a:spcAft>
+            </a:pPr>
+            <a:r>
+              <a:rPr sz="1500" b="1">
+                <a:solidFill>
+                  <a:srgbClr val="00907F"/>
+                </a:solidFill>
+                <a:latin typeface="Segoe UI"/>
+              </a:rPr>
+              <a:t>Why these thresholds</a:t>
+            </a:r>
+          </a:p>
+        </p:txBody>
+      </p:sp>
+      <p:sp>
+        <p:nvSpPr>
+          <p:cNvPr id="10" name="TextBox 9"/>
+          <p:cNvSpPr txBox="1"/>
+          <p:nvPr/>
+        </p:nvSpPr>
+        <p:spPr>
+          <a:xfrm>
+            <a:off x="6492240" y="4965192"/>
+            <a:ext cx="4937760" cy="1737360"/>
+          </a:xfrm>
+          <a:prstGeom prst="rect">
+            <a:avLst/>
+          </a:prstGeom>
+          <a:noFill/>
+        </p:spPr>
+        <p:txBody>
+          <a:bodyPr wrap="square">
+            <a:spAutoFit/>
+          </a:bodyPr>
+          <a:lstStyle/>
+          <a:p>
+            <a:pPr algn="l">
+              <a:lnSpc>
+                <a:spcPct val="125000"/>
+              </a:lnSpc>
+              <a:spcAft>
+                <a:spcPts val="600"/>
+              </a:spcAft>
+            </a:pPr>
+            <a:r>
+              <a:rPr sz="1350" b="0">
+                <a:solidFill>
+                  <a:srgbClr val="171A14"/>
+                </a:solidFill>
+                <a:latin typeface="Segoe UI"/>
+              </a:rPr>
+              <a:t>Swept, not picked. The number of qualifying algorithms is flat across 0.5–3% and again across 4–25%, so any value mid-plateau gives identical results. 4% or 30% would sit on a cliff.</a:t>
+            </a:r>
+          </a:p>
+          <a:p>
+            <a:pPr algn="l">
+              <a:lnSpc>
+                <a:spcPct val="125000"/>
+              </a:lnSpc>
+              <a:spcAft>
+                <a:spcPts val="600"/>
+              </a:spcAft>
+            </a:pPr>
+            <a:r>
+              <a:rPr sz="1350" b="0">
+                <a:solidFill>
+                  <a:srgbClr val="171A14"/>
+                </a:solidFill>
+                <a:latin typeface="Segoe UI"/>
+              </a:rPr>
+              <a:t/>
+            </a:r>
+          </a:p>
+          <a:p>
+            <a:pPr algn="l">
+              <a:lnSpc>
+                <a:spcPct val="125000"/>
+              </a:lnSpc>
+              <a:spcAft>
+                <a:spcPts val="600"/>
+              </a:spcAft>
+            </a:pPr>
+            <a:r>
+              <a:rPr sz="1350" b="0">
+                <a:solidFill>
+                  <a:srgbClr val="171A14"/>
+                </a:solidFill>
+                <a:latin typeface="Segoe UI"/>
+              </a:rPr>
+              <a:t>The ≥10-zone guard exists because the panel grew 201×. Without it, RSA/SHA-256 and RSASHA1-NSEC3 both “reach 1%” in 2011-05 on a SINGLE zone — 1% of a 32-zone panel.</a:t>
+            </a:r>
+          </a:p>
+          <a:p>
+            <a:pPr algn="l">
+              <a:lnSpc>
+                <a:spcPct val="125000"/>
+              </a:lnSpc>
+              <a:spcAft>
+                <a:spcPts val="600"/>
+              </a:spcAft>
+            </a:pPr>
+            <a:r>
+              <a:rPr sz="1350" b="0">
+                <a:solidFill>
+                  <a:srgbClr val="171A14"/>
+                </a:solidFill>
+                <a:latin typeface="Segoe UI"/>
+              </a:rPr>
+              <a:t/>
+            </a:r>
+          </a:p>
+          <a:p>
+            <a:pPr algn="l">
+              <a:lnSpc>
+                <a:spcPct val="125000"/>
+              </a:lnSpc>
+              <a:spcAft>
+                <a:spcPts val="600"/>
+              </a:spcAft>
+            </a:pPr>
+            <a:r>
+              <a:rPr sz="1350" b="0">
+                <a:solidFill>
+                  <a:srgbClr val="171A14"/>
+                </a:solidFill>
+                <a:latin typeface="Segoe UI"/>
+              </a:rPr>
+              <a:t>A ≥25 guard over-corrects, pushing RSASHA1-NSEC3 from 2.0y to 7.8y purely because it had few contemporaries.</a:t>
             </a:r>
           </a:p>
         </p:txBody>
@@ -8807,7 +10313,7 @@
                 </a:solidFill>
                 <a:latin typeface="Segoe UI"/>
               </a:rPr>
-              <a:t>HOW IT WORKS</a:t>
+              <a:t>WHAT IT DOES</a:t>
             </a:r>
           </a:p>
         </p:txBody>
@@ -8849,20 +10355,62 @@
                 </a:solidFill>
                 <a:latin typeface="Segoe UI"/>
               </a:rPr>
-              <a:t>Three design decisions that protect the numbers</a:t>
-            </a:r>
-          </a:p>
-        </p:txBody>
-      </p:sp>
-      <p:sp>
-        <p:nvSpPr>
-          <p:cNvPr id="4" name="Rectangle 3"/>
+              <a:t>The pipeline</a:t>
+            </a:r>
+          </a:p>
+        </p:txBody>
+      </p:sp>
+      <p:sp>
+        <p:nvSpPr>
+          <p:cNvPr id="4" name="TextBox 3"/>
+          <p:cNvSpPr txBox="1"/>
+          <p:nvPr/>
+        </p:nvSpPr>
+        <p:spPr>
+          <a:xfrm>
+            <a:off x="731520" y="1600200"/>
+            <a:ext cx="10728655" cy="457200"/>
+          </a:xfrm>
+          <a:prstGeom prst="rect">
+            <a:avLst/>
+          </a:prstGeom>
+          <a:noFill/>
+        </p:spPr>
+        <p:txBody>
+          <a:bodyPr wrap="square">
+            <a:spAutoFit/>
+          </a:bodyPr>
+          <a:lstStyle/>
+          <a:p>
+            <a:pPr algn="l">
+              <a:lnSpc>
+                <a:spcPct val="125000"/>
+              </a:lnSpc>
+              <a:spcAft>
+                <a:spcPts val="600"/>
+              </a:spcAft>
+            </a:pPr>
+            <a:r>
+              <a:rPr sz="1500" b="0">
+                <a:solidFill>
+                  <a:srgbClr val="66705C"/>
+                </a:solidFill>
+                <a:latin typeface="Segoe UI"/>
+              </a:rPr>
+              <a:t>Five stages, each resumable, each skippable.</a:t>
+            </a:r>
+          </a:p>
+        </p:txBody>
+      </p:sp>
+      <p:sp>
+        <p:nvSpPr>
+          <p:cNvPr id="5" name="Rectangle 4"/>
           <p:cNvSpPr/>
           <p:nvPr/>
         </p:nvSpPr>
         <p:spPr>
           <a:xfrm>
-            <a:off x="731520" y="1600200"/>
+            <a:off x="731520" y="2167128"/>
             <a:ext cx="10728655" cy="9525"/>
           </a:xfrm>
           <a:prstGeom prst="rect">
@@ -8898,60 +10446,451 @@
           </a:p>
         </p:txBody>
       </p:sp>
-      <p:sp>
-        <p:nvSpPr>
-          <p:cNvPr id="5" name="Rectangle 4"/>
-          <p:cNvSpPr/>
-          <p:nvPr/>
-        </p:nvSpPr>
-        <p:spPr>
-          <a:xfrm>
-            <a:off x="731520" y="1911096"/>
-            <a:ext cx="3442106" cy="3017520"/>
-          </a:xfrm>
-          <a:prstGeom prst="rect">
-            <a:avLst/>
-          </a:prstGeom>
-          <a:solidFill>
-            <a:srgbClr val="F6F7F3"/>
-          </a:solidFill>
-          <a:ln w="9525">
-            <a:solidFill>
-              <a:srgbClr val="D3D8CC"/>
-            </a:solidFill>
-          </a:ln>
-          <a:effectLst/>
-        </p:spPr>
-        <p:style>
-          <a:lnRef idx="1">
-            <a:schemeClr val="accent1"/>
-          </a:lnRef>
-          <a:fillRef idx="3">
-            <a:schemeClr val="accent1"/>
-          </a:fillRef>
-          <a:effectRef idx="2">
-            <a:schemeClr val="accent1"/>
-          </a:effectRef>
-          <a:fontRef idx="minor">
-            <a:schemeClr val="lt1"/>
-          </a:fontRef>
-        </p:style>
-        <p:txBody>
-          <a:bodyPr rtlCol="0" anchor="ctr"/>
-          <a:lstStyle/>
-          <a:p/>
-        </p:txBody>
-      </p:sp>
-      <p:sp>
-        <p:nvSpPr>
-          <p:cNvPr id="6" name="TextBox 5"/>
+      <p:graphicFrame>
+        <p:nvGraphicFramePr>
+          <p:cNvPr id="6" name="Table 5"/>
+          <p:cNvGraphicFramePr>
+            <a:graphicFrameLocks noGrp="1"/>
+          </p:cNvGraphicFramePr>
+          <p:nvPr/>
+        </p:nvGraphicFramePr>
+        <p:xfrm>
+          <a:off x="731520" y="2478024"/>
+          <a:ext cx="10728654" cy="3072384"/>
+        </p:xfrm>
+        <a:graphic>
+          <a:graphicData uri="http://schemas.openxmlformats.org/drawingml/2006/table">
+            <a:tbl>
+              <a:tblPr firstRow="1" bandRow="1">
+                <a:tableStyleId>{5C22544A-7EE6-4342-B048-85BDC9FD1C3A}</a:tableStyleId>
+              </a:tblPr>
+              <a:tblGrid>
+                <a:gridCol w="1287438"/>
+                <a:gridCol w="5900760"/>
+                <a:gridCol w="3540456"/>
+              </a:tblGrid>
+              <a:tr h="512064">
+                <a:tc>
+                  <a:txBody>
+                    <a:bodyPr/>
+                    <a:lstStyle/>
+                    <a:p>
+                      <a:r>
+                        <a:rPr sz="1200" b="1">
+                          <a:solidFill>
+                            <a:srgbClr val="66705C"/>
+                          </a:solidFill>
+                          <a:latin typeface="Segoe UI"/>
+                        </a:rPr>
+                        <a:t>Stage</a:t>
+                      </a:r>
+                    </a:p>
+                  </a:txBody>
+                  <a:tcPr anchor="ctr" marL="109728" marT="27432" marB="27432">
+                    <a:solidFill>
+                      <a:srgbClr val="F6F7F3"/>
+                    </a:solidFill>
+                  </a:tcPr>
+                </a:tc>
+                <a:tc>
+                  <a:txBody>
+                    <a:bodyPr/>
+                    <a:lstStyle/>
+                    <a:p>
+                      <a:r>
+                        <a:rPr sz="1200" b="1">
+                          <a:solidFill>
+                            <a:srgbClr val="66705C"/>
+                          </a:solidFill>
+                          <a:latin typeface="Segoe UI"/>
+                        </a:rPr>
+                        <a:t>What happens</a:t>
+                      </a:r>
+                    </a:p>
+                  </a:txBody>
+                  <a:tcPr anchor="ctr" marL="109728" marT="27432" marB="27432">
+                    <a:solidFill>
+                      <a:srgbClr val="F6F7F3"/>
+                    </a:solidFill>
+                  </a:tcPr>
+                </a:tc>
+                <a:tc>
+                  <a:txBody>
+                    <a:bodyPr/>
+                    <a:lstStyle/>
+                    <a:p>
+                      <a:r>
+                        <a:rPr sz="1200" b="1">
+                          <a:solidFill>
+                            <a:srgbClr val="66705C"/>
+                          </a:solidFill>
+                          <a:latin typeface="Segoe UI"/>
+                        </a:rPr>
+                        <a:t>Output</a:t>
+                      </a:r>
+                    </a:p>
+                  </a:txBody>
+                  <a:tcPr anchor="ctr" marL="109728" marT="27432" marB="27432">
+                    <a:solidFill>
+                      <a:srgbClr val="F6F7F3"/>
+                    </a:solidFill>
+                  </a:tcPr>
+                </a:tc>
+              </a:tr>
+              <a:tr h="512064">
+                <a:tc>
+                  <a:txBody>
+                    <a:bodyPr/>
+                    <a:lstStyle/>
+                    <a:p>
+                      <a:r>
+                        <a:rPr sz="1300" b="0">
+                          <a:solidFill>
+                            <a:srgbClr val="171A14"/>
+                          </a:solidFill>
+                          <a:latin typeface="Segoe UI"/>
+                        </a:rPr>
+                        <a:t>ripe</a:t>
+                      </a:r>
+                    </a:p>
+                  </a:txBody>
+                  <a:tcPr anchor="ctr" marL="109728" marT="27432" marB="27432">
+                    <a:solidFill>
+                      <a:srgbClr val="FFFFFF"/>
+                    </a:solidFill>
+                  </a:tcPr>
+                </a:tc>
+                <a:tc>
+                  <a:txBody>
+                    <a:bodyPr/>
+                    <a:lstStyle/>
+                    <a:p>
+                      <a:r>
+                        <a:rPr sz="1300" b="0">
+                          <a:solidFill>
+                            <a:srgbClr val="171A14"/>
+                          </a:solidFill>
+                          <a:latin typeface="Segoe UI"/>
+                        </a:rPr>
+                        <a:t>Fetches RIPE’s reverse-delegation archive (the only stage that touches the network)</a:t>
+                      </a:r>
+                    </a:p>
+                  </a:txBody>
+                  <a:tcPr anchor="ctr" marL="109728" marT="27432" marB="27432">
+                    <a:solidFill>
+                      <a:srgbClr val="FFFFFF"/>
+                    </a:solidFill>
+                  </a:tcPr>
+                </a:tc>
+                <a:tc>
+                  <a:txBody>
+                    <a:bodyPr/>
+                    <a:lstStyle/>
+                    <a:p>
+                      <a:r>
+                        <a:rPr sz="1300" b="0">
+                          <a:solidFill>
+                            <a:srgbClr val="171A14"/>
+                          </a:solidFill>
+                          <a:latin typeface="Segoe UI"/>
+                        </a:rPr>
+                        <a:t>the reverse corpus</a:t>
+                      </a:r>
+                    </a:p>
+                  </a:txBody>
+                  <a:tcPr anchor="ctr" marL="109728" marT="27432" marB="27432">
+                    <a:solidFill>
+                      <a:srgbClr val="FFFFFF"/>
+                    </a:solidFill>
+                  </a:tcPr>
+                </a:tc>
+              </a:tr>
+              <a:tr h="512064">
+                <a:tc>
+                  <a:txBody>
+                    <a:bodyPr/>
+                    <a:lstStyle/>
+                    <a:p>
+                      <a:r>
+                        <a:rPr sz="1300" b="0">
+                          <a:solidFill>
+                            <a:srgbClr val="171A14"/>
+                          </a:solidFill>
+                          <a:latin typeface="Segoe UI"/>
+                        </a:rPr>
+                        <a:t>index</a:t>
+                      </a:r>
+                    </a:p>
+                  </a:txBody>
+                  <a:tcPr anchor="ctr" marL="109728" marT="27432" marB="27432">
+                    <a:solidFill>
+                      <a:srgbClr val="FFFFFF"/>
+                    </a:solidFill>
+                  </a:tcPr>
+                </a:tc>
+                <a:tc>
+                  <a:txBody>
+                    <a:bodyPr/>
+                    <a:lstStyle/>
+                    <a:p>
+                      <a:r>
+                        <a:rPr sz="1300" b="0">
+                          <a:solidFill>
+                            <a:srgbClr val="171A14"/>
+                          </a:solidFill>
+                          <a:latin typeface="Segoe UI"/>
+                        </a:rPr>
+                        <a:t>Walks every cache root on the NAS, merges them into one view</a:t>
+                      </a:r>
+                    </a:p>
+                  </a:txBody>
+                  <a:tcPr anchor="ctr" marL="109728" marT="27432" marB="27432">
+                    <a:solidFill>
+                      <a:srgbClr val="FFFFFF"/>
+                    </a:solidFill>
+                  </a:tcPr>
+                </a:tc>
+                <a:tc>
+                  <a:txBody>
+                    <a:bodyPr/>
+                    <a:lstStyle/>
+                    <a:p>
+                      <a:r>
+                        <a:rPr sz="1300" b="0">
+                          <a:solidFill>
+                            <a:srgbClr val="171A14"/>
+                          </a:solidFill>
+                          <a:latin typeface="Segoe UI"/>
+                        </a:rPr>
+                        <a:t>inventory.json</a:t>
+                      </a:r>
+                    </a:p>
+                  </a:txBody>
+                  <a:tcPr anchor="ctr" marL="109728" marT="27432" marB="27432">
+                    <a:solidFill>
+                      <a:srgbClr val="FFFFFF"/>
+                    </a:solidFill>
+                  </a:tcPr>
+                </a:tc>
+              </a:tr>
+              <a:tr h="512064">
+                <a:tc>
+                  <a:txBody>
+                    <a:bodyPr/>
+                    <a:lstStyle/>
+                    <a:p>
+                      <a:r>
+                        <a:rPr sz="1300" b="0">
+                          <a:solidFill>
+                            <a:srgbClr val="171A14"/>
+                          </a:solidFill>
+                          <a:latin typeface="Segoe UI"/>
+                        </a:rPr>
+                        <a:t>extract</a:t>
+                      </a:r>
+                    </a:p>
+                  </a:txBody>
+                  <a:tcPr anchor="ctr" marL="109728" marT="27432" marB="27432">
+                    <a:solidFill>
+                      <a:srgbClr val="FFFFFF"/>
+                    </a:solidFill>
+                  </a:tcPr>
+                </a:tc>
+                <a:tc>
+                  <a:txBody>
+                    <a:bodyPr/>
+                    <a:lstStyle/>
+                    <a:p>
+                      <a:r>
+                        <a:rPr sz="1300" b="0">
+                          <a:solidFill>
+                            <a:srgbClr val="171A14"/>
+                          </a:solidFill>
+                          <a:latin typeface="Segoe UI"/>
+                        </a:rPr>
+                        <a:t>One pass per source-day → tidy counts, one checkpoint each</a:t>
+                      </a:r>
+                    </a:p>
+                  </a:txBody>
+                  <a:tcPr anchor="ctr" marL="109728" marT="27432" marB="27432">
+                    <a:solidFill>
+                      <a:srgbClr val="FFFFFF"/>
+                    </a:solidFill>
+                  </a:tcPr>
+                </a:tc>
+                <a:tc>
+                  <a:txBody>
+                    <a:bodyPr/>
+                    <a:lstStyle/>
+                    <a:p>
+                      <a:r>
+                        <a:rPr sz="1300" b="0">
+                          <a:solidFill>
+                            <a:srgbClr val="171A14"/>
+                          </a:solidFill>
+                          <a:latin typeface="Segoe UI"/>
+                        </a:rPr>
+                        <a:t>timeline_monthly.csv</a:t>
+                      </a:r>
+                    </a:p>
+                  </a:txBody>
+                  <a:tcPr anchor="ctr" marL="109728" marT="27432" marB="27432">
+                    <a:solidFill>
+                      <a:srgbClr val="FFFFFF"/>
+                    </a:solidFill>
+                  </a:tcPr>
+                </a:tc>
+              </a:tr>
+              <a:tr h="512064">
+                <a:tc>
+                  <a:txBody>
+                    <a:bodyPr/>
+                    <a:lstStyle/>
+                    <a:p>
+                      <a:r>
+                        <a:rPr sz="1300" b="0">
+                          <a:solidFill>
+                            <a:srgbClr val="171A14"/>
+                          </a:solidFill>
+                          <a:latin typeface="Segoe UI"/>
+                        </a:rPr>
+                        <a:t>analyse</a:t>
+                      </a:r>
+                    </a:p>
+                  </a:txBody>
+                  <a:tcPr anchor="ctr" marL="109728" marT="27432" marB="27432">
+                    <a:solidFill>
+                      <a:srgbClr val="FFFFFF"/>
+                    </a:solidFill>
+                  </a:tcPr>
+                </a:tc>
+                <a:tc>
+                  <a:txBody>
+                    <a:bodyPr/>
+                    <a:lstStyle/>
+                    <a:p>
+                      <a:r>
+                        <a:rPr sz="1300" b="0">
+                          <a:solidFill>
+                            <a:srgbClr val="171A14"/>
+                          </a:solidFill>
+                          <a:latin typeface="Segoe UI"/>
+                        </a:rPr>
+                        <a:t>Bottom-up over observable changes, top-down over categories</a:t>
+                      </a:r>
+                    </a:p>
+                  </a:txBody>
+                  <a:tcPr anchor="ctr" marL="109728" marT="27432" marB="27432">
+                    <a:solidFill>
+                      <a:srgbClr val="FFFFFF"/>
+                    </a:solidFill>
+                  </a:tcPr>
+                </a:tc>
+                <a:tc>
+                  <a:txBody>
+                    <a:bodyPr/>
+                    <a:lstStyle/>
+                    <a:p>
+                      <a:r>
+                        <a:rPr sz="1300" b="0">
+                          <a:solidFill>
+                            <a:srgbClr val="171A14"/>
+                          </a:solidFill>
+                          <a:latin typeface="Segoe UI"/>
+                        </a:rPr>
+                        <a:t>bottom_up.json · top_down.json</a:t>
+                      </a:r>
+                    </a:p>
+                  </a:txBody>
+                  <a:tcPr anchor="ctr" marL="109728" marT="27432" marB="27432">
+                    <a:solidFill>
+                      <a:srgbClr val="FFFFFF"/>
+                    </a:solidFill>
+                  </a:tcPr>
+                </a:tc>
+              </a:tr>
+              <a:tr h="512064">
+                <a:tc>
+                  <a:txBody>
+                    <a:bodyPr/>
+                    <a:lstStyle/>
+                    <a:p>
+                      <a:r>
+                        <a:rPr sz="1300" b="0">
+                          <a:solidFill>
+                            <a:srgbClr val="171A14"/>
+                          </a:solidFill>
+                          <a:latin typeface="Segoe UI"/>
+                        </a:rPr>
+                        <a:t>report</a:t>
+                      </a:r>
+                    </a:p>
+                  </a:txBody>
+                  <a:tcPr anchor="ctr" marL="109728" marT="27432" marB="27432">
+                    <a:solidFill>
+                      <a:srgbClr val="FFFFFF"/>
+                    </a:solidFill>
+                  </a:tcPr>
+                </a:tc>
+                <a:tc>
+                  <a:txBody>
+                    <a:bodyPr/>
+                    <a:lstStyle/>
+                    <a:p>
+                      <a:r>
+                        <a:rPr sz="1300" b="0">
+                          <a:solidFill>
+                            <a:srgbClr val="171A14"/>
+                          </a:solidFill>
+                          <a:latin typeface="Segoe UI"/>
+                        </a:rPr>
+                        <a:t>Digest for humans, compact bundle for the next conversation</a:t>
+                      </a:r>
+                    </a:p>
+                  </a:txBody>
+                  <a:tcPr anchor="ctr" marL="109728" marT="27432" marB="27432">
+                    <a:solidFill>
+                      <a:srgbClr val="FFFFFF"/>
+                    </a:solidFill>
+                  </a:tcPr>
+                </a:tc>
+                <a:tc>
+                  <a:txBody>
+                    <a:bodyPr/>
+                    <a:lstStyle/>
+                    <a:p>
+                      <a:r>
+                        <a:rPr sz="1300" b="0">
+                          <a:solidFill>
+                            <a:srgbClr val="171A14"/>
+                          </a:solidFill>
+                          <a:latin typeface="Segoe UI"/>
+                        </a:rPr>
+                        <a:t>summary.md · analysis_bundle.json</a:t>
+                      </a:r>
+                    </a:p>
+                  </a:txBody>
+                  <a:tcPr anchor="ctr" marL="109728" marT="27432" marB="27432">
+                    <a:solidFill>
+                      <a:srgbClr val="FFFFFF"/>
+                    </a:solidFill>
+                  </a:tcPr>
+                </a:tc>
+              </a:tr>
+            </a:tbl>
+          </a:graphicData>
+        </a:graphic>
+      </p:graphicFrame>
+      <p:sp>
+        <p:nvSpPr>
+          <p:cNvPr id="7" name="TextBox 6"/>
           <p:cNvSpPr txBox="1"/>
           <p:nvPr/>
         </p:nvSpPr>
         <p:spPr>
           <a:xfrm>
-            <a:off x="896112" y="2039112"/>
-            <a:ext cx="3112922" cy="274320"/>
+            <a:off x="731520" y="5733288"/>
+            <a:ext cx="10728655" cy="1097280"/>
           </a:xfrm>
           <a:prstGeom prst="rect">
             <a:avLst/>
@@ -8973,479 +10912,13 @@
               </a:spcAft>
             </a:pPr>
             <a:r>
-              <a:rPr sz="1200" b="1">
-                <a:solidFill>
-                  <a:srgbClr val="00907F"/>
+              <a:rPr sz="1500" b="0">
+                <a:solidFill>
+                  <a:srgbClr val="171A14"/>
                 </a:solidFill>
                 <a:latin typeface="Segoe UI"/>
               </a:rPr>
-              <a:t>MULTI-DRIVE, MERGED</a:t>
-            </a:r>
-          </a:p>
-        </p:txBody>
-      </p:sp>
-      <p:sp>
-        <p:nvSpPr>
-          <p:cNvPr id="7" name="TextBox 6"/>
-          <p:cNvSpPr txBox="1"/>
-          <p:nvPr/>
-        </p:nvSpPr>
-        <p:spPr>
-          <a:xfrm>
-            <a:off x="896112" y="2386584"/>
-            <a:ext cx="3112922" cy="822960"/>
-          </a:xfrm>
-          <a:prstGeom prst="rect">
-            <a:avLst/>
-          </a:prstGeom>
-          <a:noFill/>
-        </p:spPr>
-        <p:txBody>
-          <a:bodyPr wrap="square">
-            <a:spAutoFit/>
-          </a:bodyPr>
-          <a:lstStyle/>
-          <a:p>
-            <a:pPr algn="l">
-              <a:lnSpc>
-                <a:spcPct val="125000"/>
-              </a:lnSpc>
-              <a:spcAft>
-                <a:spcPts val="600"/>
-              </a:spcAft>
-            </a:pPr>
-            <a:r>
-              <a:rPr sz="1350" b="0">
-                <a:solidFill>
-                  <a:srgbClr val="171A14"/>
-                </a:solidFill>
-                <a:latin typeface="Segoe UI"/>
-              </a:rPr>
-              <a:t>The cache spans a main path and a spill path. A day’s files can sit on both.</a:t>
-            </a:r>
-          </a:p>
-        </p:txBody>
-      </p:sp>
-      <p:sp>
-        <p:nvSpPr>
-          <p:cNvPr id="8" name="TextBox 7"/>
-          <p:cNvSpPr txBox="1"/>
-          <p:nvPr/>
-        </p:nvSpPr>
-        <p:spPr>
-          <a:xfrm>
-            <a:off x="896112" y="4361688"/>
-            <a:ext cx="3112922" cy="457200"/>
-          </a:xfrm>
-          <a:prstGeom prst="rect">
-            <a:avLst/>
-          </a:prstGeom>
-          <a:noFill/>
-        </p:spPr>
-        <p:txBody>
-          <a:bodyPr wrap="square">
-            <a:spAutoFit/>
-          </a:bodyPr>
-          <a:lstStyle/>
-          <a:p>
-            <a:pPr algn="l">
-              <a:lnSpc>
-                <a:spcPct val="125000"/>
-              </a:lnSpc>
-              <a:spcAft>
-                <a:spcPts val="600"/>
-              </a:spcAft>
-            </a:pPr>
-            <a:r>
-              <a:rPr sz="1150" b="0">
-                <a:solidFill>
-                  <a:srgbClr val="66705C"/>
-                </a:solidFill>
-                <a:latin typeface="Segoe UI"/>
-              </a:rPr>
-              <a:t>Reading one path alone reports a PARTIAL day as a complete one — indistinguishable from a month when fewer zones signed.</a:t>
-            </a:r>
-          </a:p>
-        </p:txBody>
-      </p:sp>
-      <p:sp>
-        <p:nvSpPr>
-          <p:cNvPr id="9" name="Rectangle 8"/>
-          <p:cNvSpPr/>
-          <p:nvPr/>
-        </p:nvSpPr>
-        <p:spPr>
-          <a:xfrm>
-            <a:off x="4374794" y="1911096"/>
-            <a:ext cx="3442106" cy="3017520"/>
-          </a:xfrm>
-          <a:prstGeom prst="rect">
-            <a:avLst/>
-          </a:prstGeom>
-          <a:solidFill>
-            <a:srgbClr val="F6F7F3"/>
-          </a:solidFill>
-          <a:ln w="9525">
-            <a:solidFill>
-              <a:srgbClr val="D3D8CC"/>
-            </a:solidFill>
-          </a:ln>
-          <a:effectLst/>
-        </p:spPr>
-        <p:style>
-          <a:lnRef idx="1">
-            <a:schemeClr val="accent1"/>
-          </a:lnRef>
-          <a:fillRef idx="3">
-            <a:schemeClr val="accent1"/>
-          </a:fillRef>
-          <a:effectRef idx="2">
-            <a:schemeClr val="accent1"/>
-          </a:effectRef>
-          <a:fontRef idx="minor">
-            <a:schemeClr val="lt1"/>
-          </a:fontRef>
-        </p:style>
-        <p:txBody>
-          <a:bodyPr rtlCol="0" anchor="ctr"/>
-          <a:lstStyle/>
-          <a:p/>
-        </p:txBody>
-      </p:sp>
-      <p:sp>
-        <p:nvSpPr>
-          <p:cNvPr id="10" name="TextBox 9"/>
-          <p:cNvSpPr txBox="1"/>
-          <p:nvPr/>
-        </p:nvSpPr>
-        <p:spPr>
-          <a:xfrm>
-            <a:off x="4539386" y="2039112"/>
-            <a:ext cx="3112922" cy="274320"/>
-          </a:xfrm>
-          <a:prstGeom prst="rect">
-            <a:avLst/>
-          </a:prstGeom>
-          <a:noFill/>
-        </p:spPr>
-        <p:txBody>
-          <a:bodyPr wrap="square">
-            <a:spAutoFit/>
-          </a:bodyPr>
-          <a:lstStyle/>
-          <a:p>
-            <a:pPr algn="l">
-              <a:lnSpc>
-                <a:spcPct val="125000"/>
-              </a:lnSpc>
-              <a:spcAft>
-                <a:spcPts val="600"/>
-              </a:spcAft>
-            </a:pPr>
-            <a:r>
-              <a:rPr sz="1200" b="1">
-                <a:solidFill>
-                  <a:srgbClr val="00907F"/>
-                </a:solidFill>
-                <a:latin typeface="Segoe UI"/>
-              </a:rPr>
-              <a:t>EVERY SHARE CARRIES ITS DENOMINATOR</a:t>
-            </a:r>
-          </a:p>
-        </p:txBody>
-      </p:sp>
-      <p:sp>
-        <p:nvSpPr>
-          <p:cNvPr id="11" name="TextBox 10"/>
-          <p:cNvSpPr txBox="1"/>
-          <p:nvPr/>
-        </p:nvSpPr>
-        <p:spPr>
-          <a:xfrm>
-            <a:off x="4539386" y="2386584"/>
-            <a:ext cx="3112922" cy="822960"/>
-          </a:xfrm>
-          <a:prstGeom prst="rect">
-            <a:avLst/>
-          </a:prstGeom>
-          <a:noFill/>
-        </p:spPr>
-        <p:txBody>
-          <a:bodyPr wrap="square">
-            <a:spAutoFit/>
-          </a:bodyPr>
-          <a:lstStyle/>
-          <a:p>
-            <a:pPr algn="l">
-              <a:lnSpc>
-                <a:spcPct val="125000"/>
-              </a:lnSpc>
-              <a:spcAft>
-                <a:spcPts val="600"/>
-              </a:spcAft>
-            </a:pPr>
-            <a:r>
-              <a:rPr sz="1350" b="0">
-                <a:solidFill>
-                  <a:srgbClr val="171A14"/>
-                </a:solidFill>
-                <a:latin typeface="Segoe UI"/>
-              </a:rPr>
-              <a:t>Each dimension emits its own _total row alongside the values.</a:t>
-            </a:r>
-          </a:p>
-        </p:txBody>
-      </p:sp>
-      <p:sp>
-        <p:nvSpPr>
-          <p:cNvPr id="12" name="TextBox 11"/>
-          <p:cNvSpPr txBox="1"/>
-          <p:nvPr/>
-        </p:nvSpPr>
-        <p:spPr>
-          <a:xfrm>
-            <a:off x="4539386" y="4361688"/>
-            <a:ext cx="3112922" cy="457200"/>
-          </a:xfrm>
-          <a:prstGeom prst="rect">
-            <a:avLst/>
-          </a:prstGeom>
-          <a:noFill/>
-        </p:spPr>
-        <p:txBody>
-          <a:bodyPr wrap="square">
-            <a:spAutoFit/>
-          </a:bodyPr>
-          <a:lstStyle/>
-          <a:p>
-            <a:pPr algn="l">
-              <a:lnSpc>
-                <a:spcPct val="125000"/>
-              </a:lnSpc>
-              <a:spcAft>
-                <a:spcPts val="600"/>
-              </a:spcAft>
-            </a:pPr>
-            <a:r>
-              <a:rPr sz="1150" b="0">
-                <a:solidFill>
-                  <a:srgbClr val="66705C"/>
-                </a:solidFill>
-                <a:latin typeface="Segoe UI"/>
-              </a:rPr>
-              <a:t>The same fact reads 68%, 64% or 0.6% depending only on what you divide by. P(x | population) is recomputable, never guessed.</a:t>
-            </a:r>
-          </a:p>
-        </p:txBody>
-      </p:sp>
-      <p:sp>
-        <p:nvSpPr>
-          <p:cNvPr id="13" name="Rectangle 12"/>
-          <p:cNvSpPr/>
-          <p:nvPr/>
-        </p:nvSpPr>
-        <p:spPr>
-          <a:xfrm>
-            <a:off x="8018068" y="1911096"/>
-            <a:ext cx="3442106" cy="3017520"/>
-          </a:xfrm>
-          <a:prstGeom prst="rect">
-            <a:avLst/>
-          </a:prstGeom>
-          <a:solidFill>
-            <a:srgbClr val="F6F7F3"/>
-          </a:solidFill>
-          <a:ln w="9525">
-            <a:solidFill>
-              <a:srgbClr val="D3D8CC"/>
-            </a:solidFill>
-          </a:ln>
-          <a:effectLst/>
-        </p:spPr>
-        <p:style>
-          <a:lnRef idx="1">
-            <a:schemeClr val="accent1"/>
-          </a:lnRef>
-          <a:fillRef idx="3">
-            <a:schemeClr val="accent1"/>
-          </a:fillRef>
-          <a:effectRef idx="2">
-            <a:schemeClr val="accent1"/>
-          </a:effectRef>
-          <a:fontRef idx="minor">
-            <a:schemeClr val="lt1"/>
-          </a:fontRef>
-        </p:style>
-        <p:txBody>
-          <a:bodyPr rtlCol="0" anchor="ctr"/>
-          <a:lstStyle/>
-          <a:p/>
-        </p:txBody>
-      </p:sp>
-      <p:sp>
-        <p:nvSpPr>
-          <p:cNvPr id="14" name="TextBox 13"/>
-          <p:cNvSpPr txBox="1"/>
-          <p:nvPr/>
-        </p:nvSpPr>
-        <p:spPr>
-          <a:xfrm>
-            <a:off x="8182660" y="2039112"/>
-            <a:ext cx="3112922" cy="274320"/>
-          </a:xfrm>
-          <a:prstGeom prst="rect">
-            <a:avLst/>
-          </a:prstGeom>
-          <a:noFill/>
-        </p:spPr>
-        <p:txBody>
-          <a:bodyPr wrap="square">
-            <a:spAutoFit/>
-          </a:bodyPr>
-          <a:lstStyle/>
-          <a:p>
-            <a:pPr algn="l">
-              <a:lnSpc>
-                <a:spcPct val="125000"/>
-              </a:lnSpc>
-              <a:spcAft>
-                <a:spcPts val="600"/>
-              </a:spcAft>
-            </a:pPr>
-            <a:r>
-              <a:rPr sz="1200" b="1">
-                <a:solidFill>
-                  <a:srgbClr val="00907F"/>
-                </a:solidFill>
-                <a:latin typeface="Segoe UI"/>
-              </a:rPr>
-              <a:t>SHARDED ACROSS MACHINES</a:t>
-            </a:r>
-          </a:p>
-        </p:txBody>
-      </p:sp>
-      <p:sp>
-        <p:nvSpPr>
-          <p:cNvPr id="15" name="TextBox 14"/>
-          <p:cNvSpPr txBox="1"/>
-          <p:nvPr/>
-        </p:nvSpPr>
-        <p:spPr>
-          <a:xfrm>
-            <a:off x="8182660" y="2386584"/>
-            <a:ext cx="3112922" cy="822960"/>
-          </a:xfrm>
-          <a:prstGeom prst="rect">
-            <a:avLst/>
-          </a:prstGeom>
-          <a:noFill/>
-        </p:spPr>
-        <p:txBody>
-          <a:bodyPr wrap="square">
-            <a:spAutoFit/>
-          </a:bodyPr>
-          <a:lstStyle/>
-          <a:p>
-            <a:pPr algn="l">
-              <a:lnSpc>
-                <a:spcPct val="125000"/>
-              </a:lnSpc>
-              <a:spcAft>
-                <a:spcPts val="600"/>
-              </a:spcAft>
-            </a:pPr>
-            <a:r>
-              <a:rPr sz="1350" b="0">
-                <a:solidFill>
-                  <a:srgbClr val="171A14"/>
-                </a:solidFill>
-                <a:latin typeface="Segoe UI"/>
-              </a:rPr>
-              <a:t>Same command, different --shard. Balanced on bytes, no coordinator.</a:t>
-            </a:r>
-          </a:p>
-        </p:txBody>
-      </p:sp>
-      <p:sp>
-        <p:nvSpPr>
-          <p:cNvPr id="16" name="TextBox 15"/>
-          <p:cNvSpPr txBox="1"/>
-          <p:nvPr/>
-        </p:nvSpPr>
-        <p:spPr>
-          <a:xfrm>
-            <a:off x="8182660" y="4361688"/>
-            <a:ext cx="3112922" cy="457200"/>
-          </a:xfrm>
-          <a:prstGeom prst="rect">
-            <a:avLst/>
-          </a:prstGeom>
-          <a:noFill/>
-        </p:spPr>
-        <p:txBody>
-          <a:bodyPr wrap="square">
-            <a:spAutoFit/>
-          </a:bodyPr>
-          <a:lstStyle/>
-          <a:p>
-            <a:pPr algn="l">
-              <a:lnSpc>
-                <a:spcPct val="125000"/>
-              </a:lnSpc>
-              <a:spcAft>
-                <a:spcPts val="600"/>
-              </a:spcAft>
-            </a:pPr>
-            <a:r>
-              <a:rPr sz="1150" b="0">
-                <a:solidFill>
-                  <a:srgbClr val="66705C"/>
-                </a:solidFill>
-                <a:latin typeface="Segoe UI"/>
-              </a:rPr>
-              <a:t>3 shards over the corpus: 0.0% spread, and identical results to a single-machine run across 30 changes × 7 fields.</a:t>
-            </a:r>
-          </a:p>
-        </p:txBody>
-      </p:sp>
-      <p:sp>
-        <p:nvSpPr>
-          <p:cNvPr id="17" name="TextBox 16"/>
-          <p:cNvSpPr txBox="1"/>
-          <p:nvPr/>
-        </p:nvSpPr>
-        <p:spPr>
-          <a:xfrm>
-            <a:off x="731520" y="5202936"/>
-            <a:ext cx="10728655" cy="731520"/>
-          </a:xfrm>
-          <a:prstGeom prst="rect">
-            <a:avLst/>
-          </a:prstGeom>
-          <a:noFill/>
-        </p:spPr>
-        <p:txBody>
-          <a:bodyPr wrap="square">
-            <a:spAutoFit/>
-          </a:bodyPr>
-          <a:lstStyle/>
-          <a:p>
-            <a:pPr algn="l">
-              <a:lnSpc>
-                <a:spcPct val="125000"/>
-              </a:lnSpc>
-              <a:spcAft>
-                <a:spcPts val="600"/>
-              </a:spcAft>
-            </a:pPr>
-            <a:r>
-              <a:rPr sz="1400" b="0">
-                <a:solidFill>
-                  <a:srgbClr val="66705C"/>
-                </a:solidFill>
-                <a:latin typeface="Segoe UI"/>
-              </a:rPr>
-              <a:t>A partial corpus produces entirely plausible numbers, so each shard reports when it finishes and the analysis refuses to stay silent if the set is incomplete.</a:t>
+              <a:t>Both analysis directions are configuration, not code — data/analysis_config.json holds the observable changes, the implementation groups, the categories and the thresholds. Adding a mechanism to measure means adding a row.</a:t>
             </a:r>
           </a:p>
         </p:txBody>
@@ -9505,7 +10978,7 @@
                 </a:solidFill>
                 <a:latin typeface="Segoe UI"/>
               </a:rPr>
-              <a:t>INSIGHT 1</a:t>
+              <a:t>HOW IT WORKS</a:t>
             </a:r>
           </a:p>
         </p:txBody>
@@ -9547,7 +11020,7 @@
                 </a:solidFill>
                 <a:latin typeface="Segoe UI"/>
               </a:rPr>
-              <a:t>Being early tells you nothing about ending up used</a:t>
+              <a:t>Three design decisions that protect the numbers</a:t>
             </a:r>
           </a:p>
         </p:txBody>
@@ -9596,30 +11069,50 @@
           </a:p>
         </p:txBody>
       </p:sp>
-      <p:pic>
-        <p:nvPicPr>
-          <p:cNvPr id="5" name="Picture 4" descr="onset_vs_spread.png"/>
-          <p:cNvPicPr>
-            <a:picLocks noChangeAspect="1"/>
-          </p:cNvPicPr>
-          <p:nvPr/>
-        </p:nvPicPr>
-        <p:blipFill>
-          <a:blip r:embed="rId2"/>
-          <a:stretch>
-            <a:fillRect/>
-          </a:stretch>
-        </p:blipFill>
-        <p:spPr>
-          <a:xfrm>
-            <a:off x="2177849" y="1911096"/>
-            <a:ext cx="7835996" cy="3840479"/>
-          </a:xfrm>
-          <a:prstGeom prst="rect">
-            <a:avLst/>
-          </a:prstGeom>
-        </p:spPr>
-      </p:pic>
+      <p:sp>
+        <p:nvSpPr>
+          <p:cNvPr id="5" name="Rectangle 4"/>
+          <p:cNvSpPr/>
+          <p:nvPr/>
+        </p:nvSpPr>
+        <p:spPr>
+          <a:xfrm>
+            <a:off x="731520" y="1911096"/>
+            <a:ext cx="3442106" cy="3017520"/>
+          </a:xfrm>
+          <a:prstGeom prst="rect">
+            <a:avLst/>
+          </a:prstGeom>
+          <a:solidFill>
+            <a:srgbClr val="F6F7F3"/>
+          </a:solidFill>
+          <a:ln w="9525">
+            <a:solidFill>
+              <a:srgbClr val="D3D8CC"/>
+            </a:solidFill>
+          </a:ln>
+          <a:effectLst/>
+        </p:spPr>
+        <p:style>
+          <a:lnRef idx="1">
+            <a:schemeClr val="accent1"/>
+          </a:lnRef>
+          <a:fillRef idx="3">
+            <a:schemeClr val="accent1"/>
+          </a:fillRef>
+          <a:effectRef idx="2">
+            <a:schemeClr val="accent1"/>
+          </a:effectRef>
+          <a:fontRef idx="minor">
+            <a:schemeClr val="lt1"/>
+          </a:fontRef>
+        </p:style>
+        <p:txBody>
+          <a:bodyPr rtlCol="0" anchor="ctr"/>
+          <a:lstStyle/>
+          <a:p/>
+        </p:txBody>
+      </p:sp>
       <p:sp>
         <p:nvSpPr>
           <p:cNvPr id="6" name="TextBox 5"/>
@@ -9628,8 +11121,8 @@
         </p:nvSpPr>
         <p:spPr>
           <a:xfrm>
-            <a:off x="731520" y="5715000"/>
-            <a:ext cx="10728655" cy="822960"/>
+            <a:off x="896112" y="2039112"/>
+            <a:ext cx="3112922" cy="274320"/>
           </a:xfrm>
           <a:prstGeom prst="rect">
             <a:avLst/>
@@ -9651,13 +11144,479 @@
               </a:spcAft>
             </a:pPr>
             <a:r>
-              <a:rPr sz="1500" b="0">
-                <a:solidFill>
-                  <a:srgbClr val="171A14"/>
+              <a:rPr sz="1200" b="1">
+                <a:solidFill>
+                  <a:srgbClr val="00907F"/>
                 </a:solidFill>
                 <a:latin typeface="Segoe UI"/>
               </a:rPr>
-              <a:t>The two most prevalent mechanisms were slower than average to appear. Half the fastest are still below 1%. This is the evidence FOR splitting the definition, not an assumption behind it.</a:t>
+              <a:t>MULTI-DRIVE, MERGED</a:t>
+            </a:r>
+          </a:p>
+        </p:txBody>
+      </p:sp>
+      <p:sp>
+        <p:nvSpPr>
+          <p:cNvPr id="7" name="TextBox 6"/>
+          <p:cNvSpPr txBox="1"/>
+          <p:nvPr/>
+        </p:nvSpPr>
+        <p:spPr>
+          <a:xfrm>
+            <a:off x="896112" y="2386584"/>
+            <a:ext cx="3112922" cy="822960"/>
+          </a:xfrm>
+          <a:prstGeom prst="rect">
+            <a:avLst/>
+          </a:prstGeom>
+          <a:noFill/>
+        </p:spPr>
+        <p:txBody>
+          <a:bodyPr wrap="square">
+            <a:spAutoFit/>
+          </a:bodyPr>
+          <a:lstStyle/>
+          <a:p>
+            <a:pPr algn="l">
+              <a:lnSpc>
+                <a:spcPct val="125000"/>
+              </a:lnSpc>
+              <a:spcAft>
+                <a:spcPts val="600"/>
+              </a:spcAft>
+            </a:pPr>
+            <a:r>
+              <a:rPr sz="1350" b="0">
+                <a:solidFill>
+                  <a:srgbClr val="171A14"/>
+                </a:solidFill>
+                <a:latin typeface="Segoe UI"/>
+              </a:rPr>
+              <a:t>The cache spans a main path and a spill path. A day’s files can sit on both.</a:t>
+            </a:r>
+          </a:p>
+        </p:txBody>
+      </p:sp>
+      <p:sp>
+        <p:nvSpPr>
+          <p:cNvPr id="8" name="TextBox 7"/>
+          <p:cNvSpPr txBox="1"/>
+          <p:nvPr/>
+        </p:nvSpPr>
+        <p:spPr>
+          <a:xfrm>
+            <a:off x="896112" y="4361688"/>
+            <a:ext cx="3112922" cy="457200"/>
+          </a:xfrm>
+          <a:prstGeom prst="rect">
+            <a:avLst/>
+          </a:prstGeom>
+          <a:noFill/>
+        </p:spPr>
+        <p:txBody>
+          <a:bodyPr wrap="square">
+            <a:spAutoFit/>
+          </a:bodyPr>
+          <a:lstStyle/>
+          <a:p>
+            <a:pPr algn="l">
+              <a:lnSpc>
+                <a:spcPct val="125000"/>
+              </a:lnSpc>
+              <a:spcAft>
+                <a:spcPts val="600"/>
+              </a:spcAft>
+            </a:pPr>
+            <a:r>
+              <a:rPr sz="1150" b="0">
+                <a:solidFill>
+                  <a:srgbClr val="66705C"/>
+                </a:solidFill>
+                <a:latin typeface="Segoe UI"/>
+              </a:rPr>
+              <a:t>Reading one path alone reports a PARTIAL day as a complete one — indistinguishable from a month when fewer zones signed.</a:t>
+            </a:r>
+          </a:p>
+        </p:txBody>
+      </p:sp>
+      <p:sp>
+        <p:nvSpPr>
+          <p:cNvPr id="9" name="Rectangle 8"/>
+          <p:cNvSpPr/>
+          <p:nvPr/>
+        </p:nvSpPr>
+        <p:spPr>
+          <a:xfrm>
+            <a:off x="4374794" y="1911096"/>
+            <a:ext cx="3442106" cy="3017520"/>
+          </a:xfrm>
+          <a:prstGeom prst="rect">
+            <a:avLst/>
+          </a:prstGeom>
+          <a:solidFill>
+            <a:srgbClr val="F6F7F3"/>
+          </a:solidFill>
+          <a:ln w="9525">
+            <a:solidFill>
+              <a:srgbClr val="D3D8CC"/>
+            </a:solidFill>
+          </a:ln>
+          <a:effectLst/>
+        </p:spPr>
+        <p:style>
+          <a:lnRef idx="1">
+            <a:schemeClr val="accent1"/>
+          </a:lnRef>
+          <a:fillRef idx="3">
+            <a:schemeClr val="accent1"/>
+          </a:fillRef>
+          <a:effectRef idx="2">
+            <a:schemeClr val="accent1"/>
+          </a:effectRef>
+          <a:fontRef idx="minor">
+            <a:schemeClr val="lt1"/>
+          </a:fontRef>
+        </p:style>
+        <p:txBody>
+          <a:bodyPr rtlCol="0" anchor="ctr"/>
+          <a:lstStyle/>
+          <a:p/>
+        </p:txBody>
+      </p:sp>
+      <p:sp>
+        <p:nvSpPr>
+          <p:cNvPr id="10" name="TextBox 9"/>
+          <p:cNvSpPr txBox="1"/>
+          <p:nvPr/>
+        </p:nvSpPr>
+        <p:spPr>
+          <a:xfrm>
+            <a:off x="4539386" y="2039112"/>
+            <a:ext cx="3112922" cy="274320"/>
+          </a:xfrm>
+          <a:prstGeom prst="rect">
+            <a:avLst/>
+          </a:prstGeom>
+          <a:noFill/>
+        </p:spPr>
+        <p:txBody>
+          <a:bodyPr wrap="square">
+            <a:spAutoFit/>
+          </a:bodyPr>
+          <a:lstStyle/>
+          <a:p>
+            <a:pPr algn="l">
+              <a:lnSpc>
+                <a:spcPct val="125000"/>
+              </a:lnSpc>
+              <a:spcAft>
+                <a:spcPts val="600"/>
+              </a:spcAft>
+            </a:pPr>
+            <a:r>
+              <a:rPr sz="1200" b="1">
+                <a:solidFill>
+                  <a:srgbClr val="00907F"/>
+                </a:solidFill>
+                <a:latin typeface="Segoe UI"/>
+              </a:rPr>
+              <a:t>EVERY SHARE CARRIES ITS DENOMINATOR</a:t>
+            </a:r>
+          </a:p>
+        </p:txBody>
+      </p:sp>
+      <p:sp>
+        <p:nvSpPr>
+          <p:cNvPr id="11" name="TextBox 10"/>
+          <p:cNvSpPr txBox="1"/>
+          <p:nvPr/>
+        </p:nvSpPr>
+        <p:spPr>
+          <a:xfrm>
+            <a:off x="4539386" y="2386584"/>
+            <a:ext cx="3112922" cy="822960"/>
+          </a:xfrm>
+          <a:prstGeom prst="rect">
+            <a:avLst/>
+          </a:prstGeom>
+          <a:noFill/>
+        </p:spPr>
+        <p:txBody>
+          <a:bodyPr wrap="square">
+            <a:spAutoFit/>
+          </a:bodyPr>
+          <a:lstStyle/>
+          <a:p>
+            <a:pPr algn="l">
+              <a:lnSpc>
+                <a:spcPct val="125000"/>
+              </a:lnSpc>
+              <a:spcAft>
+                <a:spcPts val="600"/>
+              </a:spcAft>
+            </a:pPr>
+            <a:r>
+              <a:rPr sz="1350" b="0">
+                <a:solidFill>
+                  <a:srgbClr val="171A14"/>
+                </a:solidFill>
+                <a:latin typeface="Segoe UI"/>
+              </a:rPr>
+              <a:t>Each dimension emits its own _total row alongside the values.</a:t>
+            </a:r>
+          </a:p>
+        </p:txBody>
+      </p:sp>
+      <p:sp>
+        <p:nvSpPr>
+          <p:cNvPr id="12" name="TextBox 11"/>
+          <p:cNvSpPr txBox="1"/>
+          <p:nvPr/>
+        </p:nvSpPr>
+        <p:spPr>
+          <a:xfrm>
+            <a:off x="4539386" y="4361688"/>
+            <a:ext cx="3112922" cy="457200"/>
+          </a:xfrm>
+          <a:prstGeom prst="rect">
+            <a:avLst/>
+          </a:prstGeom>
+          <a:noFill/>
+        </p:spPr>
+        <p:txBody>
+          <a:bodyPr wrap="square">
+            <a:spAutoFit/>
+          </a:bodyPr>
+          <a:lstStyle/>
+          <a:p>
+            <a:pPr algn="l">
+              <a:lnSpc>
+                <a:spcPct val="125000"/>
+              </a:lnSpc>
+              <a:spcAft>
+                <a:spcPts val="600"/>
+              </a:spcAft>
+            </a:pPr>
+            <a:r>
+              <a:rPr sz="1150" b="0">
+                <a:solidFill>
+                  <a:srgbClr val="66705C"/>
+                </a:solidFill>
+                <a:latin typeface="Segoe UI"/>
+              </a:rPr>
+              <a:t>The same fact reads 68%, 64% or 0.6% depending only on what you divide by. P(x | population) is recomputable, never guessed.</a:t>
+            </a:r>
+          </a:p>
+        </p:txBody>
+      </p:sp>
+      <p:sp>
+        <p:nvSpPr>
+          <p:cNvPr id="13" name="Rectangle 12"/>
+          <p:cNvSpPr/>
+          <p:nvPr/>
+        </p:nvSpPr>
+        <p:spPr>
+          <a:xfrm>
+            <a:off x="8018068" y="1911096"/>
+            <a:ext cx="3442106" cy="3017520"/>
+          </a:xfrm>
+          <a:prstGeom prst="rect">
+            <a:avLst/>
+          </a:prstGeom>
+          <a:solidFill>
+            <a:srgbClr val="F6F7F3"/>
+          </a:solidFill>
+          <a:ln w="9525">
+            <a:solidFill>
+              <a:srgbClr val="D3D8CC"/>
+            </a:solidFill>
+          </a:ln>
+          <a:effectLst/>
+        </p:spPr>
+        <p:style>
+          <a:lnRef idx="1">
+            <a:schemeClr val="accent1"/>
+          </a:lnRef>
+          <a:fillRef idx="3">
+            <a:schemeClr val="accent1"/>
+          </a:fillRef>
+          <a:effectRef idx="2">
+            <a:schemeClr val="accent1"/>
+          </a:effectRef>
+          <a:fontRef idx="minor">
+            <a:schemeClr val="lt1"/>
+          </a:fontRef>
+        </p:style>
+        <p:txBody>
+          <a:bodyPr rtlCol="0" anchor="ctr"/>
+          <a:lstStyle/>
+          <a:p/>
+        </p:txBody>
+      </p:sp>
+      <p:sp>
+        <p:nvSpPr>
+          <p:cNvPr id="14" name="TextBox 13"/>
+          <p:cNvSpPr txBox="1"/>
+          <p:nvPr/>
+        </p:nvSpPr>
+        <p:spPr>
+          <a:xfrm>
+            <a:off x="8182660" y="2039112"/>
+            <a:ext cx="3112922" cy="274320"/>
+          </a:xfrm>
+          <a:prstGeom prst="rect">
+            <a:avLst/>
+          </a:prstGeom>
+          <a:noFill/>
+        </p:spPr>
+        <p:txBody>
+          <a:bodyPr wrap="square">
+            <a:spAutoFit/>
+          </a:bodyPr>
+          <a:lstStyle/>
+          <a:p>
+            <a:pPr algn="l">
+              <a:lnSpc>
+                <a:spcPct val="125000"/>
+              </a:lnSpc>
+              <a:spcAft>
+                <a:spcPts val="600"/>
+              </a:spcAft>
+            </a:pPr>
+            <a:r>
+              <a:rPr sz="1200" b="1">
+                <a:solidFill>
+                  <a:srgbClr val="00907F"/>
+                </a:solidFill>
+                <a:latin typeface="Segoe UI"/>
+              </a:rPr>
+              <a:t>SHARDED ACROSS MACHINES</a:t>
+            </a:r>
+          </a:p>
+        </p:txBody>
+      </p:sp>
+      <p:sp>
+        <p:nvSpPr>
+          <p:cNvPr id="15" name="TextBox 14"/>
+          <p:cNvSpPr txBox="1"/>
+          <p:nvPr/>
+        </p:nvSpPr>
+        <p:spPr>
+          <a:xfrm>
+            <a:off x="8182660" y="2386584"/>
+            <a:ext cx="3112922" cy="822960"/>
+          </a:xfrm>
+          <a:prstGeom prst="rect">
+            <a:avLst/>
+          </a:prstGeom>
+          <a:noFill/>
+        </p:spPr>
+        <p:txBody>
+          <a:bodyPr wrap="square">
+            <a:spAutoFit/>
+          </a:bodyPr>
+          <a:lstStyle/>
+          <a:p>
+            <a:pPr algn="l">
+              <a:lnSpc>
+                <a:spcPct val="125000"/>
+              </a:lnSpc>
+              <a:spcAft>
+                <a:spcPts val="600"/>
+              </a:spcAft>
+            </a:pPr>
+            <a:r>
+              <a:rPr sz="1350" b="0">
+                <a:solidFill>
+                  <a:srgbClr val="171A14"/>
+                </a:solidFill>
+                <a:latin typeface="Segoe UI"/>
+              </a:rPr>
+              <a:t>Same command, different --shard. Balanced on bytes, no coordinator.</a:t>
+            </a:r>
+          </a:p>
+        </p:txBody>
+      </p:sp>
+      <p:sp>
+        <p:nvSpPr>
+          <p:cNvPr id="16" name="TextBox 15"/>
+          <p:cNvSpPr txBox="1"/>
+          <p:nvPr/>
+        </p:nvSpPr>
+        <p:spPr>
+          <a:xfrm>
+            <a:off x="8182660" y="4361688"/>
+            <a:ext cx="3112922" cy="457200"/>
+          </a:xfrm>
+          <a:prstGeom prst="rect">
+            <a:avLst/>
+          </a:prstGeom>
+          <a:noFill/>
+        </p:spPr>
+        <p:txBody>
+          <a:bodyPr wrap="square">
+            <a:spAutoFit/>
+          </a:bodyPr>
+          <a:lstStyle/>
+          <a:p>
+            <a:pPr algn="l">
+              <a:lnSpc>
+                <a:spcPct val="125000"/>
+              </a:lnSpc>
+              <a:spcAft>
+                <a:spcPts val="600"/>
+              </a:spcAft>
+            </a:pPr>
+            <a:r>
+              <a:rPr sz="1150" b="0">
+                <a:solidFill>
+                  <a:srgbClr val="66705C"/>
+                </a:solidFill>
+                <a:latin typeface="Segoe UI"/>
+              </a:rPr>
+              <a:t>3 shards over the corpus: 0.0% spread, and identical results to a single-machine run across 30 changes × 7 fields.</a:t>
+            </a:r>
+          </a:p>
+        </p:txBody>
+      </p:sp>
+      <p:sp>
+        <p:nvSpPr>
+          <p:cNvPr id="17" name="TextBox 16"/>
+          <p:cNvSpPr txBox="1"/>
+          <p:nvPr/>
+        </p:nvSpPr>
+        <p:spPr>
+          <a:xfrm>
+            <a:off x="731520" y="5202936"/>
+            <a:ext cx="10728655" cy="731520"/>
+          </a:xfrm>
+          <a:prstGeom prst="rect">
+            <a:avLst/>
+          </a:prstGeom>
+          <a:noFill/>
+        </p:spPr>
+        <p:txBody>
+          <a:bodyPr wrap="square">
+            <a:spAutoFit/>
+          </a:bodyPr>
+          <a:lstStyle/>
+          <a:p>
+            <a:pPr algn="l">
+              <a:lnSpc>
+                <a:spcPct val="125000"/>
+              </a:lnSpc>
+              <a:spcAft>
+                <a:spcPts val="600"/>
+              </a:spcAft>
+            </a:pPr>
+            <a:r>
+              <a:rPr sz="1400" b="0">
+                <a:solidFill>
+                  <a:srgbClr val="66705C"/>
+                </a:solidFill>
+                <a:latin typeface="Segoe UI"/>
+              </a:rPr>
+              <a:t>A partial corpus produces entirely plausible numbers, so each shard reports when it finishes and the analysis refuses to stay silent if the set is incomplete.</a:t>
             </a:r>
           </a:p>
         </p:txBody>
@@ -9717,7 +11676,7 @@
                 </a:solidFill>
                 <a:latin typeface="Segoe UI"/>
               </a:rPr>
-              <a:t>INSIGHT 2</a:t>
+              <a:t>THE FULL RUN</a:t>
             </a:r>
           </a:p>
         </p:txBody>
@@ -9759,20 +11718,62 @@
                 </a:solidFill>
                 <a:latin typeface="Segoe UI"/>
               </a:rPr>
-              <a:t>What does predict onset: how many parties must ship code</a:t>
-            </a:r>
-          </a:p>
-        </p:txBody>
-      </p:sp>
-      <p:sp>
-        <p:nvSpPr>
-          <p:cNvPr id="4" name="Rectangle 3"/>
+              <a:t>What the full corpus changed</a:t>
+            </a:r>
+          </a:p>
+        </p:txBody>
+      </p:sp>
+      <p:sp>
+        <p:nvSpPr>
+          <p:cNvPr id="4" name="TextBox 3"/>
+          <p:cNvSpPr txBox="1"/>
+          <p:nvPr/>
+        </p:nvSpPr>
+        <p:spPr>
+          <a:xfrm>
+            <a:off x="731520" y="1600200"/>
+            <a:ext cx="10728655" cy="457200"/>
+          </a:xfrm>
+          <a:prstGeom prst="rect">
+            <a:avLst/>
+          </a:prstGeom>
+          <a:noFill/>
+        </p:spPr>
+        <p:txBody>
+          <a:bodyPr wrap="square">
+            <a:spAutoFit/>
+          </a:bodyPr>
+          <a:lstStyle/>
+          <a:p>
+            <a:pPr algn="l">
+              <a:lnSpc>
+                <a:spcPct val="125000"/>
+              </a:lnSpc>
+              <a:spcAft>
+                <a:spcPts val="600"/>
+              </a:spcAft>
+            </a:pPr>
+            <a:r>
+              <a:rPr sz="1500" b="0">
+                <a:solidFill>
+                  <a:srgbClr val="66705C"/>
+                </a:solidFill>
+                <a:latin typeface="Segoe UI"/>
+              </a:rPr>
+              <a:t>Adding 8.24 TB of forward data moved 14 dates and refuted one finding.</a:t>
+            </a:r>
+          </a:p>
+        </p:txBody>
+      </p:sp>
+      <p:sp>
+        <p:nvSpPr>
+          <p:cNvPr id="5" name="Rectangle 4"/>
           <p:cNvSpPr/>
           <p:nvPr/>
         </p:nvSpPr>
         <p:spPr>
           <a:xfrm>
-            <a:off x="731520" y="1600200"/>
+            <a:off x="731520" y="2167128"/>
             <a:ext cx="10728655" cy="9525"/>
           </a:xfrm>
           <a:prstGeom prst="rect">
@@ -9808,17 +11809,527 @@
           </a:p>
         </p:txBody>
       </p:sp>
+      <p:sp>
+        <p:nvSpPr>
+          <p:cNvPr id="6" name="Rectangle 5"/>
+          <p:cNvSpPr/>
+          <p:nvPr/>
+        </p:nvSpPr>
+        <p:spPr>
+          <a:xfrm>
+            <a:off x="731520" y="2478024"/>
+            <a:ext cx="3442106" cy="1645920"/>
+          </a:xfrm>
+          <a:prstGeom prst="rect">
+            <a:avLst/>
+          </a:prstGeom>
+          <a:solidFill>
+            <a:srgbClr val="F6F7F3"/>
+          </a:solidFill>
+          <a:ln w="9525">
+            <a:solidFill>
+              <a:srgbClr val="D3D8CC"/>
+            </a:solidFill>
+          </a:ln>
+          <a:effectLst/>
+        </p:spPr>
+        <p:style>
+          <a:lnRef idx="1">
+            <a:schemeClr val="accent1"/>
+          </a:lnRef>
+          <a:fillRef idx="3">
+            <a:schemeClr val="accent1"/>
+          </a:fillRef>
+          <a:effectRef idx="2">
+            <a:schemeClr val="accent1"/>
+          </a:effectRef>
+          <a:fontRef idx="minor">
+            <a:schemeClr val="lt1"/>
+          </a:fontRef>
+        </p:style>
+        <p:txBody>
+          <a:bodyPr rtlCol="0" anchor="ctr"/>
+          <a:lstStyle/>
+          <a:p/>
+        </p:txBody>
+      </p:sp>
+      <p:sp>
+        <p:nvSpPr>
+          <p:cNvPr id="7" name="TextBox 6"/>
+          <p:cNvSpPr txBox="1"/>
+          <p:nvPr/>
+        </p:nvSpPr>
+        <p:spPr>
+          <a:xfrm>
+            <a:off x="896112" y="2606040"/>
+            <a:ext cx="3112922" cy="274320"/>
+          </a:xfrm>
+          <a:prstGeom prst="rect">
+            <a:avLst/>
+          </a:prstGeom>
+          <a:noFill/>
+        </p:spPr>
+        <p:txBody>
+          <a:bodyPr wrap="square">
+            <a:spAutoFit/>
+          </a:bodyPr>
+          <a:lstStyle/>
+          <a:p>
+            <a:pPr algn="l">
+              <a:lnSpc>
+                <a:spcPct val="125000"/>
+              </a:lnSpc>
+              <a:spcAft>
+                <a:spcPts val="600"/>
+              </a:spcAft>
+            </a:pPr>
+            <a:r>
+              <a:rPr sz="1200" b="1">
+                <a:solidFill>
+                  <a:srgbClr val="00907F"/>
+                </a:solidFill>
+                <a:latin typeface="Segoe UI"/>
+              </a:rPr>
+              <a:t>MEASURABLE OBSERVABLES</a:t>
+            </a:r>
+          </a:p>
+        </p:txBody>
+      </p:sp>
+      <p:sp>
+        <p:nvSpPr>
+          <p:cNvPr id="8" name="TextBox 7"/>
+          <p:cNvSpPr txBox="1"/>
+          <p:nvPr/>
+        </p:nvSpPr>
+        <p:spPr>
+          <a:xfrm>
+            <a:off x="896112" y="2953512"/>
+            <a:ext cx="3112922" cy="822960"/>
+          </a:xfrm>
+          <a:prstGeom prst="rect">
+            <a:avLst/>
+          </a:prstGeom>
+          <a:noFill/>
+        </p:spPr>
+        <p:txBody>
+          <a:bodyPr wrap="square">
+            <a:spAutoFit/>
+          </a:bodyPr>
+          <a:lstStyle/>
+          <a:p>
+            <a:pPr algn="l">
+              <a:lnSpc>
+                <a:spcPct val="125000"/>
+              </a:lnSpc>
+              <a:spcAft>
+                <a:spcPts val="600"/>
+              </a:spcAft>
+            </a:pPr>
+            <a:r>
+              <a:rPr sz="1600" b="0">
+                <a:solidFill>
+                  <a:srgbClr val="171A14"/>
+                </a:solidFill>
+                <a:latin typeface="Segoe UI"/>
+              </a:rPr>
+              <a:t>14  →  24</a:t>
+            </a:r>
+          </a:p>
+        </p:txBody>
+      </p:sp>
+      <p:sp>
+        <p:nvSpPr>
+          <p:cNvPr id="9" name="TextBox 8"/>
+          <p:cNvSpPr txBox="1"/>
+          <p:nvPr/>
+        </p:nvSpPr>
+        <p:spPr>
+          <a:xfrm>
+            <a:off x="896112" y="3557016"/>
+            <a:ext cx="3112922" cy="457200"/>
+          </a:xfrm>
+          <a:prstGeom prst="rect">
+            <a:avLst/>
+          </a:prstGeom>
+          <a:noFill/>
+        </p:spPr>
+        <p:txBody>
+          <a:bodyPr wrap="square">
+            <a:spAutoFit/>
+          </a:bodyPr>
+          <a:lstStyle/>
+          <a:p>
+            <a:pPr algn="l">
+              <a:lnSpc>
+                <a:spcPct val="125000"/>
+              </a:lnSpc>
+              <a:spcAft>
+                <a:spcPts val="600"/>
+              </a:spcAft>
+            </a:pPr>
+            <a:r>
+              <a:rPr sz="1150" b="0">
+                <a:solidFill>
+                  <a:srgbClr val="66705C"/>
+                </a:solidFill>
+                <a:latin typeface="Segoe UI"/>
+              </a:rPr>
+              <a:t>Ten became measurable for the first time. The forward corpus carries NSEC3 parameters, DNSKEY flags and CDS, which delegation data cannot.</a:t>
+            </a:r>
+          </a:p>
+        </p:txBody>
+      </p:sp>
+      <p:sp>
+        <p:nvSpPr>
+          <p:cNvPr id="10" name="Rectangle 9"/>
+          <p:cNvSpPr/>
+          <p:nvPr/>
+        </p:nvSpPr>
+        <p:spPr>
+          <a:xfrm>
+            <a:off x="4374794" y="2478024"/>
+            <a:ext cx="3442106" cy="1645920"/>
+          </a:xfrm>
+          <a:prstGeom prst="rect">
+            <a:avLst/>
+          </a:prstGeom>
+          <a:solidFill>
+            <a:srgbClr val="F6F7F3"/>
+          </a:solidFill>
+          <a:ln w="9525">
+            <a:solidFill>
+              <a:srgbClr val="D3D8CC"/>
+            </a:solidFill>
+          </a:ln>
+          <a:effectLst/>
+        </p:spPr>
+        <p:style>
+          <a:lnRef idx="1">
+            <a:schemeClr val="accent1"/>
+          </a:lnRef>
+          <a:fillRef idx="3">
+            <a:schemeClr val="accent1"/>
+          </a:fillRef>
+          <a:effectRef idx="2">
+            <a:schemeClr val="accent1"/>
+          </a:effectRef>
+          <a:fontRef idx="minor">
+            <a:schemeClr val="lt1"/>
+          </a:fontRef>
+        </p:style>
+        <p:txBody>
+          <a:bodyPr rtlCol="0" anchor="ctr"/>
+          <a:lstStyle/>
+          <a:p/>
+        </p:txBody>
+      </p:sp>
+      <p:sp>
+        <p:nvSpPr>
+          <p:cNvPr id="11" name="TextBox 10"/>
+          <p:cNvSpPr txBox="1"/>
+          <p:nvPr/>
+        </p:nvSpPr>
+        <p:spPr>
+          <a:xfrm>
+            <a:off x="4539386" y="2606040"/>
+            <a:ext cx="3112922" cy="274320"/>
+          </a:xfrm>
+          <a:prstGeom prst="rect">
+            <a:avLst/>
+          </a:prstGeom>
+          <a:noFill/>
+        </p:spPr>
+        <p:txBody>
+          <a:bodyPr wrap="square">
+            <a:spAutoFit/>
+          </a:bodyPr>
+          <a:lstStyle/>
+          <a:p>
+            <a:pPr algn="l">
+              <a:lnSpc>
+                <a:spcPct val="125000"/>
+              </a:lnSpc>
+              <a:spcAft>
+                <a:spcPts val="600"/>
+              </a:spcAft>
+            </a:pPr>
+            <a:r>
+              <a:rPr sz="1200" b="1">
+                <a:solidFill>
+                  <a:srgbClr val="00907F"/>
+                </a:solidFill>
+                <a:latin typeface="Segoe UI"/>
+              </a:rPr>
+              <a:t>FIRST-SEEN DATES MOVED EARLIER</a:t>
+            </a:r>
+          </a:p>
+        </p:txBody>
+      </p:sp>
+      <p:sp>
+        <p:nvSpPr>
+          <p:cNvPr id="12" name="TextBox 11"/>
+          <p:cNvSpPr txBox="1"/>
+          <p:nvPr/>
+        </p:nvSpPr>
+        <p:spPr>
+          <a:xfrm>
+            <a:off x="4539386" y="2953512"/>
+            <a:ext cx="3112922" cy="822960"/>
+          </a:xfrm>
+          <a:prstGeom prst="rect">
+            <a:avLst/>
+          </a:prstGeom>
+          <a:noFill/>
+        </p:spPr>
+        <p:txBody>
+          <a:bodyPr wrap="square">
+            <a:spAutoFit/>
+          </a:bodyPr>
+          <a:lstStyle/>
+          <a:p>
+            <a:pPr algn="l">
+              <a:lnSpc>
+                <a:spcPct val="125000"/>
+              </a:lnSpc>
+              <a:spcAft>
+                <a:spcPts val="600"/>
+              </a:spcAft>
+            </a:pPr>
+            <a:r>
+              <a:rPr sz="1600" b="0">
+                <a:solidFill>
+                  <a:srgbClr val="171A14"/>
+                </a:solidFill>
+                <a:latin typeface="Segoe UI"/>
+              </a:rPr>
+              <a:t>14 of them</a:t>
+            </a:r>
+          </a:p>
+        </p:txBody>
+      </p:sp>
+      <p:sp>
+        <p:nvSpPr>
+          <p:cNvPr id="13" name="TextBox 12"/>
+          <p:cNvSpPr txBox="1"/>
+          <p:nvPr/>
+        </p:nvSpPr>
+        <p:spPr>
+          <a:xfrm>
+            <a:off x="4539386" y="3557016"/>
+            <a:ext cx="3112922" cy="457200"/>
+          </a:xfrm>
+          <a:prstGeom prst="rect">
+            <a:avLst/>
+          </a:prstGeom>
+          <a:noFill/>
+        </p:spPr>
+        <p:txBody>
+          <a:bodyPr wrap="square">
+            <a:spAutoFit/>
+          </a:bodyPr>
+          <a:lstStyle/>
+          <a:p>
+            <a:pPr algn="l">
+              <a:lnSpc>
+                <a:spcPct val="125000"/>
+              </a:lnSpc>
+              <a:spcAft>
+                <a:spcPts val="600"/>
+              </a:spcAft>
+            </a:pPr>
+            <a:r>
+              <a:rPr sz="1150" b="0">
+                <a:solidFill>
+                  <a:srgbClr val="66705C"/>
+                </a:solidFill>
+                <a:latin typeface="Segoe UI"/>
+              </a:rPr>
+              <a:t>Existence is a minimum over all evidence, so more corpus can only move a date earlier. Largest: SHA-384 digest −4.1 y, Ed25519 −3.7 y.</a:t>
+            </a:r>
+          </a:p>
+        </p:txBody>
+      </p:sp>
+      <p:sp>
+        <p:nvSpPr>
+          <p:cNvPr id="14" name="Rectangle 13"/>
+          <p:cNvSpPr/>
+          <p:nvPr/>
+        </p:nvSpPr>
+        <p:spPr>
+          <a:xfrm>
+            <a:off x="8018068" y="2478024"/>
+            <a:ext cx="3442106" cy="1645920"/>
+          </a:xfrm>
+          <a:prstGeom prst="rect">
+            <a:avLst/>
+          </a:prstGeom>
+          <a:solidFill>
+            <a:srgbClr val="F6F7F3"/>
+          </a:solidFill>
+          <a:ln w="9525">
+            <a:solidFill>
+              <a:srgbClr val="D3D8CC"/>
+            </a:solidFill>
+          </a:ln>
+          <a:effectLst/>
+        </p:spPr>
+        <p:style>
+          <a:lnRef idx="1">
+            <a:schemeClr val="accent1"/>
+          </a:lnRef>
+          <a:fillRef idx="3">
+            <a:schemeClr val="accent1"/>
+          </a:fillRef>
+          <a:effectRef idx="2">
+            <a:schemeClr val="accent1"/>
+          </a:effectRef>
+          <a:fontRef idx="minor">
+            <a:schemeClr val="lt1"/>
+          </a:fontRef>
+        </p:style>
+        <p:txBody>
+          <a:bodyPr rtlCol="0" anchor="ctr"/>
+          <a:lstStyle/>
+          <a:p/>
+        </p:txBody>
+      </p:sp>
+      <p:sp>
+        <p:nvSpPr>
+          <p:cNvPr id="15" name="TextBox 14"/>
+          <p:cNvSpPr txBox="1"/>
+          <p:nvPr/>
+        </p:nvSpPr>
+        <p:spPr>
+          <a:xfrm>
+            <a:off x="8182660" y="2606040"/>
+            <a:ext cx="3112922" cy="274320"/>
+          </a:xfrm>
+          <a:prstGeom prst="rect">
+            <a:avLst/>
+          </a:prstGeom>
+          <a:noFill/>
+        </p:spPr>
+        <p:txBody>
+          <a:bodyPr wrap="square">
+            <a:spAutoFit/>
+          </a:bodyPr>
+          <a:lstStyle/>
+          <a:p>
+            <a:pPr algn="l">
+              <a:lnSpc>
+                <a:spcPct val="125000"/>
+              </a:lnSpc>
+              <a:spcAft>
+                <a:spcPts val="600"/>
+              </a:spcAft>
+            </a:pPr>
+            <a:r>
+              <a:rPr sz="1200" b="1">
+                <a:solidFill>
+                  <a:srgbClr val="00907F"/>
+                </a:solidFill>
+                <a:latin typeface="Segoe UI"/>
+              </a:rPr>
+              <a:t>A FINDING WITHDRAWN</a:t>
+            </a:r>
+          </a:p>
+        </p:txBody>
+      </p:sp>
+      <p:sp>
+        <p:nvSpPr>
+          <p:cNvPr id="16" name="TextBox 15"/>
+          <p:cNvSpPr txBox="1"/>
+          <p:nvPr/>
+        </p:nvSpPr>
+        <p:spPr>
+          <a:xfrm>
+            <a:off x="8182660" y="2953512"/>
+            <a:ext cx="3112922" cy="822960"/>
+          </a:xfrm>
+          <a:prstGeom prst="rect">
+            <a:avLst/>
+          </a:prstGeom>
+          <a:noFill/>
+        </p:spPr>
+        <p:txBody>
+          <a:bodyPr wrap="square">
+            <a:spAutoFit/>
+          </a:bodyPr>
+          <a:lstStyle/>
+          <a:p>
+            <a:pPr algn="l">
+              <a:lnSpc>
+                <a:spcPct val="125000"/>
+              </a:lnSpc>
+              <a:spcAft>
+                <a:spcPts val="600"/>
+              </a:spcAft>
+            </a:pPr>
+            <a:r>
+              <a:rPr sz="1600" b="0">
+                <a:solidFill>
+                  <a:srgbClr val="171A14"/>
+                </a:solidFill>
+                <a:latin typeface="Segoe UI"/>
+              </a:rPr>
+              <a:t>no longer true</a:t>
+            </a:r>
+          </a:p>
+        </p:txBody>
+      </p:sp>
+      <p:sp>
+        <p:nvSpPr>
+          <p:cNvPr id="17" name="TextBox 16"/>
+          <p:cNvSpPr txBox="1"/>
+          <p:nvPr/>
+        </p:nvSpPr>
+        <p:spPr>
+          <a:xfrm>
+            <a:off x="8182660" y="3557016"/>
+            <a:ext cx="3112922" cy="457200"/>
+          </a:xfrm>
+          <a:prstGeom prst="rect">
+            <a:avLst/>
+          </a:prstGeom>
+          <a:noFill/>
+        </p:spPr>
+        <p:txBody>
+          <a:bodyPr wrap="square">
+            <a:spAutoFit/>
+          </a:bodyPr>
+          <a:lstStyle/>
+          <a:p>
+            <a:pPr algn="l">
+              <a:lnSpc>
+                <a:spcPct val="125000"/>
+              </a:lnSpc>
+              <a:spcAft>
+                <a:spcPts val="600"/>
+              </a:spcAft>
+            </a:pPr>
+            <a:r>
+              <a:rPr sz="1150" b="0">
+                <a:solidFill>
+                  <a:srgbClr val="66705C"/>
+                </a:solidFill>
+                <a:latin typeface="Segoe UI"/>
+              </a:rPr>
+              <a:t>“Each new algorithm takes longer to appear” held in reverse data and fails on the full corpus.</a:t>
+            </a:r>
+          </a:p>
+        </p:txBody>
+      </p:sp>
       <p:graphicFrame>
         <p:nvGraphicFramePr>
-          <p:cNvPr id="5" name="Table 4"/>
+          <p:cNvPr id="18" name="Table 17"/>
           <p:cNvGraphicFramePr>
             <a:graphicFrameLocks noGrp="1"/>
           </p:cNvGraphicFramePr>
           <p:nvPr/>
         </p:nvGraphicFramePr>
         <p:xfrm>
-          <a:off x="731520" y="1911096"/>
-          <a:ext cx="10728654" cy="2743200"/>
+          <a:off x="731520" y="4288536"/>
+          <a:ext cx="10728652" cy="1865376"/>
         </p:xfrm>
         <a:graphic>
           <a:graphicData uri="http://schemas.openxmlformats.org/drawingml/2006/table">
@@ -9827,11 +12338,12 @@
                 <a:tableStyleId>{5C22544A-7EE6-4342-B048-85BDC9FD1C3A}</a:tableStyleId>
               </a:tblPr>
               <a:tblGrid>
-                <a:gridCol w="6008046"/>
-                <a:gridCol w="2360304"/>
-                <a:gridCol w="2360304"/>
+                <a:gridCol w="3218596"/>
+                <a:gridCol w="1716584"/>
+                <a:gridCol w="1931157"/>
+                <a:gridCol w="3862315"/>
               </a:tblGrid>
-              <a:tr h="548640">
+              <a:tr h="310896">
                 <a:tc>
                   <a:txBody>
                     <a:bodyPr/>
@@ -9844,7 +12356,7 @@
                           </a:solidFill>
                           <a:latin typeface="Segoe UI"/>
                         </a:rPr>
-                        <a:t>What the change requires</a:t>
+                        <a:t>New cryptographic primitive</a:t>
                       </a:r>
                     </a:p>
                   </a:txBody>
@@ -9866,7 +12378,7 @@
                           </a:solidFill>
                           <a:latin typeface="Segoe UI"/>
                         </a:rPr>
-                        <a:t>Measured on</a:t>
+                        <a:t>Published</a:t>
                       </a:r>
                     </a:p>
                   </a:txBody>
@@ -9888,7 +12400,7 @@
                           </a:solidFill>
                           <a:latin typeface="Segoe UI"/>
                         </a:rPr>
-                        <a:t>Onset</a:t>
+                        <a:t>Reverse only</a:t>
                       </a:r>
                     </a:p>
                   </a:txBody>
@@ -9898,8 +12410,30 @@
                     </a:solidFill>
                   </a:tcPr>
                 </a:tc>
+                <a:tc>
+                  <a:txBody>
+                    <a:bodyPr/>
+                    <a:lstStyle/>
+                    <a:p>
+                      <a:r>
+                        <a:rPr sz="1200" b="1">
+                          <a:solidFill>
+                            <a:srgbClr val="66705C"/>
+                          </a:solidFill>
+                          <a:latin typeface="Segoe UI"/>
+                        </a:rPr>
+                        <a:t>Full corpus</a:t>
+                      </a:r>
+                    </a:p>
+                  </a:txBody>
+                  <a:tcPr anchor="ctr" marL="109728" marT="27432" marB="27432">
+                    <a:solidFill>
+                      <a:srgbClr val="F6F7F3"/>
+                    </a:solidFill>
+                  </a:tcPr>
+                </a:tc>
               </a:tr>
-              <a:tr h="548640">
+              <a:tr h="310896">
                 <a:tc>
                   <a:txBody>
                     <a:bodyPr/>
@@ -9912,7 +12446,7 @@
                           </a:solidFill>
                           <a:latin typeface="Segoe UI"/>
                         </a:rPr>
-                        <a:t>A new codepoint — the cryptography is already linked in</a:t>
+                        <a:t>ECC-GOST</a:t>
                       </a:r>
                     </a:p>
                   </a:txBody>
@@ -9934,7 +12468,7 @@
                           </a:solidFill>
                           <a:latin typeface="Segoe UI"/>
                         </a:rPr>
-                        <a:t>algorithms 8, 10</a:t>
+                        <a:t>2010-07</a:t>
                       </a:r>
                     </a:p>
                   </a:txBody>
@@ -9956,7 +12490,7 @@
                           </a:solidFill>
                           <a:latin typeface="Segoe UI"/>
                         </a:rPr>
-                        <a:t>0.5 – 0.8 y</a:t>
+                        <a:t>—</a:t>
                       </a:r>
                     </a:p>
                   </a:txBody>
@@ -9966,8 +12500,30 @@
                     </a:solidFill>
                   </a:tcPr>
                 </a:tc>
+                <a:tc>
+                  <a:txBody>
+                    <a:bodyPr/>
+                    <a:lstStyle/>
+                    <a:p>
+                      <a:r>
+                        <a:rPr sz="1300" b="0">
+                          <a:solidFill>
+                            <a:srgbClr val="171A14"/>
+                          </a:solidFill>
+                          <a:latin typeface="Segoe UI"/>
+                        </a:rPr>
+                        <a:t>2.4 y</a:t>
+                      </a:r>
+                    </a:p>
+                  </a:txBody>
+                  <a:tcPr anchor="ctr" marL="109728" marT="27432" marB="27432">
+                    <a:solidFill>
+                      <a:srgbClr val="FFFFFF"/>
+                    </a:solidFill>
+                  </a:tcPr>
+                </a:tc>
               </a:tr>
-              <a:tr h="548640">
+              <a:tr h="310896">
                 <a:tc>
                   <a:txBody>
                     <a:bodyPr/>
@@ -9980,7 +12536,7 @@
                           </a:solidFill>
                           <a:latin typeface="Segoe UI"/>
                         </a:rPr>
-                        <a:t>A new DS digest — a hash, parent side only</a:t>
+                        <a:t>ECDSA P-256</a:t>
                       </a:r>
                     </a:p>
                   </a:txBody>
@@ -10002,7 +12558,7 @@
                           </a:solidFill>
                           <a:latin typeface="Segoe UI"/>
                         </a:rPr>
-                        <a:t>digests 3, 4</a:t>
+                        <a:t>2012-04</a:t>
                       </a:r>
                     </a:p>
                   </a:txBody>
@@ -10024,7 +12580,7 @@
                           </a:solidFill>
                           <a:latin typeface="Segoe UI"/>
                         </a:rPr>
-                        <a:t>0.8 – 1.3 y</a:t>
+                        <a:t>3.7 y</a:t>
                       </a:r>
                     </a:p>
                   </a:txBody>
@@ -10034,8 +12590,30 @@
                     </a:solidFill>
                   </a:tcPr>
                 </a:tc>
+                <a:tc>
+                  <a:txBody>
+                    <a:bodyPr/>
+                    <a:lstStyle/>
+                    <a:p>
+                      <a:r>
+                        <a:rPr sz="1300" b="0">
+                          <a:solidFill>
+                            <a:srgbClr val="171A14"/>
+                          </a:solidFill>
+                          <a:latin typeface="Segoe UI"/>
+                        </a:rPr>
+                        <a:t>3.6 y</a:t>
+                      </a:r>
+                    </a:p>
+                  </a:txBody>
+                  <a:tcPr anchor="ctr" marL="109728" marT="27432" marB="27432">
+                    <a:solidFill>
+                      <a:srgbClr val="FFFFFF"/>
+                    </a:solidFill>
+                  </a:tcPr>
+                </a:tc>
               </a:tr>
-              <a:tr h="548640">
+              <a:tr h="310896">
                 <a:tc>
                   <a:txBody>
                     <a:bodyPr/>
@@ -10048,7 +12626,7 @@
                           </a:solidFill>
                           <a:latin typeface="Segoe UI"/>
                         </a:rPr>
-                        <a:t>Same cryptography, new signalling</a:t>
+                        <a:t>ECDSA P-384</a:t>
                       </a:r>
                     </a:p>
                   </a:txBody>
@@ -10070,7 +12648,7 @@
                           </a:solidFill>
                           <a:latin typeface="Segoe UI"/>
                         </a:rPr>
-                        <a:t>algorithm 7</a:t>
+                        <a:t>2012-04</a:t>
                       </a:r>
                     </a:p>
                   </a:txBody>
@@ -10092,7 +12670,7 @@
                           </a:solidFill>
                           <a:latin typeface="Segoe UI"/>
                         </a:rPr>
-                        <a:t>1.4 y</a:t>
+                        <a:t>4.0 y</a:t>
                       </a:r>
                     </a:p>
                   </a:txBody>
@@ -10102,8 +12680,30 @@
                     </a:solidFill>
                   </a:tcPr>
                 </a:tc>
+                <a:tc>
+                  <a:txBody>
+                    <a:bodyPr/>
+                    <a:lstStyle/>
+                    <a:p>
+                      <a:r>
+                        <a:rPr sz="1300" b="0">
+                          <a:solidFill>
+                            <a:srgbClr val="171A14"/>
+                          </a:solidFill>
+                          <a:latin typeface="Segoe UI"/>
+                        </a:rPr>
+                        <a:t>3.9 y</a:t>
+                      </a:r>
+                    </a:p>
+                  </a:txBody>
+                  <a:tcPr anchor="ctr" marL="109728" marT="27432" marB="27432">
+                    <a:solidFill>
+                      <a:srgbClr val="FFFFFF"/>
+                    </a:solidFill>
+                  </a:tcPr>
+                </a:tc>
               </a:tr>
-              <a:tr h="548640">
+              <a:tr h="310896">
                 <a:tc>
                   <a:txBody>
                     <a:bodyPr/>
@@ -10116,7 +12716,7 @@
                           </a:solidFill>
                           <a:latin typeface="Segoe UI"/>
                         </a:rPr>
-                        <a:t>A NEW PRIMITIVE — signer AND validator must both ship</a:t>
+                        <a:t>Ed25519</a:t>
                       </a:r>
                     </a:p>
                   </a:txBody>
@@ -10138,7 +12738,7 @@
                           </a:solidFill>
                           <a:latin typeface="Segoe UI"/>
                         </a:rPr>
-                        <a:t>algorithms 12–16</a:t>
+                        <a:t>2017-02</a:t>
                       </a:r>
                     </a:p>
                   </a:txBody>
@@ -10160,7 +12760,119 @@
                           </a:solidFill>
                           <a:latin typeface="Segoe UI"/>
                         </a:rPr>
-                        <a:t>2.5 – 5.8 y</a:t>
+                        <a:t>5.6 y</a:t>
+                      </a:r>
+                    </a:p>
+                  </a:txBody>
+                  <a:tcPr anchor="ctr" marL="109728" marT="27432" marB="27432">
+                    <a:solidFill>
+                      <a:srgbClr val="FFFFFF"/>
+                    </a:solidFill>
+                  </a:tcPr>
+                </a:tc>
+                <a:tc>
+                  <a:txBody>
+                    <a:bodyPr/>
+                    <a:lstStyle/>
+                    <a:p>
+                      <a:r>
+                        <a:rPr sz="1300" b="0">
+                          <a:solidFill>
+                            <a:srgbClr val="171A14"/>
+                          </a:solidFill>
+                          <a:latin typeface="Segoe UI"/>
+                        </a:rPr>
+                        <a:t>1.9 y  ← the newest is the fastest</a:t>
+                      </a:r>
+                    </a:p>
+                  </a:txBody>
+                  <a:tcPr anchor="ctr" marL="109728" marT="27432" marB="27432">
+                    <a:solidFill>
+                      <a:srgbClr val="FFFFFF"/>
+                    </a:solidFill>
+                  </a:tcPr>
+                </a:tc>
+              </a:tr>
+              <a:tr h="310896">
+                <a:tc>
+                  <a:txBody>
+                    <a:bodyPr/>
+                    <a:lstStyle/>
+                    <a:p>
+                      <a:r>
+                        <a:rPr sz="1300" b="0">
+                          <a:solidFill>
+                            <a:srgbClr val="171A14"/>
+                          </a:solidFill>
+                          <a:latin typeface="Segoe UI"/>
+                        </a:rPr>
+                        <a:t>Ed448</a:t>
+                      </a:r>
+                    </a:p>
+                  </a:txBody>
+                  <a:tcPr anchor="ctr" marL="109728" marT="27432" marB="27432">
+                    <a:solidFill>
+                      <a:srgbClr val="FFFFFF"/>
+                    </a:solidFill>
+                  </a:tcPr>
+                </a:tc>
+                <a:tc>
+                  <a:txBody>
+                    <a:bodyPr/>
+                    <a:lstStyle/>
+                    <a:p>
+                      <a:r>
+                        <a:rPr sz="1300" b="0">
+                          <a:solidFill>
+                            <a:srgbClr val="171A14"/>
+                          </a:solidFill>
+                          <a:latin typeface="Segoe UI"/>
+                        </a:rPr>
+                        <a:t>2017-02</a:t>
+                      </a:r>
+                    </a:p>
+                  </a:txBody>
+                  <a:tcPr anchor="ctr" marL="109728" marT="27432" marB="27432">
+                    <a:solidFill>
+                      <a:srgbClr val="FFFFFF"/>
+                    </a:solidFill>
+                  </a:tcPr>
+                </a:tc>
+                <a:tc>
+                  <a:txBody>
+                    <a:bodyPr/>
+                    <a:lstStyle/>
+                    <a:p>
+                      <a:r>
+                        <a:rPr sz="1300" b="0">
+                          <a:solidFill>
+                            <a:srgbClr val="171A14"/>
+                          </a:solidFill>
+                          <a:latin typeface="Segoe UI"/>
+                        </a:rPr>
+                        <a:t>5.8 y</a:t>
+                      </a:r>
+                    </a:p>
+                  </a:txBody>
+                  <a:tcPr anchor="ctr" marL="109728" marT="27432" marB="27432">
+                    <a:solidFill>
+                      <a:srgbClr val="FFFFFF"/>
+                    </a:solidFill>
+                  </a:tcPr>
+                </a:tc>
+                <a:tc>
+                  <a:txBody>
+                    <a:bodyPr/>
+                    <a:lstStyle/>
+                    <a:p>
+                      <a:r>
+                        <a:rPr sz="1300" b="0">
+                          <a:solidFill>
+                            <a:srgbClr val="171A14"/>
+                          </a:solidFill>
+                          <a:latin typeface="Segoe UI"/>
+                        </a:rPr>
+                        <a:t>3.2 y</a:t>
                       </a:r>
                     </a:p>
                   </a:txBody>
@@ -10177,14 +12889,14 @@
       </p:graphicFrame>
       <p:sp>
         <p:nvSpPr>
-          <p:cNvPr id="6" name="TextBox 5"/>
+          <p:cNvPr id="19" name="TextBox 18"/>
           <p:cNvSpPr txBox="1"/>
           <p:nvPr/>
         </p:nvSpPr>
         <p:spPr>
           <a:xfrm>
-            <a:off x="731520" y="4882896"/>
-            <a:ext cx="10728655" cy="1371600"/>
+            <a:off x="731520" y="6263640"/>
+            <a:ext cx="10728655" cy="548640"/>
           </a:xfrm>
           <a:prstGeom prst="rect">
             <a:avLst/>
@@ -10206,51 +12918,13 @@
               </a:spcAft>
             </a:pPr>
             <a:r>
-              <a:rPr sz="1600" b="0">
-                <a:solidFill>
-                  <a:srgbClr val="171A14"/>
+              <a:rPr sz="1250" b="0">
+                <a:solidFill>
+                  <a:srgbClr val="66705C"/>
                 </a:solidFill>
                 <a:latin typeface="Segoe UI"/>
               </a:rPr>
-              <a:t>The one real gap in the data — 1.4 y to 2.5 y — falls exactly where a change starts needing both ends. Not difficulty: Ed25519 is no harder to implement than RSA/SHA-512.</a:t>
-            </a:r>
-          </a:p>
-          <a:p>
-            <a:pPr algn="l">
-              <a:lnSpc>
-                <a:spcPct val="125000"/>
-              </a:lnSpc>
-              <a:spcAft>
-                <a:spcPts val="600"/>
-              </a:spcAft>
-            </a:pPr>
-            <a:r>
-              <a:rPr sz="1600" b="0">
-                <a:solidFill>
-                  <a:srgbClr val="171A14"/>
-                </a:solidFill>
-                <a:latin typeface="Segoe UI"/>
-              </a:rPr>
-              <a:t/>
-            </a:r>
-          </a:p>
-          <a:p>
-            <a:pPr algn="l">
-              <a:lnSpc>
-                <a:spcPct val="125000"/>
-              </a:lnSpc>
-              <a:spcAft>
-                <a:spcPts val="600"/>
-              </a:spcAft>
-            </a:pPr>
-            <a:r>
-              <a:rPr sz="1600" b="0">
-                <a:solidFill>
-                  <a:srgbClr val="171A14"/>
-                </a:solidFill>
-                <a:latin typeface="Segoe UI"/>
-              </a:rPr>
-              <a:t>RFC 5218 calls this “incrementally deployable”, which is the citation for the mechanism.</a:t>
+              <a:t>Reverse only: 3.7 → 4.0 → 5.6 → 5.8, monotonic. Full corpus: 2.4 → 3.6 → 3.9 → 1.9 → 3.2, not monotonic. The pattern was a property of one corpus: reverse-DNS operators adopt late, so every newer algorithm looked slower. .se had Ed25519 in 2019-01; the RIRs not until 2022-08.</a:t>
             </a:r>
           </a:p>
         </p:txBody>

--- a/out/analysis/dnssec_framework.pptx
+++ b/out/analysis/dnssec_framework.pptx
@@ -4434,7 +4434,7 @@
                 </a:solidFill>
                 <a:latin typeface="Segoe UI"/>
               </a:rPr>
-              <a:t>Four of six tracked mechanisms are below their own peak.</a:t>
+              <a:t>Reverse panel, the one series with no composition break: four of six mechanisms sit below their own peak.</a:t>
             </a:r>
           </a:p>
         </p:txBody>
@@ -4860,7 +4860,7 @@
                 </a:solidFill>
                 <a:latin typeface="Segoe UI"/>
               </a:rPr>
-              <a:t>7.81%</a:t>
+              <a:t>7.30%</a:t>
             </a:r>
           </a:p>
           <a:p>
@@ -4879,7 +4879,7 @@
                 </a:solidFill>
                 <a:latin typeface="Segoe UI"/>
               </a:rPr>
-              <a:t>514 zones</a:t>
+              <a:t>15,888 records</a:t>
             </a:r>
           </a:p>
         </p:txBody>
@@ -5049,7 +5049,7 @@
                 </a:solidFill>
                 <a:latin typeface="Segoe UI"/>
               </a:rPr>
-              <a:t>21.77%</a:t>
+              <a:t>18.26%</a:t>
             </a:r>
           </a:p>
           <a:p>
@@ -5068,7 +5068,7 @@
                 </a:solidFill>
                 <a:latin typeface="Segoe UI"/>
               </a:rPr>
-              <a:t>1,433 zones</a:t>
+              <a:t>19,652 records</a:t>
             </a:r>
           </a:p>
         </p:txBody>
@@ -5335,7 +5335,7 @@
               </a:spcAft>
             </a:pPr>
             <a:r>
-              <a:rPr sz="1600" b="0">
+              <a:rPr sz="1500" b="0">
                 <a:solidFill>
                   <a:srgbClr val="171A14"/>
                 </a:solidFill>
@@ -5354,13 +5354,32 @@
               </a:spcAft>
             </a:pPr>
             <a:r>
-              <a:rPr sz="1600" b="0">
+              <a:rPr sz="1500" b="0">
                 <a:solidFill>
                   <a:srgbClr val="171A14"/>
                 </a:solidFill>
                 <a:latin typeface="Segoe UI"/>
               </a:rPr>
-              <a:t>400 zones carry both.</a:t>
+              <a:t/>
+            </a:r>
+          </a:p>
+          <a:p>
+            <a:pPr algn="l">
+              <a:lnSpc>
+                <a:spcPct val="125000"/>
+              </a:lnSpc>
+              <a:spcAft>
+                <a:spcPts val="600"/>
+              </a:spcAft>
+            </a:pPr>
+            <a:r>
+              <a:rPr sz="1500" b="0">
+                <a:solidFill>
+                  <a:srgbClr val="171A14"/>
+                </a:solidFill>
+                <a:latin typeface="Segoe UI"/>
+              </a:rPr>
+              <a:t>Both RFCs published 2025-11 and the forward corpus ends 2023-12, so the entire post-publication window is reverse data — a property of the corpus, not a choice.</a:t>
             </a:r>
           </a:p>
         </p:txBody>
@@ -5563,7 +5582,7 @@
         </p:nvGraphicFramePr>
         <p:xfrm>
           <a:off x="731520" y="2478024"/>
-          <a:ext cx="10728654" cy="3566160"/>
+          <a:ext cx="10728654" cy="4279392"/>
         </p:xfrm>
         <a:graphic>
           <a:graphicData uri="http://schemas.openxmlformats.org/drawingml/2006/table">
@@ -5634,7 +5653,7 @@
                           </a:solidFill>
                           <a:latin typeface="Segoe UI"/>
                         </a:rPr>
-                        <a:t>The reverse corpus holds NS and DS records only</a:t>
+                        <a:t>Forward and reverse cover different periods</a:t>
                       </a:r>
                     </a:p>
                   </a:txBody>
@@ -5656,7 +5675,53 @@
                           </a:solidFill>
                           <a:latin typeface="Segoe UI"/>
                         </a:rPr>
-                        <a:t>9 configured observables — NSEC3 parameters, DNSKEY flags, CDS, TLSA — have nothing that could match. Not negative results.</a:t>
+                        <a:t>Forward ends 2023-12, the RIRs run to 2026-08. Any share spanning 2024-01 compares two populations: 11 of 15 peak-to-now drops are not comparable, and none of them is quoted.</a:t>
+                      </a:r>
+                    </a:p>
+                  </a:txBody>
+                  <a:tcPr anchor="ctr" marL="109728" marT="27432" marB="27432">
+                    <a:solidFill>
+                      <a:srgbClr val="FFFFFF"/>
+                    </a:solidFill>
+                  </a:tcPr>
+                </a:tc>
+              </a:tr>
+              <a:tr h="713232">
+                <a:tc>
+                  <a:txBody>
+                    <a:bodyPr/>
+                    <a:lstStyle/>
+                    <a:p>
+                      <a:r>
+                        <a:rPr sz="1300" b="0">
+                          <a:solidFill>
+                            <a:srgbClr val="171A14"/>
+                          </a:solidFill>
+                          <a:latin typeface="Segoe UI"/>
+                        </a:rPr>
+                        <a:t>Only TLSA is still unreachable</a:t>
+                      </a:r>
+                    </a:p>
+                  </a:txBody>
+                  <a:tcPr anchor="ctr" marL="109728" marT="27432" marB="27432">
+                    <a:solidFill>
+                      <a:srgbClr val="FFFFFF"/>
+                    </a:solidFill>
+                  </a:tcPr>
+                </a:tc>
+                <a:tc>
+                  <a:txBody>
+                    <a:bodyPr/>
+                    <a:lstStyle/>
+                    <a:p>
+                      <a:r>
+                        <a:rPr sz="1300" b="0">
+                          <a:solidFill>
+                            <a:srgbClr val="171A14"/>
+                          </a:solidFill>
+                          <a:latin typeface="Segoe UI"/>
+                        </a:rPr>
+                        <a:t>The forward corpus closed the rest — 2 observables have no denominator anywhere, down from 9. Untestable, not negative.</a:t>
                       </a:r>
                     </a:p>
                   </a:txBody>
@@ -6081,7 +6146,7 @@
                           </a:solidFill>
                           <a:latin typeface="Segoe UI"/>
                         </a:rPr>
-                        <a:t>Run the pipeline over the full 14 TB OpenINTEL cache</a:t>
+                        <a:t>Analyse forward and reverse separately, never pooled</a:t>
                       </a:r>
                     </a:p>
                   </a:txBody>
@@ -6103,7 +6168,7 @@
                           </a:solidFill>
                           <a:latin typeface="Segoe UI"/>
                         </a:rPr>
-                        <a:t>Everything here is reverse-DNS only. The forward corpus has the record types this corpus lacks.</a:t>
+                        <a:t>They cover different periods, so a pooled share crosses a break at 2024-01. This is the one thing blocking the prevalence numbers; it needs no rescan, only the analyse stage.</a:t>
                       </a:r>
                     </a:p>
                   </a:txBody>
@@ -6149,7 +6214,7 @@
                           </a:solidFill>
                           <a:latin typeface="Segoe UI"/>
                         </a:rPr>
-                        <a:t>Decide: share measure, cumulative measure, or both</a:t>
+                        <a:t>Extend the forward mirror past 2023-12</a:t>
                       </a:r>
                     </a:p>
                   </a:txBody>
@@ -6171,7 +6236,7 @@
                           </a:solidFill>
                           <a:latin typeface="Segoe UI"/>
                         </a:rPr>
-                        <a:t>A cumulative measure would let us inherit Rogers’ thresholds, but it cannot see displacement.</a:t>
+                        <a:t>RFC 9905 and 9906 published 2025-11, so the whole deprecation question is answerable only on reverse data until the forward mirror catches up.</a:t>
                       </a:r>
                     </a:p>
                   </a:txBody>
@@ -6217,7 +6282,7 @@
                           </a:solidFill>
                           <a:latin typeface="Segoe UI"/>
                         </a:rPr>
-                        <a:t>Settle whether displacement is genuinely unclaimed</a:t>
+                        <a:t>Decide: share measure, cumulative measure, or both</a:t>
                       </a:r>
                     </a:p>
                   </a:txBody>
@@ -6239,7 +6304,7 @@
                           </a:solidFill>
                           <a:latin typeface="Segoe UI"/>
                         </a:rPr>
-                        <a:t>If it is, it is a stronger contribution than the timeline. Needs someone who knows the literature better than a search does.</a:t>
+                        <a:t>A cumulative measure would let us inherit Rogers’ thresholds, but it cannot see displacement.</a:t>
                       </a:r>
                     </a:p>
                   </a:txBody>
@@ -6285,7 +6350,7 @@
                           </a:solidFill>
                           <a:latin typeface="Segoe UI"/>
                         </a:rPr>
-                        <a:t>Add the 13 measurable RFCs we do not screen</a:t>
+                        <a:t>Settle whether displacement is genuinely unclaimed</a:t>
                       </a:r>
                     </a:p>
                   </a:txBody>
@@ -6307,7 +6372,7 @@
                           </a:solidFill>
                           <a:latin typeface="Segoe UI"/>
                         </a:rPr>
-                        <a:t>Mechanical work. ZONEMD and compact denial of existence would extend the story, not just widen it.</a:t>
+                        <a:t>If it is, it is a stronger contribution than the timeline. Needs someone who knows the literature better than a search does.</a:t>
                       </a:r>
                     </a:p>
                   </a:txBody>
@@ -6353,7 +6418,7 @@
                           </a:solidFill>
                           <a:latin typeface="Segoe UI"/>
                         </a:rPr>
-                        <a:t>Re-run the forward scan under the current checklist</a:t>
+                        <a:t>Add the 13 measurable RFCs we do not screen</a:t>
                       </a:r>
                     </a:p>
                   </a:txBody>
@@ -6375,7 +6440,7 @@
                           </a:solidFill>
                           <a:latin typeface="Segoe UI"/>
                         </a:rPr>
-                        <a:t>RFC 5011 and 9276 are unresolved only because the forward run predates the 30-RFC checklist.</a:t>
+                        <a:t>ZONEMD, compact denial of existence, multi-signer. Mechanical work that would extend the story rather than just widen it.</a:t>
                       </a:r>
                     </a:p>
                   </a:txBody>
@@ -9090,7 +9155,7 @@
                 </a:solidFill>
                 <a:latin typeface="Segoe UI"/>
               </a:rPr>
-              <a:t>Thresholds were swept, not picked. The qualifying count is flat across 0.5–3% and 4–25%, so any value mid-plateau gives identical results. The ≥10-zone guard exists because the panel grew 201×: one zone was 3.1% of it in 2011 and is 0.016% now.</a:t>
+              <a:t>Thresholds were swept, not picked. The qualifying count is flat across 0.5–3% and 4–25%, so any value mid-plateau gives identical results. The ≥10-zone guard exists because a population grows: on the reverse panel one zone was 3.1% of it in 2011 and is 0.016% now — a 201× change in what the same threshold demands.</a:t>
             </a:r>
           </a:p>
         </p:txBody>
@@ -9234,7 +9299,7 @@
                 </a:solidFill>
                 <a:latin typeface="Segoe UI"/>
               </a:rPr>
-              <a:t>All three of these “first appeared”. Only one of them is used.</a:t>
+              <a:t>All three first appeared. Two reached real use, one never did, and one of those two has since fallen back.</a:t>
             </a:r>
           </a:p>
         </p:txBody>
@@ -9923,7 +9988,7 @@
                           </a:solidFill>
                           <a:latin typeface="Segoe UI"/>
                         </a:rPr>
-                        <a:t>71.1%</a:t>
+                        <a:t>see note</a:t>
                       </a:r>
                     </a:p>
                   </a:txBody>
@@ -10215,7 +10280,7 @@
                 </a:solidFill>
                 <a:latin typeface="Segoe UI"/>
               </a:rPr>
-              <a:t>The ≥10-zone guard exists because the panel grew 201×. Without it, RSA/SHA-256 and RSASHA1-NSEC3 both “reach 1%” in 2011-05 on a SINGLE zone — 1% of a 32-zone panel.</a:t>
+              <a:t>The ≥10-zone guard: on the reverse panel, RSA/SHA-256 and RSASHA1-NSEC3 both “reach 1%” in 2011-05 on a SINGLE zone — 1% of a 32-zone population.</a:t>
             </a:r>
           </a:p>
           <a:p>
@@ -12490,7 +12555,7 @@
                           </a:solidFill>
                           <a:latin typeface="Segoe UI"/>
                         </a:rPr>
-                        <a:t>—</a:t>
+                        <a:t>2.5 y</a:t>
                       </a:r>
                     </a:p>
                   </a:txBody>

--- a/out/analysis/dnssec_framework.pptx
+++ b/out/analysis/dnssec_framework.pptx
@@ -20,6 +20,9 @@
     <p:sldId id="268" r:id="rId19"/>
     <p:sldId id="269" r:id="rId20"/>
     <p:sldId id="270" r:id="rId21"/>
+    <p:sldId id="271" r:id="rId22"/>
+    <p:sldId id="272" r:id="rId23"/>
+    <p:sldId id="273" r:id="rId24"/>
   </p:sldIdLst>
   <p:sldSz cx="12191695" cy="6858000" type="screen4x3"/>
   <p:notesSz cx="6858000" cy="9144000"/>
@@ -3344,7 +3347,7 @@
                 </a:solidFill>
                 <a:latin typeface="Segoe UI"/>
               </a:rPr>
-              <a:t>INSIGHT 1</a:t>
+              <a:t>WHAT IT DOES</a:t>
             </a:r>
           </a:p>
         </p:txBody>
@@ -3386,20 +3389,62 @@
                 </a:solidFill>
                 <a:latin typeface="Segoe UI"/>
               </a:rPr>
-              <a:t>Being early tells you nothing about ending up used</a:t>
-            </a:r>
-          </a:p>
-        </p:txBody>
-      </p:sp>
-      <p:sp>
-        <p:nvSpPr>
-          <p:cNvPr id="4" name="Rectangle 3"/>
+              <a:t>The pipeline</a:t>
+            </a:r>
+          </a:p>
+        </p:txBody>
+      </p:sp>
+      <p:sp>
+        <p:nvSpPr>
+          <p:cNvPr id="4" name="TextBox 3"/>
+          <p:cNvSpPr txBox="1"/>
+          <p:nvPr/>
+        </p:nvSpPr>
+        <p:spPr>
+          <a:xfrm>
+            <a:off x="731520" y="1600200"/>
+            <a:ext cx="10728655" cy="457200"/>
+          </a:xfrm>
+          <a:prstGeom prst="rect">
+            <a:avLst/>
+          </a:prstGeom>
+          <a:noFill/>
+        </p:spPr>
+        <p:txBody>
+          <a:bodyPr wrap="square">
+            <a:spAutoFit/>
+          </a:bodyPr>
+          <a:lstStyle/>
+          <a:p>
+            <a:pPr algn="l">
+              <a:lnSpc>
+                <a:spcPct val="125000"/>
+              </a:lnSpc>
+              <a:spcAft>
+                <a:spcPts val="600"/>
+              </a:spcAft>
+            </a:pPr>
+            <a:r>
+              <a:rPr sz="1500" b="0">
+                <a:solidFill>
+                  <a:srgbClr val="66705C"/>
+                </a:solidFill>
+                <a:latin typeface="Segoe UI"/>
+              </a:rPr>
+              <a:t>Five stages, each resumable, each skippable.</a:t>
+            </a:r>
+          </a:p>
+        </p:txBody>
+      </p:sp>
+      <p:sp>
+        <p:nvSpPr>
+          <p:cNvPr id="5" name="Rectangle 4"/>
           <p:cNvSpPr/>
           <p:nvPr/>
         </p:nvSpPr>
         <p:spPr>
           <a:xfrm>
-            <a:off x="731520" y="1600200"/>
+            <a:off x="731520" y="2167128"/>
             <a:ext cx="10728655" cy="9525"/>
           </a:xfrm>
           <a:prstGeom prst="rect">
@@ -3435,40 +3480,451 @@
           </a:p>
         </p:txBody>
       </p:sp>
-      <p:pic>
-        <p:nvPicPr>
-          <p:cNvPr id="5" name="Picture 4" descr="onset_vs_spread.png"/>
-          <p:cNvPicPr>
-            <a:picLocks noChangeAspect="1"/>
-          </p:cNvPicPr>
-          <p:nvPr/>
-        </p:nvPicPr>
-        <p:blipFill>
-          <a:blip r:embed="rId2"/>
-          <a:stretch>
-            <a:fillRect/>
-          </a:stretch>
-        </p:blipFill>
-        <p:spPr>
-          <a:xfrm>
-            <a:off x="2388256" y="1911096"/>
-            <a:ext cx="7415182" cy="3840479"/>
-          </a:xfrm>
-          <a:prstGeom prst="rect">
-            <a:avLst/>
-          </a:prstGeom>
-        </p:spPr>
-      </p:pic>
-      <p:sp>
-        <p:nvSpPr>
-          <p:cNvPr id="6" name="TextBox 5"/>
+      <p:graphicFrame>
+        <p:nvGraphicFramePr>
+          <p:cNvPr id="6" name="Table 5"/>
+          <p:cNvGraphicFramePr>
+            <a:graphicFrameLocks noGrp="1"/>
+          </p:cNvGraphicFramePr>
+          <p:nvPr/>
+        </p:nvGraphicFramePr>
+        <p:xfrm>
+          <a:off x="731520" y="2478024"/>
+          <a:ext cx="10728654" cy="3072384"/>
+        </p:xfrm>
+        <a:graphic>
+          <a:graphicData uri="http://schemas.openxmlformats.org/drawingml/2006/table">
+            <a:tbl>
+              <a:tblPr firstRow="1" bandRow="1">
+                <a:tableStyleId>{5C22544A-7EE6-4342-B048-85BDC9FD1C3A}</a:tableStyleId>
+              </a:tblPr>
+              <a:tblGrid>
+                <a:gridCol w="1287438"/>
+                <a:gridCol w="5900760"/>
+                <a:gridCol w="3540456"/>
+              </a:tblGrid>
+              <a:tr h="512064">
+                <a:tc>
+                  <a:txBody>
+                    <a:bodyPr/>
+                    <a:lstStyle/>
+                    <a:p>
+                      <a:r>
+                        <a:rPr sz="1200" b="1">
+                          <a:solidFill>
+                            <a:srgbClr val="66705C"/>
+                          </a:solidFill>
+                          <a:latin typeface="Segoe UI"/>
+                        </a:rPr>
+                        <a:t>Stage</a:t>
+                      </a:r>
+                    </a:p>
+                  </a:txBody>
+                  <a:tcPr anchor="ctr" marL="109728" marT="27432" marB="27432">
+                    <a:solidFill>
+                      <a:srgbClr val="F6F7F3"/>
+                    </a:solidFill>
+                  </a:tcPr>
+                </a:tc>
+                <a:tc>
+                  <a:txBody>
+                    <a:bodyPr/>
+                    <a:lstStyle/>
+                    <a:p>
+                      <a:r>
+                        <a:rPr sz="1200" b="1">
+                          <a:solidFill>
+                            <a:srgbClr val="66705C"/>
+                          </a:solidFill>
+                          <a:latin typeface="Segoe UI"/>
+                        </a:rPr>
+                        <a:t>What happens</a:t>
+                      </a:r>
+                    </a:p>
+                  </a:txBody>
+                  <a:tcPr anchor="ctr" marL="109728" marT="27432" marB="27432">
+                    <a:solidFill>
+                      <a:srgbClr val="F6F7F3"/>
+                    </a:solidFill>
+                  </a:tcPr>
+                </a:tc>
+                <a:tc>
+                  <a:txBody>
+                    <a:bodyPr/>
+                    <a:lstStyle/>
+                    <a:p>
+                      <a:r>
+                        <a:rPr sz="1200" b="1">
+                          <a:solidFill>
+                            <a:srgbClr val="66705C"/>
+                          </a:solidFill>
+                          <a:latin typeface="Segoe UI"/>
+                        </a:rPr>
+                        <a:t>Output</a:t>
+                      </a:r>
+                    </a:p>
+                  </a:txBody>
+                  <a:tcPr anchor="ctr" marL="109728" marT="27432" marB="27432">
+                    <a:solidFill>
+                      <a:srgbClr val="F6F7F3"/>
+                    </a:solidFill>
+                  </a:tcPr>
+                </a:tc>
+              </a:tr>
+              <a:tr h="512064">
+                <a:tc>
+                  <a:txBody>
+                    <a:bodyPr/>
+                    <a:lstStyle/>
+                    <a:p>
+                      <a:r>
+                        <a:rPr sz="1300" b="0">
+                          <a:solidFill>
+                            <a:srgbClr val="171A14"/>
+                          </a:solidFill>
+                          <a:latin typeface="Segoe UI"/>
+                        </a:rPr>
+                        <a:t>ripe</a:t>
+                      </a:r>
+                    </a:p>
+                  </a:txBody>
+                  <a:tcPr anchor="ctr" marL="109728" marT="27432" marB="27432">
+                    <a:solidFill>
+                      <a:srgbClr val="FFFFFF"/>
+                    </a:solidFill>
+                  </a:tcPr>
+                </a:tc>
+                <a:tc>
+                  <a:txBody>
+                    <a:bodyPr/>
+                    <a:lstStyle/>
+                    <a:p>
+                      <a:r>
+                        <a:rPr sz="1300" b="0">
+                          <a:solidFill>
+                            <a:srgbClr val="171A14"/>
+                          </a:solidFill>
+                          <a:latin typeface="Segoe UI"/>
+                        </a:rPr>
+                        <a:t>Fetches RIPE’s reverse-delegation archive (the only stage that touches the network)</a:t>
+                      </a:r>
+                    </a:p>
+                  </a:txBody>
+                  <a:tcPr anchor="ctr" marL="109728" marT="27432" marB="27432">
+                    <a:solidFill>
+                      <a:srgbClr val="FFFFFF"/>
+                    </a:solidFill>
+                  </a:tcPr>
+                </a:tc>
+                <a:tc>
+                  <a:txBody>
+                    <a:bodyPr/>
+                    <a:lstStyle/>
+                    <a:p>
+                      <a:r>
+                        <a:rPr sz="1300" b="0">
+                          <a:solidFill>
+                            <a:srgbClr val="171A14"/>
+                          </a:solidFill>
+                          <a:latin typeface="Segoe UI"/>
+                        </a:rPr>
+                        <a:t>the reverse corpus</a:t>
+                      </a:r>
+                    </a:p>
+                  </a:txBody>
+                  <a:tcPr anchor="ctr" marL="109728" marT="27432" marB="27432">
+                    <a:solidFill>
+                      <a:srgbClr val="FFFFFF"/>
+                    </a:solidFill>
+                  </a:tcPr>
+                </a:tc>
+              </a:tr>
+              <a:tr h="512064">
+                <a:tc>
+                  <a:txBody>
+                    <a:bodyPr/>
+                    <a:lstStyle/>
+                    <a:p>
+                      <a:r>
+                        <a:rPr sz="1300" b="0">
+                          <a:solidFill>
+                            <a:srgbClr val="171A14"/>
+                          </a:solidFill>
+                          <a:latin typeface="Segoe UI"/>
+                        </a:rPr>
+                        <a:t>index</a:t>
+                      </a:r>
+                    </a:p>
+                  </a:txBody>
+                  <a:tcPr anchor="ctr" marL="109728" marT="27432" marB="27432">
+                    <a:solidFill>
+                      <a:srgbClr val="FFFFFF"/>
+                    </a:solidFill>
+                  </a:tcPr>
+                </a:tc>
+                <a:tc>
+                  <a:txBody>
+                    <a:bodyPr/>
+                    <a:lstStyle/>
+                    <a:p>
+                      <a:r>
+                        <a:rPr sz="1300" b="0">
+                          <a:solidFill>
+                            <a:srgbClr val="171A14"/>
+                          </a:solidFill>
+                          <a:latin typeface="Segoe UI"/>
+                        </a:rPr>
+                        <a:t>Walks every cache root on the NAS, merges them into one view</a:t>
+                      </a:r>
+                    </a:p>
+                  </a:txBody>
+                  <a:tcPr anchor="ctr" marL="109728" marT="27432" marB="27432">
+                    <a:solidFill>
+                      <a:srgbClr val="FFFFFF"/>
+                    </a:solidFill>
+                  </a:tcPr>
+                </a:tc>
+                <a:tc>
+                  <a:txBody>
+                    <a:bodyPr/>
+                    <a:lstStyle/>
+                    <a:p>
+                      <a:r>
+                        <a:rPr sz="1300" b="0">
+                          <a:solidFill>
+                            <a:srgbClr val="171A14"/>
+                          </a:solidFill>
+                          <a:latin typeface="Segoe UI"/>
+                        </a:rPr>
+                        <a:t>inventory.json</a:t>
+                      </a:r>
+                    </a:p>
+                  </a:txBody>
+                  <a:tcPr anchor="ctr" marL="109728" marT="27432" marB="27432">
+                    <a:solidFill>
+                      <a:srgbClr val="FFFFFF"/>
+                    </a:solidFill>
+                  </a:tcPr>
+                </a:tc>
+              </a:tr>
+              <a:tr h="512064">
+                <a:tc>
+                  <a:txBody>
+                    <a:bodyPr/>
+                    <a:lstStyle/>
+                    <a:p>
+                      <a:r>
+                        <a:rPr sz="1300" b="0">
+                          <a:solidFill>
+                            <a:srgbClr val="171A14"/>
+                          </a:solidFill>
+                          <a:latin typeface="Segoe UI"/>
+                        </a:rPr>
+                        <a:t>extract</a:t>
+                      </a:r>
+                    </a:p>
+                  </a:txBody>
+                  <a:tcPr anchor="ctr" marL="109728" marT="27432" marB="27432">
+                    <a:solidFill>
+                      <a:srgbClr val="FFFFFF"/>
+                    </a:solidFill>
+                  </a:tcPr>
+                </a:tc>
+                <a:tc>
+                  <a:txBody>
+                    <a:bodyPr/>
+                    <a:lstStyle/>
+                    <a:p>
+                      <a:r>
+                        <a:rPr sz="1300" b="0">
+                          <a:solidFill>
+                            <a:srgbClr val="171A14"/>
+                          </a:solidFill>
+                          <a:latin typeface="Segoe UI"/>
+                        </a:rPr>
+                        <a:t>One pass per source-day → tidy counts, one checkpoint each</a:t>
+                      </a:r>
+                    </a:p>
+                  </a:txBody>
+                  <a:tcPr anchor="ctr" marL="109728" marT="27432" marB="27432">
+                    <a:solidFill>
+                      <a:srgbClr val="FFFFFF"/>
+                    </a:solidFill>
+                  </a:tcPr>
+                </a:tc>
+                <a:tc>
+                  <a:txBody>
+                    <a:bodyPr/>
+                    <a:lstStyle/>
+                    <a:p>
+                      <a:r>
+                        <a:rPr sz="1300" b="0">
+                          <a:solidFill>
+                            <a:srgbClr val="171A14"/>
+                          </a:solidFill>
+                          <a:latin typeface="Segoe UI"/>
+                        </a:rPr>
+                        <a:t>timeline_monthly.csv</a:t>
+                      </a:r>
+                    </a:p>
+                  </a:txBody>
+                  <a:tcPr anchor="ctr" marL="109728" marT="27432" marB="27432">
+                    <a:solidFill>
+                      <a:srgbClr val="FFFFFF"/>
+                    </a:solidFill>
+                  </a:tcPr>
+                </a:tc>
+              </a:tr>
+              <a:tr h="512064">
+                <a:tc>
+                  <a:txBody>
+                    <a:bodyPr/>
+                    <a:lstStyle/>
+                    <a:p>
+                      <a:r>
+                        <a:rPr sz="1300" b="0">
+                          <a:solidFill>
+                            <a:srgbClr val="171A14"/>
+                          </a:solidFill>
+                          <a:latin typeface="Segoe UI"/>
+                        </a:rPr>
+                        <a:t>analyse</a:t>
+                      </a:r>
+                    </a:p>
+                  </a:txBody>
+                  <a:tcPr anchor="ctr" marL="109728" marT="27432" marB="27432">
+                    <a:solidFill>
+                      <a:srgbClr val="FFFFFF"/>
+                    </a:solidFill>
+                  </a:tcPr>
+                </a:tc>
+                <a:tc>
+                  <a:txBody>
+                    <a:bodyPr/>
+                    <a:lstStyle/>
+                    <a:p>
+                      <a:r>
+                        <a:rPr sz="1300" b="0">
+                          <a:solidFill>
+                            <a:srgbClr val="171A14"/>
+                          </a:solidFill>
+                          <a:latin typeface="Segoe UI"/>
+                        </a:rPr>
+                        <a:t>Bottom-up over observable changes, top-down over categories</a:t>
+                      </a:r>
+                    </a:p>
+                  </a:txBody>
+                  <a:tcPr anchor="ctr" marL="109728" marT="27432" marB="27432">
+                    <a:solidFill>
+                      <a:srgbClr val="FFFFFF"/>
+                    </a:solidFill>
+                  </a:tcPr>
+                </a:tc>
+                <a:tc>
+                  <a:txBody>
+                    <a:bodyPr/>
+                    <a:lstStyle/>
+                    <a:p>
+                      <a:r>
+                        <a:rPr sz="1300" b="0">
+                          <a:solidFill>
+                            <a:srgbClr val="171A14"/>
+                          </a:solidFill>
+                          <a:latin typeface="Segoe UI"/>
+                        </a:rPr>
+                        <a:t>bottom_up.json · top_down.json</a:t>
+                      </a:r>
+                    </a:p>
+                  </a:txBody>
+                  <a:tcPr anchor="ctr" marL="109728" marT="27432" marB="27432">
+                    <a:solidFill>
+                      <a:srgbClr val="FFFFFF"/>
+                    </a:solidFill>
+                  </a:tcPr>
+                </a:tc>
+              </a:tr>
+              <a:tr h="512064">
+                <a:tc>
+                  <a:txBody>
+                    <a:bodyPr/>
+                    <a:lstStyle/>
+                    <a:p>
+                      <a:r>
+                        <a:rPr sz="1300" b="0">
+                          <a:solidFill>
+                            <a:srgbClr val="171A14"/>
+                          </a:solidFill>
+                          <a:latin typeface="Segoe UI"/>
+                        </a:rPr>
+                        <a:t>report</a:t>
+                      </a:r>
+                    </a:p>
+                  </a:txBody>
+                  <a:tcPr anchor="ctr" marL="109728" marT="27432" marB="27432">
+                    <a:solidFill>
+                      <a:srgbClr val="FFFFFF"/>
+                    </a:solidFill>
+                  </a:tcPr>
+                </a:tc>
+                <a:tc>
+                  <a:txBody>
+                    <a:bodyPr/>
+                    <a:lstStyle/>
+                    <a:p>
+                      <a:r>
+                        <a:rPr sz="1300" b="0">
+                          <a:solidFill>
+                            <a:srgbClr val="171A14"/>
+                          </a:solidFill>
+                          <a:latin typeface="Segoe UI"/>
+                        </a:rPr>
+                        <a:t>Digest for humans, compact bundle for the next conversation</a:t>
+                      </a:r>
+                    </a:p>
+                  </a:txBody>
+                  <a:tcPr anchor="ctr" marL="109728" marT="27432" marB="27432">
+                    <a:solidFill>
+                      <a:srgbClr val="FFFFFF"/>
+                    </a:solidFill>
+                  </a:tcPr>
+                </a:tc>
+                <a:tc>
+                  <a:txBody>
+                    <a:bodyPr/>
+                    <a:lstStyle/>
+                    <a:p>
+                      <a:r>
+                        <a:rPr sz="1300" b="0">
+                          <a:solidFill>
+                            <a:srgbClr val="171A14"/>
+                          </a:solidFill>
+                          <a:latin typeface="Segoe UI"/>
+                        </a:rPr>
+                        <a:t>summary.md · analysis_bundle.json</a:t>
+                      </a:r>
+                    </a:p>
+                  </a:txBody>
+                  <a:tcPr anchor="ctr" marL="109728" marT="27432" marB="27432">
+                    <a:solidFill>
+                      <a:srgbClr val="FFFFFF"/>
+                    </a:solidFill>
+                  </a:tcPr>
+                </a:tc>
+              </a:tr>
+            </a:tbl>
+          </a:graphicData>
+        </a:graphic>
+      </p:graphicFrame>
+      <p:sp>
+        <p:nvSpPr>
+          <p:cNvPr id="7" name="TextBox 6"/>
           <p:cNvSpPr txBox="1"/>
           <p:nvPr/>
         </p:nvSpPr>
         <p:spPr>
           <a:xfrm>
-            <a:off x="731520" y="5532120"/>
-            <a:ext cx="10728655" cy="1005840"/>
+            <a:off x="731520" y="5733288"/>
+            <a:ext cx="10728655" cy="1097280"/>
           </a:xfrm>
           <a:prstGeom prst="rect">
             <a:avLst/>
@@ -3490,13 +3946,13 @@
               </a:spcAft>
             </a:pPr>
             <a:r>
-              <a:rPr sz="1400" b="0">
+              <a:rPr sz="1500" b="0">
                 <a:solidFill>
                   <a:srgbClr val="171A14"/>
                 </a:solidFill>
                 <a:latin typeface="Segoe UI"/>
               </a:rPr>
-              <a:t>Peak share, not today's — “today” is 2023-12 for the forward-only observables and 2026-08 for the DS ones, so one axis cannot carry both. At n=11 the correlation is not distinguishable from zero under either endpoint (−0.14 on peak, +0.33 on latest). This is the evidence FOR splitting the definition, not an assumption behind it.</a:t>
+              <a:t>Both analysis directions are configuration, not code — data/analysis_config.json holds the observable changes, the implementation groups, the categories and the thresholds. Adding a mechanism to measure means adding a row.</a:t>
             </a:r>
           </a:p>
         </p:txBody>
@@ -3556,6 +4012,2224 @@
                 </a:solidFill>
                 <a:latin typeface="Segoe UI"/>
               </a:rPr>
+              <a:t>HOW IT WORKS</a:t>
+            </a:r>
+          </a:p>
+        </p:txBody>
+      </p:sp>
+      <p:sp>
+        <p:nvSpPr>
+          <p:cNvPr id="3" name="TextBox 2"/>
+          <p:cNvSpPr txBox="1"/>
+          <p:nvPr/>
+        </p:nvSpPr>
+        <p:spPr>
+          <a:xfrm>
+            <a:off x="731520" y="850392"/>
+            <a:ext cx="10728655" cy="640080"/>
+          </a:xfrm>
+          <a:prstGeom prst="rect">
+            <a:avLst/>
+          </a:prstGeom>
+          <a:noFill/>
+        </p:spPr>
+        <p:txBody>
+          <a:bodyPr wrap="square">
+            <a:spAutoFit/>
+          </a:bodyPr>
+          <a:lstStyle/>
+          <a:p>
+            <a:pPr algn="l">
+              <a:lnSpc>
+                <a:spcPct val="125000"/>
+              </a:lnSpc>
+              <a:spcAft>
+                <a:spcPts val="600"/>
+              </a:spcAft>
+            </a:pPr>
+            <a:r>
+              <a:rPr sz="3200" b="1">
+                <a:solidFill>
+                  <a:srgbClr val="171A14"/>
+                </a:solidFill>
+                <a:latin typeface="Segoe UI"/>
+              </a:rPr>
+              <a:t>Three design decisions that protect the numbers</a:t>
+            </a:r>
+          </a:p>
+        </p:txBody>
+      </p:sp>
+      <p:sp>
+        <p:nvSpPr>
+          <p:cNvPr id="4" name="Rectangle 3"/>
+          <p:cNvSpPr/>
+          <p:nvPr/>
+        </p:nvSpPr>
+        <p:spPr>
+          <a:xfrm>
+            <a:off x="731520" y="1600200"/>
+            <a:ext cx="10728655" cy="9525"/>
+          </a:xfrm>
+          <a:prstGeom prst="rect">
+            <a:avLst/>
+          </a:prstGeom>
+          <a:solidFill>
+            <a:srgbClr val="D3D8CC"/>
+          </a:solidFill>
+          <a:ln>
+            <a:noFill/>
+          </a:ln>
+          <a:effectLst/>
+        </p:spPr>
+        <p:style>
+          <a:lnRef idx="1">
+            <a:schemeClr val="accent1"/>
+          </a:lnRef>
+          <a:fillRef idx="3">
+            <a:schemeClr val="accent1"/>
+          </a:fillRef>
+          <a:effectRef idx="2">
+            <a:schemeClr val="accent1"/>
+          </a:effectRef>
+          <a:fontRef idx="minor">
+            <a:schemeClr val="lt1"/>
+          </a:fontRef>
+        </p:style>
+        <p:txBody>
+          <a:bodyPr rtlCol="0" anchor="ctr"/>
+          <a:lstStyle/>
+          <a:p>
+            <a:pPr algn="ctr"/>
+          </a:p>
+        </p:txBody>
+      </p:sp>
+      <p:sp>
+        <p:nvSpPr>
+          <p:cNvPr id="5" name="Rectangle 4"/>
+          <p:cNvSpPr/>
+          <p:nvPr/>
+        </p:nvSpPr>
+        <p:spPr>
+          <a:xfrm>
+            <a:off x="731520" y="1911096"/>
+            <a:ext cx="3442106" cy="3017520"/>
+          </a:xfrm>
+          <a:prstGeom prst="rect">
+            <a:avLst/>
+          </a:prstGeom>
+          <a:solidFill>
+            <a:srgbClr val="F6F7F3"/>
+          </a:solidFill>
+          <a:ln w="9525">
+            <a:solidFill>
+              <a:srgbClr val="D3D8CC"/>
+            </a:solidFill>
+          </a:ln>
+          <a:effectLst/>
+        </p:spPr>
+        <p:style>
+          <a:lnRef idx="1">
+            <a:schemeClr val="accent1"/>
+          </a:lnRef>
+          <a:fillRef idx="3">
+            <a:schemeClr val="accent1"/>
+          </a:fillRef>
+          <a:effectRef idx="2">
+            <a:schemeClr val="accent1"/>
+          </a:effectRef>
+          <a:fontRef idx="minor">
+            <a:schemeClr val="lt1"/>
+          </a:fontRef>
+        </p:style>
+        <p:txBody>
+          <a:bodyPr rtlCol="0" anchor="ctr"/>
+          <a:lstStyle/>
+          <a:p/>
+        </p:txBody>
+      </p:sp>
+      <p:sp>
+        <p:nvSpPr>
+          <p:cNvPr id="6" name="TextBox 5"/>
+          <p:cNvSpPr txBox="1"/>
+          <p:nvPr/>
+        </p:nvSpPr>
+        <p:spPr>
+          <a:xfrm>
+            <a:off x="896112" y="2039112"/>
+            <a:ext cx="3112922" cy="274320"/>
+          </a:xfrm>
+          <a:prstGeom prst="rect">
+            <a:avLst/>
+          </a:prstGeom>
+          <a:noFill/>
+        </p:spPr>
+        <p:txBody>
+          <a:bodyPr wrap="square">
+            <a:spAutoFit/>
+          </a:bodyPr>
+          <a:lstStyle/>
+          <a:p>
+            <a:pPr algn="l">
+              <a:lnSpc>
+                <a:spcPct val="125000"/>
+              </a:lnSpc>
+              <a:spcAft>
+                <a:spcPts val="600"/>
+              </a:spcAft>
+            </a:pPr>
+            <a:r>
+              <a:rPr sz="1200" b="1">
+                <a:solidFill>
+                  <a:srgbClr val="00907F"/>
+                </a:solidFill>
+                <a:latin typeface="Segoe UI"/>
+              </a:rPr>
+              <a:t>MULTI-DRIVE, MERGED</a:t>
+            </a:r>
+          </a:p>
+        </p:txBody>
+      </p:sp>
+      <p:sp>
+        <p:nvSpPr>
+          <p:cNvPr id="7" name="TextBox 6"/>
+          <p:cNvSpPr txBox="1"/>
+          <p:nvPr/>
+        </p:nvSpPr>
+        <p:spPr>
+          <a:xfrm>
+            <a:off x="896112" y="2386584"/>
+            <a:ext cx="3112922" cy="822960"/>
+          </a:xfrm>
+          <a:prstGeom prst="rect">
+            <a:avLst/>
+          </a:prstGeom>
+          <a:noFill/>
+        </p:spPr>
+        <p:txBody>
+          <a:bodyPr wrap="square">
+            <a:spAutoFit/>
+          </a:bodyPr>
+          <a:lstStyle/>
+          <a:p>
+            <a:pPr algn="l">
+              <a:lnSpc>
+                <a:spcPct val="125000"/>
+              </a:lnSpc>
+              <a:spcAft>
+                <a:spcPts val="600"/>
+              </a:spcAft>
+            </a:pPr>
+            <a:r>
+              <a:rPr sz="1350" b="0">
+                <a:solidFill>
+                  <a:srgbClr val="171A14"/>
+                </a:solidFill>
+                <a:latin typeface="Segoe UI"/>
+              </a:rPr>
+              <a:t>The cache spans a main path and a spill path. A day’s files can sit on both.</a:t>
+            </a:r>
+          </a:p>
+        </p:txBody>
+      </p:sp>
+      <p:sp>
+        <p:nvSpPr>
+          <p:cNvPr id="8" name="TextBox 7"/>
+          <p:cNvSpPr txBox="1"/>
+          <p:nvPr/>
+        </p:nvSpPr>
+        <p:spPr>
+          <a:xfrm>
+            <a:off x="896112" y="4361688"/>
+            <a:ext cx="3112922" cy="457200"/>
+          </a:xfrm>
+          <a:prstGeom prst="rect">
+            <a:avLst/>
+          </a:prstGeom>
+          <a:noFill/>
+        </p:spPr>
+        <p:txBody>
+          <a:bodyPr wrap="square">
+            <a:spAutoFit/>
+          </a:bodyPr>
+          <a:lstStyle/>
+          <a:p>
+            <a:pPr algn="l">
+              <a:lnSpc>
+                <a:spcPct val="125000"/>
+              </a:lnSpc>
+              <a:spcAft>
+                <a:spcPts val="600"/>
+              </a:spcAft>
+            </a:pPr>
+            <a:r>
+              <a:rPr sz="1150" b="0">
+                <a:solidFill>
+                  <a:srgbClr val="66705C"/>
+                </a:solidFill>
+                <a:latin typeface="Segoe UI"/>
+              </a:rPr>
+              <a:t>Reading one path alone reports a PARTIAL day as a complete one — indistinguishable from a month when fewer zones signed.</a:t>
+            </a:r>
+          </a:p>
+        </p:txBody>
+      </p:sp>
+      <p:sp>
+        <p:nvSpPr>
+          <p:cNvPr id="9" name="Rectangle 8"/>
+          <p:cNvSpPr/>
+          <p:nvPr/>
+        </p:nvSpPr>
+        <p:spPr>
+          <a:xfrm>
+            <a:off x="4374794" y="1911096"/>
+            <a:ext cx="3442106" cy="3017520"/>
+          </a:xfrm>
+          <a:prstGeom prst="rect">
+            <a:avLst/>
+          </a:prstGeom>
+          <a:solidFill>
+            <a:srgbClr val="F6F7F3"/>
+          </a:solidFill>
+          <a:ln w="9525">
+            <a:solidFill>
+              <a:srgbClr val="D3D8CC"/>
+            </a:solidFill>
+          </a:ln>
+          <a:effectLst/>
+        </p:spPr>
+        <p:style>
+          <a:lnRef idx="1">
+            <a:schemeClr val="accent1"/>
+          </a:lnRef>
+          <a:fillRef idx="3">
+            <a:schemeClr val="accent1"/>
+          </a:fillRef>
+          <a:effectRef idx="2">
+            <a:schemeClr val="accent1"/>
+          </a:effectRef>
+          <a:fontRef idx="minor">
+            <a:schemeClr val="lt1"/>
+          </a:fontRef>
+        </p:style>
+        <p:txBody>
+          <a:bodyPr rtlCol="0" anchor="ctr"/>
+          <a:lstStyle/>
+          <a:p/>
+        </p:txBody>
+      </p:sp>
+      <p:sp>
+        <p:nvSpPr>
+          <p:cNvPr id="10" name="TextBox 9"/>
+          <p:cNvSpPr txBox="1"/>
+          <p:nvPr/>
+        </p:nvSpPr>
+        <p:spPr>
+          <a:xfrm>
+            <a:off x="4539386" y="2039112"/>
+            <a:ext cx="3112922" cy="274320"/>
+          </a:xfrm>
+          <a:prstGeom prst="rect">
+            <a:avLst/>
+          </a:prstGeom>
+          <a:noFill/>
+        </p:spPr>
+        <p:txBody>
+          <a:bodyPr wrap="square">
+            <a:spAutoFit/>
+          </a:bodyPr>
+          <a:lstStyle/>
+          <a:p>
+            <a:pPr algn="l">
+              <a:lnSpc>
+                <a:spcPct val="125000"/>
+              </a:lnSpc>
+              <a:spcAft>
+                <a:spcPts val="600"/>
+              </a:spcAft>
+            </a:pPr>
+            <a:r>
+              <a:rPr sz="1200" b="1">
+                <a:solidFill>
+                  <a:srgbClr val="00907F"/>
+                </a:solidFill>
+                <a:latin typeface="Segoe UI"/>
+              </a:rPr>
+              <a:t>EVERY SHARE CARRIES ITS DENOMINATOR</a:t>
+            </a:r>
+          </a:p>
+        </p:txBody>
+      </p:sp>
+      <p:sp>
+        <p:nvSpPr>
+          <p:cNvPr id="11" name="TextBox 10"/>
+          <p:cNvSpPr txBox="1"/>
+          <p:nvPr/>
+        </p:nvSpPr>
+        <p:spPr>
+          <a:xfrm>
+            <a:off x="4539386" y="2386584"/>
+            <a:ext cx="3112922" cy="822960"/>
+          </a:xfrm>
+          <a:prstGeom prst="rect">
+            <a:avLst/>
+          </a:prstGeom>
+          <a:noFill/>
+        </p:spPr>
+        <p:txBody>
+          <a:bodyPr wrap="square">
+            <a:spAutoFit/>
+          </a:bodyPr>
+          <a:lstStyle/>
+          <a:p>
+            <a:pPr algn="l">
+              <a:lnSpc>
+                <a:spcPct val="125000"/>
+              </a:lnSpc>
+              <a:spcAft>
+                <a:spcPts val="600"/>
+              </a:spcAft>
+            </a:pPr>
+            <a:r>
+              <a:rPr sz="1350" b="0">
+                <a:solidFill>
+                  <a:srgbClr val="171A14"/>
+                </a:solidFill>
+                <a:latin typeface="Segoe UI"/>
+              </a:rPr>
+              <a:t>Each dimension emits its own _total row alongside the values.</a:t>
+            </a:r>
+          </a:p>
+        </p:txBody>
+      </p:sp>
+      <p:sp>
+        <p:nvSpPr>
+          <p:cNvPr id="12" name="TextBox 11"/>
+          <p:cNvSpPr txBox="1"/>
+          <p:nvPr/>
+        </p:nvSpPr>
+        <p:spPr>
+          <a:xfrm>
+            <a:off x="4539386" y="4361688"/>
+            <a:ext cx="3112922" cy="457200"/>
+          </a:xfrm>
+          <a:prstGeom prst="rect">
+            <a:avLst/>
+          </a:prstGeom>
+          <a:noFill/>
+        </p:spPr>
+        <p:txBody>
+          <a:bodyPr wrap="square">
+            <a:spAutoFit/>
+          </a:bodyPr>
+          <a:lstStyle/>
+          <a:p>
+            <a:pPr algn="l">
+              <a:lnSpc>
+                <a:spcPct val="125000"/>
+              </a:lnSpc>
+              <a:spcAft>
+                <a:spcPts val="600"/>
+              </a:spcAft>
+            </a:pPr>
+            <a:r>
+              <a:rPr sz="1150" b="0">
+                <a:solidFill>
+                  <a:srgbClr val="66705C"/>
+                </a:solidFill>
+                <a:latin typeface="Segoe UI"/>
+              </a:rPr>
+              <a:t>The same fact reads 68%, 64% or 0.6% depending only on what you divide by. P(x | population) is recomputable, never guessed.</a:t>
+            </a:r>
+          </a:p>
+        </p:txBody>
+      </p:sp>
+      <p:sp>
+        <p:nvSpPr>
+          <p:cNvPr id="13" name="Rectangle 12"/>
+          <p:cNvSpPr/>
+          <p:nvPr/>
+        </p:nvSpPr>
+        <p:spPr>
+          <a:xfrm>
+            <a:off x="8018068" y="1911096"/>
+            <a:ext cx="3442106" cy="3017520"/>
+          </a:xfrm>
+          <a:prstGeom prst="rect">
+            <a:avLst/>
+          </a:prstGeom>
+          <a:solidFill>
+            <a:srgbClr val="F6F7F3"/>
+          </a:solidFill>
+          <a:ln w="9525">
+            <a:solidFill>
+              <a:srgbClr val="D3D8CC"/>
+            </a:solidFill>
+          </a:ln>
+          <a:effectLst/>
+        </p:spPr>
+        <p:style>
+          <a:lnRef idx="1">
+            <a:schemeClr val="accent1"/>
+          </a:lnRef>
+          <a:fillRef idx="3">
+            <a:schemeClr val="accent1"/>
+          </a:fillRef>
+          <a:effectRef idx="2">
+            <a:schemeClr val="accent1"/>
+          </a:effectRef>
+          <a:fontRef idx="minor">
+            <a:schemeClr val="lt1"/>
+          </a:fontRef>
+        </p:style>
+        <p:txBody>
+          <a:bodyPr rtlCol="0" anchor="ctr"/>
+          <a:lstStyle/>
+          <a:p/>
+        </p:txBody>
+      </p:sp>
+      <p:sp>
+        <p:nvSpPr>
+          <p:cNvPr id="14" name="TextBox 13"/>
+          <p:cNvSpPr txBox="1"/>
+          <p:nvPr/>
+        </p:nvSpPr>
+        <p:spPr>
+          <a:xfrm>
+            <a:off x="8182660" y="2039112"/>
+            <a:ext cx="3112922" cy="274320"/>
+          </a:xfrm>
+          <a:prstGeom prst="rect">
+            <a:avLst/>
+          </a:prstGeom>
+          <a:noFill/>
+        </p:spPr>
+        <p:txBody>
+          <a:bodyPr wrap="square">
+            <a:spAutoFit/>
+          </a:bodyPr>
+          <a:lstStyle/>
+          <a:p>
+            <a:pPr algn="l">
+              <a:lnSpc>
+                <a:spcPct val="125000"/>
+              </a:lnSpc>
+              <a:spcAft>
+                <a:spcPts val="600"/>
+              </a:spcAft>
+            </a:pPr>
+            <a:r>
+              <a:rPr sz="1200" b="1">
+                <a:solidFill>
+                  <a:srgbClr val="00907F"/>
+                </a:solidFill>
+                <a:latin typeface="Segoe UI"/>
+              </a:rPr>
+              <a:t>SHARDED ACROSS MACHINES</a:t>
+            </a:r>
+          </a:p>
+        </p:txBody>
+      </p:sp>
+      <p:sp>
+        <p:nvSpPr>
+          <p:cNvPr id="15" name="TextBox 14"/>
+          <p:cNvSpPr txBox="1"/>
+          <p:nvPr/>
+        </p:nvSpPr>
+        <p:spPr>
+          <a:xfrm>
+            <a:off x="8182660" y="2386584"/>
+            <a:ext cx="3112922" cy="822960"/>
+          </a:xfrm>
+          <a:prstGeom prst="rect">
+            <a:avLst/>
+          </a:prstGeom>
+          <a:noFill/>
+        </p:spPr>
+        <p:txBody>
+          <a:bodyPr wrap="square">
+            <a:spAutoFit/>
+          </a:bodyPr>
+          <a:lstStyle/>
+          <a:p>
+            <a:pPr algn="l">
+              <a:lnSpc>
+                <a:spcPct val="125000"/>
+              </a:lnSpc>
+              <a:spcAft>
+                <a:spcPts val="600"/>
+              </a:spcAft>
+            </a:pPr>
+            <a:r>
+              <a:rPr sz="1350" b="0">
+                <a:solidFill>
+                  <a:srgbClr val="171A14"/>
+                </a:solidFill>
+                <a:latin typeface="Segoe UI"/>
+              </a:rPr>
+              <a:t>Same command, different --shard. Balanced on bytes, no coordinator.</a:t>
+            </a:r>
+          </a:p>
+        </p:txBody>
+      </p:sp>
+      <p:sp>
+        <p:nvSpPr>
+          <p:cNvPr id="16" name="TextBox 15"/>
+          <p:cNvSpPr txBox="1"/>
+          <p:nvPr/>
+        </p:nvSpPr>
+        <p:spPr>
+          <a:xfrm>
+            <a:off x="8182660" y="4361688"/>
+            <a:ext cx="3112922" cy="457200"/>
+          </a:xfrm>
+          <a:prstGeom prst="rect">
+            <a:avLst/>
+          </a:prstGeom>
+          <a:noFill/>
+        </p:spPr>
+        <p:txBody>
+          <a:bodyPr wrap="square">
+            <a:spAutoFit/>
+          </a:bodyPr>
+          <a:lstStyle/>
+          <a:p>
+            <a:pPr algn="l">
+              <a:lnSpc>
+                <a:spcPct val="125000"/>
+              </a:lnSpc>
+              <a:spcAft>
+                <a:spcPts val="600"/>
+              </a:spcAft>
+            </a:pPr>
+            <a:r>
+              <a:rPr sz="1150" b="0">
+                <a:solidFill>
+                  <a:srgbClr val="66705C"/>
+                </a:solidFill>
+                <a:latin typeface="Segoe UI"/>
+              </a:rPr>
+              <a:t>3 shards over the corpus: 0.0% spread, and identical results to a single-machine run across 30 changes × 7 fields.</a:t>
+            </a:r>
+          </a:p>
+        </p:txBody>
+      </p:sp>
+      <p:sp>
+        <p:nvSpPr>
+          <p:cNvPr id="17" name="TextBox 16"/>
+          <p:cNvSpPr txBox="1"/>
+          <p:nvPr/>
+        </p:nvSpPr>
+        <p:spPr>
+          <a:xfrm>
+            <a:off x="731520" y="5202936"/>
+            <a:ext cx="10728655" cy="731520"/>
+          </a:xfrm>
+          <a:prstGeom prst="rect">
+            <a:avLst/>
+          </a:prstGeom>
+          <a:noFill/>
+        </p:spPr>
+        <p:txBody>
+          <a:bodyPr wrap="square">
+            <a:spAutoFit/>
+          </a:bodyPr>
+          <a:lstStyle/>
+          <a:p>
+            <a:pPr algn="l">
+              <a:lnSpc>
+                <a:spcPct val="125000"/>
+              </a:lnSpc>
+              <a:spcAft>
+                <a:spcPts val="600"/>
+              </a:spcAft>
+            </a:pPr>
+            <a:r>
+              <a:rPr sz="1400" b="0">
+                <a:solidFill>
+                  <a:srgbClr val="66705C"/>
+                </a:solidFill>
+                <a:latin typeface="Segoe UI"/>
+              </a:rPr>
+              <a:t>A partial corpus produces entirely plausible numbers, so each shard reports when it finishes and the analysis refuses to stay silent if the set is incomplete.</a:t>
+            </a:r>
+          </a:p>
+        </p:txBody>
+      </p:sp>
+    </p:spTree>
+  </p:cSld>
+  <p:clrMapOvr>
+    <a:masterClrMapping/>
+  </p:clrMapOvr>
+</p:sld>
+</file>
+
+<file path=ppt/slides/slide12.xml><?xml version="1.0" encoding="utf-8"?>
+<p:sld xmlns:a="http://schemas.openxmlformats.org/drawingml/2006/main" xmlns:p="http://schemas.openxmlformats.org/presentationml/2006/main" xmlns:r="http://schemas.openxmlformats.org/officeDocument/2006/relationships">
+  <p:cSld>
+    <p:spTree>
+      <p:nvGrpSpPr>
+        <p:cNvPr id="1" name=""/>
+        <p:cNvGrpSpPr/>
+        <p:nvPr/>
+      </p:nvGrpSpPr>
+      <p:grpSpPr/>
+      <p:sp>
+        <p:nvSpPr>
+          <p:cNvPr id="2" name="TextBox 1"/>
+          <p:cNvSpPr txBox="1"/>
+          <p:nvPr/>
+        </p:nvSpPr>
+        <p:spPr>
+          <a:xfrm>
+            <a:off x="731520" y="502920"/>
+            <a:ext cx="10728655" cy="274320"/>
+          </a:xfrm>
+          <a:prstGeom prst="rect">
+            <a:avLst/>
+          </a:prstGeom>
+          <a:noFill/>
+        </p:spPr>
+        <p:txBody>
+          <a:bodyPr wrap="square">
+            <a:spAutoFit/>
+          </a:bodyPr>
+          <a:lstStyle/>
+          <a:p>
+            <a:pPr algn="l">
+              <a:lnSpc>
+                <a:spcPct val="125000"/>
+              </a:lnSpc>
+              <a:spcAft>
+                <a:spcPts val="600"/>
+              </a:spcAft>
+            </a:pPr>
+            <a:r>
+              <a:rPr sz="1100" b="1">
+                <a:solidFill>
+                  <a:srgbClr val="00907F"/>
+                </a:solidFill>
+                <a:latin typeface="Segoe UI"/>
+              </a:rPr>
+              <a:t>THE FULL RUN</a:t>
+            </a:r>
+          </a:p>
+        </p:txBody>
+      </p:sp>
+      <p:sp>
+        <p:nvSpPr>
+          <p:cNvPr id="3" name="TextBox 2"/>
+          <p:cNvSpPr txBox="1"/>
+          <p:nvPr/>
+        </p:nvSpPr>
+        <p:spPr>
+          <a:xfrm>
+            <a:off x="731520" y="850392"/>
+            <a:ext cx="10728655" cy="640080"/>
+          </a:xfrm>
+          <a:prstGeom prst="rect">
+            <a:avLst/>
+          </a:prstGeom>
+          <a:noFill/>
+        </p:spPr>
+        <p:txBody>
+          <a:bodyPr wrap="square">
+            <a:spAutoFit/>
+          </a:bodyPr>
+          <a:lstStyle/>
+          <a:p>
+            <a:pPr algn="l">
+              <a:lnSpc>
+                <a:spcPct val="125000"/>
+              </a:lnSpc>
+              <a:spcAft>
+                <a:spcPts val="600"/>
+              </a:spcAft>
+            </a:pPr>
+            <a:r>
+              <a:rPr sz="3200" b="1">
+                <a:solidFill>
+                  <a:srgbClr val="171A14"/>
+                </a:solidFill>
+                <a:latin typeface="Segoe UI"/>
+              </a:rPr>
+              <a:t>What the full corpus changed</a:t>
+            </a:r>
+          </a:p>
+        </p:txBody>
+      </p:sp>
+      <p:sp>
+        <p:nvSpPr>
+          <p:cNvPr id="4" name="TextBox 3"/>
+          <p:cNvSpPr txBox="1"/>
+          <p:nvPr/>
+        </p:nvSpPr>
+        <p:spPr>
+          <a:xfrm>
+            <a:off x="731520" y="1600200"/>
+            <a:ext cx="10728655" cy="457200"/>
+          </a:xfrm>
+          <a:prstGeom prst="rect">
+            <a:avLst/>
+          </a:prstGeom>
+          <a:noFill/>
+        </p:spPr>
+        <p:txBody>
+          <a:bodyPr wrap="square">
+            <a:spAutoFit/>
+          </a:bodyPr>
+          <a:lstStyle/>
+          <a:p>
+            <a:pPr algn="l">
+              <a:lnSpc>
+                <a:spcPct val="125000"/>
+              </a:lnSpc>
+              <a:spcAft>
+                <a:spcPts val="600"/>
+              </a:spcAft>
+            </a:pPr>
+            <a:r>
+              <a:rPr sz="1500" b="0">
+                <a:solidFill>
+                  <a:srgbClr val="66705C"/>
+                </a:solidFill>
+                <a:latin typeface="Segoe UI"/>
+              </a:rPr>
+              <a:t>Adding 8.24 TB of forward data moved 14 dates and refuted one finding.</a:t>
+            </a:r>
+          </a:p>
+        </p:txBody>
+      </p:sp>
+      <p:sp>
+        <p:nvSpPr>
+          <p:cNvPr id="5" name="Rectangle 4"/>
+          <p:cNvSpPr/>
+          <p:nvPr/>
+        </p:nvSpPr>
+        <p:spPr>
+          <a:xfrm>
+            <a:off x="731520" y="2167128"/>
+            <a:ext cx="10728655" cy="9525"/>
+          </a:xfrm>
+          <a:prstGeom prst="rect">
+            <a:avLst/>
+          </a:prstGeom>
+          <a:solidFill>
+            <a:srgbClr val="D3D8CC"/>
+          </a:solidFill>
+          <a:ln>
+            <a:noFill/>
+          </a:ln>
+          <a:effectLst/>
+        </p:spPr>
+        <p:style>
+          <a:lnRef idx="1">
+            <a:schemeClr val="accent1"/>
+          </a:lnRef>
+          <a:fillRef idx="3">
+            <a:schemeClr val="accent1"/>
+          </a:fillRef>
+          <a:effectRef idx="2">
+            <a:schemeClr val="accent1"/>
+          </a:effectRef>
+          <a:fontRef idx="minor">
+            <a:schemeClr val="lt1"/>
+          </a:fontRef>
+        </p:style>
+        <p:txBody>
+          <a:bodyPr rtlCol="0" anchor="ctr"/>
+          <a:lstStyle/>
+          <a:p>
+            <a:pPr algn="ctr"/>
+          </a:p>
+        </p:txBody>
+      </p:sp>
+      <p:sp>
+        <p:nvSpPr>
+          <p:cNvPr id="6" name="Rectangle 5"/>
+          <p:cNvSpPr/>
+          <p:nvPr/>
+        </p:nvSpPr>
+        <p:spPr>
+          <a:xfrm>
+            <a:off x="731520" y="2478024"/>
+            <a:ext cx="3442106" cy="1645920"/>
+          </a:xfrm>
+          <a:prstGeom prst="rect">
+            <a:avLst/>
+          </a:prstGeom>
+          <a:solidFill>
+            <a:srgbClr val="F6F7F3"/>
+          </a:solidFill>
+          <a:ln w="9525">
+            <a:solidFill>
+              <a:srgbClr val="D3D8CC"/>
+            </a:solidFill>
+          </a:ln>
+          <a:effectLst/>
+        </p:spPr>
+        <p:style>
+          <a:lnRef idx="1">
+            <a:schemeClr val="accent1"/>
+          </a:lnRef>
+          <a:fillRef idx="3">
+            <a:schemeClr val="accent1"/>
+          </a:fillRef>
+          <a:effectRef idx="2">
+            <a:schemeClr val="accent1"/>
+          </a:effectRef>
+          <a:fontRef idx="minor">
+            <a:schemeClr val="lt1"/>
+          </a:fontRef>
+        </p:style>
+        <p:txBody>
+          <a:bodyPr rtlCol="0" anchor="ctr"/>
+          <a:lstStyle/>
+          <a:p/>
+        </p:txBody>
+      </p:sp>
+      <p:sp>
+        <p:nvSpPr>
+          <p:cNvPr id="7" name="TextBox 6"/>
+          <p:cNvSpPr txBox="1"/>
+          <p:nvPr/>
+        </p:nvSpPr>
+        <p:spPr>
+          <a:xfrm>
+            <a:off x="896112" y="2606040"/>
+            <a:ext cx="3112922" cy="274320"/>
+          </a:xfrm>
+          <a:prstGeom prst="rect">
+            <a:avLst/>
+          </a:prstGeom>
+          <a:noFill/>
+        </p:spPr>
+        <p:txBody>
+          <a:bodyPr wrap="square">
+            <a:spAutoFit/>
+          </a:bodyPr>
+          <a:lstStyle/>
+          <a:p>
+            <a:pPr algn="l">
+              <a:lnSpc>
+                <a:spcPct val="125000"/>
+              </a:lnSpc>
+              <a:spcAft>
+                <a:spcPts val="600"/>
+              </a:spcAft>
+            </a:pPr>
+            <a:r>
+              <a:rPr sz="1200" b="1">
+                <a:solidFill>
+                  <a:srgbClr val="00907F"/>
+                </a:solidFill>
+                <a:latin typeface="Segoe UI"/>
+              </a:rPr>
+              <a:t>MEASURABLE OBSERVABLES</a:t>
+            </a:r>
+          </a:p>
+        </p:txBody>
+      </p:sp>
+      <p:sp>
+        <p:nvSpPr>
+          <p:cNvPr id="8" name="TextBox 7"/>
+          <p:cNvSpPr txBox="1"/>
+          <p:nvPr/>
+        </p:nvSpPr>
+        <p:spPr>
+          <a:xfrm>
+            <a:off x="896112" y="2953512"/>
+            <a:ext cx="3112922" cy="822960"/>
+          </a:xfrm>
+          <a:prstGeom prst="rect">
+            <a:avLst/>
+          </a:prstGeom>
+          <a:noFill/>
+        </p:spPr>
+        <p:txBody>
+          <a:bodyPr wrap="square">
+            <a:spAutoFit/>
+          </a:bodyPr>
+          <a:lstStyle/>
+          <a:p>
+            <a:pPr algn="l">
+              <a:lnSpc>
+                <a:spcPct val="125000"/>
+              </a:lnSpc>
+              <a:spcAft>
+                <a:spcPts val="600"/>
+              </a:spcAft>
+            </a:pPr>
+            <a:r>
+              <a:rPr sz="1600" b="0">
+                <a:solidFill>
+                  <a:srgbClr val="171A14"/>
+                </a:solidFill>
+                <a:latin typeface="Segoe UI"/>
+              </a:rPr>
+              <a:t>14  →  24</a:t>
+            </a:r>
+          </a:p>
+        </p:txBody>
+      </p:sp>
+      <p:sp>
+        <p:nvSpPr>
+          <p:cNvPr id="9" name="TextBox 8"/>
+          <p:cNvSpPr txBox="1"/>
+          <p:nvPr/>
+        </p:nvSpPr>
+        <p:spPr>
+          <a:xfrm>
+            <a:off x="896112" y="3557016"/>
+            <a:ext cx="3112922" cy="457200"/>
+          </a:xfrm>
+          <a:prstGeom prst="rect">
+            <a:avLst/>
+          </a:prstGeom>
+          <a:noFill/>
+        </p:spPr>
+        <p:txBody>
+          <a:bodyPr wrap="square">
+            <a:spAutoFit/>
+          </a:bodyPr>
+          <a:lstStyle/>
+          <a:p>
+            <a:pPr algn="l">
+              <a:lnSpc>
+                <a:spcPct val="125000"/>
+              </a:lnSpc>
+              <a:spcAft>
+                <a:spcPts val="600"/>
+              </a:spcAft>
+            </a:pPr>
+            <a:r>
+              <a:rPr sz="1150" b="0">
+                <a:solidFill>
+                  <a:srgbClr val="66705C"/>
+                </a:solidFill>
+                <a:latin typeface="Segoe UI"/>
+              </a:rPr>
+              <a:t>Ten became measurable for the first time. The forward corpus carries NSEC3 parameters, DNSKEY flags and CDS, which delegation data cannot.</a:t>
+            </a:r>
+          </a:p>
+        </p:txBody>
+      </p:sp>
+      <p:sp>
+        <p:nvSpPr>
+          <p:cNvPr id="10" name="Rectangle 9"/>
+          <p:cNvSpPr/>
+          <p:nvPr/>
+        </p:nvSpPr>
+        <p:spPr>
+          <a:xfrm>
+            <a:off x="4374794" y="2478024"/>
+            <a:ext cx="3442106" cy="1645920"/>
+          </a:xfrm>
+          <a:prstGeom prst="rect">
+            <a:avLst/>
+          </a:prstGeom>
+          <a:solidFill>
+            <a:srgbClr val="F6F7F3"/>
+          </a:solidFill>
+          <a:ln w="9525">
+            <a:solidFill>
+              <a:srgbClr val="D3D8CC"/>
+            </a:solidFill>
+          </a:ln>
+          <a:effectLst/>
+        </p:spPr>
+        <p:style>
+          <a:lnRef idx="1">
+            <a:schemeClr val="accent1"/>
+          </a:lnRef>
+          <a:fillRef idx="3">
+            <a:schemeClr val="accent1"/>
+          </a:fillRef>
+          <a:effectRef idx="2">
+            <a:schemeClr val="accent1"/>
+          </a:effectRef>
+          <a:fontRef idx="minor">
+            <a:schemeClr val="lt1"/>
+          </a:fontRef>
+        </p:style>
+        <p:txBody>
+          <a:bodyPr rtlCol="0" anchor="ctr"/>
+          <a:lstStyle/>
+          <a:p/>
+        </p:txBody>
+      </p:sp>
+      <p:sp>
+        <p:nvSpPr>
+          <p:cNvPr id="11" name="TextBox 10"/>
+          <p:cNvSpPr txBox="1"/>
+          <p:nvPr/>
+        </p:nvSpPr>
+        <p:spPr>
+          <a:xfrm>
+            <a:off x="4539386" y="2606040"/>
+            <a:ext cx="3112922" cy="274320"/>
+          </a:xfrm>
+          <a:prstGeom prst="rect">
+            <a:avLst/>
+          </a:prstGeom>
+          <a:noFill/>
+        </p:spPr>
+        <p:txBody>
+          <a:bodyPr wrap="square">
+            <a:spAutoFit/>
+          </a:bodyPr>
+          <a:lstStyle/>
+          <a:p>
+            <a:pPr algn="l">
+              <a:lnSpc>
+                <a:spcPct val="125000"/>
+              </a:lnSpc>
+              <a:spcAft>
+                <a:spcPts val="600"/>
+              </a:spcAft>
+            </a:pPr>
+            <a:r>
+              <a:rPr sz="1200" b="1">
+                <a:solidFill>
+                  <a:srgbClr val="00907F"/>
+                </a:solidFill>
+                <a:latin typeface="Segoe UI"/>
+              </a:rPr>
+              <a:t>FIRST-SEEN DATES MOVED EARLIER</a:t>
+            </a:r>
+          </a:p>
+        </p:txBody>
+      </p:sp>
+      <p:sp>
+        <p:nvSpPr>
+          <p:cNvPr id="12" name="TextBox 11"/>
+          <p:cNvSpPr txBox="1"/>
+          <p:nvPr/>
+        </p:nvSpPr>
+        <p:spPr>
+          <a:xfrm>
+            <a:off x="4539386" y="2953512"/>
+            <a:ext cx="3112922" cy="822960"/>
+          </a:xfrm>
+          <a:prstGeom prst="rect">
+            <a:avLst/>
+          </a:prstGeom>
+          <a:noFill/>
+        </p:spPr>
+        <p:txBody>
+          <a:bodyPr wrap="square">
+            <a:spAutoFit/>
+          </a:bodyPr>
+          <a:lstStyle/>
+          <a:p>
+            <a:pPr algn="l">
+              <a:lnSpc>
+                <a:spcPct val="125000"/>
+              </a:lnSpc>
+              <a:spcAft>
+                <a:spcPts val="600"/>
+              </a:spcAft>
+            </a:pPr>
+            <a:r>
+              <a:rPr sz="1600" b="0">
+                <a:solidFill>
+                  <a:srgbClr val="171A14"/>
+                </a:solidFill>
+                <a:latin typeface="Segoe UI"/>
+              </a:rPr>
+              <a:t>14 of them</a:t>
+            </a:r>
+          </a:p>
+        </p:txBody>
+      </p:sp>
+      <p:sp>
+        <p:nvSpPr>
+          <p:cNvPr id="13" name="TextBox 12"/>
+          <p:cNvSpPr txBox="1"/>
+          <p:nvPr/>
+        </p:nvSpPr>
+        <p:spPr>
+          <a:xfrm>
+            <a:off x="4539386" y="3557016"/>
+            <a:ext cx="3112922" cy="457200"/>
+          </a:xfrm>
+          <a:prstGeom prst="rect">
+            <a:avLst/>
+          </a:prstGeom>
+          <a:noFill/>
+        </p:spPr>
+        <p:txBody>
+          <a:bodyPr wrap="square">
+            <a:spAutoFit/>
+          </a:bodyPr>
+          <a:lstStyle/>
+          <a:p>
+            <a:pPr algn="l">
+              <a:lnSpc>
+                <a:spcPct val="125000"/>
+              </a:lnSpc>
+              <a:spcAft>
+                <a:spcPts val="600"/>
+              </a:spcAft>
+            </a:pPr>
+            <a:r>
+              <a:rPr sz="1150" b="0">
+                <a:solidFill>
+                  <a:srgbClr val="66705C"/>
+                </a:solidFill>
+                <a:latin typeface="Segoe UI"/>
+              </a:rPr>
+              <a:t>Existence is a minimum over all evidence, so more corpus can only move a date earlier. Largest: SHA-384 digest −4.1 y, Ed25519 −3.7 y.</a:t>
+            </a:r>
+          </a:p>
+        </p:txBody>
+      </p:sp>
+      <p:sp>
+        <p:nvSpPr>
+          <p:cNvPr id="14" name="Rectangle 13"/>
+          <p:cNvSpPr/>
+          <p:nvPr/>
+        </p:nvSpPr>
+        <p:spPr>
+          <a:xfrm>
+            <a:off x="8018068" y="2478024"/>
+            <a:ext cx="3442106" cy="1645920"/>
+          </a:xfrm>
+          <a:prstGeom prst="rect">
+            <a:avLst/>
+          </a:prstGeom>
+          <a:solidFill>
+            <a:srgbClr val="F6F7F3"/>
+          </a:solidFill>
+          <a:ln w="9525">
+            <a:solidFill>
+              <a:srgbClr val="D3D8CC"/>
+            </a:solidFill>
+          </a:ln>
+          <a:effectLst/>
+        </p:spPr>
+        <p:style>
+          <a:lnRef idx="1">
+            <a:schemeClr val="accent1"/>
+          </a:lnRef>
+          <a:fillRef idx="3">
+            <a:schemeClr val="accent1"/>
+          </a:fillRef>
+          <a:effectRef idx="2">
+            <a:schemeClr val="accent1"/>
+          </a:effectRef>
+          <a:fontRef idx="minor">
+            <a:schemeClr val="lt1"/>
+          </a:fontRef>
+        </p:style>
+        <p:txBody>
+          <a:bodyPr rtlCol="0" anchor="ctr"/>
+          <a:lstStyle/>
+          <a:p/>
+        </p:txBody>
+      </p:sp>
+      <p:sp>
+        <p:nvSpPr>
+          <p:cNvPr id="15" name="TextBox 14"/>
+          <p:cNvSpPr txBox="1"/>
+          <p:nvPr/>
+        </p:nvSpPr>
+        <p:spPr>
+          <a:xfrm>
+            <a:off x="8182660" y="2606040"/>
+            <a:ext cx="3112922" cy="274320"/>
+          </a:xfrm>
+          <a:prstGeom prst="rect">
+            <a:avLst/>
+          </a:prstGeom>
+          <a:noFill/>
+        </p:spPr>
+        <p:txBody>
+          <a:bodyPr wrap="square">
+            <a:spAutoFit/>
+          </a:bodyPr>
+          <a:lstStyle/>
+          <a:p>
+            <a:pPr algn="l">
+              <a:lnSpc>
+                <a:spcPct val="125000"/>
+              </a:lnSpc>
+              <a:spcAft>
+                <a:spcPts val="600"/>
+              </a:spcAft>
+            </a:pPr>
+            <a:r>
+              <a:rPr sz="1200" b="1">
+                <a:solidFill>
+                  <a:srgbClr val="00907F"/>
+                </a:solidFill>
+                <a:latin typeface="Segoe UI"/>
+              </a:rPr>
+              <a:t>A FINDING WITHDRAWN</a:t>
+            </a:r>
+          </a:p>
+        </p:txBody>
+      </p:sp>
+      <p:sp>
+        <p:nvSpPr>
+          <p:cNvPr id="16" name="TextBox 15"/>
+          <p:cNvSpPr txBox="1"/>
+          <p:nvPr/>
+        </p:nvSpPr>
+        <p:spPr>
+          <a:xfrm>
+            <a:off x="8182660" y="2953512"/>
+            <a:ext cx="3112922" cy="822960"/>
+          </a:xfrm>
+          <a:prstGeom prst="rect">
+            <a:avLst/>
+          </a:prstGeom>
+          <a:noFill/>
+        </p:spPr>
+        <p:txBody>
+          <a:bodyPr wrap="square">
+            <a:spAutoFit/>
+          </a:bodyPr>
+          <a:lstStyle/>
+          <a:p>
+            <a:pPr algn="l">
+              <a:lnSpc>
+                <a:spcPct val="125000"/>
+              </a:lnSpc>
+              <a:spcAft>
+                <a:spcPts val="600"/>
+              </a:spcAft>
+            </a:pPr>
+            <a:r>
+              <a:rPr sz="1600" b="0">
+                <a:solidFill>
+                  <a:srgbClr val="171A14"/>
+                </a:solidFill>
+                <a:latin typeface="Segoe UI"/>
+              </a:rPr>
+              <a:t>no longer true</a:t>
+            </a:r>
+          </a:p>
+        </p:txBody>
+      </p:sp>
+      <p:sp>
+        <p:nvSpPr>
+          <p:cNvPr id="17" name="TextBox 16"/>
+          <p:cNvSpPr txBox="1"/>
+          <p:nvPr/>
+        </p:nvSpPr>
+        <p:spPr>
+          <a:xfrm>
+            <a:off x="8182660" y="3557016"/>
+            <a:ext cx="3112922" cy="457200"/>
+          </a:xfrm>
+          <a:prstGeom prst="rect">
+            <a:avLst/>
+          </a:prstGeom>
+          <a:noFill/>
+        </p:spPr>
+        <p:txBody>
+          <a:bodyPr wrap="square">
+            <a:spAutoFit/>
+          </a:bodyPr>
+          <a:lstStyle/>
+          <a:p>
+            <a:pPr algn="l">
+              <a:lnSpc>
+                <a:spcPct val="125000"/>
+              </a:lnSpc>
+              <a:spcAft>
+                <a:spcPts val="600"/>
+              </a:spcAft>
+            </a:pPr>
+            <a:r>
+              <a:rPr sz="1150" b="0">
+                <a:solidFill>
+                  <a:srgbClr val="66705C"/>
+                </a:solidFill>
+                <a:latin typeface="Segoe UI"/>
+              </a:rPr>
+              <a:t>“Each new algorithm takes longer to appear” held in reverse data and fails on the full corpus.</a:t>
+            </a:r>
+          </a:p>
+        </p:txBody>
+      </p:sp>
+      <p:graphicFrame>
+        <p:nvGraphicFramePr>
+          <p:cNvPr id="18" name="Table 17"/>
+          <p:cNvGraphicFramePr>
+            <a:graphicFrameLocks noGrp="1"/>
+          </p:cNvGraphicFramePr>
+          <p:nvPr/>
+        </p:nvGraphicFramePr>
+        <p:xfrm>
+          <a:off x="731520" y="4288536"/>
+          <a:ext cx="10728652" cy="1865376"/>
+        </p:xfrm>
+        <a:graphic>
+          <a:graphicData uri="http://schemas.openxmlformats.org/drawingml/2006/table">
+            <a:tbl>
+              <a:tblPr firstRow="1" bandRow="1">
+                <a:tableStyleId>{5C22544A-7EE6-4342-B048-85BDC9FD1C3A}</a:tableStyleId>
+              </a:tblPr>
+              <a:tblGrid>
+                <a:gridCol w="3218596"/>
+                <a:gridCol w="1716584"/>
+                <a:gridCol w="1931157"/>
+                <a:gridCol w="3862315"/>
+              </a:tblGrid>
+              <a:tr h="310896">
+                <a:tc>
+                  <a:txBody>
+                    <a:bodyPr/>
+                    <a:lstStyle/>
+                    <a:p>
+                      <a:r>
+                        <a:rPr sz="1200" b="1">
+                          <a:solidFill>
+                            <a:srgbClr val="66705C"/>
+                          </a:solidFill>
+                          <a:latin typeface="Segoe UI"/>
+                        </a:rPr>
+                        <a:t>New cryptographic primitive</a:t>
+                      </a:r>
+                    </a:p>
+                  </a:txBody>
+                  <a:tcPr anchor="ctr" marL="109728" marT="27432" marB="27432">
+                    <a:solidFill>
+                      <a:srgbClr val="F6F7F3"/>
+                    </a:solidFill>
+                  </a:tcPr>
+                </a:tc>
+                <a:tc>
+                  <a:txBody>
+                    <a:bodyPr/>
+                    <a:lstStyle/>
+                    <a:p>
+                      <a:r>
+                        <a:rPr sz="1200" b="1">
+                          <a:solidFill>
+                            <a:srgbClr val="66705C"/>
+                          </a:solidFill>
+                          <a:latin typeface="Segoe UI"/>
+                        </a:rPr>
+                        <a:t>Published</a:t>
+                      </a:r>
+                    </a:p>
+                  </a:txBody>
+                  <a:tcPr anchor="ctr" marL="109728" marT="27432" marB="27432">
+                    <a:solidFill>
+                      <a:srgbClr val="F6F7F3"/>
+                    </a:solidFill>
+                  </a:tcPr>
+                </a:tc>
+                <a:tc>
+                  <a:txBody>
+                    <a:bodyPr/>
+                    <a:lstStyle/>
+                    <a:p>
+                      <a:r>
+                        <a:rPr sz="1200" b="1">
+                          <a:solidFill>
+                            <a:srgbClr val="66705C"/>
+                          </a:solidFill>
+                          <a:latin typeface="Segoe UI"/>
+                        </a:rPr>
+                        <a:t>Reverse only</a:t>
+                      </a:r>
+                    </a:p>
+                  </a:txBody>
+                  <a:tcPr anchor="ctr" marL="109728" marT="27432" marB="27432">
+                    <a:solidFill>
+                      <a:srgbClr val="F6F7F3"/>
+                    </a:solidFill>
+                  </a:tcPr>
+                </a:tc>
+                <a:tc>
+                  <a:txBody>
+                    <a:bodyPr/>
+                    <a:lstStyle/>
+                    <a:p>
+                      <a:r>
+                        <a:rPr sz="1200" b="1">
+                          <a:solidFill>
+                            <a:srgbClr val="66705C"/>
+                          </a:solidFill>
+                          <a:latin typeface="Segoe UI"/>
+                        </a:rPr>
+                        <a:t>Full corpus</a:t>
+                      </a:r>
+                    </a:p>
+                  </a:txBody>
+                  <a:tcPr anchor="ctr" marL="109728" marT="27432" marB="27432">
+                    <a:solidFill>
+                      <a:srgbClr val="F6F7F3"/>
+                    </a:solidFill>
+                  </a:tcPr>
+                </a:tc>
+              </a:tr>
+              <a:tr h="310896">
+                <a:tc>
+                  <a:txBody>
+                    <a:bodyPr/>
+                    <a:lstStyle/>
+                    <a:p>
+                      <a:r>
+                        <a:rPr sz="1300" b="0">
+                          <a:solidFill>
+                            <a:srgbClr val="171A14"/>
+                          </a:solidFill>
+                          <a:latin typeface="Segoe UI"/>
+                        </a:rPr>
+                        <a:t>ECC-GOST</a:t>
+                      </a:r>
+                    </a:p>
+                  </a:txBody>
+                  <a:tcPr anchor="ctr" marL="109728" marT="27432" marB="27432">
+                    <a:solidFill>
+                      <a:srgbClr val="FFFFFF"/>
+                    </a:solidFill>
+                  </a:tcPr>
+                </a:tc>
+                <a:tc>
+                  <a:txBody>
+                    <a:bodyPr/>
+                    <a:lstStyle/>
+                    <a:p>
+                      <a:r>
+                        <a:rPr sz="1300" b="0">
+                          <a:solidFill>
+                            <a:srgbClr val="171A14"/>
+                          </a:solidFill>
+                          <a:latin typeface="Segoe UI"/>
+                        </a:rPr>
+                        <a:t>2010-07</a:t>
+                      </a:r>
+                    </a:p>
+                  </a:txBody>
+                  <a:tcPr anchor="ctr" marL="109728" marT="27432" marB="27432">
+                    <a:solidFill>
+                      <a:srgbClr val="FFFFFF"/>
+                    </a:solidFill>
+                  </a:tcPr>
+                </a:tc>
+                <a:tc>
+                  <a:txBody>
+                    <a:bodyPr/>
+                    <a:lstStyle/>
+                    <a:p>
+                      <a:r>
+                        <a:rPr sz="1300" b="0">
+                          <a:solidFill>
+                            <a:srgbClr val="171A14"/>
+                          </a:solidFill>
+                          <a:latin typeface="Segoe UI"/>
+                        </a:rPr>
+                        <a:t>2.5 y</a:t>
+                      </a:r>
+                    </a:p>
+                  </a:txBody>
+                  <a:tcPr anchor="ctr" marL="109728" marT="27432" marB="27432">
+                    <a:solidFill>
+                      <a:srgbClr val="FFFFFF"/>
+                    </a:solidFill>
+                  </a:tcPr>
+                </a:tc>
+                <a:tc>
+                  <a:txBody>
+                    <a:bodyPr/>
+                    <a:lstStyle/>
+                    <a:p>
+                      <a:r>
+                        <a:rPr sz="1300" b="0">
+                          <a:solidFill>
+                            <a:srgbClr val="171A14"/>
+                          </a:solidFill>
+                          <a:latin typeface="Segoe UI"/>
+                        </a:rPr>
+                        <a:t>2.4 y</a:t>
+                      </a:r>
+                    </a:p>
+                  </a:txBody>
+                  <a:tcPr anchor="ctr" marL="109728" marT="27432" marB="27432">
+                    <a:solidFill>
+                      <a:srgbClr val="FFFFFF"/>
+                    </a:solidFill>
+                  </a:tcPr>
+                </a:tc>
+              </a:tr>
+              <a:tr h="310896">
+                <a:tc>
+                  <a:txBody>
+                    <a:bodyPr/>
+                    <a:lstStyle/>
+                    <a:p>
+                      <a:r>
+                        <a:rPr sz="1300" b="0">
+                          <a:solidFill>
+                            <a:srgbClr val="171A14"/>
+                          </a:solidFill>
+                          <a:latin typeface="Segoe UI"/>
+                        </a:rPr>
+                        <a:t>ECDSA P-256</a:t>
+                      </a:r>
+                    </a:p>
+                  </a:txBody>
+                  <a:tcPr anchor="ctr" marL="109728" marT="27432" marB="27432">
+                    <a:solidFill>
+                      <a:srgbClr val="FFFFFF"/>
+                    </a:solidFill>
+                  </a:tcPr>
+                </a:tc>
+                <a:tc>
+                  <a:txBody>
+                    <a:bodyPr/>
+                    <a:lstStyle/>
+                    <a:p>
+                      <a:r>
+                        <a:rPr sz="1300" b="0">
+                          <a:solidFill>
+                            <a:srgbClr val="171A14"/>
+                          </a:solidFill>
+                          <a:latin typeface="Segoe UI"/>
+                        </a:rPr>
+                        <a:t>2012-04</a:t>
+                      </a:r>
+                    </a:p>
+                  </a:txBody>
+                  <a:tcPr anchor="ctr" marL="109728" marT="27432" marB="27432">
+                    <a:solidFill>
+                      <a:srgbClr val="FFFFFF"/>
+                    </a:solidFill>
+                  </a:tcPr>
+                </a:tc>
+                <a:tc>
+                  <a:txBody>
+                    <a:bodyPr/>
+                    <a:lstStyle/>
+                    <a:p>
+                      <a:r>
+                        <a:rPr sz="1300" b="0">
+                          <a:solidFill>
+                            <a:srgbClr val="171A14"/>
+                          </a:solidFill>
+                          <a:latin typeface="Segoe UI"/>
+                        </a:rPr>
+                        <a:t>3.7 y</a:t>
+                      </a:r>
+                    </a:p>
+                  </a:txBody>
+                  <a:tcPr anchor="ctr" marL="109728" marT="27432" marB="27432">
+                    <a:solidFill>
+                      <a:srgbClr val="FFFFFF"/>
+                    </a:solidFill>
+                  </a:tcPr>
+                </a:tc>
+                <a:tc>
+                  <a:txBody>
+                    <a:bodyPr/>
+                    <a:lstStyle/>
+                    <a:p>
+                      <a:r>
+                        <a:rPr sz="1300" b="0">
+                          <a:solidFill>
+                            <a:srgbClr val="171A14"/>
+                          </a:solidFill>
+                          <a:latin typeface="Segoe UI"/>
+                        </a:rPr>
+                        <a:t>3.6 y</a:t>
+                      </a:r>
+                    </a:p>
+                  </a:txBody>
+                  <a:tcPr anchor="ctr" marL="109728" marT="27432" marB="27432">
+                    <a:solidFill>
+                      <a:srgbClr val="FFFFFF"/>
+                    </a:solidFill>
+                  </a:tcPr>
+                </a:tc>
+              </a:tr>
+              <a:tr h="310896">
+                <a:tc>
+                  <a:txBody>
+                    <a:bodyPr/>
+                    <a:lstStyle/>
+                    <a:p>
+                      <a:r>
+                        <a:rPr sz="1300" b="0">
+                          <a:solidFill>
+                            <a:srgbClr val="171A14"/>
+                          </a:solidFill>
+                          <a:latin typeface="Segoe UI"/>
+                        </a:rPr>
+                        <a:t>ECDSA P-384</a:t>
+                      </a:r>
+                    </a:p>
+                  </a:txBody>
+                  <a:tcPr anchor="ctr" marL="109728" marT="27432" marB="27432">
+                    <a:solidFill>
+                      <a:srgbClr val="FFFFFF"/>
+                    </a:solidFill>
+                  </a:tcPr>
+                </a:tc>
+                <a:tc>
+                  <a:txBody>
+                    <a:bodyPr/>
+                    <a:lstStyle/>
+                    <a:p>
+                      <a:r>
+                        <a:rPr sz="1300" b="0">
+                          <a:solidFill>
+                            <a:srgbClr val="171A14"/>
+                          </a:solidFill>
+                          <a:latin typeface="Segoe UI"/>
+                        </a:rPr>
+                        <a:t>2012-04</a:t>
+                      </a:r>
+                    </a:p>
+                  </a:txBody>
+                  <a:tcPr anchor="ctr" marL="109728" marT="27432" marB="27432">
+                    <a:solidFill>
+                      <a:srgbClr val="FFFFFF"/>
+                    </a:solidFill>
+                  </a:tcPr>
+                </a:tc>
+                <a:tc>
+                  <a:txBody>
+                    <a:bodyPr/>
+                    <a:lstStyle/>
+                    <a:p>
+                      <a:r>
+                        <a:rPr sz="1300" b="0">
+                          <a:solidFill>
+                            <a:srgbClr val="171A14"/>
+                          </a:solidFill>
+                          <a:latin typeface="Segoe UI"/>
+                        </a:rPr>
+                        <a:t>4.0 y</a:t>
+                      </a:r>
+                    </a:p>
+                  </a:txBody>
+                  <a:tcPr anchor="ctr" marL="109728" marT="27432" marB="27432">
+                    <a:solidFill>
+                      <a:srgbClr val="FFFFFF"/>
+                    </a:solidFill>
+                  </a:tcPr>
+                </a:tc>
+                <a:tc>
+                  <a:txBody>
+                    <a:bodyPr/>
+                    <a:lstStyle/>
+                    <a:p>
+                      <a:r>
+                        <a:rPr sz="1300" b="0">
+                          <a:solidFill>
+                            <a:srgbClr val="171A14"/>
+                          </a:solidFill>
+                          <a:latin typeface="Segoe UI"/>
+                        </a:rPr>
+                        <a:t>3.9 y</a:t>
+                      </a:r>
+                    </a:p>
+                  </a:txBody>
+                  <a:tcPr anchor="ctr" marL="109728" marT="27432" marB="27432">
+                    <a:solidFill>
+                      <a:srgbClr val="FFFFFF"/>
+                    </a:solidFill>
+                  </a:tcPr>
+                </a:tc>
+              </a:tr>
+              <a:tr h="310896">
+                <a:tc>
+                  <a:txBody>
+                    <a:bodyPr/>
+                    <a:lstStyle/>
+                    <a:p>
+                      <a:r>
+                        <a:rPr sz="1300" b="0">
+                          <a:solidFill>
+                            <a:srgbClr val="171A14"/>
+                          </a:solidFill>
+                          <a:latin typeface="Segoe UI"/>
+                        </a:rPr>
+                        <a:t>Ed25519</a:t>
+                      </a:r>
+                    </a:p>
+                  </a:txBody>
+                  <a:tcPr anchor="ctr" marL="109728" marT="27432" marB="27432">
+                    <a:solidFill>
+                      <a:srgbClr val="FFFFFF"/>
+                    </a:solidFill>
+                  </a:tcPr>
+                </a:tc>
+                <a:tc>
+                  <a:txBody>
+                    <a:bodyPr/>
+                    <a:lstStyle/>
+                    <a:p>
+                      <a:r>
+                        <a:rPr sz="1300" b="0">
+                          <a:solidFill>
+                            <a:srgbClr val="171A14"/>
+                          </a:solidFill>
+                          <a:latin typeface="Segoe UI"/>
+                        </a:rPr>
+                        <a:t>2017-02</a:t>
+                      </a:r>
+                    </a:p>
+                  </a:txBody>
+                  <a:tcPr anchor="ctr" marL="109728" marT="27432" marB="27432">
+                    <a:solidFill>
+                      <a:srgbClr val="FFFFFF"/>
+                    </a:solidFill>
+                  </a:tcPr>
+                </a:tc>
+                <a:tc>
+                  <a:txBody>
+                    <a:bodyPr/>
+                    <a:lstStyle/>
+                    <a:p>
+                      <a:r>
+                        <a:rPr sz="1300" b="0">
+                          <a:solidFill>
+                            <a:srgbClr val="171A14"/>
+                          </a:solidFill>
+                          <a:latin typeface="Segoe UI"/>
+                        </a:rPr>
+                        <a:t>5.6 y</a:t>
+                      </a:r>
+                    </a:p>
+                  </a:txBody>
+                  <a:tcPr anchor="ctr" marL="109728" marT="27432" marB="27432">
+                    <a:solidFill>
+                      <a:srgbClr val="FFFFFF"/>
+                    </a:solidFill>
+                  </a:tcPr>
+                </a:tc>
+                <a:tc>
+                  <a:txBody>
+                    <a:bodyPr/>
+                    <a:lstStyle/>
+                    <a:p>
+                      <a:r>
+                        <a:rPr sz="1300" b="0">
+                          <a:solidFill>
+                            <a:srgbClr val="171A14"/>
+                          </a:solidFill>
+                          <a:latin typeface="Segoe UI"/>
+                        </a:rPr>
+                        <a:t>1.9 y  ← the newest is the fastest</a:t>
+                      </a:r>
+                    </a:p>
+                  </a:txBody>
+                  <a:tcPr anchor="ctr" marL="109728" marT="27432" marB="27432">
+                    <a:solidFill>
+                      <a:srgbClr val="FFFFFF"/>
+                    </a:solidFill>
+                  </a:tcPr>
+                </a:tc>
+              </a:tr>
+              <a:tr h="310896">
+                <a:tc>
+                  <a:txBody>
+                    <a:bodyPr/>
+                    <a:lstStyle/>
+                    <a:p>
+                      <a:r>
+                        <a:rPr sz="1300" b="0">
+                          <a:solidFill>
+                            <a:srgbClr val="171A14"/>
+                          </a:solidFill>
+                          <a:latin typeface="Segoe UI"/>
+                        </a:rPr>
+                        <a:t>Ed448</a:t>
+                      </a:r>
+                    </a:p>
+                  </a:txBody>
+                  <a:tcPr anchor="ctr" marL="109728" marT="27432" marB="27432">
+                    <a:solidFill>
+                      <a:srgbClr val="FFFFFF"/>
+                    </a:solidFill>
+                  </a:tcPr>
+                </a:tc>
+                <a:tc>
+                  <a:txBody>
+                    <a:bodyPr/>
+                    <a:lstStyle/>
+                    <a:p>
+                      <a:r>
+                        <a:rPr sz="1300" b="0">
+                          <a:solidFill>
+                            <a:srgbClr val="171A14"/>
+                          </a:solidFill>
+                          <a:latin typeface="Segoe UI"/>
+                        </a:rPr>
+                        <a:t>2017-02</a:t>
+                      </a:r>
+                    </a:p>
+                  </a:txBody>
+                  <a:tcPr anchor="ctr" marL="109728" marT="27432" marB="27432">
+                    <a:solidFill>
+                      <a:srgbClr val="FFFFFF"/>
+                    </a:solidFill>
+                  </a:tcPr>
+                </a:tc>
+                <a:tc>
+                  <a:txBody>
+                    <a:bodyPr/>
+                    <a:lstStyle/>
+                    <a:p>
+                      <a:r>
+                        <a:rPr sz="1300" b="0">
+                          <a:solidFill>
+                            <a:srgbClr val="171A14"/>
+                          </a:solidFill>
+                          <a:latin typeface="Segoe UI"/>
+                        </a:rPr>
+                        <a:t>5.8 y</a:t>
+                      </a:r>
+                    </a:p>
+                  </a:txBody>
+                  <a:tcPr anchor="ctr" marL="109728" marT="27432" marB="27432">
+                    <a:solidFill>
+                      <a:srgbClr val="FFFFFF"/>
+                    </a:solidFill>
+                  </a:tcPr>
+                </a:tc>
+                <a:tc>
+                  <a:txBody>
+                    <a:bodyPr/>
+                    <a:lstStyle/>
+                    <a:p>
+                      <a:r>
+                        <a:rPr sz="1300" b="0">
+                          <a:solidFill>
+                            <a:srgbClr val="171A14"/>
+                          </a:solidFill>
+                          <a:latin typeface="Segoe UI"/>
+                        </a:rPr>
+                        <a:t>3.2 y</a:t>
+                      </a:r>
+                    </a:p>
+                  </a:txBody>
+                  <a:tcPr anchor="ctr" marL="109728" marT="27432" marB="27432">
+                    <a:solidFill>
+                      <a:srgbClr val="FFFFFF"/>
+                    </a:solidFill>
+                  </a:tcPr>
+                </a:tc>
+              </a:tr>
+            </a:tbl>
+          </a:graphicData>
+        </a:graphic>
+      </p:graphicFrame>
+      <p:sp>
+        <p:nvSpPr>
+          <p:cNvPr id="19" name="TextBox 18"/>
+          <p:cNvSpPr txBox="1"/>
+          <p:nvPr/>
+        </p:nvSpPr>
+        <p:spPr>
+          <a:xfrm>
+            <a:off x="731520" y="6263640"/>
+            <a:ext cx="10728655" cy="548640"/>
+          </a:xfrm>
+          <a:prstGeom prst="rect">
+            <a:avLst/>
+          </a:prstGeom>
+          <a:noFill/>
+        </p:spPr>
+        <p:txBody>
+          <a:bodyPr wrap="square">
+            <a:spAutoFit/>
+          </a:bodyPr>
+          <a:lstStyle/>
+          <a:p>
+            <a:pPr algn="l">
+              <a:lnSpc>
+                <a:spcPct val="125000"/>
+              </a:lnSpc>
+              <a:spcAft>
+                <a:spcPts val="600"/>
+              </a:spcAft>
+            </a:pPr>
+            <a:r>
+              <a:rPr sz="1250" b="0">
+                <a:solidFill>
+                  <a:srgbClr val="66705C"/>
+                </a:solidFill>
+                <a:latin typeface="Segoe UI"/>
+              </a:rPr>
+              <a:t>Reverse only: 3.7 → 4.0 → 5.6 → 5.8, monotonic. Full corpus: 2.4 → 3.6 → 3.9 → 1.9 → 3.2, not monotonic. The pattern was a property of one corpus: reverse-DNS operators adopt late, so every newer algorithm looked slower. .se had Ed25519 in 2019-01; the RIRs not until 2022-08.</a:t>
+            </a:r>
+          </a:p>
+        </p:txBody>
+      </p:sp>
+    </p:spTree>
+  </p:cSld>
+  <p:clrMapOvr>
+    <a:masterClrMapping/>
+  </p:clrMapOvr>
+</p:sld>
+</file>
+
+<file path=ppt/slides/slide13.xml><?xml version="1.0" encoding="utf-8"?>
+<p:sld xmlns:a="http://schemas.openxmlformats.org/drawingml/2006/main" xmlns:p="http://schemas.openxmlformats.org/presentationml/2006/main" xmlns:r="http://schemas.openxmlformats.org/officeDocument/2006/relationships">
+  <p:cSld>
+    <p:spTree>
+      <p:nvGrpSpPr>
+        <p:cNvPr id="1" name=""/>
+        <p:cNvGrpSpPr/>
+        <p:nvPr/>
+      </p:nvGrpSpPr>
+      <p:grpSpPr/>
+      <p:sp>
+        <p:nvSpPr>
+          <p:cNvPr id="2" name="TextBox 1"/>
+          <p:cNvSpPr txBox="1"/>
+          <p:nvPr/>
+        </p:nvSpPr>
+        <p:spPr>
+          <a:xfrm>
+            <a:off x="731520" y="502920"/>
+            <a:ext cx="10728655" cy="274320"/>
+          </a:xfrm>
+          <a:prstGeom prst="rect">
+            <a:avLst/>
+          </a:prstGeom>
+          <a:noFill/>
+        </p:spPr>
+        <p:txBody>
+          <a:bodyPr wrap="square">
+            <a:spAutoFit/>
+          </a:bodyPr>
+          <a:lstStyle/>
+          <a:p>
+            <a:pPr algn="l">
+              <a:lnSpc>
+                <a:spcPct val="125000"/>
+              </a:lnSpc>
+              <a:spcAft>
+                <a:spcPts val="600"/>
+              </a:spcAft>
+            </a:pPr>
+            <a:r>
+              <a:rPr sz="1100" b="1">
+                <a:solidFill>
+                  <a:srgbClr val="00907F"/>
+                </a:solidFill>
+                <a:latin typeface="Segoe UI"/>
+              </a:rPr>
+              <a:t>INSIGHT 1</a:t>
+            </a:r>
+          </a:p>
+        </p:txBody>
+      </p:sp>
+      <p:sp>
+        <p:nvSpPr>
+          <p:cNvPr id="3" name="TextBox 2"/>
+          <p:cNvSpPr txBox="1"/>
+          <p:nvPr/>
+        </p:nvSpPr>
+        <p:spPr>
+          <a:xfrm>
+            <a:off x="731520" y="850392"/>
+            <a:ext cx="10728655" cy="640080"/>
+          </a:xfrm>
+          <a:prstGeom prst="rect">
+            <a:avLst/>
+          </a:prstGeom>
+          <a:noFill/>
+        </p:spPr>
+        <p:txBody>
+          <a:bodyPr wrap="square">
+            <a:spAutoFit/>
+          </a:bodyPr>
+          <a:lstStyle/>
+          <a:p>
+            <a:pPr algn="l">
+              <a:lnSpc>
+                <a:spcPct val="125000"/>
+              </a:lnSpc>
+              <a:spcAft>
+                <a:spcPts val="600"/>
+              </a:spcAft>
+            </a:pPr>
+            <a:r>
+              <a:rPr sz="3200" b="1">
+                <a:solidFill>
+                  <a:srgbClr val="171A14"/>
+                </a:solidFill>
+                <a:latin typeface="Segoe UI"/>
+              </a:rPr>
+              <a:t>Being early tells you nothing about ending up used</a:t>
+            </a:r>
+          </a:p>
+        </p:txBody>
+      </p:sp>
+      <p:sp>
+        <p:nvSpPr>
+          <p:cNvPr id="4" name="Rectangle 3"/>
+          <p:cNvSpPr/>
+          <p:nvPr/>
+        </p:nvSpPr>
+        <p:spPr>
+          <a:xfrm>
+            <a:off x="731520" y="1600200"/>
+            <a:ext cx="10728655" cy="9525"/>
+          </a:xfrm>
+          <a:prstGeom prst="rect">
+            <a:avLst/>
+          </a:prstGeom>
+          <a:solidFill>
+            <a:srgbClr val="D3D8CC"/>
+          </a:solidFill>
+          <a:ln>
+            <a:noFill/>
+          </a:ln>
+          <a:effectLst/>
+        </p:spPr>
+        <p:style>
+          <a:lnRef idx="1">
+            <a:schemeClr val="accent1"/>
+          </a:lnRef>
+          <a:fillRef idx="3">
+            <a:schemeClr val="accent1"/>
+          </a:fillRef>
+          <a:effectRef idx="2">
+            <a:schemeClr val="accent1"/>
+          </a:effectRef>
+          <a:fontRef idx="minor">
+            <a:schemeClr val="lt1"/>
+          </a:fontRef>
+        </p:style>
+        <p:txBody>
+          <a:bodyPr rtlCol="0" anchor="ctr"/>
+          <a:lstStyle/>
+          <a:p>
+            <a:pPr algn="ctr"/>
+          </a:p>
+        </p:txBody>
+      </p:sp>
+      <p:pic>
+        <p:nvPicPr>
+          <p:cNvPr id="5" name="Picture 4" descr="onset_vs_spread.png"/>
+          <p:cNvPicPr>
+            <a:picLocks noChangeAspect="1"/>
+          </p:cNvPicPr>
+          <p:nvPr/>
+        </p:nvPicPr>
+        <p:blipFill>
+          <a:blip r:embed="rId2"/>
+          <a:stretch>
+            <a:fillRect/>
+          </a:stretch>
+        </p:blipFill>
+        <p:spPr>
+          <a:xfrm>
+            <a:off x="2388256" y="1911096"/>
+            <a:ext cx="7415182" cy="3840479"/>
+          </a:xfrm>
+          <a:prstGeom prst="rect">
+            <a:avLst/>
+          </a:prstGeom>
+        </p:spPr>
+      </p:pic>
+      <p:sp>
+        <p:nvSpPr>
+          <p:cNvPr id="6" name="TextBox 5"/>
+          <p:cNvSpPr txBox="1"/>
+          <p:nvPr/>
+        </p:nvSpPr>
+        <p:spPr>
+          <a:xfrm>
+            <a:off x="731520" y="5532120"/>
+            <a:ext cx="10728655" cy="1005840"/>
+          </a:xfrm>
+          <a:prstGeom prst="rect">
+            <a:avLst/>
+          </a:prstGeom>
+          <a:noFill/>
+        </p:spPr>
+        <p:txBody>
+          <a:bodyPr wrap="square">
+            <a:spAutoFit/>
+          </a:bodyPr>
+          <a:lstStyle/>
+          <a:p>
+            <a:pPr algn="l">
+              <a:lnSpc>
+                <a:spcPct val="125000"/>
+              </a:lnSpc>
+              <a:spcAft>
+                <a:spcPts val="600"/>
+              </a:spcAft>
+            </a:pPr>
+            <a:r>
+              <a:rPr sz="1400" b="0">
+                <a:solidFill>
+                  <a:srgbClr val="171A14"/>
+                </a:solidFill>
+                <a:latin typeface="Segoe UI"/>
+              </a:rPr>
+              <a:t>Peak share, not today's — “today” is 2023-12 for the forward-only observables and 2026-08 for the DS ones, so one axis cannot carry both. At n=11 the correlation is not distinguishable from zero under either endpoint (−0.14 on peak, +0.33 on latest). This is the evidence FOR splitting the definition, not an assumption behind it.</a:t>
+            </a:r>
+          </a:p>
+        </p:txBody>
+      </p:sp>
+    </p:spTree>
+  </p:cSld>
+  <p:clrMapOvr>
+    <a:masterClrMapping/>
+  </p:clrMapOvr>
+</p:sld>
+</file>
+
+<file path=ppt/slides/slide14.xml><?xml version="1.0" encoding="utf-8"?>
+<p:sld xmlns:a="http://schemas.openxmlformats.org/drawingml/2006/main" xmlns:p="http://schemas.openxmlformats.org/presentationml/2006/main" xmlns:r="http://schemas.openxmlformats.org/officeDocument/2006/relationships">
+  <p:cSld>
+    <p:spTree>
+      <p:nvGrpSpPr>
+        <p:cNvPr id="1" name=""/>
+        <p:cNvGrpSpPr/>
+        <p:nvPr/>
+      </p:nvGrpSpPr>
+      <p:grpSpPr/>
+      <p:sp>
+        <p:nvSpPr>
+          <p:cNvPr id="2" name="TextBox 1"/>
+          <p:cNvSpPr txBox="1"/>
+          <p:nvPr/>
+        </p:nvSpPr>
+        <p:spPr>
+          <a:xfrm>
+            <a:off x="731520" y="502920"/>
+            <a:ext cx="10728655" cy="274320"/>
+          </a:xfrm>
+          <a:prstGeom prst="rect">
+            <a:avLst/>
+          </a:prstGeom>
+          <a:noFill/>
+        </p:spPr>
+        <p:txBody>
+          <a:bodyPr wrap="square">
+            <a:spAutoFit/>
+          </a:bodyPr>
+          <a:lstStyle/>
+          <a:p>
+            <a:pPr algn="l">
+              <a:lnSpc>
+                <a:spcPct val="125000"/>
+              </a:lnSpc>
+              <a:spcAft>
+                <a:spcPts val="600"/>
+              </a:spcAft>
+            </a:pPr>
+            <a:r>
+              <a:rPr sz="1100" b="1">
+                <a:solidFill>
+                  <a:srgbClr val="00907F"/>
+                </a:solidFill>
+                <a:latin typeface="Segoe UI"/>
+              </a:rPr>
               <a:t>INSIGHT 2</a:t>
             </a:r>
           </a:p>
@@ -4303,7 +6977,7 @@
 </p:sld>
 </file>
 
-<file path=ppt/slides/slide12.xml><?xml version="1.0" encoding="utf-8"?>
+<file path=ppt/slides/slide15.xml><?xml version="1.0" encoding="utf-8"?>
 <p:sld xmlns:a="http://schemas.openxmlformats.org/drawingml/2006/main" xmlns:p="http://schemas.openxmlformats.org/presentationml/2006/main" xmlns:r="http://schemas.openxmlformats.org/officeDocument/2006/relationships">
   <p:cSld>
     <p:spTree>
@@ -4557,7 +7231,7 @@
 </p:sld>
 </file>
 
-<file path=ppt/slides/slide13.xml><?xml version="1.0" encoding="utf-8"?>
+<file path=ppt/slides/slide16.xml><?xml version="1.0" encoding="utf-8"?>
 <p:sld xmlns:a="http://schemas.openxmlformats.org/drawingml/2006/main" xmlns:p="http://schemas.openxmlformats.org/presentationml/2006/main" xmlns:r="http://schemas.openxmlformats.org/officeDocument/2006/relationships">
   <p:cSld>
     <p:spTree>
@@ -5392,7 +8066,7 @@
 </p:sld>
 </file>
 
-<file path=ppt/slides/slide14.xml><?xml version="1.0" encoding="utf-8"?>
+<file path=ppt/slides/slide17.xml><?xml version="1.0" encoding="utf-8"?>
 <p:sld xmlns:a="http://schemas.openxmlformats.org/drawingml/2006/main" xmlns:p="http://schemas.openxmlformats.org/presentationml/2006/main" xmlns:r="http://schemas.openxmlformats.org/officeDocument/2006/relationships">
   <p:cSld>
     <p:spTree>
@@ -5882,7 +8556,7 @@
 </p:sld>
 </file>
 
-<file path=ppt/slides/slide15.xml><?xml version="1.0" encoding="utf-8"?>
+<file path=ppt/slides/slide18.xml><?xml version="1.0" encoding="utf-8"?>
 <p:sld xmlns:a="http://schemas.openxmlformats.org/drawingml/2006/main" xmlns:p="http://schemas.openxmlformats.org/presentationml/2006/main" xmlns:r="http://schemas.openxmlformats.org/officeDocument/2006/relationships">
   <p:cSld>
     <p:spTree>
@@ -6936,7 +9610,7 @@
                 </a:solidFill>
                 <a:latin typeface="Segoe UI"/>
               </a:rPr>
-              <a:t>It peaked at 2.03% of signed names in 2020-06.</a:t>
+              <a:t>In the forward TLDs it reached 2.04% of signed names by 2020-06.</a:t>
             </a:r>
           </a:p>
         </p:txBody>
@@ -7106,7 +9780,7 @@
                 </a:solidFill>
                 <a:latin typeface="Segoe UI"/>
               </a:rPr>
-              <a:t>It is not. It has fallen back to 0.37% since.</a:t>
+              <a:t>It is not. Those same TLDs were back to 0.003% by 2023-12.</a:t>
             </a:r>
           </a:p>
         </p:txBody>
@@ -9544,7 +12218,7 @@
                           </a:solidFill>
                           <a:latin typeface="Segoe UI"/>
                         </a:rPr>
-                        <a:t>Ed25519</a:t>
+                        <a:t>Ed25519 — forward</a:t>
                       </a:r>
                     </a:p>
                   </a:txBody>
@@ -9654,7 +12328,7 @@
                           </a:solidFill>
                           <a:latin typeface="Segoe UI"/>
                         </a:rPr>
-                        <a:t>2.03%</a:t>
+                        <a:t>2.04%</a:t>
                       </a:r>
                     </a:p>
                   </a:txBody>
@@ -9676,7 +12350,7 @@
                           </a:solidFill>
                           <a:latin typeface="Segoe UI"/>
                         </a:rPr>
-                        <a:t>0.37%</a:t>
+                        <a:t>0.003%</a:t>
                       </a:r>
                     </a:p>
                   </a:txBody>
@@ -9700,7 +12374,7 @@
                           </a:solidFill>
                           <a:latin typeface="Segoe UI"/>
                         </a:rPr>
-                        <a:t>Ed448</a:t>
+                        <a:t>Ed25519 — reverse</a:t>
                       </a:r>
                     </a:p>
                   </a:txBody>
@@ -9722,7 +12396,7 @@
                           </a:solidFill>
                           <a:latin typeface="Segoe UI"/>
                         </a:rPr>
-                        <a:t>3.2 y</a:t>
+                        <a:t>5.5 y</a:t>
                       </a:r>
                     </a:p>
                   </a:txBody>
@@ -9744,7 +12418,7 @@
                           </a:solidFill>
                           <a:latin typeface="Segoe UI"/>
                         </a:rPr>
-                        <a:t>2020-05</a:t>
+                        <a:t>2022-08</a:t>
                       </a:r>
                     </a:p>
                   </a:txBody>
@@ -9810,7 +12484,7 @@
                           </a:solidFill>
                           <a:latin typeface="Segoe UI"/>
                         </a:rPr>
-                        <a:t>0.03%</a:t>
+                        <a:t>0.39%</a:t>
                       </a:r>
                     </a:p>
                   </a:txBody>
@@ -9832,7 +12506,7 @@
                           </a:solidFill>
                           <a:latin typeface="Segoe UI"/>
                         </a:rPr>
-                        <a:t>0.03%</a:t>
+                        <a:t>0.37%</a:t>
                       </a:r>
                     </a:p>
                   </a:txBody>
@@ -9856,7 +12530,7 @@
                           </a:solidFill>
                           <a:latin typeface="Segoe UI"/>
                         </a:rPr>
-                        <a:t>ECDSA P-256 (RFC 6605)</a:t>
+                        <a:t>Ed448 — forward</a:t>
                       </a:r>
                     </a:p>
                   </a:txBody>
@@ -9878,7 +12552,7 @@
                           </a:solidFill>
                           <a:latin typeface="Segoe UI"/>
                         </a:rPr>
-                        <a:t>3.6 y</a:t>
+                        <a:t>3.2 y</a:t>
                       </a:r>
                     </a:p>
                   </a:txBody>
@@ -9900,7 +12574,7 @@
                           </a:solidFill>
                           <a:latin typeface="Segoe UI"/>
                         </a:rPr>
-                        <a:t>2015-11</a:t>
+                        <a:t>2020-05</a:t>
                       </a:r>
                     </a:p>
                   </a:txBody>
@@ -9922,7 +12596,7 @@
                           </a:solidFill>
                           <a:latin typeface="Segoe UI"/>
                         </a:rPr>
-                        <a:t>2016-10</a:t>
+                        <a:t>never</a:t>
                       </a:r>
                     </a:p>
                   </a:txBody>
@@ -9944,7 +12618,7 @@
                           </a:solidFill>
                           <a:latin typeface="Segoe UI"/>
                         </a:rPr>
-                        <a:t>2019-02</a:t>
+                        <a:t>never</a:t>
                       </a:r>
                     </a:p>
                   </a:txBody>
@@ -9966,7 +12640,7 @@
                           </a:solidFill>
                           <a:latin typeface="Segoe UI"/>
                         </a:rPr>
-                        <a:t>76.2%</a:t>
+                        <a:t>0.00%</a:t>
                       </a:r>
                     </a:p>
                   </a:txBody>
@@ -9988,7 +12662,7 @@
                           </a:solidFill>
                           <a:latin typeface="Segoe UI"/>
                         </a:rPr>
-                        <a:t>see note</a:t>
+                        <a:t>0.00%</a:t>
                       </a:r>
                     </a:p>
                   </a:txBody>
@@ -10082,7 +12756,7 @@
                 </a:solidFill>
                 <a:latin typeface="Segoe UI"/>
               </a:rPr>
-              <a:t>Ed25519 and Ed448 are defined by the SAME RFC, published the same day, in the same cryptographic family.</a:t>
+              <a:t>Ed25519 and Ed448 come from the SAME RFC, published the same day, in the same family — one date for “RFC 8080” would have averaged them into a single number.</a:t>
             </a:r>
           </a:p>
           <a:p>
@@ -10120,7 +12794,7 @@
                 </a:solidFill>
                 <a:latin typeface="Segoe UI"/>
               </a:rPr>
-              <a:t>Ed25519 appeared after 1.9 years, reached real use, peaked at 2.03% and has fallen back to 0.37%. Ed448 took 3.2 years to appear and has never been used by more than a handful of zones.</a:t>
+              <a:t>Ed25519 appeared in the forward TLDs after 1.9 years and in reverse delegations only after 5.5, and did something different in each. Ed448 has never left first sighting anywhere.</a:t>
             </a:r>
           </a:p>
           <a:p>
@@ -10158,7 +12832,7 @@
                 </a:solidFill>
                 <a:latin typeface="Segoe UI"/>
               </a:rPr>
-              <a:t>One date per RFC would have averaged these into a single number for “RFC 8080” and hidden both stories. This is why the unit of measurement is the observable change, not the document.</a:t>
+              <a:t>Each row is one corpus throughout. This is why the unit is the observable change and not the document, and why a first-sighting date has to name the corpora it searched.</a:t>
             </a:r>
           </a:p>
         </p:txBody>
@@ -10378,7 +13052,7 @@
                 </a:solidFill>
                 <a:latin typeface="Segoe UI"/>
               </a:rPr>
-              <a:t>WHAT IT DOES</a:t>
+              <a:t>CROSS-REFERENCE</a:t>
             </a:r>
           </a:p>
         </p:txBody>
@@ -10420,7 +13094,7 @@
                 </a:solidFill>
                 <a:latin typeface="Segoe UI"/>
               </a:rPr>
-              <a:t>The pipeline</a:t>
+              <a:t>Two corpora that share nothing, compared at one date</a:t>
             </a:r>
           </a:p>
         </p:txBody>
@@ -10462,7 +13136,7 @@
                 </a:solidFill>
                 <a:latin typeface="Segoe UI"/>
               </a:rPr>
-              <a:t>Five stages, each resumable, each skippable.</a:t>
+              <a:t>2023-12, the last month both cover.</a:t>
             </a:r>
           </a:p>
         </p:txBody>
@@ -10511,441 +13185,30 @@
           </a:p>
         </p:txBody>
       </p:sp>
-      <p:graphicFrame>
-        <p:nvGraphicFramePr>
-          <p:cNvPr id="6" name="Table 5"/>
-          <p:cNvGraphicFramePr>
-            <a:graphicFrameLocks noGrp="1"/>
-          </p:cNvGraphicFramePr>
-          <p:nvPr/>
-        </p:nvGraphicFramePr>
-        <p:xfrm>
-          <a:off x="731520" y="2478024"/>
-          <a:ext cx="10728654" cy="3072384"/>
-        </p:xfrm>
-        <a:graphic>
-          <a:graphicData uri="http://schemas.openxmlformats.org/drawingml/2006/table">
-            <a:tbl>
-              <a:tblPr firstRow="1" bandRow="1">
-                <a:tableStyleId>{5C22544A-7EE6-4342-B048-85BDC9FD1C3A}</a:tableStyleId>
-              </a:tblPr>
-              <a:tblGrid>
-                <a:gridCol w="1287438"/>
-                <a:gridCol w="5900760"/>
-                <a:gridCol w="3540456"/>
-              </a:tblGrid>
-              <a:tr h="512064">
-                <a:tc>
-                  <a:txBody>
-                    <a:bodyPr/>
-                    <a:lstStyle/>
-                    <a:p>
-                      <a:r>
-                        <a:rPr sz="1200" b="1">
-                          <a:solidFill>
-                            <a:srgbClr val="66705C"/>
-                          </a:solidFill>
-                          <a:latin typeface="Segoe UI"/>
-                        </a:rPr>
-                        <a:t>Stage</a:t>
-                      </a:r>
-                    </a:p>
-                  </a:txBody>
-                  <a:tcPr anchor="ctr" marL="109728" marT="27432" marB="27432">
-                    <a:solidFill>
-                      <a:srgbClr val="F6F7F3"/>
-                    </a:solidFill>
-                  </a:tcPr>
-                </a:tc>
-                <a:tc>
-                  <a:txBody>
-                    <a:bodyPr/>
-                    <a:lstStyle/>
-                    <a:p>
-                      <a:r>
-                        <a:rPr sz="1200" b="1">
-                          <a:solidFill>
-                            <a:srgbClr val="66705C"/>
-                          </a:solidFill>
-                          <a:latin typeface="Segoe UI"/>
-                        </a:rPr>
-                        <a:t>What happens</a:t>
-                      </a:r>
-                    </a:p>
-                  </a:txBody>
-                  <a:tcPr anchor="ctr" marL="109728" marT="27432" marB="27432">
-                    <a:solidFill>
-                      <a:srgbClr val="F6F7F3"/>
-                    </a:solidFill>
-                  </a:tcPr>
-                </a:tc>
-                <a:tc>
-                  <a:txBody>
-                    <a:bodyPr/>
-                    <a:lstStyle/>
-                    <a:p>
-                      <a:r>
-                        <a:rPr sz="1200" b="1">
-                          <a:solidFill>
-                            <a:srgbClr val="66705C"/>
-                          </a:solidFill>
-                          <a:latin typeface="Segoe UI"/>
-                        </a:rPr>
-                        <a:t>Output</a:t>
-                      </a:r>
-                    </a:p>
-                  </a:txBody>
-                  <a:tcPr anchor="ctr" marL="109728" marT="27432" marB="27432">
-                    <a:solidFill>
-                      <a:srgbClr val="F6F7F3"/>
-                    </a:solidFill>
-                  </a:tcPr>
-                </a:tc>
-              </a:tr>
-              <a:tr h="512064">
-                <a:tc>
-                  <a:txBody>
-                    <a:bodyPr/>
-                    <a:lstStyle/>
-                    <a:p>
-                      <a:r>
-                        <a:rPr sz="1300" b="0">
-                          <a:solidFill>
-                            <a:srgbClr val="171A14"/>
-                          </a:solidFill>
-                          <a:latin typeface="Segoe UI"/>
-                        </a:rPr>
-                        <a:t>ripe</a:t>
-                      </a:r>
-                    </a:p>
-                  </a:txBody>
-                  <a:tcPr anchor="ctr" marL="109728" marT="27432" marB="27432">
-                    <a:solidFill>
-                      <a:srgbClr val="FFFFFF"/>
-                    </a:solidFill>
-                  </a:tcPr>
-                </a:tc>
-                <a:tc>
-                  <a:txBody>
-                    <a:bodyPr/>
-                    <a:lstStyle/>
-                    <a:p>
-                      <a:r>
-                        <a:rPr sz="1300" b="0">
-                          <a:solidFill>
-                            <a:srgbClr val="171A14"/>
-                          </a:solidFill>
-                          <a:latin typeface="Segoe UI"/>
-                        </a:rPr>
-                        <a:t>Fetches RIPE’s reverse-delegation archive (the only stage that touches the network)</a:t>
-                      </a:r>
-                    </a:p>
-                  </a:txBody>
-                  <a:tcPr anchor="ctr" marL="109728" marT="27432" marB="27432">
-                    <a:solidFill>
-                      <a:srgbClr val="FFFFFF"/>
-                    </a:solidFill>
-                  </a:tcPr>
-                </a:tc>
-                <a:tc>
-                  <a:txBody>
-                    <a:bodyPr/>
-                    <a:lstStyle/>
-                    <a:p>
-                      <a:r>
-                        <a:rPr sz="1300" b="0">
-                          <a:solidFill>
-                            <a:srgbClr val="171A14"/>
-                          </a:solidFill>
-                          <a:latin typeface="Segoe UI"/>
-                        </a:rPr>
-                        <a:t>the reverse corpus</a:t>
-                      </a:r>
-                    </a:p>
-                  </a:txBody>
-                  <a:tcPr anchor="ctr" marL="109728" marT="27432" marB="27432">
-                    <a:solidFill>
-                      <a:srgbClr val="FFFFFF"/>
-                    </a:solidFill>
-                  </a:tcPr>
-                </a:tc>
-              </a:tr>
-              <a:tr h="512064">
-                <a:tc>
-                  <a:txBody>
-                    <a:bodyPr/>
-                    <a:lstStyle/>
-                    <a:p>
-                      <a:r>
-                        <a:rPr sz="1300" b="0">
-                          <a:solidFill>
-                            <a:srgbClr val="171A14"/>
-                          </a:solidFill>
-                          <a:latin typeface="Segoe UI"/>
-                        </a:rPr>
-                        <a:t>index</a:t>
-                      </a:r>
-                    </a:p>
-                  </a:txBody>
-                  <a:tcPr anchor="ctr" marL="109728" marT="27432" marB="27432">
-                    <a:solidFill>
-                      <a:srgbClr val="FFFFFF"/>
-                    </a:solidFill>
-                  </a:tcPr>
-                </a:tc>
-                <a:tc>
-                  <a:txBody>
-                    <a:bodyPr/>
-                    <a:lstStyle/>
-                    <a:p>
-                      <a:r>
-                        <a:rPr sz="1300" b="0">
-                          <a:solidFill>
-                            <a:srgbClr val="171A14"/>
-                          </a:solidFill>
-                          <a:latin typeface="Segoe UI"/>
-                        </a:rPr>
-                        <a:t>Walks every cache root on the NAS, merges them into one view</a:t>
-                      </a:r>
-                    </a:p>
-                  </a:txBody>
-                  <a:tcPr anchor="ctr" marL="109728" marT="27432" marB="27432">
-                    <a:solidFill>
-                      <a:srgbClr val="FFFFFF"/>
-                    </a:solidFill>
-                  </a:tcPr>
-                </a:tc>
-                <a:tc>
-                  <a:txBody>
-                    <a:bodyPr/>
-                    <a:lstStyle/>
-                    <a:p>
-                      <a:r>
-                        <a:rPr sz="1300" b="0">
-                          <a:solidFill>
-                            <a:srgbClr val="171A14"/>
-                          </a:solidFill>
-                          <a:latin typeface="Segoe UI"/>
-                        </a:rPr>
-                        <a:t>inventory.json</a:t>
-                      </a:r>
-                    </a:p>
-                  </a:txBody>
-                  <a:tcPr anchor="ctr" marL="109728" marT="27432" marB="27432">
-                    <a:solidFill>
-                      <a:srgbClr val="FFFFFF"/>
-                    </a:solidFill>
-                  </a:tcPr>
-                </a:tc>
-              </a:tr>
-              <a:tr h="512064">
-                <a:tc>
-                  <a:txBody>
-                    <a:bodyPr/>
-                    <a:lstStyle/>
-                    <a:p>
-                      <a:r>
-                        <a:rPr sz="1300" b="0">
-                          <a:solidFill>
-                            <a:srgbClr val="171A14"/>
-                          </a:solidFill>
-                          <a:latin typeface="Segoe UI"/>
-                        </a:rPr>
-                        <a:t>extract</a:t>
-                      </a:r>
-                    </a:p>
-                  </a:txBody>
-                  <a:tcPr anchor="ctr" marL="109728" marT="27432" marB="27432">
-                    <a:solidFill>
-                      <a:srgbClr val="FFFFFF"/>
-                    </a:solidFill>
-                  </a:tcPr>
-                </a:tc>
-                <a:tc>
-                  <a:txBody>
-                    <a:bodyPr/>
-                    <a:lstStyle/>
-                    <a:p>
-                      <a:r>
-                        <a:rPr sz="1300" b="0">
-                          <a:solidFill>
-                            <a:srgbClr val="171A14"/>
-                          </a:solidFill>
-                          <a:latin typeface="Segoe UI"/>
-                        </a:rPr>
-                        <a:t>One pass per source-day → tidy counts, one checkpoint each</a:t>
-                      </a:r>
-                    </a:p>
-                  </a:txBody>
-                  <a:tcPr anchor="ctr" marL="109728" marT="27432" marB="27432">
-                    <a:solidFill>
-                      <a:srgbClr val="FFFFFF"/>
-                    </a:solidFill>
-                  </a:tcPr>
-                </a:tc>
-                <a:tc>
-                  <a:txBody>
-                    <a:bodyPr/>
-                    <a:lstStyle/>
-                    <a:p>
-                      <a:r>
-                        <a:rPr sz="1300" b="0">
-                          <a:solidFill>
-                            <a:srgbClr val="171A14"/>
-                          </a:solidFill>
-                          <a:latin typeface="Segoe UI"/>
-                        </a:rPr>
-                        <a:t>timeline_monthly.csv</a:t>
-                      </a:r>
-                    </a:p>
-                  </a:txBody>
-                  <a:tcPr anchor="ctr" marL="109728" marT="27432" marB="27432">
-                    <a:solidFill>
-                      <a:srgbClr val="FFFFFF"/>
-                    </a:solidFill>
-                  </a:tcPr>
-                </a:tc>
-              </a:tr>
-              <a:tr h="512064">
-                <a:tc>
-                  <a:txBody>
-                    <a:bodyPr/>
-                    <a:lstStyle/>
-                    <a:p>
-                      <a:r>
-                        <a:rPr sz="1300" b="0">
-                          <a:solidFill>
-                            <a:srgbClr val="171A14"/>
-                          </a:solidFill>
-                          <a:latin typeface="Segoe UI"/>
-                        </a:rPr>
-                        <a:t>analyse</a:t>
-                      </a:r>
-                    </a:p>
-                  </a:txBody>
-                  <a:tcPr anchor="ctr" marL="109728" marT="27432" marB="27432">
-                    <a:solidFill>
-                      <a:srgbClr val="FFFFFF"/>
-                    </a:solidFill>
-                  </a:tcPr>
-                </a:tc>
-                <a:tc>
-                  <a:txBody>
-                    <a:bodyPr/>
-                    <a:lstStyle/>
-                    <a:p>
-                      <a:r>
-                        <a:rPr sz="1300" b="0">
-                          <a:solidFill>
-                            <a:srgbClr val="171A14"/>
-                          </a:solidFill>
-                          <a:latin typeface="Segoe UI"/>
-                        </a:rPr>
-                        <a:t>Bottom-up over observable changes, top-down over categories</a:t>
-                      </a:r>
-                    </a:p>
-                  </a:txBody>
-                  <a:tcPr anchor="ctr" marL="109728" marT="27432" marB="27432">
-                    <a:solidFill>
-                      <a:srgbClr val="FFFFFF"/>
-                    </a:solidFill>
-                  </a:tcPr>
-                </a:tc>
-                <a:tc>
-                  <a:txBody>
-                    <a:bodyPr/>
-                    <a:lstStyle/>
-                    <a:p>
-                      <a:r>
-                        <a:rPr sz="1300" b="0">
-                          <a:solidFill>
-                            <a:srgbClr val="171A14"/>
-                          </a:solidFill>
-                          <a:latin typeface="Segoe UI"/>
-                        </a:rPr>
-                        <a:t>bottom_up.json · top_down.json</a:t>
-                      </a:r>
-                    </a:p>
-                  </a:txBody>
-                  <a:tcPr anchor="ctr" marL="109728" marT="27432" marB="27432">
-                    <a:solidFill>
-                      <a:srgbClr val="FFFFFF"/>
-                    </a:solidFill>
-                  </a:tcPr>
-                </a:tc>
-              </a:tr>
-              <a:tr h="512064">
-                <a:tc>
-                  <a:txBody>
-                    <a:bodyPr/>
-                    <a:lstStyle/>
-                    <a:p>
-                      <a:r>
-                        <a:rPr sz="1300" b="0">
-                          <a:solidFill>
-                            <a:srgbClr val="171A14"/>
-                          </a:solidFill>
-                          <a:latin typeface="Segoe UI"/>
-                        </a:rPr>
-                        <a:t>report</a:t>
-                      </a:r>
-                    </a:p>
-                  </a:txBody>
-                  <a:tcPr anchor="ctr" marL="109728" marT="27432" marB="27432">
-                    <a:solidFill>
-                      <a:srgbClr val="FFFFFF"/>
-                    </a:solidFill>
-                  </a:tcPr>
-                </a:tc>
-                <a:tc>
-                  <a:txBody>
-                    <a:bodyPr/>
-                    <a:lstStyle/>
-                    <a:p>
-                      <a:r>
-                        <a:rPr sz="1300" b="0">
-                          <a:solidFill>
-                            <a:srgbClr val="171A14"/>
-                          </a:solidFill>
-                          <a:latin typeface="Segoe UI"/>
-                        </a:rPr>
-                        <a:t>Digest for humans, compact bundle for the next conversation</a:t>
-                      </a:r>
-                    </a:p>
-                  </a:txBody>
-                  <a:tcPr anchor="ctr" marL="109728" marT="27432" marB="27432">
-                    <a:solidFill>
-                      <a:srgbClr val="FFFFFF"/>
-                    </a:solidFill>
-                  </a:tcPr>
-                </a:tc>
-                <a:tc>
-                  <a:txBody>
-                    <a:bodyPr/>
-                    <a:lstStyle/>
-                    <a:p>
-                      <a:r>
-                        <a:rPr sz="1300" b="0">
-                          <a:solidFill>
-                            <a:srgbClr val="171A14"/>
-                          </a:solidFill>
-                          <a:latin typeface="Segoe UI"/>
-                        </a:rPr>
-                        <a:t>summary.md · analysis_bundle.json</a:t>
-                      </a:r>
-                    </a:p>
-                  </a:txBody>
-                  <a:tcPr anchor="ctr" marL="109728" marT="27432" marB="27432">
-                    <a:solidFill>
-                      <a:srgbClr val="FFFFFF"/>
-                    </a:solidFill>
-                  </a:tcPr>
-                </a:tc>
-              </a:tr>
-            </a:tbl>
-          </a:graphicData>
-        </a:graphic>
-      </p:graphicFrame>
+      <p:pic>
+        <p:nvPicPr>
+          <p:cNvPr id="6" name="Picture 5" descr="forward_vs_reverse.png"/>
+          <p:cNvPicPr>
+            <a:picLocks noChangeAspect="1"/>
+          </p:cNvPicPr>
+          <p:nvPr/>
+        </p:nvPicPr>
+        <p:blipFill>
+          <a:blip r:embed="rId2"/>
+          <a:stretch>
+            <a:fillRect/>
+          </a:stretch>
+        </p:blipFill>
+        <p:spPr>
+          <a:xfrm>
+            <a:off x="3017912" y="2478024"/>
+            <a:ext cx="6155871" cy="3474720"/>
+          </a:xfrm>
+          <a:prstGeom prst="rect">
+            <a:avLst/>
+          </a:prstGeom>
+        </p:spPr>
+      </p:pic>
       <p:sp>
         <p:nvSpPr>
           <p:cNvPr id="7" name="TextBox 6"/>
@@ -10954,8 +13217,8 @@
         </p:nvSpPr>
         <p:spPr>
           <a:xfrm>
-            <a:off x="731520" y="5733288"/>
-            <a:ext cx="10728655" cy="1097280"/>
+            <a:off x="731520" y="5532120"/>
+            <a:ext cx="10728655" cy="1005840"/>
           </a:xfrm>
           <a:prstGeom prst="rect">
             <a:avLst/>
@@ -10977,13 +13240,13 @@
               </a:spcAft>
             </a:pPr>
             <a:r>
-              <a:rPr sz="1500" b="0">
+              <a:rPr sz="1400" b="0">
                 <a:solidFill>
                   <a:srgbClr val="171A14"/>
                 </a:solidFill>
                 <a:latin typeface="Segoe UI"/>
               </a:rPr>
-              <a:t>Both analysis directions are configuration, not code — data/analysis_config.json holds the observable changes, the implementation groups, the categories and the thresholds. Adding a mechanism to measure means adding a row.</a:t>
+              <a:t>14 of 20 comparable observables agree within 5 percentage points — SHA-256 DS digest reads 98.34% and 98.24%, a tenth of a point apart, from corpora with no shared infrastructure, operators or method. Where they disagree the direction is consistent: forward zones have modernised and reverse delegations have not.</a:t>
             </a:r>
           </a:p>
         </p:txBody>
@@ -11043,7 +13306,7 @@
                 </a:solidFill>
                 <a:latin typeface="Segoe UI"/>
               </a:rPr>
-              <a:t>HOW IT WORKS</a:t>
+              <a:t>THE DENOMINATOR</a:t>
             </a:r>
           </a:p>
         </p:txBody>
@@ -11085,20 +13348,62 @@
                 </a:solidFill>
                 <a:latin typeface="Segoe UI"/>
               </a:rPr>
-              <a:t>Three design decisions that protect the numbers</a:t>
-            </a:r>
-          </a:p>
-        </p:txBody>
-      </p:sp>
-      <p:sp>
-        <p:nvSpPr>
-          <p:cNvPr id="4" name="Rectangle 3"/>
+              <a:t>Why the two are never pooled</a:t>
+            </a:r>
+          </a:p>
+        </p:txBody>
+      </p:sp>
+      <p:sp>
+        <p:nvSpPr>
+          <p:cNvPr id="4" name="TextBox 3"/>
+          <p:cNvSpPr txBox="1"/>
+          <p:nvPr/>
+        </p:nvSpPr>
+        <p:spPr>
+          <a:xfrm>
+            <a:off x="731520" y="1600200"/>
+            <a:ext cx="10728655" cy="457200"/>
+          </a:xfrm>
+          <a:prstGeom prst="rect">
+            <a:avLst/>
+          </a:prstGeom>
+          <a:noFill/>
+        </p:spPr>
+        <p:txBody>
+          <a:bodyPr wrap="square">
+            <a:spAutoFit/>
+          </a:bodyPr>
+          <a:lstStyle/>
+          <a:p>
+            <a:pPr algn="l">
+              <a:lnSpc>
+                <a:spcPct val="125000"/>
+              </a:lnSpc>
+              <a:spcAft>
+                <a:spcPts val="600"/>
+              </a:spcAft>
+            </a:pPr>
+            <a:r>
+              <a:rPr sz="1500" b="0">
+                <a:solidFill>
+                  <a:srgbClr val="66705C"/>
+                </a:solidFill>
+                <a:latin typeface="Segoe UI"/>
+              </a:rPr>
+              <a:t>The forward sources are 99.6% of the population, and they stop.</a:t>
+            </a:r>
+          </a:p>
+        </p:txBody>
+      </p:sp>
+      <p:sp>
+        <p:nvSpPr>
+          <p:cNvPr id="5" name="Rectangle 4"/>
           <p:cNvSpPr/>
           <p:nvPr/>
         </p:nvSpPr>
         <p:spPr>
           <a:xfrm>
-            <a:off x="731520" y="1600200"/>
+            <a:off x="731520" y="2167128"/>
             <a:ext cx="10728655" cy="9525"/>
           </a:xfrm>
           <a:prstGeom prst="rect">
@@ -11134,60 +13439,40 @@
           </a:p>
         </p:txBody>
       </p:sp>
-      <p:sp>
-        <p:nvSpPr>
-          <p:cNvPr id="5" name="Rectangle 4"/>
-          <p:cNvSpPr/>
-          <p:nvPr/>
-        </p:nvSpPr>
-        <p:spPr>
-          <a:xfrm>
-            <a:off x="731520" y="1911096"/>
-            <a:ext cx="3442106" cy="3017520"/>
-          </a:xfrm>
-          <a:prstGeom prst="rect">
-            <a:avLst/>
-          </a:prstGeom>
-          <a:solidFill>
-            <a:srgbClr val="F6F7F3"/>
-          </a:solidFill>
-          <a:ln w="9525">
-            <a:solidFill>
-              <a:srgbClr val="D3D8CC"/>
-            </a:solidFill>
-          </a:ln>
-          <a:effectLst/>
-        </p:spPr>
-        <p:style>
-          <a:lnRef idx="1">
-            <a:schemeClr val="accent1"/>
-          </a:lnRef>
-          <a:fillRef idx="3">
-            <a:schemeClr val="accent1"/>
-          </a:fillRef>
-          <a:effectRef idx="2">
-            <a:schemeClr val="accent1"/>
-          </a:effectRef>
-          <a:fontRef idx="minor">
-            <a:schemeClr val="lt1"/>
-          </a:fontRef>
-        </p:style>
-        <p:txBody>
-          <a:bodyPr rtlCol="0" anchor="ctr"/>
-          <a:lstStyle/>
-          <a:p/>
-        </p:txBody>
-      </p:sp>
-      <p:sp>
-        <p:nvSpPr>
-          <p:cNvPr id="6" name="TextBox 5"/>
+      <p:pic>
+        <p:nvPicPr>
+          <p:cNvPr id="6" name="Picture 5" descr="composition_break.png"/>
+          <p:cNvPicPr>
+            <a:picLocks noChangeAspect="1"/>
+          </p:cNvPicPr>
+          <p:nvPr/>
+        </p:nvPicPr>
+        <p:blipFill>
+          <a:blip r:embed="rId2"/>
+          <a:stretch>
+            <a:fillRect/>
+          </a:stretch>
+        </p:blipFill>
+        <p:spPr>
+          <a:xfrm>
+            <a:off x="2224909" y="2478024"/>
+            <a:ext cx="7741876" cy="3200400"/>
+          </a:xfrm>
+          <a:prstGeom prst="rect">
+            <a:avLst/>
+          </a:prstGeom>
+        </p:spPr>
+      </p:pic>
+      <p:sp>
+        <p:nvSpPr>
+          <p:cNvPr id="7" name="TextBox 6"/>
           <p:cNvSpPr txBox="1"/>
           <p:nvPr/>
         </p:nvSpPr>
         <p:spPr>
           <a:xfrm>
-            <a:off x="896112" y="2039112"/>
-            <a:ext cx="3112922" cy="274320"/>
+            <a:off x="731520" y="5394960"/>
+            <a:ext cx="10728655" cy="1097280"/>
           </a:xfrm>
           <a:prstGeom prst="rect">
             <a:avLst/>
@@ -11209,479 +13494,13 @@
               </a:spcAft>
             </a:pPr>
             <a:r>
-              <a:rPr sz="1200" b="1">
-                <a:solidFill>
-                  <a:srgbClr val="00907F"/>
+              <a:rPr sz="1400" b="0">
+                <a:solidFill>
+                  <a:srgbClr val="171A14"/>
                 </a:solidFill>
                 <a:latin typeface="Segoe UI"/>
               </a:rPr>
-              <a:t>MULTI-DRIVE, MERGED</a:t>
-            </a:r>
-          </a:p>
-        </p:txBody>
-      </p:sp>
-      <p:sp>
-        <p:nvSpPr>
-          <p:cNvPr id="7" name="TextBox 6"/>
-          <p:cNvSpPr txBox="1"/>
-          <p:nvPr/>
-        </p:nvSpPr>
-        <p:spPr>
-          <a:xfrm>
-            <a:off x="896112" y="2386584"/>
-            <a:ext cx="3112922" cy="822960"/>
-          </a:xfrm>
-          <a:prstGeom prst="rect">
-            <a:avLst/>
-          </a:prstGeom>
-          <a:noFill/>
-        </p:spPr>
-        <p:txBody>
-          <a:bodyPr wrap="square">
-            <a:spAutoFit/>
-          </a:bodyPr>
-          <a:lstStyle/>
-          <a:p>
-            <a:pPr algn="l">
-              <a:lnSpc>
-                <a:spcPct val="125000"/>
-              </a:lnSpc>
-              <a:spcAft>
-                <a:spcPts val="600"/>
-              </a:spcAft>
-            </a:pPr>
-            <a:r>
-              <a:rPr sz="1350" b="0">
-                <a:solidFill>
-                  <a:srgbClr val="171A14"/>
-                </a:solidFill>
-                <a:latin typeface="Segoe UI"/>
-              </a:rPr>
-              <a:t>The cache spans a main path and a spill path. A day’s files can sit on both.</a:t>
-            </a:r>
-          </a:p>
-        </p:txBody>
-      </p:sp>
-      <p:sp>
-        <p:nvSpPr>
-          <p:cNvPr id="8" name="TextBox 7"/>
-          <p:cNvSpPr txBox="1"/>
-          <p:nvPr/>
-        </p:nvSpPr>
-        <p:spPr>
-          <a:xfrm>
-            <a:off x="896112" y="4361688"/>
-            <a:ext cx="3112922" cy="457200"/>
-          </a:xfrm>
-          <a:prstGeom prst="rect">
-            <a:avLst/>
-          </a:prstGeom>
-          <a:noFill/>
-        </p:spPr>
-        <p:txBody>
-          <a:bodyPr wrap="square">
-            <a:spAutoFit/>
-          </a:bodyPr>
-          <a:lstStyle/>
-          <a:p>
-            <a:pPr algn="l">
-              <a:lnSpc>
-                <a:spcPct val="125000"/>
-              </a:lnSpc>
-              <a:spcAft>
-                <a:spcPts val="600"/>
-              </a:spcAft>
-            </a:pPr>
-            <a:r>
-              <a:rPr sz="1150" b="0">
-                <a:solidFill>
-                  <a:srgbClr val="66705C"/>
-                </a:solidFill>
-                <a:latin typeface="Segoe UI"/>
-              </a:rPr>
-              <a:t>Reading one path alone reports a PARTIAL day as a complete one — indistinguishable from a month when fewer zones signed.</a:t>
-            </a:r>
-          </a:p>
-        </p:txBody>
-      </p:sp>
-      <p:sp>
-        <p:nvSpPr>
-          <p:cNvPr id="9" name="Rectangle 8"/>
-          <p:cNvSpPr/>
-          <p:nvPr/>
-        </p:nvSpPr>
-        <p:spPr>
-          <a:xfrm>
-            <a:off x="4374794" y="1911096"/>
-            <a:ext cx="3442106" cy="3017520"/>
-          </a:xfrm>
-          <a:prstGeom prst="rect">
-            <a:avLst/>
-          </a:prstGeom>
-          <a:solidFill>
-            <a:srgbClr val="F6F7F3"/>
-          </a:solidFill>
-          <a:ln w="9525">
-            <a:solidFill>
-              <a:srgbClr val="D3D8CC"/>
-            </a:solidFill>
-          </a:ln>
-          <a:effectLst/>
-        </p:spPr>
-        <p:style>
-          <a:lnRef idx="1">
-            <a:schemeClr val="accent1"/>
-          </a:lnRef>
-          <a:fillRef idx="3">
-            <a:schemeClr val="accent1"/>
-          </a:fillRef>
-          <a:effectRef idx="2">
-            <a:schemeClr val="accent1"/>
-          </a:effectRef>
-          <a:fontRef idx="minor">
-            <a:schemeClr val="lt1"/>
-          </a:fontRef>
-        </p:style>
-        <p:txBody>
-          <a:bodyPr rtlCol="0" anchor="ctr"/>
-          <a:lstStyle/>
-          <a:p/>
-        </p:txBody>
-      </p:sp>
-      <p:sp>
-        <p:nvSpPr>
-          <p:cNvPr id="10" name="TextBox 9"/>
-          <p:cNvSpPr txBox="1"/>
-          <p:nvPr/>
-        </p:nvSpPr>
-        <p:spPr>
-          <a:xfrm>
-            <a:off x="4539386" y="2039112"/>
-            <a:ext cx="3112922" cy="274320"/>
-          </a:xfrm>
-          <a:prstGeom prst="rect">
-            <a:avLst/>
-          </a:prstGeom>
-          <a:noFill/>
-        </p:spPr>
-        <p:txBody>
-          <a:bodyPr wrap="square">
-            <a:spAutoFit/>
-          </a:bodyPr>
-          <a:lstStyle/>
-          <a:p>
-            <a:pPr algn="l">
-              <a:lnSpc>
-                <a:spcPct val="125000"/>
-              </a:lnSpc>
-              <a:spcAft>
-                <a:spcPts val="600"/>
-              </a:spcAft>
-            </a:pPr>
-            <a:r>
-              <a:rPr sz="1200" b="1">
-                <a:solidFill>
-                  <a:srgbClr val="00907F"/>
-                </a:solidFill>
-                <a:latin typeface="Segoe UI"/>
-              </a:rPr>
-              <a:t>EVERY SHARE CARRIES ITS DENOMINATOR</a:t>
-            </a:r>
-          </a:p>
-        </p:txBody>
-      </p:sp>
-      <p:sp>
-        <p:nvSpPr>
-          <p:cNvPr id="11" name="TextBox 10"/>
-          <p:cNvSpPr txBox="1"/>
-          <p:nvPr/>
-        </p:nvSpPr>
-        <p:spPr>
-          <a:xfrm>
-            <a:off x="4539386" y="2386584"/>
-            <a:ext cx="3112922" cy="822960"/>
-          </a:xfrm>
-          <a:prstGeom prst="rect">
-            <a:avLst/>
-          </a:prstGeom>
-          <a:noFill/>
-        </p:spPr>
-        <p:txBody>
-          <a:bodyPr wrap="square">
-            <a:spAutoFit/>
-          </a:bodyPr>
-          <a:lstStyle/>
-          <a:p>
-            <a:pPr algn="l">
-              <a:lnSpc>
-                <a:spcPct val="125000"/>
-              </a:lnSpc>
-              <a:spcAft>
-                <a:spcPts val="600"/>
-              </a:spcAft>
-            </a:pPr>
-            <a:r>
-              <a:rPr sz="1350" b="0">
-                <a:solidFill>
-                  <a:srgbClr val="171A14"/>
-                </a:solidFill>
-                <a:latin typeface="Segoe UI"/>
-              </a:rPr>
-              <a:t>Each dimension emits its own _total row alongside the values.</a:t>
-            </a:r>
-          </a:p>
-        </p:txBody>
-      </p:sp>
-      <p:sp>
-        <p:nvSpPr>
-          <p:cNvPr id="12" name="TextBox 11"/>
-          <p:cNvSpPr txBox="1"/>
-          <p:nvPr/>
-        </p:nvSpPr>
-        <p:spPr>
-          <a:xfrm>
-            <a:off x="4539386" y="4361688"/>
-            <a:ext cx="3112922" cy="457200"/>
-          </a:xfrm>
-          <a:prstGeom prst="rect">
-            <a:avLst/>
-          </a:prstGeom>
-          <a:noFill/>
-        </p:spPr>
-        <p:txBody>
-          <a:bodyPr wrap="square">
-            <a:spAutoFit/>
-          </a:bodyPr>
-          <a:lstStyle/>
-          <a:p>
-            <a:pPr algn="l">
-              <a:lnSpc>
-                <a:spcPct val="125000"/>
-              </a:lnSpc>
-              <a:spcAft>
-                <a:spcPts val="600"/>
-              </a:spcAft>
-            </a:pPr>
-            <a:r>
-              <a:rPr sz="1150" b="0">
-                <a:solidFill>
-                  <a:srgbClr val="66705C"/>
-                </a:solidFill>
-                <a:latin typeface="Segoe UI"/>
-              </a:rPr>
-              <a:t>The same fact reads 68%, 64% or 0.6% depending only on what you divide by. P(x | population) is recomputable, never guessed.</a:t>
-            </a:r>
-          </a:p>
-        </p:txBody>
-      </p:sp>
-      <p:sp>
-        <p:nvSpPr>
-          <p:cNvPr id="13" name="Rectangle 12"/>
-          <p:cNvSpPr/>
-          <p:nvPr/>
-        </p:nvSpPr>
-        <p:spPr>
-          <a:xfrm>
-            <a:off x="8018068" y="1911096"/>
-            <a:ext cx="3442106" cy="3017520"/>
-          </a:xfrm>
-          <a:prstGeom prst="rect">
-            <a:avLst/>
-          </a:prstGeom>
-          <a:solidFill>
-            <a:srgbClr val="F6F7F3"/>
-          </a:solidFill>
-          <a:ln w="9525">
-            <a:solidFill>
-              <a:srgbClr val="D3D8CC"/>
-            </a:solidFill>
-          </a:ln>
-          <a:effectLst/>
-        </p:spPr>
-        <p:style>
-          <a:lnRef idx="1">
-            <a:schemeClr val="accent1"/>
-          </a:lnRef>
-          <a:fillRef idx="3">
-            <a:schemeClr val="accent1"/>
-          </a:fillRef>
-          <a:effectRef idx="2">
-            <a:schemeClr val="accent1"/>
-          </a:effectRef>
-          <a:fontRef idx="minor">
-            <a:schemeClr val="lt1"/>
-          </a:fontRef>
-        </p:style>
-        <p:txBody>
-          <a:bodyPr rtlCol="0" anchor="ctr"/>
-          <a:lstStyle/>
-          <a:p/>
-        </p:txBody>
-      </p:sp>
-      <p:sp>
-        <p:nvSpPr>
-          <p:cNvPr id="14" name="TextBox 13"/>
-          <p:cNvSpPr txBox="1"/>
-          <p:nvPr/>
-        </p:nvSpPr>
-        <p:spPr>
-          <a:xfrm>
-            <a:off x="8182660" y="2039112"/>
-            <a:ext cx="3112922" cy="274320"/>
-          </a:xfrm>
-          <a:prstGeom prst="rect">
-            <a:avLst/>
-          </a:prstGeom>
-          <a:noFill/>
-        </p:spPr>
-        <p:txBody>
-          <a:bodyPr wrap="square">
-            <a:spAutoFit/>
-          </a:bodyPr>
-          <a:lstStyle/>
-          <a:p>
-            <a:pPr algn="l">
-              <a:lnSpc>
-                <a:spcPct val="125000"/>
-              </a:lnSpc>
-              <a:spcAft>
-                <a:spcPts val="600"/>
-              </a:spcAft>
-            </a:pPr>
-            <a:r>
-              <a:rPr sz="1200" b="1">
-                <a:solidFill>
-                  <a:srgbClr val="00907F"/>
-                </a:solidFill>
-                <a:latin typeface="Segoe UI"/>
-              </a:rPr>
-              <a:t>SHARDED ACROSS MACHINES</a:t>
-            </a:r>
-          </a:p>
-        </p:txBody>
-      </p:sp>
-      <p:sp>
-        <p:nvSpPr>
-          <p:cNvPr id="15" name="TextBox 14"/>
-          <p:cNvSpPr txBox="1"/>
-          <p:nvPr/>
-        </p:nvSpPr>
-        <p:spPr>
-          <a:xfrm>
-            <a:off x="8182660" y="2386584"/>
-            <a:ext cx="3112922" cy="822960"/>
-          </a:xfrm>
-          <a:prstGeom prst="rect">
-            <a:avLst/>
-          </a:prstGeom>
-          <a:noFill/>
-        </p:spPr>
-        <p:txBody>
-          <a:bodyPr wrap="square">
-            <a:spAutoFit/>
-          </a:bodyPr>
-          <a:lstStyle/>
-          <a:p>
-            <a:pPr algn="l">
-              <a:lnSpc>
-                <a:spcPct val="125000"/>
-              </a:lnSpc>
-              <a:spcAft>
-                <a:spcPts val="600"/>
-              </a:spcAft>
-            </a:pPr>
-            <a:r>
-              <a:rPr sz="1350" b="0">
-                <a:solidFill>
-                  <a:srgbClr val="171A14"/>
-                </a:solidFill>
-                <a:latin typeface="Segoe UI"/>
-              </a:rPr>
-              <a:t>Same command, different --shard. Balanced on bytes, no coordinator.</a:t>
-            </a:r>
-          </a:p>
-        </p:txBody>
-      </p:sp>
-      <p:sp>
-        <p:nvSpPr>
-          <p:cNvPr id="16" name="TextBox 15"/>
-          <p:cNvSpPr txBox="1"/>
-          <p:nvPr/>
-        </p:nvSpPr>
-        <p:spPr>
-          <a:xfrm>
-            <a:off x="8182660" y="4361688"/>
-            <a:ext cx="3112922" cy="457200"/>
-          </a:xfrm>
-          <a:prstGeom prst="rect">
-            <a:avLst/>
-          </a:prstGeom>
-          <a:noFill/>
-        </p:spPr>
-        <p:txBody>
-          <a:bodyPr wrap="square">
-            <a:spAutoFit/>
-          </a:bodyPr>
-          <a:lstStyle/>
-          <a:p>
-            <a:pPr algn="l">
-              <a:lnSpc>
-                <a:spcPct val="125000"/>
-              </a:lnSpc>
-              <a:spcAft>
-                <a:spcPts val="600"/>
-              </a:spcAft>
-            </a:pPr>
-            <a:r>
-              <a:rPr sz="1150" b="0">
-                <a:solidFill>
-                  <a:srgbClr val="66705C"/>
-                </a:solidFill>
-                <a:latin typeface="Segoe UI"/>
-              </a:rPr>
-              <a:t>3 shards over the corpus: 0.0% spread, and identical results to a single-machine run across 30 changes × 7 fields.</a:t>
-            </a:r>
-          </a:p>
-        </p:txBody>
-      </p:sp>
-      <p:sp>
-        <p:nvSpPr>
-          <p:cNvPr id="17" name="TextBox 16"/>
-          <p:cNvSpPr txBox="1"/>
-          <p:nvPr/>
-        </p:nvSpPr>
-        <p:spPr>
-          <a:xfrm>
-            <a:off x="731520" y="5202936"/>
-            <a:ext cx="10728655" cy="731520"/>
-          </a:xfrm>
-          <a:prstGeom prst="rect">
-            <a:avLst/>
-          </a:prstGeom>
-          <a:noFill/>
-        </p:spPr>
-        <p:txBody>
-          <a:bodyPr wrap="square">
-            <a:spAutoFit/>
-          </a:bodyPr>
-          <a:lstStyle/>
-          <a:p>
-            <a:pPr algn="l">
-              <a:lnSpc>
-                <a:spcPct val="125000"/>
-              </a:lnSpc>
-              <a:spcAft>
-                <a:spcPts val="600"/>
-              </a:spcAft>
-            </a:pPr>
-            <a:r>
-              <a:rPr sz="1400" b="0">
-                <a:solidFill>
-                  <a:srgbClr val="66705C"/>
-                </a:solidFill>
-                <a:latin typeface="Segoe UI"/>
-              </a:rPr>
-              <a:t>A partial corpus produces entirely plausible numbers, so each shard reports when it finishes and the analysis refuses to stay silent if the set is incomplete.</a:t>
+              <a:t>A pooled share is a forward number until 2023-12 and a reverse number after it, with a 99.6% cliff between. Peak and latest values routinely land on opposite sides, so 11 of 15 peak-to-latest drops in the pooled run are not comparable and none is quoted here. Every figure on this deck is one corpus at a time.</a:t>
             </a:r>
           </a:p>
         </p:txBody>
@@ -11741,7 +13560,7 @@
                 </a:solidFill>
                 <a:latin typeface="Segoe UI"/>
               </a:rPr>
-              <a:t>THE FULL RUN</a:t>
+              <a:t>THE BIGGEST CAVEAT</a:t>
             </a:r>
           </a:p>
         </p:txBody>
@@ -11783,7 +13602,7 @@
                 </a:solidFill>
                 <a:latin typeface="Segoe UI"/>
               </a:rPr>
-              <a:t>What the full corpus changed</a:t>
+              <a:t>A share of names is not a count of decisions</a:t>
             </a:r>
           </a:p>
         </p:txBody>
@@ -11825,7 +13644,7 @@
                 </a:solidFill>
                 <a:latin typeface="Segoe UI"/>
               </a:rPr>
-              <a:t>Adding 8.24 TB of forward data moved 14 dates and refuted one finding.</a:t>
+              <a:t>In the forward corpus, single operators move six figures of names in one month.</a:t>
             </a:r>
           </a:p>
         </p:txBody>
@@ -11874,50 +13693,441 @@
           </a:p>
         </p:txBody>
       </p:sp>
-      <p:sp>
-        <p:nvSpPr>
-          <p:cNvPr id="6" name="Rectangle 5"/>
-          <p:cNvSpPr/>
-          <p:nvPr/>
-        </p:nvSpPr>
-        <p:spPr>
-          <a:xfrm>
-            <a:off x="731520" y="2478024"/>
-            <a:ext cx="3442106" cy="1645920"/>
-          </a:xfrm>
-          <a:prstGeom prst="rect">
-            <a:avLst/>
-          </a:prstGeom>
-          <a:solidFill>
-            <a:srgbClr val="F6F7F3"/>
-          </a:solidFill>
-          <a:ln w="9525">
-            <a:solidFill>
-              <a:srgbClr val="D3D8CC"/>
-            </a:solidFill>
-          </a:ln>
-          <a:effectLst/>
-        </p:spPr>
-        <p:style>
-          <a:lnRef idx="1">
-            <a:schemeClr val="accent1"/>
-          </a:lnRef>
-          <a:fillRef idx="3">
-            <a:schemeClr val="accent1"/>
-          </a:fillRef>
-          <a:effectRef idx="2">
-            <a:schemeClr val="accent1"/>
-          </a:effectRef>
-          <a:fontRef idx="minor">
-            <a:schemeClr val="lt1"/>
-          </a:fontRef>
-        </p:style>
-        <p:txBody>
-          <a:bodyPr rtlCol="0" anchor="ctr"/>
-          <a:lstStyle/>
-          <a:p/>
-        </p:txBody>
-      </p:sp>
+      <p:graphicFrame>
+        <p:nvGraphicFramePr>
+          <p:cNvPr id="6" name="Table 5"/>
+          <p:cNvGraphicFramePr>
+            <a:graphicFrameLocks noGrp="1"/>
+          </p:cNvGraphicFramePr>
+          <p:nvPr/>
+        </p:nvGraphicFramePr>
+        <p:xfrm>
+          <a:off x="731520" y="2478024"/>
+          <a:ext cx="5120640" cy="2194560"/>
+        </p:xfrm>
+        <a:graphic>
+          <a:graphicData uri="http://schemas.openxmlformats.org/drawingml/2006/table">
+            <a:tbl>
+              <a:tblPr firstRow="1" bandRow="1">
+                <a:tableStyleId>{5C22544A-7EE6-4342-B048-85BDC9FD1C3A}</a:tableStyleId>
+              </a:tblPr>
+              <a:tblGrid>
+                <a:gridCol w="2048256"/>
+                <a:gridCol w="1536192"/>
+                <a:gridCol w="1536192"/>
+              </a:tblGrid>
+              <a:tr h="365760">
+                <a:tc>
+                  <a:txBody>
+                    <a:bodyPr/>
+                    <a:lstStyle/>
+                    <a:p>
+                      <a:r>
+                        <a:rPr sz="1200" b="1">
+                          <a:solidFill>
+                            <a:srgbClr val="66705C"/>
+                          </a:solidFill>
+                          <a:latin typeface="Segoe UI"/>
+                        </a:rPr>
+                        <a:t>Ed25519, forward TLDs</a:t>
+                      </a:r>
+                    </a:p>
+                  </a:txBody>
+                  <a:tcPr anchor="ctr" marL="109728" marT="27432" marB="27432">
+                    <a:solidFill>
+                      <a:srgbClr val="F6F7F3"/>
+                    </a:solidFill>
+                  </a:tcPr>
+                </a:tc>
+                <a:tc>
+                  <a:txBody>
+                    <a:bodyPr/>
+                    <a:lstStyle/>
+                    <a:p>
+                      <a:r>
+                        <a:rPr sz="1200" b="1">
+                          <a:solidFill>
+                            <a:srgbClr val="66705C"/>
+                          </a:solidFill>
+                          <a:latin typeface="Segoe UI"/>
+                        </a:rPr>
+                        <a:t>names</a:t>
+                      </a:r>
+                    </a:p>
+                  </a:txBody>
+                  <a:tcPr anchor="ctr" marL="109728" marT="27432" marB="27432">
+                    <a:solidFill>
+                      <a:srgbClr val="F6F7F3"/>
+                    </a:solidFill>
+                  </a:tcPr>
+                </a:tc>
+                <a:tc>
+                  <a:txBody>
+                    <a:bodyPr/>
+                    <a:lstStyle/>
+                    <a:p>
+                      <a:r>
+                        <a:rPr sz="1200" b="1">
+                          <a:solidFill>
+                            <a:srgbClr val="66705C"/>
+                          </a:solidFill>
+                          <a:latin typeface="Segoe UI"/>
+                        </a:rPr>
+                        <a:t>share</a:t>
+                      </a:r>
+                    </a:p>
+                  </a:txBody>
+                  <a:tcPr anchor="ctr" marL="109728" marT="27432" marB="27432">
+                    <a:solidFill>
+                      <a:srgbClr val="F6F7F3"/>
+                    </a:solidFill>
+                  </a:tcPr>
+                </a:tc>
+              </a:tr>
+              <a:tr h="365760">
+                <a:tc>
+                  <a:txBody>
+                    <a:bodyPr/>
+                    <a:lstStyle/>
+                    <a:p>
+                      <a:r>
+                        <a:rPr sz="1300" b="0">
+                          <a:solidFill>
+                            <a:srgbClr val="171A14"/>
+                          </a:solidFill>
+                          <a:latin typeface="Segoe UI"/>
+                        </a:rPr>
+                        <a:t>2020-01</a:t>
+                      </a:r>
+                    </a:p>
+                  </a:txBody>
+                  <a:tcPr anchor="ctr" marL="109728" marT="27432" marB="27432">
+                    <a:solidFill>
+                      <a:srgbClr val="FFFFFF"/>
+                    </a:solidFill>
+                  </a:tcPr>
+                </a:tc>
+                <a:tc>
+                  <a:txBody>
+                    <a:bodyPr/>
+                    <a:lstStyle/>
+                    <a:p>
+                      <a:r>
+                        <a:rPr sz="1300" b="0">
+                          <a:solidFill>
+                            <a:srgbClr val="171A14"/>
+                          </a:solidFill>
+                          <a:latin typeface="Segoe UI"/>
+                        </a:rPr>
+                        <a:t>3</a:t>
+                      </a:r>
+                    </a:p>
+                  </a:txBody>
+                  <a:tcPr anchor="ctr" marL="109728" marT="27432" marB="27432">
+                    <a:solidFill>
+                      <a:srgbClr val="FFFFFF"/>
+                    </a:solidFill>
+                  </a:tcPr>
+                </a:tc>
+                <a:tc>
+                  <a:txBody>
+                    <a:bodyPr/>
+                    <a:lstStyle/>
+                    <a:p>
+                      <a:r>
+                        <a:rPr sz="1300" b="0">
+                          <a:solidFill>
+                            <a:srgbClr val="171A14"/>
+                          </a:solidFill>
+                          <a:latin typeface="Segoe UI"/>
+                        </a:rPr>
+                        <a:t>0.000%</a:t>
+                      </a:r>
+                    </a:p>
+                  </a:txBody>
+                  <a:tcPr anchor="ctr" marL="109728" marT="27432" marB="27432">
+                    <a:solidFill>
+                      <a:srgbClr val="FFFFFF"/>
+                    </a:solidFill>
+                  </a:tcPr>
+                </a:tc>
+              </a:tr>
+              <a:tr h="365760">
+                <a:tc>
+                  <a:txBody>
+                    <a:bodyPr/>
+                    <a:lstStyle/>
+                    <a:p>
+                      <a:r>
+                        <a:rPr sz="1300" b="0">
+                          <a:solidFill>
+                            <a:srgbClr val="171A14"/>
+                          </a:solidFill>
+                          <a:latin typeface="Segoe UI"/>
+                        </a:rPr>
+                        <a:t>2020-06</a:t>
+                      </a:r>
+                    </a:p>
+                  </a:txBody>
+                  <a:tcPr anchor="ctr" marL="109728" marT="27432" marB="27432">
+                    <a:solidFill>
+                      <a:srgbClr val="FFFFFF"/>
+                    </a:solidFill>
+                  </a:tcPr>
+                </a:tc>
+                <a:tc>
+                  <a:txBody>
+                    <a:bodyPr/>
+                    <a:lstStyle/>
+                    <a:p>
+                      <a:r>
+                        <a:rPr sz="1300" b="0">
+                          <a:solidFill>
+                            <a:srgbClr val="171A14"/>
+                          </a:solidFill>
+                          <a:latin typeface="Segoe UI"/>
+                        </a:rPr>
+                        <a:t>19,863</a:t>
+                      </a:r>
+                    </a:p>
+                  </a:txBody>
+                  <a:tcPr anchor="ctr" marL="109728" marT="27432" marB="27432">
+                    <a:solidFill>
+                      <a:srgbClr val="FFFFFF"/>
+                    </a:solidFill>
+                  </a:tcPr>
+                </a:tc>
+                <a:tc>
+                  <a:txBody>
+                    <a:bodyPr/>
+                    <a:lstStyle/>
+                    <a:p>
+                      <a:r>
+                        <a:rPr sz="1300" b="0">
+                          <a:solidFill>
+                            <a:srgbClr val="171A14"/>
+                          </a:solidFill>
+                          <a:latin typeface="Segoe UI"/>
+                        </a:rPr>
+                        <a:t>2.039%</a:t>
+                      </a:r>
+                    </a:p>
+                  </a:txBody>
+                  <a:tcPr anchor="ctr" marL="109728" marT="27432" marB="27432">
+                    <a:solidFill>
+                      <a:srgbClr val="FFFFFF"/>
+                    </a:solidFill>
+                  </a:tcPr>
+                </a:tc>
+              </a:tr>
+              <a:tr h="365760">
+                <a:tc>
+                  <a:txBody>
+                    <a:bodyPr/>
+                    <a:lstStyle/>
+                    <a:p>
+                      <a:r>
+                        <a:rPr sz="1300" b="0">
+                          <a:solidFill>
+                            <a:srgbClr val="171A14"/>
+                          </a:solidFill>
+                          <a:latin typeface="Segoe UI"/>
+                        </a:rPr>
+                        <a:t>2021-06</a:t>
+                      </a:r>
+                    </a:p>
+                  </a:txBody>
+                  <a:tcPr anchor="ctr" marL="109728" marT="27432" marB="27432">
+                    <a:solidFill>
+                      <a:srgbClr val="FFFFFF"/>
+                    </a:solidFill>
+                  </a:tcPr>
+                </a:tc>
+                <a:tc>
+                  <a:txBody>
+                    <a:bodyPr/>
+                    <a:lstStyle/>
+                    <a:p>
+                      <a:r>
+                        <a:rPr sz="1300" b="0">
+                          <a:solidFill>
+                            <a:srgbClr val="171A14"/>
+                          </a:solidFill>
+                          <a:latin typeface="Segoe UI"/>
+                        </a:rPr>
+                        <a:t>42</a:t>
+                      </a:r>
+                    </a:p>
+                  </a:txBody>
+                  <a:tcPr anchor="ctr" marL="109728" marT="27432" marB="27432">
+                    <a:solidFill>
+                      <a:srgbClr val="FFFFFF"/>
+                    </a:solidFill>
+                  </a:tcPr>
+                </a:tc>
+                <a:tc>
+                  <a:txBody>
+                    <a:bodyPr/>
+                    <a:lstStyle/>
+                    <a:p>
+                      <a:r>
+                        <a:rPr sz="1300" b="0">
+                          <a:solidFill>
+                            <a:srgbClr val="171A14"/>
+                          </a:solidFill>
+                          <a:latin typeface="Segoe UI"/>
+                        </a:rPr>
+                        <a:t>0.004%</a:t>
+                      </a:r>
+                    </a:p>
+                  </a:txBody>
+                  <a:tcPr anchor="ctr" marL="109728" marT="27432" marB="27432">
+                    <a:solidFill>
+                      <a:srgbClr val="FFFFFF"/>
+                    </a:solidFill>
+                  </a:tcPr>
+                </a:tc>
+              </a:tr>
+              <a:tr h="365760">
+                <a:tc>
+                  <a:txBody>
+                    <a:bodyPr/>
+                    <a:lstStyle/>
+                    <a:p>
+                      <a:r>
+                        <a:rPr sz="1300" b="0">
+                          <a:solidFill>
+                            <a:srgbClr val="171A14"/>
+                          </a:solidFill>
+                          <a:latin typeface="Segoe UI"/>
+                        </a:rPr>
+                        <a:t>2023-01</a:t>
+                      </a:r>
+                    </a:p>
+                  </a:txBody>
+                  <a:tcPr anchor="ctr" marL="109728" marT="27432" marB="27432">
+                    <a:solidFill>
+                      <a:srgbClr val="FFFFFF"/>
+                    </a:solidFill>
+                  </a:tcPr>
+                </a:tc>
+                <a:tc>
+                  <a:txBody>
+                    <a:bodyPr/>
+                    <a:lstStyle/>
+                    <a:p>
+                      <a:r>
+                        <a:rPr sz="1300" b="0">
+                          <a:solidFill>
+                            <a:srgbClr val="171A14"/>
+                          </a:solidFill>
+                          <a:latin typeface="Segoe UI"/>
+                        </a:rPr>
+                        <a:t>11,921</a:t>
+                      </a:r>
+                    </a:p>
+                  </a:txBody>
+                  <a:tcPr anchor="ctr" marL="109728" marT="27432" marB="27432">
+                    <a:solidFill>
+                      <a:srgbClr val="FFFFFF"/>
+                    </a:solidFill>
+                  </a:tcPr>
+                </a:tc>
+                <a:tc>
+                  <a:txBody>
+                    <a:bodyPr/>
+                    <a:lstStyle/>
+                    <a:p>
+                      <a:r>
+                        <a:rPr sz="1300" b="0">
+                          <a:solidFill>
+                            <a:srgbClr val="171A14"/>
+                          </a:solidFill>
+                          <a:latin typeface="Segoe UI"/>
+                        </a:rPr>
+                        <a:t>0.557%</a:t>
+                      </a:r>
+                    </a:p>
+                  </a:txBody>
+                  <a:tcPr anchor="ctr" marL="109728" marT="27432" marB="27432">
+                    <a:solidFill>
+                      <a:srgbClr val="FFFFFF"/>
+                    </a:solidFill>
+                  </a:tcPr>
+                </a:tc>
+              </a:tr>
+              <a:tr h="365760">
+                <a:tc>
+                  <a:txBody>
+                    <a:bodyPr/>
+                    <a:lstStyle/>
+                    <a:p>
+                      <a:r>
+                        <a:rPr sz="1300" b="0">
+                          <a:solidFill>
+                            <a:srgbClr val="171A14"/>
+                          </a:solidFill>
+                          <a:latin typeface="Segoe UI"/>
+                        </a:rPr>
+                        <a:t>2023-12</a:t>
+                      </a:r>
+                    </a:p>
+                  </a:txBody>
+                  <a:tcPr anchor="ctr" marL="109728" marT="27432" marB="27432">
+                    <a:solidFill>
+                      <a:srgbClr val="FFFFFF"/>
+                    </a:solidFill>
+                  </a:tcPr>
+                </a:tc>
+                <a:tc>
+                  <a:txBody>
+                    <a:bodyPr/>
+                    <a:lstStyle/>
+                    <a:p>
+                      <a:r>
+                        <a:rPr sz="1300" b="0">
+                          <a:solidFill>
+                            <a:srgbClr val="171A14"/>
+                          </a:solidFill>
+                          <a:latin typeface="Segoe UI"/>
+                        </a:rPr>
+                        <a:t>72</a:t>
+                      </a:r>
+                    </a:p>
+                  </a:txBody>
+                  <a:tcPr anchor="ctr" marL="109728" marT="27432" marB="27432">
+                    <a:solidFill>
+                      <a:srgbClr val="FFFFFF"/>
+                    </a:solidFill>
+                  </a:tcPr>
+                </a:tc>
+                <a:tc>
+                  <a:txBody>
+                    <a:bodyPr/>
+                    <a:lstStyle/>
+                    <a:p>
+                      <a:r>
+                        <a:rPr sz="1300" b="0">
+                          <a:solidFill>
+                            <a:srgbClr val="171A14"/>
+                          </a:solidFill>
+                          <a:latin typeface="Segoe UI"/>
+                        </a:rPr>
+                        <a:t>0.003%</a:t>
+                      </a:r>
+                    </a:p>
+                  </a:txBody>
+                  <a:tcPr anchor="ctr" marL="109728" marT="27432" marB="27432">
+                    <a:solidFill>
+                      <a:srgbClr val="FFFFFF"/>
+                    </a:solidFill>
+                  </a:tcPr>
+                </a:tc>
+              </a:tr>
+            </a:tbl>
+          </a:graphicData>
+        </a:graphic>
+      </p:graphicFrame>
       <p:sp>
         <p:nvSpPr>
           <p:cNvPr id="7" name="TextBox 6"/>
@@ -11926,8 +14136,8 @@
         </p:nvSpPr>
         <p:spPr>
           <a:xfrm>
-            <a:off x="896112" y="2606040"/>
-            <a:ext cx="3112922" cy="274320"/>
+            <a:off x="6309360" y="2478024"/>
+            <a:ext cx="5120640" cy="3108960"/>
           </a:xfrm>
           <a:prstGeom prst="rect">
             <a:avLst/>
@@ -11949,38 +14159,15 @@
               </a:spcAft>
             </a:pPr>
             <a:r>
-              <a:rPr sz="1200" b="1">
-                <a:solidFill>
-                  <a:srgbClr val="00907F"/>
+              <a:rPr sz="1350" b="0">
+                <a:solidFill>
+                  <a:srgbClr val="171A14"/>
                 </a:solidFill>
                 <a:latin typeface="Segoe UI"/>
               </a:rPr>
-              <a:t>MEASURABLE OBSERVABLES</a:t>
-            </a:r>
-          </a:p>
-        </p:txBody>
-      </p:sp>
-      <p:sp>
-        <p:nvSpPr>
-          <p:cNvPr id="8" name="TextBox 7"/>
-          <p:cNvSpPr txBox="1"/>
-          <p:nvPr/>
-        </p:nvSpPr>
-        <p:spPr>
-          <a:xfrm>
-            <a:off x="896112" y="2953512"/>
-            <a:ext cx="3112922" cy="822960"/>
-          </a:xfrm>
-          <a:prstGeom prst="rect">
-            <a:avLst/>
-          </a:prstGeom>
-          <a:noFill/>
-        </p:spPr>
-        <p:txBody>
-          <a:bodyPr wrap="square">
-            <a:spAutoFit/>
-          </a:bodyPr>
-          <a:lstStyle/>
+              <a:t>Tens of thousands of names appearing and vanishing within months, twice, is not diffusion. It is one operator moving a portfolio — .se accounts for nearly all of it, peaking at 19,455 names.</a:t>
+            </a:r>
+          </a:p>
           <a:p>
             <a:pPr algn="l">
               <a:lnSpc>
@@ -11991,38 +14178,15 @@
               </a:spcAft>
             </a:pPr>
             <a:r>
-              <a:rPr sz="1600" b="0">
+              <a:rPr sz="1350" b="0">
                 <a:solidFill>
                   <a:srgbClr val="171A14"/>
                 </a:solidFill>
                 <a:latin typeface="Segoe UI"/>
               </a:rPr>
-              <a:t>14  →  24</a:t>
-            </a:r>
-          </a:p>
-        </p:txBody>
-      </p:sp>
-      <p:sp>
-        <p:nvSpPr>
-          <p:cNvPr id="9" name="TextBox 8"/>
-          <p:cNvSpPr txBox="1"/>
-          <p:nvPr/>
-        </p:nvSpPr>
-        <p:spPr>
-          <a:xfrm>
-            <a:off x="896112" y="3557016"/>
-            <a:ext cx="3112922" cy="457200"/>
-          </a:xfrm>
-          <a:prstGeom prst="rect">
-            <a:avLst/>
-          </a:prstGeom>
-          <a:noFill/>
-        </p:spPr>
-        <p:txBody>
-          <a:bodyPr wrap="square">
-            <a:spAutoFit/>
-          </a:bodyPr>
-          <a:lstStyle/>
+              <a:t/>
+            </a:r>
+          </a:p>
           <a:p>
             <a:pPr algn="l">
               <a:lnSpc>
@@ -12033,82 +14197,15 @@
               </a:spcAft>
             </a:pPr>
             <a:r>
-              <a:rPr sz="1150" b="0">
-                <a:solidFill>
-                  <a:srgbClr val="66705C"/>
+              <a:rPr sz="1350" b="0">
+                <a:solidFill>
+                  <a:srgbClr val="171A14"/>
                 </a:solidFill>
                 <a:latin typeface="Segoe UI"/>
               </a:rPr>
-              <a:t>Ten became measurable for the first time. The forward corpus carries NSEC3 parameters, DNSKEY flags and CDS, which delegation data cannot.</a:t>
-            </a:r>
-          </a:p>
-        </p:txBody>
-      </p:sp>
-      <p:sp>
-        <p:nvSpPr>
-          <p:cNvPr id="10" name="Rectangle 9"/>
-          <p:cNvSpPr/>
-          <p:nvPr/>
-        </p:nvSpPr>
-        <p:spPr>
-          <a:xfrm>
-            <a:off x="4374794" y="2478024"/>
-            <a:ext cx="3442106" cy="1645920"/>
-          </a:xfrm>
-          <a:prstGeom prst="rect">
-            <a:avLst/>
-          </a:prstGeom>
-          <a:solidFill>
-            <a:srgbClr val="F6F7F3"/>
-          </a:solidFill>
-          <a:ln w="9525">
-            <a:solidFill>
-              <a:srgbClr val="D3D8CC"/>
-            </a:solidFill>
-          </a:ln>
-          <a:effectLst/>
-        </p:spPr>
-        <p:style>
-          <a:lnRef idx="1">
-            <a:schemeClr val="accent1"/>
-          </a:lnRef>
-          <a:fillRef idx="3">
-            <a:schemeClr val="accent1"/>
-          </a:fillRef>
-          <a:effectRef idx="2">
-            <a:schemeClr val="accent1"/>
-          </a:effectRef>
-          <a:fontRef idx="minor">
-            <a:schemeClr val="lt1"/>
-          </a:fontRef>
-        </p:style>
-        <p:txBody>
-          <a:bodyPr rtlCol="0" anchor="ctr"/>
-          <a:lstStyle/>
-          <a:p/>
-        </p:txBody>
-      </p:sp>
-      <p:sp>
-        <p:nvSpPr>
-          <p:cNvPr id="11" name="TextBox 10"/>
-          <p:cNvSpPr txBox="1"/>
-          <p:nvPr/>
-        </p:nvSpPr>
-        <p:spPr>
-          <a:xfrm>
-            <a:off x="4539386" y="2606040"/>
-            <a:ext cx="3112922" cy="274320"/>
-          </a:xfrm>
-          <a:prstGeom prst="rect">
-            <a:avLst/>
-          </a:prstGeom>
-          <a:noFill/>
-        </p:spPr>
-        <p:txBody>
-          <a:bodyPr wrap="square">
-            <a:spAutoFit/>
-          </a:bodyPr>
-          <a:lstStyle/>
+              <a:t>The largest jump anywhere is ECDSA P-256: +118,961 names in 2019-02, 76% of its total that month. So “ECDSA reached common usage in 2019-02” records one bulk migration.</a:t>
+            </a:r>
+          </a:p>
           <a:p>
             <a:pPr algn="l">
               <a:lnSpc>
@@ -12119,38 +14216,15 @@
               </a:spcAft>
             </a:pPr>
             <a:r>
-              <a:rPr sz="1200" b="1">
-                <a:solidFill>
-                  <a:srgbClr val="00907F"/>
+              <a:rPr sz="1350" b="0">
+                <a:solidFill>
+                  <a:srgbClr val="171A14"/>
                 </a:solidFill>
                 <a:latin typeface="Segoe UI"/>
               </a:rPr>
-              <a:t>FIRST-SEEN DATES MOVED EARLIER</a:t>
-            </a:r>
-          </a:p>
-        </p:txBody>
-      </p:sp>
-      <p:sp>
-        <p:nvSpPr>
-          <p:cNvPr id="12" name="TextBox 11"/>
-          <p:cNvSpPr txBox="1"/>
-          <p:nvPr/>
-        </p:nvSpPr>
-        <p:spPr>
-          <a:xfrm>
-            <a:off x="4539386" y="2953512"/>
-            <a:ext cx="3112922" cy="822960"/>
-          </a:xfrm>
-          <a:prstGeom prst="rect">
-            <a:avLst/>
-          </a:prstGeom>
-          <a:noFill/>
-        </p:spPr>
-        <p:txBody>
-          <a:bodyPr wrap="square">
-            <a:spAutoFit/>
-          </a:bodyPr>
-          <a:lstStyle/>
+              <a:t/>
+            </a:r>
+          </a:p>
           <a:p>
             <a:pPr algn="l">
               <a:lnSpc>
@@ -12161,27 +14235,27 @@
               </a:spcAft>
             </a:pPr>
             <a:r>
-              <a:rPr sz="1600" b="0">
+              <a:rPr sz="1350" b="0">
                 <a:solidFill>
                   <a:srgbClr val="171A14"/>
                 </a:solidFill>
                 <a:latin typeface="Segoe UI"/>
               </a:rPr>
-              <a:t>14 of them</a:t>
-            </a:r>
-          </a:p>
-        </p:txBody>
-      </p:sp>
-      <p:sp>
-        <p:nvSpPr>
-          <p:cNvPr id="13" name="TextBox 12"/>
+              <a:t>Forward shares therefore largely measure registrar and provider defaults, not independent decisions.</a:t>
+            </a:r>
+          </a:p>
+        </p:txBody>
+      </p:sp>
+      <p:sp>
+        <p:nvSpPr>
+          <p:cNvPr id="8" name="TextBox 7"/>
           <p:cNvSpPr txBox="1"/>
           <p:nvPr/>
         </p:nvSpPr>
         <p:spPr>
           <a:xfrm>
-            <a:off x="4539386" y="3557016"/>
-            <a:ext cx="3112922" cy="457200"/>
+            <a:off x="731520" y="5769864"/>
+            <a:ext cx="10728655" cy="822960"/>
           </a:xfrm>
           <a:prstGeom prst="rect">
             <a:avLst/>
@@ -12203,793 +14277,13 @@
               </a:spcAft>
             </a:pPr>
             <a:r>
-              <a:rPr sz="1150" b="0">
+              <a:rPr sz="1400" b="0">
                 <a:solidFill>
                   <a:srgbClr val="66705C"/>
                 </a:solidFill>
                 <a:latin typeface="Segoe UI"/>
               </a:rPr>
-              <a:t>Existence is a minimum over all evidence, so more corpus can only move a date earlier. Largest: SHA-384 digest −4.1 y, Ed25519 −3.7 y.</a:t>
-            </a:r>
-          </a:p>
-        </p:txBody>
-      </p:sp>
-      <p:sp>
-        <p:nvSpPr>
-          <p:cNvPr id="14" name="Rectangle 13"/>
-          <p:cNvSpPr/>
-          <p:nvPr/>
-        </p:nvSpPr>
-        <p:spPr>
-          <a:xfrm>
-            <a:off x="8018068" y="2478024"/>
-            <a:ext cx="3442106" cy="1645920"/>
-          </a:xfrm>
-          <a:prstGeom prst="rect">
-            <a:avLst/>
-          </a:prstGeom>
-          <a:solidFill>
-            <a:srgbClr val="F6F7F3"/>
-          </a:solidFill>
-          <a:ln w="9525">
-            <a:solidFill>
-              <a:srgbClr val="D3D8CC"/>
-            </a:solidFill>
-          </a:ln>
-          <a:effectLst/>
-        </p:spPr>
-        <p:style>
-          <a:lnRef idx="1">
-            <a:schemeClr val="accent1"/>
-          </a:lnRef>
-          <a:fillRef idx="3">
-            <a:schemeClr val="accent1"/>
-          </a:fillRef>
-          <a:effectRef idx="2">
-            <a:schemeClr val="accent1"/>
-          </a:effectRef>
-          <a:fontRef idx="minor">
-            <a:schemeClr val="lt1"/>
-          </a:fontRef>
-        </p:style>
-        <p:txBody>
-          <a:bodyPr rtlCol="0" anchor="ctr"/>
-          <a:lstStyle/>
-          <a:p/>
-        </p:txBody>
-      </p:sp>
-      <p:sp>
-        <p:nvSpPr>
-          <p:cNvPr id="15" name="TextBox 14"/>
-          <p:cNvSpPr txBox="1"/>
-          <p:nvPr/>
-        </p:nvSpPr>
-        <p:spPr>
-          <a:xfrm>
-            <a:off x="8182660" y="2606040"/>
-            <a:ext cx="3112922" cy="274320"/>
-          </a:xfrm>
-          <a:prstGeom prst="rect">
-            <a:avLst/>
-          </a:prstGeom>
-          <a:noFill/>
-        </p:spPr>
-        <p:txBody>
-          <a:bodyPr wrap="square">
-            <a:spAutoFit/>
-          </a:bodyPr>
-          <a:lstStyle/>
-          <a:p>
-            <a:pPr algn="l">
-              <a:lnSpc>
-                <a:spcPct val="125000"/>
-              </a:lnSpc>
-              <a:spcAft>
-                <a:spcPts val="600"/>
-              </a:spcAft>
-            </a:pPr>
-            <a:r>
-              <a:rPr sz="1200" b="1">
-                <a:solidFill>
-                  <a:srgbClr val="00907F"/>
-                </a:solidFill>
-                <a:latin typeface="Segoe UI"/>
-              </a:rPr>
-              <a:t>A FINDING WITHDRAWN</a:t>
-            </a:r>
-          </a:p>
-        </p:txBody>
-      </p:sp>
-      <p:sp>
-        <p:nvSpPr>
-          <p:cNvPr id="16" name="TextBox 15"/>
-          <p:cNvSpPr txBox="1"/>
-          <p:nvPr/>
-        </p:nvSpPr>
-        <p:spPr>
-          <a:xfrm>
-            <a:off x="8182660" y="2953512"/>
-            <a:ext cx="3112922" cy="822960"/>
-          </a:xfrm>
-          <a:prstGeom prst="rect">
-            <a:avLst/>
-          </a:prstGeom>
-          <a:noFill/>
-        </p:spPr>
-        <p:txBody>
-          <a:bodyPr wrap="square">
-            <a:spAutoFit/>
-          </a:bodyPr>
-          <a:lstStyle/>
-          <a:p>
-            <a:pPr algn="l">
-              <a:lnSpc>
-                <a:spcPct val="125000"/>
-              </a:lnSpc>
-              <a:spcAft>
-                <a:spcPts val="600"/>
-              </a:spcAft>
-            </a:pPr>
-            <a:r>
-              <a:rPr sz="1600" b="0">
-                <a:solidFill>
-                  <a:srgbClr val="171A14"/>
-                </a:solidFill>
-                <a:latin typeface="Segoe UI"/>
-              </a:rPr>
-              <a:t>no longer true</a:t>
-            </a:r>
-          </a:p>
-        </p:txBody>
-      </p:sp>
-      <p:sp>
-        <p:nvSpPr>
-          <p:cNvPr id="17" name="TextBox 16"/>
-          <p:cNvSpPr txBox="1"/>
-          <p:nvPr/>
-        </p:nvSpPr>
-        <p:spPr>
-          <a:xfrm>
-            <a:off x="8182660" y="3557016"/>
-            <a:ext cx="3112922" cy="457200"/>
-          </a:xfrm>
-          <a:prstGeom prst="rect">
-            <a:avLst/>
-          </a:prstGeom>
-          <a:noFill/>
-        </p:spPr>
-        <p:txBody>
-          <a:bodyPr wrap="square">
-            <a:spAutoFit/>
-          </a:bodyPr>
-          <a:lstStyle/>
-          <a:p>
-            <a:pPr algn="l">
-              <a:lnSpc>
-                <a:spcPct val="125000"/>
-              </a:lnSpc>
-              <a:spcAft>
-                <a:spcPts val="600"/>
-              </a:spcAft>
-            </a:pPr>
-            <a:r>
-              <a:rPr sz="1150" b="0">
-                <a:solidFill>
-                  <a:srgbClr val="66705C"/>
-                </a:solidFill>
-                <a:latin typeface="Segoe UI"/>
-              </a:rPr>
-              <a:t>“Each new algorithm takes longer to appear” held in reverse data and fails on the full corpus.</a:t>
-            </a:r>
-          </a:p>
-        </p:txBody>
-      </p:sp>
-      <p:graphicFrame>
-        <p:nvGraphicFramePr>
-          <p:cNvPr id="18" name="Table 17"/>
-          <p:cNvGraphicFramePr>
-            <a:graphicFrameLocks noGrp="1"/>
-          </p:cNvGraphicFramePr>
-          <p:nvPr/>
-        </p:nvGraphicFramePr>
-        <p:xfrm>
-          <a:off x="731520" y="4288536"/>
-          <a:ext cx="10728652" cy="1865376"/>
-        </p:xfrm>
-        <a:graphic>
-          <a:graphicData uri="http://schemas.openxmlformats.org/drawingml/2006/table">
-            <a:tbl>
-              <a:tblPr firstRow="1" bandRow="1">
-                <a:tableStyleId>{5C22544A-7EE6-4342-B048-85BDC9FD1C3A}</a:tableStyleId>
-              </a:tblPr>
-              <a:tblGrid>
-                <a:gridCol w="3218596"/>
-                <a:gridCol w="1716584"/>
-                <a:gridCol w="1931157"/>
-                <a:gridCol w="3862315"/>
-              </a:tblGrid>
-              <a:tr h="310896">
-                <a:tc>
-                  <a:txBody>
-                    <a:bodyPr/>
-                    <a:lstStyle/>
-                    <a:p>
-                      <a:r>
-                        <a:rPr sz="1200" b="1">
-                          <a:solidFill>
-                            <a:srgbClr val="66705C"/>
-                          </a:solidFill>
-                          <a:latin typeface="Segoe UI"/>
-                        </a:rPr>
-                        <a:t>New cryptographic primitive</a:t>
-                      </a:r>
-                    </a:p>
-                  </a:txBody>
-                  <a:tcPr anchor="ctr" marL="109728" marT="27432" marB="27432">
-                    <a:solidFill>
-                      <a:srgbClr val="F6F7F3"/>
-                    </a:solidFill>
-                  </a:tcPr>
-                </a:tc>
-                <a:tc>
-                  <a:txBody>
-                    <a:bodyPr/>
-                    <a:lstStyle/>
-                    <a:p>
-                      <a:r>
-                        <a:rPr sz="1200" b="1">
-                          <a:solidFill>
-                            <a:srgbClr val="66705C"/>
-                          </a:solidFill>
-                          <a:latin typeface="Segoe UI"/>
-                        </a:rPr>
-                        <a:t>Published</a:t>
-                      </a:r>
-                    </a:p>
-                  </a:txBody>
-                  <a:tcPr anchor="ctr" marL="109728" marT="27432" marB="27432">
-                    <a:solidFill>
-                      <a:srgbClr val="F6F7F3"/>
-                    </a:solidFill>
-                  </a:tcPr>
-                </a:tc>
-                <a:tc>
-                  <a:txBody>
-                    <a:bodyPr/>
-                    <a:lstStyle/>
-                    <a:p>
-                      <a:r>
-                        <a:rPr sz="1200" b="1">
-                          <a:solidFill>
-                            <a:srgbClr val="66705C"/>
-                          </a:solidFill>
-                          <a:latin typeface="Segoe UI"/>
-                        </a:rPr>
-                        <a:t>Reverse only</a:t>
-                      </a:r>
-                    </a:p>
-                  </a:txBody>
-                  <a:tcPr anchor="ctr" marL="109728" marT="27432" marB="27432">
-                    <a:solidFill>
-                      <a:srgbClr val="F6F7F3"/>
-                    </a:solidFill>
-                  </a:tcPr>
-                </a:tc>
-                <a:tc>
-                  <a:txBody>
-                    <a:bodyPr/>
-                    <a:lstStyle/>
-                    <a:p>
-                      <a:r>
-                        <a:rPr sz="1200" b="1">
-                          <a:solidFill>
-                            <a:srgbClr val="66705C"/>
-                          </a:solidFill>
-                          <a:latin typeface="Segoe UI"/>
-                        </a:rPr>
-                        <a:t>Full corpus</a:t>
-                      </a:r>
-                    </a:p>
-                  </a:txBody>
-                  <a:tcPr anchor="ctr" marL="109728" marT="27432" marB="27432">
-                    <a:solidFill>
-                      <a:srgbClr val="F6F7F3"/>
-                    </a:solidFill>
-                  </a:tcPr>
-                </a:tc>
-              </a:tr>
-              <a:tr h="310896">
-                <a:tc>
-                  <a:txBody>
-                    <a:bodyPr/>
-                    <a:lstStyle/>
-                    <a:p>
-                      <a:r>
-                        <a:rPr sz="1300" b="0">
-                          <a:solidFill>
-                            <a:srgbClr val="171A14"/>
-                          </a:solidFill>
-                          <a:latin typeface="Segoe UI"/>
-                        </a:rPr>
-                        <a:t>ECC-GOST</a:t>
-                      </a:r>
-                    </a:p>
-                  </a:txBody>
-                  <a:tcPr anchor="ctr" marL="109728" marT="27432" marB="27432">
-                    <a:solidFill>
-                      <a:srgbClr val="FFFFFF"/>
-                    </a:solidFill>
-                  </a:tcPr>
-                </a:tc>
-                <a:tc>
-                  <a:txBody>
-                    <a:bodyPr/>
-                    <a:lstStyle/>
-                    <a:p>
-                      <a:r>
-                        <a:rPr sz="1300" b="0">
-                          <a:solidFill>
-                            <a:srgbClr val="171A14"/>
-                          </a:solidFill>
-                          <a:latin typeface="Segoe UI"/>
-                        </a:rPr>
-                        <a:t>2010-07</a:t>
-                      </a:r>
-                    </a:p>
-                  </a:txBody>
-                  <a:tcPr anchor="ctr" marL="109728" marT="27432" marB="27432">
-                    <a:solidFill>
-                      <a:srgbClr val="FFFFFF"/>
-                    </a:solidFill>
-                  </a:tcPr>
-                </a:tc>
-                <a:tc>
-                  <a:txBody>
-                    <a:bodyPr/>
-                    <a:lstStyle/>
-                    <a:p>
-                      <a:r>
-                        <a:rPr sz="1300" b="0">
-                          <a:solidFill>
-                            <a:srgbClr val="171A14"/>
-                          </a:solidFill>
-                          <a:latin typeface="Segoe UI"/>
-                        </a:rPr>
-                        <a:t>2.5 y</a:t>
-                      </a:r>
-                    </a:p>
-                  </a:txBody>
-                  <a:tcPr anchor="ctr" marL="109728" marT="27432" marB="27432">
-                    <a:solidFill>
-                      <a:srgbClr val="FFFFFF"/>
-                    </a:solidFill>
-                  </a:tcPr>
-                </a:tc>
-                <a:tc>
-                  <a:txBody>
-                    <a:bodyPr/>
-                    <a:lstStyle/>
-                    <a:p>
-                      <a:r>
-                        <a:rPr sz="1300" b="0">
-                          <a:solidFill>
-                            <a:srgbClr val="171A14"/>
-                          </a:solidFill>
-                          <a:latin typeface="Segoe UI"/>
-                        </a:rPr>
-                        <a:t>2.4 y</a:t>
-                      </a:r>
-                    </a:p>
-                  </a:txBody>
-                  <a:tcPr anchor="ctr" marL="109728" marT="27432" marB="27432">
-                    <a:solidFill>
-                      <a:srgbClr val="FFFFFF"/>
-                    </a:solidFill>
-                  </a:tcPr>
-                </a:tc>
-              </a:tr>
-              <a:tr h="310896">
-                <a:tc>
-                  <a:txBody>
-                    <a:bodyPr/>
-                    <a:lstStyle/>
-                    <a:p>
-                      <a:r>
-                        <a:rPr sz="1300" b="0">
-                          <a:solidFill>
-                            <a:srgbClr val="171A14"/>
-                          </a:solidFill>
-                          <a:latin typeface="Segoe UI"/>
-                        </a:rPr>
-                        <a:t>ECDSA P-256</a:t>
-                      </a:r>
-                    </a:p>
-                  </a:txBody>
-                  <a:tcPr anchor="ctr" marL="109728" marT="27432" marB="27432">
-                    <a:solidFill>
-                      <a:srgbClr val="FFFFFF"/>
-                    </a:solidFill>
-                  </a:tcPr>
-                </a:tc>
-                <a:tc>
-                  <a:txBody>
-                    <a:bodyPr/>
-                    <a:lstStyle/>
-                    <a:p>
-                      <a:r>
-                        <a:rPr sz="1300" b="0">
-                          <a:solidFill>
-                            <a:srgbClr val="171A14"/>
-                          </a:solidFill>
-                          <a:latin typeface="Segoe UI"/>
-                        </a:rPr>
-                        <a:t>2012-04</a:t>
-                      </a:r>
-                    </a:p>
-                  </a:txBody>
-                  <a:tcPr anchor="ctr" marL="109728" marT="27432" marB="27432">
-                    <a:solidFill>
-                      <a:srgbClr val="FFFFFF"/>
-                    </a:solidFill>
-                  </a:tcPr>
-                </a:tc>
-                <a:tc>
-                  <a:txBody>
-                    <a:bodyPr/>
-                    <a:lstStyle/>
-                    <a:p>
-                      <a:r>
-                        <a:rPr sz="1300" b="0">
-                          <a:solidFill>
-                            <a:srgbClr val="171A14"/>
-                          </a:solidFill>
-                          <a:latin typeface="Segoe UI"/>
-                        </a:rPr>
-                        <a:t>3.7 y</a:t>
-                      </a:r>
-                    </a:p>
-                  </a:txBody>
-                  <a:tcPr anchor="ctr" marL="109728" marT="27432" marB="27432">
-                    <a:solidFill>
-                      <a:srgbClr val="FFFFFF"/>
-                    </a:solidFill>
-                  </a:tcPr>
-                </a:tc>
-                <a:tc>
-                  <a:txBody>
-                    <a:bodyPr/>
-                    <a:lstStyle/>
-                    <a:p>
-                      <a:r>
-                        <a:rPr sz="1300" b="0">
-                          <a:solidFill>
-                            <a:srgbClr val="171A14"/>
-                          </a:solidFill>
-                          <a:latin typeface="Segoe UI"/>
-                        </a:rPr>
-                        <a:t>3.6 y</a:t>
-                      </a:r>
-                    </a:p>
-                  </a:txBody>
-                  <a:tcPr anchor="ctr" marL="109728" marT="27432" marB="27432">
-                    <a:solidFill>
-                      <a:srgbClr val="FFFFFF"/>
-                    </a:solidFill>
-                  </a:tcPr>
-                </a:tc>
-              </a:tr>
-              <a:tr h="310896">
-                <a:tc>
-                  <a:txBody>
-                    <a:bodyPr/>
-                    <a:lstStyle/>
-                    <a:p>
-                      <a:r>
-                        <a:rPr sz="1300" b="0">
-                          <a:solidFill>
-                            <a:srgbClr val="171A14"/>
-                          </a:solidFill>
-                          <a:latin typeface="Segoe UI"/>
-                        </a:rPr>
-                        <a:t>ECDSA P-384</a:t>
-                      </a:r>
-                    </a:p>
-                  </a:txBody>
-                  <a:tcPr anchor="ctr" marL="109728" marT="27432" marB="27432">
-                    <a:solidFill>
-                      <a:srgbClr val="FFFFFF"/>
-                    </a:solidFill>
-                  </a:tcPr>
-                </a:tc>
-                <a:tc>
-                  <a:txBody>
-                    <a:bodyPr/>
-                    <a:lstStyle/>
-                    <a:p>
-                      <a:r>
-                        <a:rPr sz="1300" b="0">
-                          <a:solidFill>
-                            <a:srgbClr val="171A14"/>
-                          </a:solidFill>
-                          <a:latin typeface="Segoe UI"/>
-                        </a:rPr>
-                        <a:t>2012-04</a:t>
-                      </a:r>
-                    </a:p>
-                  </a:txBody>
-                  <a:tcPr anchor="ctr" marL="109728" marT="27432" marB="27432">
-                    <a:solidFill>
-                      <a:srgbClr val="FFFFFF"/>
-                    </a:solidFill>
-                  </a:tcPr>
-                </a:tc>
-                <a:tc>
-                  <a:txBody>
-                    <a:bodyPr/>
-                    <a:lstStyle/>
-                    <a:p>
-                      <a:r>
-                        <a:rPr sz="1300" b="0">
-                          <a:solidFill>
-                            <a:srgbClr val="171A14"/>
-                          </a:solidFill>
-                          <a:latin typeface="Segoe UI"/>
-                        </a:rPr>
-                        <a:t>4.0 y</a:t>
-                      </a:r>
-                    </a:p>
-                  </a:txBody>
-                  <a:tcPr anchor="ctr" marL="109728" marT="27432" marB="27432">
-                    <a:solidFill>
-                      <a:srgbClr val="FFFFFF"/>
-                    </a:solidFill>
-                  </a:tcPr>
-                </a:tc>
-                <a:tc>
-                  <a:txBody>
-                    <a:bodyPr/>
-                    <a:lstStyle/>
-                    <a:p>
-                      <a:r>
-                        <a:rPr sz="1300" b="0">
-                          <a:solidFill>
-                            <a:srgbClr val="171A14"/>
-                          </a:solidFill>
-                          <a:latin typeface="Segoe UI"/>
-                        </a:rPr>
-                        <a:t>3.9 y</a:t>
-                      </a:r>
-                    </a:p>
-                  </a:txBody>
-                  <a:tcPr anchor="ctr" marL="109728" marT="27432" marB="27432">
-                    <a:solidFill>
-                      <a:srgbClr val="FFFFFF"/>
-                    </a:solidFill>
-                  </a:tcPr>
-                </a:tc>
-              </a:tr>
-              <a:tr h="310896">
-                <a:tc>
-                  <a:txBody>
-                    <a:bodyPr/>
-                    <a:lstStyle/>
-                    <a:p>
-                      <a:r>
-                        <a:rPr sz="1300" b="0">
-                          <a:solidFill>
-                            <a:srgbClr val="171A14"/>
-                          </a:solidFill>
-                          <a:latin typeface="Segoe UI"/>
-                        </a:rPr>
-                        <a:t>Ed25519</a:t>
-                      </a:r>
-                    </a:p>
-                  </a:txBody>
-                  <a:tcPr anchor="ctr" marL="109728" marT="27432" marB="27432">
-                    <a:solidFill>
-                      <a:srgbClr val="FFFFFF"/>
-                    </a:solidFill>
-                  </a:tcPr>
-                </a:tc>
-                <a:tc>
-                  <a:txBody>
-                    <a:bodyPr/>
-                    <a:lstStyle/>
-                    <a:p>
-                      <a:r>
-                        <a:rPr sz="1300" b="0">
-                          <a:solidFill>
-                            <a:srgbClr val="171A14"/>
-                          </a:solidFill>
-                          <a:latin typeface="Segoe UI"/>
-                        </a:rPr>
-                        <a:t>2017-02</a:t>
-                      </a:r>
-                    </a:p>
-                  </a:txBody>
-                  <a:tcPr anchor="ctr" marL="109728" marT="27432" marB="27432">
-                    <a:solidFill>
-                      <a:srgbClr val="FFFFFF"/>
-                    </a:solidFill>
-                  </a:tcPr>
-                </a:tc>
-                <a:tc>
-                  <a:txBody>
-                    <a:bodyPr/>
-                    <a:lstStyle/>
-                    <a:p>
-                      <a:r>
-                        <a:rPr sz="1300" b="0">
-                          <a:solidFill>
-                            <a:srgbClr val="171A14"/>
-                          </a:solidFill>
-                          <a:latin typeface="Segoe UI"/>
-                        </a:rPr>
-                        <a:t>5.6 y</a:t>
-                      </a:r>
-                    </a:p>
-                  </a:txBody>
-                  <a:tcPr anchor="ctr" marL="109728" marT="27432" marB="27432">
-                    <a:solidFill>
-                      <a:srgbClr val="FFFFFF"/>
-                    </a:solidFill>
-                  </a:tcPr>
-                </a:tc>
-                <a:tc>
-                  <a:txBody>
-                    <a:bodyPr/>
-                    <a:lstStyle/>
-                    <a:p>
-                      <a:r>
-                        <a:rPr sz="1300" b="0">
-                          <a:solidFill>
-                            <a:srgbClr val="171A14"/>
-                          </a:solidFill>
-                          <a:latin typeface="Segoe UI"/>
-                        </a:rPr>
-                        <a:t>1.9 y  ← the newest is the fastest</a:t>
-                      </a:r>
-                    </a:p>
-                  </a:txBody>
-                  <a:tcPr anchor="ctr" marL="109728" marT="27432" marB="27432">
-                    <a:solidFill>
-                      <a:srgbClr val="FFFFFF"/>
-                    </a:solidFill>
-                  </a:tcPr>
-                </a:tc>
-              </a:tr>
-              <a:tr h="310896">
-                <a:tc>
-                  <a:txBody>
-                    <a:bodyPr/>
-                    <a:lstStyle/>
-                    <a:p>
-                      <a:r>
-                        <a:rPr sz="1300" b="0">
-                          <a:solidFill>
-                            <a:srgbClr val="171A14"/>
-                          </a:solidFill>
-                          <a:latin typeface="Segoe UI"/>
-                        </a:rPr>
-                        <a:t>Ed448</a:t>
-                      </a:r>
-                    </a:p>
-                  </a:txBody>
-                  <a:tcPr anchor="ctr" marL="109728" marT="27432" marB="27432">
-                    <a:solidFill>
-                      <a:srgbClr val="FFFFFF"/>
-                    </a:solidFill>
-                  </a:tcPr>
-                </a:tc>
-                <a:tc>
-                  <a:txBody>
-                    <a:bodyPr/>
-                    <a:lstStyle/>
-                    <a:p>
-                      <a:r>
-                        <a:rPr sz="1300" b="0">
-                          <a:solidFill>
-                            <a:srgbClr val="171A14"/>
-                          </a:solidFill>
-                          <a:latin typeface="Segoe UI"/>
-                        </a:rPr>
-                        <a:t>2017-02</a:t>
-                      </a:r>
-                    </a:p>
-                  </a:txBody>
-                  <a:tcPr anchor="ctr" marL="109728" marT="27432" marB="27432">
-                    <a:solidFill>
-                      <a:srgbClr val="FFFFFF"/>
-                    </a:solidFill>
-                  </a:tcPr>
-                </a:tc>
-                <a:tc>
-                  <a:txBody>
-                    <a:bodyPr/>
-                    <a:lstStyle/>
-                    <a:p>
-                      <a:r>
-                        <a:rPr sz="1300" b="0">
-                          <a:solidFill>
-                            <a:srgbClr val="171A14"/>
-                          </a:solidFill>
-                          <a:latin typeface="Segoe UI"/>
-                        </a:rPr>
-                        <a:t>5.8 y</a:t>
-                      </a:r>
-                    </a:p>
-                  </a:txBody>
-                  <a:tcPr anchor="ctr" marL="109728" marT="27432" marB="27432">
-                    <a:solidFill>
-                      <a:srgbClr val="FFFFFF"/>
-                    </a:solidFill>
-                  </a:tcPr>
-                </a:tc>
-                <a:tc>
-                  <a:txBody>
-                    <a:bodyPr/>
-                    <a:lstStyle/>
-                    <a:p>
-                      <a:r>
-                        <a:rPr sz="1300" b="0">
-                          <a:solidFill>
-                            <a:srgbClr val="171A14"/>
-                          </a:solidFill>
-                          <a:latin typeface="Segoe UI"/>
-                        </a:rPr>
-                        <a:t>3.2 y</a:t>
-                      </a:r>
-                    </a:p>
-                  </a:txBody>
-                  <a:tcPr anchor="ctr" marL="109728" marT="27432" marB="27432">
-                    <a:solidFill>
-                      <a:srgbClr val="FFFFFF"/>
-                    </a:solidFill>
-                  </a:tcPr>
-                </a:tc>
-              </a:tr>
-            </a:tbl>
-          </a:graphicData>
-        </a:graphic>
-      </p:graphicFrame>
-      <p:sp>
-        <p:nvSpPr>
-          <p:cNvPr id="19" name="TextBox 18"/>
-          <p:cNvSpPr txBox="1"/>
-          <p:nvPr/>
-        </p:nvSpPr>
-        <p:spPr>
-          <a:xfrm>
-            <a:off x="731520" y="6263640"/>
-            <a:ext cx="10728655" cy="548640"/>
-          </a:xfrm>
-          <a:prstGeom prst="rect">
-            <a:avLst/>
-          </a:prstGeom>
-          <a:noFill/>
-        </p:spPr>
-        <p:txBody>
-          <a:bodyPr wrap="square">
-            <a:spAutoFit/>
-          </a:bodyPr>
-          <a:lstStyle/>
-          <a:p>
-            <a:pPr algn="l">
-              <a:lnSpc>
-                <a:spcPct val="125000"/>
-              </a:lnSpc>
-              <a:spcAft>
-                <a:spcPts val="600"/>
-              </a:spcAft>
-            </a:pPr>
-            <a:r>
-              <a:rPr sz="1250" b="0">
-                <a:solidFill>
-                  <a:srgbClr val="66705C"/>
-                </a:solidFill>
-                <a:latin typeface="Segoe UI"/>
-              </a:rPr>
-              <a:t>Reverse only: 3.7 → 4.0 → 5.6 → 5.8, monotonic. Full corpus: 2.4 → 3.6 → 3.9 → 1.9 → 3.2, not monotonic. The pattern was a property of one corpus: reverse-DNS operators adopt late, so every newer algorithm looked slower. .se had Ed25519 in 2019-01; the RIRs not until 2022-08.</a:t>
+              <a:t>This strengthens the case against the diffusion literature rather than weakening it: that literature assumes a population of independent adopters, and this one has a handful of actors who can move six figures of names at once.</a:t>
             </a:r>
           </a:p>
         </p:txBody>
